--- a/platform-mechanics/platform-operating-mechanics.pptx
+++ b/platform-mechanics/platform-operating-mechanics.pptx
@@ -2550,7 +2550,7 @@
           <a:p>
             <a:r>
               <a:rPr lang="en-US" dirty="0"/>
-              <a:t>Bottom to top: Sep 7, 10:35 AM: the system booked the job for Sep 21 at 10 AM (comment: populate_recurring_contract); status submitted. Sep 14, 2:29 PM: the cleaner claimed it. Sep 21, 9:19 AM: the cleaner rescheduled it from Sep 21, 10 AM to Sep 22, 11 AM. Sep 21, 9:50 AM: the cleaner rescheduled again, from Sep 22, 11 AM to Sep 24, 12:30 PM. Sep 24, 4:09 PM: the cleaner invoiced the job (status before: pending_invoice), and the system logged the invoice snapshot. Article example for reference: On Oct 9 at 7 PM, CS booked a cleaning via CRM for Oct 10 at 11 AM. Around 8:42 PM on the same day, CP Victor claimed the appointment. On Oct 11 at 2:03 PM, the CP invoiced the job, and the system logged it to the snapshot.</a:t>
+              <a:t>TRAINER: let trainees read the job history first (bottom to top). Then click The Story (or press the right arrow) to reveal the story one line at a time, staying on this slide. Story: On Sept 7, 2026, the system booked a cleaning for C Anjuli Kintanar scheduled for Sept 21 10AM CT through the recurring cleaning plan. On Sept 14, CP Truffle Wuffle claimed the job as scheduled. On Sept 21 9:19AM CT, CP Truffle Wuffle rescheduled the appointment from Sept 21, 10AM CT to Sept 22, 11AM. On Sept 21 9:50 AM CT, CP Truffle Wuffle rescheduled the appointment again from Sept 22, 11AM to Sept 24, 12:30 PM CT. On Sept 24, 4:09 PM CT, CP Truffle Wuffle invoiced the appointment and the system logged it in snapshot.</a:t>
             </a:r>
             <a:endParaRPr lang="en-US" dirty="0"/>
           </a:p>
@@ -22974,2442 +22974,230 @@
                 <a:ea typeface="SF Pro Text" pitchFamily="34" charset="-122"/>
                 <a:cs typeface="SF Pro Text" pitchFamily="34" charset="-120"/>
               </a:rPr>
-              <a:t>The same job history, read from the bottom up.</a:t>
+              <a:t>Read the job history from the bottom up. Then click The Story.</a:t>
             </a:r>
             <a:endParaRPr lang="en-US" sz="1200" dirty="0"/>
           </a:p>
         </p:txBody>
       </p:sp>
-      <p:graphicFrame>
-        <p:nvGraphicFramePr>
-          <p:cNvPr id="9" name="Table 0"/>
-          <p:cNvGraphicFramePr>
-            <a:graphicFrameLocks noGrp="1"/>
-          </p:cNvGraphicFramePr>
-          <p:nvPr>
-            <p:extLst>
-              <p:ext uri="{D42A27DB-BD31-4B8C-83A1-F6EECF244321}">
-                <p14:modId xmlns:p14="http://schemas.microsoft.com/office/powerpoint/2010/main" val="1579011935"/>
-              </p:ext>
-            </p:extLst>
-          </p:nvPr>
-        </p:nvGraphicFramePr>
-        <p:xfrm>
-          <a:off x="411480" y="1280160"/>
-          <a:ext cx="8321040" cy="914400"/>
-        </p:xfrm>
-        <a:graphic>
-          <a:graphicData uri="http://schemas.openxmlformats.org/drawingml/2006/table">
-            <a:tbl>
-              <a:tblPr/>
-              <a:tblGrid>
-                <a:gridCol w="365760"/>
-                <a:gridCol w="1554480"/>
-                <a:gridCol w="914400"/>
-                <a:gridCol w="2011680"/>
-                <a:gridCol w="3474720"/>
-              </a:tblGrid>
-              <a:tr h="329184">
-                <a:tc>
-                  <a:txBody>
-                    <a:bodyPr/>
-                    <a:lstStyle/>
-                    <a:p>
-                      <a:pPr indent="0" marL="0">
-                        <a:buNone/>
-                      </a:pPr>
-                      <a:endParaRPr lang="en-US" sz="950" dirty="0">
-                        <a:latin typeface="SF Pro Display" charset="0"/>
-                        <a:ea typeface="SF Pro Display" charset="0"/>
-                        <a:cs typeface="SF Pro Display" charset="0"/>
-                      </a:endParaRPr>
-                    </a:p>
-                  </a:txBody>
-                  <a:tcPr marL="91440" marR="91440" marT="27432" marB="27432" anchor="ctr">
-                    <a:lnL w="9525" cap="flat" cmpd="sng" algn="ctr">
-                      <a:solidFill>
-                        <a:srgbClr val="DCE1E7"/>
-                      </a:solidFill>
-                      <a:prstDash val="solid"/>
-                      <a:round/>
-                      <a:headEnd type="none" w="med" len="med"/>
-                      <a:tailEnd type="none" w="med" len="med"/>
-                    </a:lnL>
-                    <a:lnR w="9525" cap="flat" cmpd="sng" algn="ctr">
-                      <a:solidFill>
-                        <a:srgbClr val="DCE1E7"/>
-                      </a:solidFill>
-                      <a:prstDash val="solid"/>
-                      <a:round/>
-                      <a:headEnd type="none" w="med" len="med"/>
-                      <a:tailEnd type="none" w="med" len="med"/>
-                    </a:lnR>
-                    <a:lnT w="9525" cap="flat" cmpd="sng" algn="ctr">
-                      <a:solidFill>
-                        <a:srgbClr val="DCE1E7"/>
-                      </a:solidFill>
-                      <a:prstDash val="solid"/>
-                      <a:round/>
-                      <a:headEnd type="none" w="med" len="med"/>
-                      <a:tailEnd type="none" w="med" len="med"/>
-                    </a:lnT>
-                    <a:lnB w="9525" cap="flat" cmpd="sng" algn="ctr">
-                      <a:solidFill>
-                        <a:srgbClr val="DCE1E7"/>
-                      </a:solidFill>
-                      <a:prstDash val="solid"/>
-                      <a:round/>
-                      <a:headEnd type="none" w="med" len="med"/>
-                      <a:tailEnd type="none" w="med" len="med"/>
-                    </a:lnB>
-                    <a:solidFill>
-                      <a:srgbClr val="E3F4F1"/>
-                    </a:solidFill>
-                  </a:tcPr>
-                </a:tc>
-                <a:tc>
-                  <a:txBody>
-                    <a:bodyPr/>
-                    <a:lstStyle/>
-                    <a:p>
-                      <a:pPr indent="0" marL="0">
-                        <a:buNone/>
-                      </a:pPr>
-                      <a:r>
-                        <a:rPr lang="en-US" sz="950" b="1" dirty="0">
-                          <a:solidFill>
-                            <a:srgbClr val="0B7A6F"/>
-                          </a:solidFill>
-                          <a:latin typeface="SF Pro Display" pitchFamily="34" charset="0"/>
-                          <a:ea typeface="SF Pro Display" pitchFamily="34" charset="-122"/>
-                          <a:cs typeface="SF Pro Display" pitchFamily="34" charset="-120"/>
-                        </a:rPr>
-                        <a:t>Action on</a:t>
-                      </a:r>
-                      <a:endParaRPr lang="en-US" sz="950" dirty="0">
-                        <a:latin typeface="SF Pro Display" charset="0"/>
-                        <a:ea typeface="SF Pro Display" charset="0"/>
-                        <a:cs typeface="SF Pro Display" charset="0"/>
-                      </a:endParaRPr>
-                    </a:p>
-                  </a:txBody>
-                  <a:tcPr marL="91440" marR="91440" marT="27432" marB="27432" anchor="ctr">
-                    <a:lnL w="9525" cap="flat" cmpd="sng" algn="ctr">
-                      <a:solidFill>
-                        <a:srgbClr val="DCE1E7"/>
-                      </a:solidFill>
-                      <a:prstDash val="solid"/>
-                      <a:round/>
-                      <a:headEnd type="none" w="med" len="med"/>
-                      <a:tailEnd type="none" w="med" len="med"/>
-                    </a:lnL>
-                    <a:lnR w="9525" cap="flat" cmpd="sng" algn="ctr">
-                      <a:solidFill>
-                        <a:srgbClr val="DCE1E7"/>
-                      </a:solidFill>
-                      <a:prstDash val="solid"/>
-                      <a:round/>
-                      <a:headEnd type="none" w="med" len="med"/>
-                      <a:tailEnd type="none" w="med" len="med"/>
-                    </a:lnR>
-                    <a:lnT w="9525" cap="flat" cmpd="sng" algn="ctr">
-                      <a:solidFill>
-                        <a:srgbClr val="DCE1E7"/>
-                      </a:solidFill>
-                      <a:prstDash val="solid"/>
-                      <a:round/>
-                      <a:headEnd type="none" w="med" len="med"/>
-                      <a:tailEnd type="none" w="med" len="med"/>
-                    </a:lnT>
-                    <a:lnB w="9525" cap="flat" cmpd="sng" algn="ctr">
-                      <a:solidFill>
-                        <a:srgbClr val="DCE1E7"/>
-                      </a:solidFill>
-                      <a:prstDash val="solid"/>
-                      <a:round/>
-                      <a:headEnd type="none" w="med" len="med"/>
-                      <a:tailEnd type="none" w="med" len="med"/>
-                    </a:lnB>
-                    <a:solidFill>
-                      <a:srgbClr val="E3F4F1"/>
-                    </a:solidFill>
-                  </a:tcPr>
-                </a:tc>
-                <a:tc>
-                  <a:txBody>
-                    <a:bodyPr/>
-                    <a:lstStyle/>
-                    <a:p>
-                      <a:pPr indent="0" marL="0">
-                        <a:buNone/>
-                      </a:pPr>
-                      <a:r>
-                        <a:rPr lang="en-US" sz="950" b="1" dirty="0">
-                          <a:solidFill>
-                            <a:srgbClr val="0B7A6F"/>
-                          </a:solidFill>
-                          <a:latin typeface="SF Pro Display" pitchFamily="34" charset="0"/>
-                          <a:ea typeface="SF Pro Display" pitchFamily="34" charset="-122"/>
-                          <a:cs typeface="SF Pro Display" pitchFamily="34" charset="-120"/>
-                        </a:rPr>
-                        <a:t>Actor</a:t>
-                      </a:r>
-                      <a:endParaRPr lang="en-US" sz="950" dirty="0">
-                        <a:latin typeface="SF Pro Display" charset="0"/>
-                        <a:ea typeface="SF Pro Display" charset="0"/>
-                        <a:cs typeface="SF Pro Display" charset="0"/>
-                      </a:endParaRPr>
-                    </a:p>
-                  </a:txBody>
-                  <a:tcPr marL="91440" marR="91440" marT="27432" marB="27432" anchor="ctr">
-                    <a:lnL w="9525" cap="flat" cmpd="sng" algn="ctr">
-                      <a:solidFill>
-                        <a:srgbClr val="DCE1E7"/>
-                      </a:solidFill>
-                      <a:prstDash val="solid"/>
-                      <a:round/>
-                      <a:headEnd type="none" w="med" len="med"/>
-                      <a:tailEnd type="none" w="med" len="med"/>
-                    </a:lnL>
-                    <a:lnR w="9525" cap="flat" cmpd="sng" algn="ctr">
-                      <a:solidFill>
-                        <a:srgbClr val="DCE1E7"/>
-                      </a:solidFill>
-                      <a:prstDash val="solid"/>
-                      <a:round/>
-                      <a:headEnd type="none" w="med" len="med"/>
-                      <a:tailEnd type="none" w="med" len="med"/>
-                    </a:lnR>
-                    <a:lnT w="9525" cap="flat" cmpd="sng" algn="ctr">
-                      <a:solidFill>
-                        <a:srgbClr val="DCE1E7"/>
-                      </a:solidFill>
-                      <a:prstDash val="solid"/>
-                      <a:round/>
-                      <a:headEnd type="none" w="med" len="med"/>
-                      <a:tailEnd type="none" w="med" len="med"/>
-                    </a:lnT>
-                    <a:lnB w="9525" cap="flat" cmpd="sng" algn="ctr">
-                      <a:solidFill>
-                        <a:srgbClr val="DCE1E7"/>
-                      </a:solidFill>
-                      <a:prstDash val="solid"/>
-                      <a:round/>
-                      <a:headEnd type="none" w="med" len="med"/>
-                      <a:tailEnd type="none" w="med" len="med"/>
-                    </a:lnB>
-                    <a:solidFill>
-                      <a:srgbClr val="E3F4F1"/>
-                    </a:solidFill>
-                  </a:tcPr>
-                </a:tc>
-                <a:tc>
-                  <a:txBody>
-                    <a:bodyPr/>
-                    <a:lstStyle/>
-                    <a:p>
-                      <a:pPr indent="0" marL="0">
-                        <a:buNone/>
-                      </a:pPr>
-                      <a:r>
-                        <a:rPr lang="en-US" sz="950" b="1" dirty="0">
-                          <a:solidFill>
-                            <a:srgbClr val="0B7A6F"/>
-                          </a:solidFill>
-                          <a:latin typeface="SF Pro Display" pitchFamily="34" charset="0"/>
-                          <a:ea typeface="SF Pro Display" pitchFamily="34" charset="-122"/>
-                          <a:cs typeface="SF Pro Display" pitchFamily="34" charset="-120"/>
-                        </a:rPr>
-                        <a:t>Action</a:t>
-                      </a:r>
-                      <a:endParaRPr lang="en-US" sz="950" dirty="0">
-                        <a:latin typeface="SF Pro Display" charset="0"/>
-                        <a:ea typeface="SF Pro Display" charset="0"/>
-                        <a:cs typeface="SF Pro Display" charset="0"/>
-                      </a:endParaRPr>
-                    </a:p>
-                  </a:txBody>
-                  <a:tcPr marL="91440" marR="91440" marT="27432" marB="27432" anchor="ctr">
-                    <a:lnL w="9525" cap="flat" cmpd="sng" algn="ctr">
-                      <a:solidFill>
-                        <a:srgbClr val="DCE1E7"/>
-                      </a:solidFill>
-                      <a:prstDash val="solid"/>
-                      <a:round/>
-                      <a:headEnd type="none" w="med" len="med"/>
-                      <a:tailEnd type="none" w="med" len="med"/>
-                    </a:lnL>
-                    <a:lnR w="9525" cap="flat" cmpd="sng" algn="ctr">
-                      <a:solidFill>
-                        <a:srgbClr val="DCE1E7"/>
-                      </a:solidFill>
-                      <a:prstDash val="solid"/>
-                      <a:round/>
-                      <a:headEnd type="none" w="med" len="med"/>
-                      <a:tailEnd type="none" w="med" len="med"/>
-                    </a:lnR>
-                    <a:lnT w="9525" cap="flat" cmpd="sng" algn="ctr">
-                      <a:solidFill>
-                        <a:srgbClr val="DCE1E7"/>
-                      </a:solidFill>
-                      <a:prstDash val="solid"/>
-                      <a:round/>
-                      <a:headEnd type="none" w="med" len="med"/>
-                      <a:tailEnd type="none" w="med" len="med"/>
-                    </a:lnT>
-                    <a:lnB w="9525" cap="flat" cmpd="sng" algn="ctr">
-                      <a:solidFill>
-                        <a:srgbClr val="DCE1E7"/>
-                      </a:solidFill>
-                      <a:prstDash val="solid"/>
-                      <a:round/>
-                      <a:headEnd type="none" w="med" len="med"/>
-                      <a:tailEnd type="none" w="med" len="med"/>
-                    </a:lnB>
-                    <a:solidFill>
-                      <a:srgbClr val="E3F4F1"/>
-                    </a:solidFill>
-                  </a:tcPr>
-                </a:tc>
-                <a:tc>
-                  <a:txBody>
-                    <a:bodyPr/>
-                    <a:lstStyle/>
-                    <a:p>
-                      <a:pPr indent="0" marL="0">
-                        <a:buNone/>
-                      </a:pPr>
-                      <a:r>
-                        <a:rPr lang="en-US" sz="950" b="1" dirty="0">
-                          <a:solidFill>
-                            <a:srgbClr val="0B7A6F"/>
-                          </a:solidFill>
-                          <a:latin typeface="SF Pro Display" pitchFamily="34" charset="0"/>
-                          <a:ea typeface="SF Pro Display" pitchFamily="34" charset="-122"/>
-                          <a:cs typeface="SF Pro Display" pitchFamily="34" charset="-120"/>
-                        </a:rPr>
-                        <a:t>What it tells you</a:t>
-                      </a:r>
-                      <a:endParaRPr lang="en-US" sz="950" dirty="0">
-                        <a:latin typeface="SF Pro Display" charset="0"/>
-                        <a:ea typeface="SF Pro Display" charset="0"/>
-                        <a:cs typeface="SF Pro Display" charset="0"/>
-                      </a:endParaRPr>
-                    </a:p>
-                  </a:txBody>
-                  <a:tcPr marL="91440" marR="91440" marT="27432" marB="27432" anchor="ctr">
-                    <a:lnL w="9525" cap="flat" cmpd="sng" algn="ctr">
-                      <a:solidFill>
-                        <a:srgbClr val="DCE1E7"/>
-                      </a:solidFill>
-                      <a:prstDash val="solid"/>
-                      <a:round/>
-                      <a:headEnd type="none" w="med" len="med"/>
-                      <a:tailEnd type="none" w="med" len="med"/>
-                    </a:lnL>
-                    <a:lnR w="9525" cap="flat" cmpd="sng" algn="ctr">
-                      <a:solidFill>
-                        <a:srgbClr val="DCE1E7"/>
-                      </a:solidFill>
-                      <a:prstDash val="solid"/>
-                      <a:round/>
-                      <a:headEnd type="none" w="med" len="med"/>
-                      <a:tailEnd type="none" w="med" len="med"/>
-                    </a:lnR>
-                    <a:lnT w="9525" cap="flat" cmpd="sng" algn="ctr">
-                      <a:solidFill>
-                        <a:srgbClr val="DCE1E7"/>
-                      </a:solidFill>
-                      <a:prstDash val="solid"/>
-                      <a:round/>
-                      <a:headEnd type="none" w="med" len="med"/>
-                      <a:tailEnd type="none" w="med" len="med"/>
-                    </a:lnT>
-                    <a:lnB w="9525" cap="flat" cmpd="sng" algn="ctr">
-                      <a:solidFill>
-                        <a:srgbClr val="DCE1E7"/>
-                      </a:solidFill>
-                      <a:prstDash val="solid"/>
-                      <a:round/>
-                      <a:headEnd type="none" w="med" len="med"/>
-                      <a:tailEnd type="none" w="med" len="med"/>
-                    </a:lnB>
-                    <a:solidFill>
-                      <a:srgbClr val="E3F4F1"/>
-                    </a:solidFill>
-                  </a:tcPr>
-                </a:tc>
-              </a:tr>
-              <a:tr h="329184">
-                <a:tc>
-                  <a:txBody>
-                    <a:bodyPr/>
-                    <a:lstStyle/>
-                    <a:p>
-                      <a:pPr indent="0" marL="0">
-                        <a:buNone/>
-                      </a:pPr>
-                      <a:r>
-                        <a:rPr lang="en-US" sz="950" b="1" dirty="0">
-                          <a:solidFill>
-                            <a:srgbClr val="1D1D1F"/>
-                          </a:solidFill>
-                          <a:latin typeface="SF Pro Text" pitchFamily="34" charset="0"/>
-                          <a:ea typeface="SF Pro Text" pitchFamily="34" charset="-122"/>
-                          <a:cs typeface="SF Pro Text" pitchFamily="34" charset="-120"/>
-                        </a:rPr>
-                        <a:t>1</a:t>
-                      </a:r>
-                      <a:endParaRPr lang="en-US" sz="950" dirty="0">
-                        <a:latin typeface="SF Pro Text" charset="0"/>
-                        <a:ea typeface="SF Pro Text" charset="0"/>
-                        <a:cs typeface="SF Pro Text" charset="0"/>
-                      </a:endParaRPr>
-                    </a:p>
-                  </a:txBody>
-                  <a:tcPr marL="91440" marR="91440" marT="27432" marB="27432" anchor="ctr">
-                    <a:lnL w="9525" cap="flat" cmpd="sng" algn="ctr">
-                      <a:solidFill>
-                        <a:srgbClr val="DCE1E7"/>
-                      </a:solidFill>
-                      <a:prstDash val="solid"/>
-                      <a:round/>
-                      <a:headEnd type="none" w="med" len="med"/>
-                      <a:tailEnd type="none" w="med" len="med"/>
-                    </a:lnL>
-                    <a:lnR w="9525" cap="flat" cmpd="sng" algn="ctr">
-                      <a:solidFill>
-                        <a:srgbClr val="DCE1E7"/>
-                      </a:solidFill>
-                      <a:prstDash val="solid"/>
-                      <a:round/>
-                      <a:headEnd type="none" w="med" len="med"/>
-                      <a:tailEnd type="none" w="med" len="med"/>
-                    </a:lnR>
-                    <a:lnT w="9525" cap="flat" cmpd="sng" algn="ctr">
-                      <a:solidFill>
-                        <a:srgbClr val="DCE1E7"/>
-                      </a:solidFill>
-                      <a:prstDash val="solid"/>
-                      <a:round/>
-                      <a:headEnd type="none" w="med" len="med"/>
-                      <a:tailEnd type="none" w="med" len="med"/>
-                    </a:lnT>
-                    <a:lnB w="9525" cap="flat" cmpd="sng" algn="ctr">
-                      <a:solidFill>
-                        <a:srgbClr val="DCE1E7"/>
-                      </a:solidFill>
-                      <a:prstDash val="solid"/>
-                      <a:round/>
-                      <a:headEnd type="none" w="med" len="med"/>
-                      <a:tailEnd type="none" w="med" len="med"/>
-                    </a:lnB>
-                    <a:solidFill>
-                      <a:srgbClr val="FFFFFF"/>
-                    </a:solidFill>
-                  </a:tcPr>
-                </a:tc>
-                <a:tc>
-                  <a:txBody>
-                    <a:bodyPr/>
-                    <a:lstStyle/>
-                    <a:p>
-                      <a:pPr indent="0" marL="0">
-                        <a:buNone/>
-                      </a:pPr>
-                      <a:r>
-                        <a:rPr lang="en-US" sz="950" dirty="0">
-                          <a:solidFill>
-                            <a:srgbClr val="6E6E73"/>
-                          </a:solidFill>
-                          <a:latin typeface="SF Pro Text" pitchFamily="34" charset="0"/>
-                          <a:ea typeface="SF Pro Text" pitchFamily="34" charset="-122"/>
-                          <a:cs typeface="SF Pro Text" pitchFamily="34" charset="-120"/>
-                        </a:rPr>
-                        <a:t>Sep 7, 10:35 AM</a:t>
-                      </a:r>
-                      <a:endParaRPr lang="en-US" sz="950" dirty="0">
-                        <a:latin typeface="SF Pro Text" charset="0"/>
-                        <a:ea typeface="SF Pro Text" charset="0"/>
-                        <a:cs typeface="SF Pro Text" charset="0"/>
-                      </a:endParaRPr>
-                    </a:p>
-                  </a:txBody>
-                  <a:tcPr marL="91440" marR="91440" marT="27432" marB="27432" anchor="ctr">
-                    <a:lnL w="9525" cap="flat" cmpd="sng" algn="ctr">
-                      <a:solidFill>
-                        <a:srgbClr val="DCE1E7"/>
-                      </a:solidFill>
-                      <a:prstDash val="solid"/>
-                      <a:round/>
-                      <a:headEnd type="none" w="med" len="med"/>
-                      <a:tailEnd type="none" w="med" len="med"/>
-                    </a:lnL>
-                    <a:lnR w="9525" cap="flat" cmpd="sng" algn="ctr">
-                      <a:solidFill>
-                        <a:srgbClr val="DCE1E7"/>
-                      </a:solidFill>
-                      <a:prstDash val="solid"/>
-                      <a:round/>
-                      <a:headEnd type="none" w="med" len="med"/>
-                      <a:tailEnd type="none" w="med" len="med"/>
-                    </a:lnR>
-                    <a:lnT w="9525" cap="flat" cmpd="sng" algn="ctr">
-                      <a:solidFill>
-                        <a:srgbClr val="DCE1E7"/>
-                      </a:solidFill>
-                      <a:prstDash val="solid"/>
-                      <a:round/>
-                      <a:headEnd type="none" w="med" len="med"/>
-                      <a:tailEnd type="none" w="med" len="med"/>
-                    </a:lnT>
-                    <a:lnB w="9525" cap="flat" cmpd="sng" algn="ctr">
-                      <a:solidFill>
-                        <a:srgbClr val="DCE1E7"/>
-                      </a:solidFill>
-                      <a:prstDash val="solid"/>
-                      <a:round/>
-                      <a:headEnd type="none" w="med" len="med"/>
-                      <a:tailEnd type="none" w="med" len="med"/>
-                    </a:lnB>
-                    <a:solidFill>
-                      <a:srgbClr val="FFFFFF"/>
-                    </a:solidFill>
-                  </a:tcPr>
-                </a:tc>
-                <a:tc>
-                  <a:txBody>
-                    <a:bodyPr/>
-                    <a:lstStyle/>
-                    <a:p>
-                      <a:pPr indent="0" marL="0">
-                        <a:buNone/>
-                      </a:pPr>
-                      <a:r>
-                        <a:rPr lang="en-US" sz="950" dirty="0">
-                          <a:solidFill>
-                            <a:srgbClr val="6E6E73"/>
-                          </a:solidFill>
-                          <a:latin typeface="SF Pro Text" pitchFamily="34" charset="0"/>
-                          <a:ea typeface="SF Pro Text" pitchFamily="34" charset="-122"/>
-                          <a:cs typeface="SF Pro Text" pitchFamily="34" charset="-120"/>
-                        </a:rPr>
-                        <a:t>system</a:t>
-                      </a:r>
-                      <a:endParaRPr lang="en-US" sz="950" dirty="0">
-                        <a:latin typeface="SF Pro Text" charset="0"/>
-                        <a:ea typeface="SF Pro Text" charset="0"/>
-                        <a:cs typeface="SF Pro Text" charset="0"/>
-                      </a:endParaRPr>
-                    </a:p>
-                  </a:txBody>
-                  <a:tcPr marL="91440" marR="91440" marT="27432" marB="27432" anchor="ctr">
-                    <a:lnL w="9525" cap="flat" cmpd="sng" algn="ctr">
-                      <a:solidFill>
-                        <a:srgbClr val="DCE1E7"/>
-                      </a:solidFill>
-                      <a:prstDash val="solid"/>
-                      <a:round/>
-                      <a:headEnd type="none" w="med" len="med"/>
-                      <a:tailEnd type="none" w="med" len="med"/>
-                    </a:lnL>
-                    <a:lnR w="9525" cap="flat" cmpd="sng" algn="ctr">
-                      <a:solidFill>
-                        <a:srgbClr val="DCE1E7"/>
-                      </a:solidFill>
-                      <a:prstDash val="solid"/>
-                      <a:round/>
-                      <a:headEnd type="none" w="med" len="med"/>
-                      <a:tailEnd type="none" w="med" len="med"/>
-                    </a:lnR>
-                    <a:lnT w="9525" cap="flat" cmpd="sng" algn="ctr">
-                      <a:solidFill>
-                        <a:srgbClr val="DCE1E7"/>
-                      </a:solidFill>
-                      <a:prstDash val="solid"/>
-                      <a:round/>
-                      <a:headEnd type="none" w="med" len="med"/>
-                      <a:tailEnd type="none" w="med" len="med"/>
-                    </a:lnT>
-                    <a:lnB w="9525" cap="flat" cmpd="sng" algn="ctr">
-                      <a:solidFill>
-                        <a:srgbClr val="DCE1E7"/>
-                      </a:solidFill>
-                      <a:prstDash val="solid"/>
-                      <a:round/>
-                      <a:headEnd type="none" w="med" len="med"/>
-                      <a:tailEnd type="none" w="med" len="med"/>
-                    </a:lnB>
-                    <a:solidFill>
-                      <a:srgbClr val="FFFFFF"/>
-                    </a:solidFill>
-                  </a:tcPr>
-                </a:tc>
-                <a:tc>
-                  <a:txBody>
-                    <a:bodyPr/>
-                    <a:lstStyle/>
-                    <a:p>
-                      <a:pPr indent="0" marL="0">
-                        <a:buNone/>
-                      </a:pPr>
-                      <a:r>
-                        <a:rPr lang="en-US" sz="950" dirty="0">
-                          <a:solidFill>
-                            <a:srgbClr val="6E6E73"/>
-                          </a:solidFill>
-                          <a:latin typeface="SF Pro Text" pitchFamily="34" charset="0"/>
-                          <a:ea typeface="SF Pro Text" pitchFamily="34" charset="-122"/>
-                          <a:cs typeface="SF Pro Text" pitchFamily="34" charset="-120"/>
-                        </a:rPr>
-                        <a:t>book</a:t>
-                      </a:r>
-                      <a:endParaRPr lang="en-US" sz="950" dirty="0">
-                        <a:latin typeface="SF Pro Text" charset="0"/>
-                        <a:ea typeface="SF Pro Text" charset="0"/>
-                        <a:cs typeface="SF Pro Text" charset="0"/>
-                      </a:endParaRPr>
-                    </a:p>
-                  </a:txBody>
-                  <a:tcPr marL="91440" marR="91440" marT="27432" marB="27432" anchor="ctr">
-                    <a:lnL w="9525" cap="flat" cmpd="sng" algn="ctr">
-                      <a:solidFill>
-                        <a:srgbClr val="DCE1E7"/>
-                      </a:solidFill>
-                      <a:prstDash val="solid"/>
-                      <a:round/>
-                      <a:headEnd type="none" w="med" len="med"/>
-                      <a:tailEnd type="none" w="med" len="med"/>
-                    </a:lnL>
-                    <a:lnR w="9525" cap="flat" cmpd="sng" algn="ctr">
-                      <a:solidFill>
-                        <a:srgbClr val="DCE1E7"/>
-                      </a:solidFill>
-                      <a:prstDash val="solid"/>
-                      <a:round/>
-                      <a:headEnd type="none" w="med" len="med"/>
-                      <a:tailEnd type="none" w="med" len="med"/>
-                    </a:lnR>
-                    <a:lnT w="9525" cap="flat" cmpd="sng" algn="ctr">
-                      <a:solidFill>
-                        <a:srgbClr val="DCE1E7"/>
-                      </a:solidFill>
-                      <a:prstDash val="solid"/>
-                      <a:round/>
-                      <a:headEnd type="none" w="med" len="med"/>
-                      <a:tailEnd type="none" w="med" len="med"/>
-                    </a:lnT>
-                    <a:lnB w="9525" cap="flat" cmpd="sng" algn="ctr">
-                      <a:solidFill>
-                        <a:srgbClr val="DCE1E7"/>
-                      </a:solidFill>
-                      <a:prstDash val="solid"/>
-                      <a:round/>
-                      <a:headEnd type="none" w="med" len="med"/>
-                      <a:tailEnd type="none" w="med" len="med"/>
-                    </a:lnB>
-                    <a:solidFill>
-                      <a:srgbClr val="FFFFFF"/>
-                    </a:solidFill>
-                  </a:tcPr>
-                </a:tc>
-                <a:tc>
-                  <a:txBody>
-                    <a:bodyPr/>
-                    <a:lstStyle/>
-                    <a:p>
-                      <a:pPr indent="0" marL="0">
-                        <a:buNone/>
-                      </a:pPr>
-                      <a:r>
-                        <a:rPr lang="en-US" sz="950" dirty="0">
-                          <a:solidFill>
-                            <a:srgbClr val="6E6E73"/>
-                          </a:solidFill>
-                          <a:latin typeface="SF Pro Text" pitchFamily="34" charset="0"/>
-                          <a:ea typeface="SF Pro Text" pitchFamily="34" charset="-122"/>
-                          <a:cs typeface="SF Pro Text" pitchFamily="34" charset="-120"/>
-                        </a:rPr>
-                        <a:t>Job booked for Sep 21, 10 AM</a:t>
-                      </a:r>
-                      <a:endParaRPr lang="en-US" sz="950" dirty="0">
-                        <a:latin typeface="SF Pro Text" charset="0"/>
-                        <a:ea typeface="SF Pro Text" charset="0"/>
-                        <a:cs typeface="SF Pro Text" charset="0"/>
-                      </a:endParaRPr>
-                    </a:p>
-                  </a:txBody>
-                  <a:tcPr marL="91440" marR="91440" marT="27432" marB="27432" anchor="ctr">
-                    <a:lnL w="9525" cap="flat" cmpd="sng" algn="ctr">
-                      <a:solidFill>
-                        <a:srgbClr val="DCE1E7"/>
-                      </a:solidFill>
-                      <a:prstDash val="solid"/>
-                      <a:round/>
-                      <a:headEnd type="none" w="med" len="med"/>
-                      <a:tailEnd type="none" w="med" len="med"/>
-                    </a:lnL>
-                    <a:lnR w="9525" cap="flat" cmpd="sng" algn="ctr">
-                      <a:solidFill>
-                        <a:srgbClr val="DCE1E7"/>
-                      </a:solidFill>
-                      <a:prstDash val="solid"/>
-                      <a:round/>
-                      <a:headEnd type="none" w="med" len="med"/>
-                      <a:tailEnd type="none" w="med" len="med"/>
-                    </a:lnR>
-                    <a:lnT w="9525" cap="flat" cmpd="sng" algn="ctr">
-                      <a:solidFill>
-                        <a:srgbClr val="DCE1E7"/>
-                      </a:solidFill>
-                      <a:prstDash val="solid"/>
-                      <a:round/>
-                      <a:headEnd type="none" w="med" len="med"/>
-                      <a:tailEnd type="none" w="med" len="med"/>
-                    </a:lnT>
-                    <a:lnB w="9525" cap="flat" cmpd="sng" algn="ctr">
-                      <a:solidFill>
-                        <a:srgbClr val="DCE1E7"/>
-                      </a:solidFill>
-                      <a:prstDash val="solid"/>
-                      <a:round/>
-                      <a:headEnd type="none" w="med" len="med"/>
-                      <a:tailEnd type="none" w="med" len="med"/>
-                    </a:lnB>
-                    <a:solidFill>
-                      <a:srgbClr val="FFFFFF"/>
-                    </a:solidFill>
-                  </a:tcPr>
-                </a:tc>
-              </a:tr>
-              <a:tr h="329184">
-                <a:tc>
-                  <a:txBody>
-                    <a:bodyPr/>
-                    <a:lstStyle/>
-                    <a:p>
-                      <a:pPr indent="0" marL="0">
-                        <a:buNone/>
-                      </a:pPr>
-                      <a:r>
-                        <a:rPr lang="en-US" sz="950" b="1" dirty="0">
-                          <a:solidFill>
-                            <a:srgbClr val="1D1D1F"/>
-                          </a:solidFill>
-                          <a:latin typeface="SF Pro Text" pitchFamily="34" charset="0"/>
-                          <a:ea typeface="SF Pro Text" pitchFamily="34" charset="-122"/>
-                          <a:cs typeface="SF Pro Text" pitchFamily="34" charset="-120"/>
-                        </a:rPr>
-                        <a:t>2</a:t>
-                      </a:r>
-                      <a:endParaRPr lang="en-US" sz="950" dirty="0">
-                        <a:latin typeface="SF Pro Text" charset="0"/>
-                        <a:ea typeface="SF Pro Text" charset="0"/>
-                        <a:cs typeface="SF Pro Text" charset="0"/>
-                      </a:endParaRPr>
-                    </a:p>
-                  </a:txBody>
-                  <a:tcPr marL="91440" marR="91440" marT="27432" marB="27432" anchor="ctr">
-                    <a:lnL w="9525" cap="flat" cmpd="sng" algn="ctr">
-                      <a:solidFill>
-                        <a:srgbClr val="DCE1E7"/>
-                      </a:solidFill>
-                      <a:prstDash val="solid"/>
-                      <a:round/>
-                      <a:headEnd type="none" w="med" len="med"/>
-                      <a:tailEnd type="none" w="med" len="med"/>
-                    </a:lnL>
-                    <a:lnR w="9525" cap="flat" cmpd="sng" algn="ctr">
-                      <a:solidFill>
-                        <a:srgbClr val="DCE1E7"/>
-                      </a:solidFill>
-                      <a:prstDash val="solid"/>
-                      <a:round/>
-                      <a:headEnd type="none" w="med" len="med"/>
-                      <a:tailEnd type="none" w="med" len="med"/>
-                    </a:lnR>
-                    <a:lnT w="9525" cap="flat" cmpd="sng" algn="ctr">
-                      <a:solidFill>
-                        <a:srgbClr val="DCE1E7"/>
-                      </a:solidFill>
-                      <a:prstDash val="solid"/>
-                      <a:round/>
-                      <a:headEnd type="none" w="med" len="med"/>
-                      <a:tailEnd type="none" w="med" len="med"/>
-                    </a:lnT>
-                    <a:lnB w="9525" cap="flat" cmpd="sng" algn="ctr">
-                      <a:solidFill>
-                        <a:srgbClr val="DCE1E7"/>
-                      </a:solidFill>
-                      <a:prstDash val="solid"/>
-                      <a:round/>
-                      <a:headEnd type="none" w="med" len="med"/>
-                      <a:tailEnd type="none" w="med" len="med"/>
-                    </a:lnB>
-                    <a:solidFill>
-                      <a:srgbClr val="FFFFFF"/>
-                    </a:solidFill>
-                  </a:tcPr>
-                </a:tc>
-                <a:tc>
-                  <a:txBody>
-                    <a:bodyPr/>
-                    <a:lstStyle/>
-                    <a:p>
-                      <a:pPr indent="0" marL="0">
-                        <a:buNone/>
-                      </a:pPr>
-                      <a:r>
-                        <a:rPr lang="en-US" sz="950" dirty="0">
-                          <a:solidFill>
-                            <a:srgbClr val="6E6E73"/>
-                          </a:solidFill>
-                          <a:latin typeface="SF Pro Text" pitchFamily="34" charset="0"/>
-                          <a:ea typeface="SF Pro Text" pitchFamily="34" charset="-122"/>
-                          <a:cs typeface="SF Pro Text" pitchFamily="34" charset="-120"/>
-                        </a:rPr>
-                        <a:t>Sep 14, 2:29 PM</a:t>
-                      </a:r>
-                      <a:endParaRPr lang="en-US" sz="950" dirty="0">
-                        <a:latin typeface="SF Pro Text" charset="0"/>
-                        <a:ea typeface="SF Pro Text" charset="0"/>
-                        <a:cs typeface="SF Pro Text" charset="0"/>
-                      </a:endParaRPr>
-                    </a:p>
-                  </a:txBody>
-                  <a:tcPr marL="91440" marR="91440" marT="27432" marB="27432" anchor="ctr">
-                    <a:lnL w="9525" cap="flat" cmpd="sng" algn="ctr">
-                      <a:solidFill>
-                        <a:srgbClr val="DCE1E7"/>
-                      </a:solidFill>
-                      <a:prstDash val="solid"/>
-                      <a:round/>
-                      <a:headEnd type="none" w="med" len="med"/>
-                      <a:tailEnd type="none" w="med" len="med"/>
-                    </a:lnL>
-                    <a:lnR w="9525" cap="flat" cmpd="sng" algn="ctr">
-                      <a:solidFill>
-                        <a:srgbClr val="DCE1E7"/>
-                      </a:solidFill>
-                      <a:prstDash val="solid"/>
-                      <a:round/>
-                      <a:headEnd type="none" w="med" len="med"/>
-                      <a:tailEnd type="none" w="med" len="med"/>
-                    </a:lnR>
-                    <a:lnT w="9525" cap="flat" cmpd="sng" algn="ctr">
-                      <a:solidFill>
-                        <a:srgbClr val="DCE1E7"/>
-                      </a:solidFill>
-                      <a:prstDash val="solid"/>
-                      <a:round/>
-                      <a:headEnd type="none" w="med" len="med"/>
-                      <a:tailEnd type="none" w="med" len="med"/>
-                    </a:lnT>
-                    <a:lnB w="9525" cap="flat" cmpd="sng" algn="ctr">
-                      <a:solidFill>
-                        <a:srgbClr val="DCE1E7"/>
-                      </a:solidFill>
-                      <a:prstDash val="solid"/>
-                      <a:round/>
-                      <a:headEnd type="none" w="med" len="med"/>
-                      <a:tailEnd type="none" w="med" len="med"/>
-                    </a:lnB>
-                    <a:solidFill>
-                      <a:srgbClr val="FFFFFF"/>
-                    </a:solidFill>
-                  </a:tcPr>
-                </a:tc>
-                <a:tc>
-                  <a:txBody>
-                    <a:bodyPr/>
-                    <a:lstStyle/>
-                    <a:p>
-                      <a:pPr indent="0" marL="0">
-                        <a:buNone/>
-                      </a:pPr>
-                      <a:r>
-                        <a:rPr lang="en-US" sz="950" dirty="0">
-                          <a:solidFill>
-                            <a:srgbClr val="6E6E73"/>
-                          </a:solidFill>
-                          <a:latin typeface="SF Pro Text" pitchFamily="34" charset="0"/>
-                          <a:ea typeface="SF Pro Text" pitchFamily="34" charset="-122"/>
-                          <a:cs typeface="SF Pro Text" pitchFamily="34" charset="-120"/>
-                        </a:rPr>
-                        <a:t>cleaner</a:t>
-                      </a:r>
-                      <a:endParaRPr lang="en-US" sz="950" dirty="0">
-                        <a:latin typeface="SF Pro Text" charset="0"/>
-                        <a:ea typeface="SF Pro Text" charset="0"/>
-                        <a:cs typeface="SF Pro Text" charset="0"/>
-                      </a:endParaRPr>
-                    </a:p>
-                  </a:txBody>
-                  <a:tcPr marL="91440" marR="91440" marT="27432" marB="27432" anchor="ctr">
-                    <a:lnL w="9525" cap="flat" cmpd="sng" algn="ctr">
-                      <a:solidFill>
-                        <a:srgbClr val="DCE1E7"/>
-                      </a:solidFill>
-                      <a:prstDash val="solid"/>
-                      <a:round/>
-                      <a:headEnd type="none" w="med" len="med"/>
-                      <a:tailEnd type="none" w="med" len="med"/>
-                    </a:lnL>
-                    <a:lnR w="9525" cap="flat" cmpd="sng" algn="ctr">
-                      <a:solidFill>
-                        <a:srgbClr val="DCE1E7"/>
-                      </a:solidFill>
-                      <a:prstDash val="solid"/>
-                      <a:round/>
-                      <a:headEnd type="none" w="med" len="med"/>
-                      <a:tailEnd type="none" w="med" len="med"/>
-                    </a:lnR>
-                    <a:lnT w="9525" cap="flat" cmpd="sng" algn="ctr">
-                      <a:solidFill>
-                        <a:srgbClr val="DCE1E7"/>
-                      </a:solidFill>
-                      <a:prstDash val="solid"/>
-                      <a:round/>
-                      <a:headEnd type="none" w="med" len="med"/>
-                      <a:tailEnd type="none" w="med" len="med"/>
-                    </a:lnT>
-                    <a:lnB w="9525" cap="flat" cmpd="sng" algn="ctr">
-                      <a:solidFill>
-                        <a:srgbClr val="DCE1E7"/>
-                      </a:solidFill>
-                      <a:prstDash val="solid"/>
-                      <a:round/>
-                      <a:headEnd type="none" w="med" len="med"/>
-                      <a:tailEnd type="none" w="med" len="med"/>
-                    </a:lnB>
-                    <a:solidFill>
-                      <a:srgbClr val="FFFFFF"/>
-                    </a:solidFill>
-                  </a:tcPr>
-                </a:tc>
-                <a:tc>
-                  <a:txBody>
-                    <a:bodyPr/>
-                    <a:lstStyle/>
-                    <a:p>
-                      <a:pPr indent="0" marL="0">
-                        <a:buNone/>
-                      </a:pPr>
-                      <a:r>
-                        <a:rPr lang="en-US" sz="950" dirty="0">
-                          <a:solidFill>
-                            <a:srgbClr val="6E6E73"/>
-                          </a:solidFill>
-                          <a:latin typeface="SF Pro Text" pitchFamily="34" charset="0"/>
-                          <a:ea typeface="SF Pro Text" pitchFamily="34" charset="-122"/>
-                          <a:cs typeface="SF Pro Text" pitchFamily="34" charset="-120"/>
-                        </a:rPr>
-                        <a:t>claim</a:t>
-                      </a:r>
-                      <a:endParaRPr lang="en-US" sz="950" dirty="0">
-                        <a:latin typeface="SF Pro Text" charset="0"/>
-                        <a:ea typeface="SF Pro Text" charset="0"/>
-                        <a:cs typeface="SF Pro Text" charset="0"/>
-                      </a:endParaRPr>
-                    </a:p>
-                  </a:txBody>
-                  <a:tcPr marL="91440" marR="91440" marT="27432" marB="27432" anchor="ctr">
-                    <a:lnL w="9525" cap="flat" cmpd="sng" algn="ctr">
-                      <a:solidFill>
-                        <a:srgbClr val="DCE1E7"/>
-                      </a:solidFill>
-                      <a:prstDash val="solid"/>
-                      <a:round/>
-                      <a:headEnd type="none" w="med" len="med"/>
-                      <a:tailEnd type="none" w="med" len="med"/>
-                    </a:lnL>
-                    <a:lnR w="9525" cap="flat" cmpd="sng" algn="ctr">
-                      <a:solidFill>
-                        <a:srgbClr val="DCE1E7"/>
-                      </a:solidFill>
-                      <a:prstDash val="solid"/>
-                      <a:round/>
-                      <a:headEnd type="none" w="med" len="med"/>
-                      <a:tailEnd type="none" w="med" len="med"/>
-                    </a:lnR>
-                    <a:lnT w="9525" cap="flat" cmpd="sng" algn="ctr">
-                      <a:solidFill>
-                        <a:srgbClr val="DCE1E7"/>
-                      </a:solidFill>
-                      <a:prstDash val="solid"/>
-                      <a:round/>
-                      <a:headEnd type="none" w="med" len="med"/>
-                      <a:tailEnd type="none" w="med" len="med"/>
-                    </a:lnT>
-                    <a:lnB w="9525" cap="flat" cmpd="sng" algn="ctr">
-                      <a:solidFill>
-                        <a:srgbClr val="DCE1E7"/>
-                      </a:solidFill>
-                      <a:prstDash val="solid"/>
-                      <a:round/>
-                      <a:headEnd type="none" w="med" len="med"/>
-                      <a:tailEnd type="none" w="med" len="med"/>
-                    </a:lnB>
-                    <a:solidFill>
-                      <a:srgbClr val="FFFFFF"/>
-                    </a:solidFill>
-                  </a:tcPr>
-                </a:tc>
-                <a:tc>
-                  <a:txBody>
-                    <a:bodyPr/>
-                    <a:lstStyle/>
-                    <a:p>
-                      <a:pPr indent="0" marL="0">
-                        <a:buNone/>
-                      </a:pPr>
-                      <a:r>
-                        <a:rPr lang="en-US" sz="950" dirty="0">
-                          <a:solidFill>
-                            <a:srgbClr val="6E6E73"/>
-                          </a:solidFill>
-                          <a:latin typeface="SF Pro Text" pitchFamily="34" charset="0"/>
-                          <a:ea typeface="SF Pro Text" pitchFamily="34" charset="-122"/>
-                          <a:cs typeface="SF Pro Text" pitchFamily="34" charset="-120"/>
-                        </a:rPr>
-                        <a:t>The cleaner claimed it</a:t>
-                      </a:r>
-                      <a:endParaRPr lang="en-US" sz="950" dirty="0">
-                        <a:latin typeface="SF Pro Text" charset="0"/>
-                        <a:ea typeface="SF Pro Text" charset="0"/>
-                        <a:cs typeface="SF Pro Text" charset="0"/>
-                      </a:endParaRPr>
-                    </a:p>
-                  </a:txBody>
-                  <a:tcPr marL="91440" marR="91440" marT="27432" marB="27432" anchor="ctr">
-                    <a:lnL w="9525" cap="flat" cmpd="sng" algn="ctr">
-                      <a:solidFill>
-                        <a:srgbClr val="DCE1E7"/>
-                      </a:solidFill>
-                      <a:prstDash val="solid"/>
-                      <a:round/>
-                      <a:headEnd type="none" w="med" len="med"/>
-                      <a:tailEnd type="none" w="med" len="med"/>
-                    </a:lnL>
-                    <a:lnR w="9525" cap="flat" cmpd="sng" algn="ctr">
-                      <a:solidFill>
-                        <a:srgbClr val="DCE1E7"/>
-                      </a:solidFill>
-                      <a:prstDash val="solid"/>
-                      <a:round/>
-                      <a:headEnd type="none" w="med" len="med"/>
-                      <a:tailEnd type="none" w="med" len="med"/>
-                    </a:lnR>
-                    <a:lnT w="9525" cap="flat" cmpd="sng" algn="ctr">
-                      <a:solidFill>
-                        <a:srgbClr val="DCE1E7"/>
-                      </a:solidFill>
-                      <a:prstDash val="solid"/>
-                      <a:round/>
-                      <a:headEnd type="none" w="med" len="med"/>
-                      <a:tailEnd type="none" w="med" len="med"/>
-                    </a:lnT>
-                    <a:lnB w="9525" cap="flat" cmpd="sng" algn="ctr">
-                      <a:solidFill>
-                        <a:srgbClr val="DCE1E7"/>
-                      </a:solidFill>
-                      <a:prstDash val="solid"/>
-                      <a:round/>
-                      <a:headEnd type="none" w="med" len="med"/>
-                      <a:tailEnd type="none" w="med" len="med"/>
-                    </a:lnB>
-                    <a:solidFill>
-                      <a:srgbClr val="FFFFFF"/>
-                    </a:solidFill>
-                  </a:tcPr>
-                </a:tc>
-              </a:tr>
-              <a:tr h="329184">
-                <a:tc>
-                  <a:txBody>
-                    <a:bodyPr/>
-                    <a:lstStyle/>
-                    <a:p>
-                      <a:pPr indent="0" marL="0">
-                        <a:buNone/>
-                      </a:pPr>
-                      <a:r>
-                        <a:rPr lang="en-US" sz="950" b="1" dirty="0">
-                          <a:solidFill>
-                            <a:srgbClr val="1D1D1F"/>
-                          </a:solidFill>
-                          <a:latin typeface="SF Pro Text" pitchFamily="34" charset="0"/>
-                          <a:ea typeface="SF Pro Text" pitchFamily="34" charset="-122"/>
-                          <a:cs typeface="SF Pro Text" pitchFamily="34" charset="-120"/>
-                        </a:rPr>
-                        <a:t>3</a:t>
-                      </a:r>
-                      <a:endParaRPr lang="en-US" sz="950" dirty="0">
-                        <a:latin typeface="SF Pro Text" charset="0"/>
-                        <a:ea typeface="SF Pro Text" charset="0"/>
-                        <a:cs typeface="SF Pro Text" charset="0"/>
-                      </a:endParaRPr>
-                    </a:p>
-                  </a:txBody>
-                  <a:tcPr marL="91440" marR="91440" marT="27432" marB="27432" anchor="ctr">
-                    <a:lnL w="9525" cap="flat" cmpd="sng" algn="ctr">
-                      <a:solidFill>
-                        <a:srgbClr val="DCE1E7"/>
-                      </a:solidFill>
-                      <a:prstDash val="solid"/>
-                      <a:round/>
-                      <a:headEnd type="none" w="med" len="med"/>
-                      <a:tailEnd type="none" w="med" len="med"/>
-                    </a:lnL>
-                    <a:lnR w="9525" cap="flat" cmpd="sng" algn="ctr">
-                      <a:solidFill>
-                        <a:srgbClr val="DCE1E7"/>
-                      </a:solidFill>
-                      <a:prstDash val="solid"/>
-                      <a:round/>
-                      <a:headEnd type="none" w="med" len="med"/>
-                      <a:tailEnd type="none" w="med" len="med"/>
-                    </a:lnR>
-                    <a:lnT w="9525" cap="flat" cmpd="sng" algn="ctr">
-                      <a:solidFill>
-                        <a:srgbClr val="DCE1E7"/>
-                      </a:solidFill>
-                      <a:prstDash val="solid"/>
-                      <a:round/>
-                      <a:headEnd type="none" w="med" len="med"/>
-                      <a:tailEnd type="none" w="med" len="med"/>
-                    </a:lnT>
-                    <a:lnB w="9525" cap="flat" cmpd="sng" algn="ctr">
-                      <a:solidFill>
-                        <a:srgbClr val="DCE1E7"/>
-                      </a:solidFill>
-                      <a:prstDash val="solid"/>
-                      <a:round/>
-                      <a:headEnd type="none" w="med" len="med"/>
-                      <a:tailEnd type="none" w="med" len="med"/>
-                    </a:lnB>
-                    <a:solidFill>
-                      <a:srgbClr val="FFFFFF"/>
-                    </a:solidFill>
-                  </a:tcPr>
-                </a:tc>
-                <a:tc>
-                  <a:txBody>
-                    <a:bodyPr/>
-                    <a:lstStyle/>
-                    <a:p>
-                      <a:pPr indent="0" marL="0">
-                        <a:buNone/>
-                      </a:pPr>
-                      <a:r>
-                        <a:rPr lang="en-US" sz="950" dirty="0">
-                          <a:solidFill>
-                            <a:srgbClr val="6E6E73"/>
-                          </a:solidFill>
-                          <a:latin typeface="SF Pro Text" pitchFamily="34" charset="0"/>
-                          <a:ea typeface="SF Pro Text" pitchFamily="34" charset="-122"/>
-                          <a:cs typeface="SF Pro Text" pitchFamily="34" charset="-120"/>
-                        </a:rPr>
-                        <a:t>Sep 21, 9:19 AM</a:t>
-                      </a:r>
-                      <a:endParaRPr lang="en-US" sz="950" dirty="0">
-                        <a:latin typeface="SF Pro Text" charset="0"/>
-                        <a:ea typeface="SF Pro Text" charset="0"/>
-                        <a:cs typeface="SF Pro Text" charset="0"/>
-                      </a:endParaRPr>
-                    </a:p>
-                  </a:txBody>
-                  <a:tcPr marL="91440" marR="91440" marT="27432" marB="27432" anchor="ctr">
-                    <a:lnL w="9525" cap="flat" cmpd="sng" algn="ctr">
-                      <a:solidFill>
-                        <a:srgbClr val="DCE1E7"/>
-                      </a:solidFill>
-                      <a:prstDash val="solid"/>
-                      <a:round/>
-                      <a:headEnd type="none" w="med" len="med"/>
-                      <a:tailEnd type="none" w="med" len="med"/>
-                    </a:lnL>
-                    <a:lnR w="9525" cap="flat" cmpd="sng" algn="ctr">
-                      <a:solidFill>
-                        <a:srgbClr val="DCE1E7"/>
-                      </a:solidFill>
-                      <a:prstDash val="solid"/>
-                      <a:round/>
-                      <a:headEnd type="none" w="med" len="med"/>
-                      <a:tailEnd type="none" w="med" len="med"/>
-                    </a:lnR>
-                    <a:lnT w="9525" cap="flat" cmpd="sng" algn="ctr">
-                      <a:solidFill>
-                        <a:srgbClr val="DCE1E7"/>
-                      </a:solidFill>
-                      <a:prstDash val="solid"/>
-                      <a:round/>
-                      <a:headEnd type="none" w="med" len="med"/>
-                      <a:tailEnd type="none" w="med" len="med"/>
-                    </a:lnT>
-                    <a:lnB w="9525" cap="flat" cmpd="sng" algn="ctr">
-                      <a:solidFill>
-                        <a:srgbClr val="DCE1E7"/>
-                      </a:solidFill>
-                      <a:prstDash val="solid"/>
-                      <a:round/>
-                      <a:headEnd type="none" w="med" len="med"/>
-                      <a:tailEnd type="none" w="med" len="med"/>
-                    </a:lnB>
-                    <a:solidFill>
-                      <a:srgbClr val="FFFFFF"/>
-                    </a:solidFill>
-                  </a:tcPr>
-                </a:tc>
-                <a:tc>
-                  <a:txBody>
-                    <a:bodyPr/>
-                    <a:lstStyle/>
-                    <a:p>
-                      <a:pPr indent="0" marL="0">
-                        <a:buNone/>
-                      </a:pPr>
-                      <a:r>
-                        <a:rPr lang="en-US" sz="950" dirty="0">
-                          <a:solidFill>
-                            <a:srgbClr val="6E6E73"/>
-                          </a:solidFill>
-                          <a:latin typeface="SF Pro Text" pitchFamily="34" charset="0"/>
-                          <a:ea typeface="SF Pro Text" pitchFamily="34" charset="-122"/>
-                          <a:cs typeface="SF Pro Text" pitchFamily="34" charset="-120"/>
-                        </a:rPr>
-                        <a:t>cleaner</a:t>
-                      </a:r>
-                      <a:endParaRPr lang="en-US" sz="950" dirty="0">
-                        <a:latin typeface="SF Pro Text" charset="0"/>
-                        <a:ea typeface="SF Pro Text" charset="0"/>
-                        <a:cs typeface="SF Pro Text" charset="0"/>
-                      </a:endParaRPr>
-                    </a:p>
-                  </a:txBody>
-                  <a:tcPr marL="91440" marR="91440" marT="27432" marB="27432" anchor="ctr">
-                    <a:lnL w="9525" cap="flat" cmpd="sng" algn="ctr">
-                      <a:solidFill>
-                        <a:srgbClr val="DCE1E7"/>
-                      </a:solidFill>
-                      <a:prstDash val="solid"/>
-                      <a:round/>
-                      <a:headEnd type="none" w="med" len="med"/>
-                      <a:tailEnd type="none" w="med" len="med"/>
-                    </a:lnL>
-                    <a:lnR w="9525" cap="flat" cmpd="sng" algn="ctr">
-                      <a:solidFill>
-                        <a:srgbClr val="DCE1E7"/>
-                      </a:solidFill>
-                      <a:prstDash val="solid"/>
-                      <a:round/>
-                      <a:headEnd type="none" w="med" len="med"/>
-                      <a:tailEnd type="none" w="med" len="med"/>
-                    </a:lnR>
-                    <a:lnT w="9525" cap="flat" cmpd="sng" algn="ctr">
-                      <a:solidFill>
-                        <a:srgbClr val="DCE1E7"/>
-                      </a:solidFill>
-                      <a:prstDash val="solid"/>
-                      <a:round/>
-                      <a:headEnd type="none" w="med" len="med"/>
-                      <a:tailEnd type="none" w="med" len="med"/>
-                    </a:lnT>
-                    <a:lnB w="9525" cap="flat" cmpd="sng" algn="ctr">
-                      <a:solidFill>
-                        <a:srgbClr val="DCE1E7"/>
-                      </a:solidFill>
-                      <a:prstDash val="solid"/>
-                      <a:round/>
-                      <a:headEnd type="none" w="med" len="med"/>
-                      <a:tailEnd type="none" w="med" len="med"/>
-                    </a:lnB>
-                    <a:solidFill>
-                      <a:srgbClr val="FFFFFF"/>
-                    </a:solidFill>
-                  </a:tcPr>
-                </a:tc>
-                <a:tc>
-                  <a:txBody>
-                    <a:bodyPr/>
-                    <a:lstStyle/>
-                    <a:p>
-                      <a:pPr indent="0" marL="0">
-                        <a:buNone/>
-                      </a:pPr>
-                      <a:r>
-                        <a:rPr lang="en-US" sz="950" dirty="0">
-                          <a:solidFill>
-                            <a:srgbClr val="6E6E73"/>
-                          </a:solidFill>
-                          <a:latin typeface="SF Pro Text" pitchFamily="34" charset="0"/>
-                          <a:ea typeface="SF Pro Text" pitchFamily="34" charset="-122"/>
-                          <a:cs typeface="SF Pro Text" pitchFamily="34" charset="-120"/>
-                        </a:rPr>
-                        <a:t>reschedule</a:t>
-                      </a:r>
-                      <a:endParaRPr lang="en-US" sz="950" dirty="0">
-                        <a:latin typeface="SF Pro Text" charset="0"/>
-                        <a:ea typeface="SF Pro Text" charset="0"/>
-                        <a:cs typeface="SF Pro Text" charset="0"/>
-                      </a:endParaRPr>
-                    </a:p>
-                  </a:txBody>
-                  <a:tcPr marL="91440" marR="91440" marT="27432" marB="27432" anchor="ctr">
-                    <a:lnL w="9525" cap="flat" cmpd="sng" algn="ctr">
-                      <a:solidFill>
-                        <a:srgbClr val="DCE1E7"/>
-                      </a:solidFill>
-                      <a:prstDash val="solid"/>
-                      <a:round/>
-                      <a:headEnd type="none" w="med" len="med"/>
-                      <a:tailEnd type="none" w="med" len="med"/>
-                    </a:lnL>
-                    <a:lnR w="9525" cap="flat" cmpd="sng" algn="ctr">
-                      <a:solidFill>
-                        <a:srgbClr val="DCE1E7"/>
-                      </a:solidFill>
-                      <a:prstDash val="solid"/>
-                      <a:round/>
-                      <a:headEnd type="none" w="med" len="med"/>
-                      <a:tailEnd type="none" w="med" len="med"/>
-                    </a:lnR>
-                    <a:lnT w="9525" cap="flat" cmpd="sng" algn="ctr">
-                      <a:solidFill>
-                        <a:srgbClr val="DCE1E7"/>
-                      </a:solidFill>
-                      <a:prstDash val="solid"/>
-                      <a:round/>
-                      <a:headEnd type="none" w="med" len="med"/>
-                      <a:tailEnd type="none" w="med" len="med"/>
-                    </a:lnT>
-                    <a:lnB w="9525" cap="flat" cmpd="sng" algn="ctr">
-                      <a:solidFill>
-                        <a:srgbClr val="DCE1E7"/>
-                      </a:solidFill>
-                      <a:prstDash val="solid"/>
-                      <a:round/>
-                      <a:headEnd type="none" w="med" len="med"/>
-                      <a:tailEnd type="none" w="med" len="med"/>
-                    </a:lnB>
-                    <a:solidFill>
-                      <a:srgbClr val="FFFFFF"/>
-                    </a:solidFill>
-                  </a:tcPr>
-                </a:tc>
-                <a:tc>
-                  <a:txBody>
-                    <a:bodyPr/>
-                    <a:lstStyle/>
-                    <a:p>
-                      <a:pPr indent="0" marL="0">
-                        <a:buNone/>
-                      </a:pPr>
-                      <a:r>
-                        <a:rPr lang="en-US" sz="950" dirty="0">
-                          <a:solidFill>
-                            <a:srgbClr val="6E6E73"/>
-                          </a:solidFill>
-                          <a:latin typeface="SF Pro Text" pitchFamily="34" charset="0"/>
-                          <a:ea typeface="SF Pro Text" pitchFamily="34" charset="-122"/>
-                          <a:cs typeface="SF Pro Text" pitchFamily="34" charset="-120"/>
-                        </a:rPr>
-                        <a:t>Moved from Sep 21, 10 AM to Sep 22, 11 AM</a:t>
-                      </a:r>
-                      <a:endParaRPr lang="en-US" sz="950" dirty="0">
-                        <a:latin typeface="SF Pro Text" charset="0"/>
-                        <a:ea typeface="SF Pro Text" charset="0"/>
-                        <a:cs typeface="SF Pro Text" charset="0"/>
-                      </a:endParaRPr>
-                    </a:p>
-                  </a:txBody>
-                  <a:tcPr marL="91440" marR="91440" marT="27432" marB="27432" anchor="ctr">
-                    <a:lnL w="9525" cap="flat" cmpd="sng" algn="ctr">
-                      <a:solidFill>
-                        <a:srgbClr val="DCE1E7"/>
-                      </a:solidFill>
-                      <a:prstDash val="solid"/>
-                      <a:round/>
-                      <a:headEnd type="none" w="med" len="med"/>
-                      <a:tailEnd type="none" w="med" len="med"/>
-                    </a:lnL>
-                    <a:lnR w="9525" cap="flat" cmpd="sng" algn="ctr">
-                      <a:solidFill>
-                        <a:srgbClr val="DCE1E7"/>
-                      </a:solidFill>
-                      <a:prstDash val="solid"/>
-                      <a:round/>
-                      <a:headEnd type="none" w="med" len="med"/>
-                      <a:tailEnd type="none" w="med" len="med"/>
-                    </a:lnR>
-                    <a:lnT w="9525" cap="flat" cmpd="sng" algn="ctr">
-                      <a:solidFill>
-                        <a:srgbClr val="DCE1E7"/>
-                      </a:solidFill>
-                      <a:prstDash val="solid"/>
-                      <a:round/>
-                      <a:headEnd type="none" w="med" len="med"/>
-                      <a:tailEnd type="none" w="med" len="med"/>
-                    </a:lnT>
-                    <a:lnB w="9525" cap="flat" cmpd="sng" algn="ctr">
-                      <a:solidFill>
-                        <a:srgbClr val="DCE1E7"/>
-                      </a:solidFill>
-                      <a:prstDash val="solid"/>
-                      <a:round/>
-                      <a:headEnd type="none" w="med" len="med"/>
-                      <a:tailEnd type="none" w="med" len="med"/>
-                    </a:lnB>
-                    <a:solidFill>
-                      <a:srgbClr val="FFFFFF"/>
-                    </a:solidFill>
-                  </a:tcPr>
-                </a:tc>
-              </a:tr>
-              <a:tr h="329184">
-                <a:tc>
-                  <a:txBody>
-                    <a:bodyPr/>
-                    <a:lstStyle/>
-                    <a:p>
-                      <a:pPr indent="0" marL="0">
-                        <a:buNone/>
-                      </a:pPr>
-                      <a:r>
-                        <a:rPr lang="en-US" sz="950" b="1" dirty="0">
-                          <a:solidFill>
-                            <a:srgbClr val="1D1D1F"/>
-                          </a:solidFill>
-                          <a:latin typeface="SF Pro Text" pitchFamily="34" charset="0"/>
-                          <a:ea typeface="SF Pro Text" pitchFamily="34" charset="-122"/>
-                          <a:cs typeface="SF Pro Text" pitchFamily="34" charset="-120"/>
-                        </a:rPr>
-                        <a:t>4</a:t>
-                      </a:r>
-                      <a:endParaRPr lang="en-US" sz="950" dirty="0">
-                        <a:latin typeface="SF Pro Text" charset="0"/>
-                        <a:ea typeface="SF Pro Text" charset="0"/>
-                        <a:cs typeface="SF Pro Text" charset="0"/>
-                      </a:endParaRPr>
-                    </a:p>
-                  </a:txBody>
-                  <a:tcPr marL="91440" marR="91440" marT="27432" marB="27432" anchor="ctr">
-                    <a:lnL w="9525" cap="flat" cmpd="sng" algn="ctr">
-                      <a:solidFill>
-                        <a:srgbClr val="DCE1E7"/>
-                      </a:solidFill>
-                      <a:prstDash val="solid"/>
-                      <a:round/>
-                      <a:headEnd type="none" w="med" len="med"/>
-                      <a:tailEnd type="none" w="med" len="med"/>
-                    </a:lnL>
-                    <a:lnR w="9525" cap="flat" cmpd="sng" algn="ctr">
-                      <a:solidFill>
-                        <a:srgbClr val="DCE1E7"/>
-                      </a:solidFill>
-                      <a:prstDash val="solid"/>
-                      <a:round/>
-                      <a:headEnd type="none" w="med" len="med"/>
-                      <a:tailEnd type="none" w="med" len="med"/>
-                    </a:lnR>
-                    <a:lnT w="9525" cap="flat" cmpd="sng" algn="ctr">
-                      <a:solidFill>
-                        <a:srgbClr val="DCE1E7"/>
-                      </a:solidFill>
-                      <a:prstDash val="solid"/>
-                      <a:round/>
-                      <a:headEnd type="none" w="med" len="med"/>
-                      <a:tailEnd type="none" w="med" len="med"/>
-                    </a:lnT>
-                    <a:lnB w="9525" cap="flat" cmpd="sng" algn="ctr">
-                      <a:solidFill>
-                        <a:srgbClr val="DCE1E7"/>
-                      </a:solidFill>
-                      <a:prstDash val="solid"/>
-                      <a:round/>
-                      <a:headEnd type="none" w="med" len="med"/>
-                      <a:tailEnd type="none" w="med" len="med"/>
-                    </a:lnB>
-                    <a:solidFill>
-                      <a:srgbClr val="FFFFFF"/>
-                    </a:solidFill>
-                  </a:tcPr>
-                </a:tc>
-                <a:tc>
-                  <a:txBody>
-                    <a:bodyPr/>
-                    <a:lstStyle/>
-                    <a:p>
-                      <a:pPr indent="0" marL="0">
-                        <a:buNone/>
-                      </a:pPr>
-                      <a:r>
-                        <a:rPr lang="en-US" sz="950" dirty="0">
-                          <a:solidFill>
-                            <a:srgbClr val="6E6E73"/>
-                          </a:solidFill>
-                          <a:latin typeface="SF Pro Text" pitchFamily="34" charset="0"/>
-                          <a:ea typeface="SF Pro Text" pitchFamily="34" charset="-122"/>
-                          <a:cs typeface="SF Pro Text" pitchFamily="34" charset="-120"/>
-                        </a:rPr>
-                        <a:t>Sep 21, 9:50 AM</a:t>
-                      </a:r>
-                      <a:endParaRPr lang="en-US" sz="950" dirty="0">
-                        <a:latin typeface="SF Pro Text" charset="0"/>
-                        <a:ea typeface="SF Pro Text" charset="0"/>
-                        <a:cs typeface="SF Pro Text" charset="0"/>
-                      </a:endParaRPr>
-                    </a:p>
-                  </a:txBody>
-                  <a:tcPr marL="91440" marR="91440" marT="27432" marB="27432" anchor="ctr">
-                    <a:lnL w="9525" cap="flat" cmpd="sng" algn="ctr">
-                      <a:solidFill>
-                        <a:srgbClr val="DCE1E7"/>
-                      </a:solidFill>
-                      <a:prstDash val="solid"/>
-                      <a:round/>
-                      <a:headEnd type="none" w="med" len="med"/>
-                      <a:tailEnd type="none" w="med" len="med"/>
-                    </a:lnL>
-                    <a:lnR w="9525" cap="flat" cmpd="sng" algn="ctr">
-                      <a:solidFill>
-                        <a:srgbClr val="DCE1E7"/>
-                      </a:solidFill>
-                      <a:prstDash val="solid"/>
-                      <a:round/>
-                      <a:headEnd type="none" w="med" len="med"/>
-                      <a:tailEnd type="none" w="med" len="med"/>
-                    </a:lnR>
-                    <a:lnT w="9525" cap="flat" cmpd="sng" algn="ctr">
-                      <a:solidFill>
-                        <a:srgbClr val="DCE1E7"/>
-                      </a:solidFill>
-                      <a:prstDash val="solid"/>
-                      <a:round/>
-                      <a:headEnd type="none" w="med" len="med"/>
-                      <a:tailEnd type="none" w="med" len="med"/>
-                    </a:lnT>
-                    <a:lnB w="9525" cap="flat" cmpd="sng" algn="ctr">
-                      <a:solidFill>
-                        <a:srgbClr val="DCE1E7"/>
-                      </a:solidFill>
-                      <a:prstDash val="solid"/>
-                      <a:round/>
-                      <a:headEnd type="none" w="med" len="med"/>
-                      <a:tailEnd type="none" w="med" len="med"/>
-                    </a:lnB>
-                    <a:solidFill>
-                      <a:srgbClr val="FFFFFF"/>
-                    </a:solidFill>
-                  </a:tcPr>
-                </a:tc>
-                <a:tc>
-                  <a:txBody>
-                    <a:bodyPr/>
-                    <a:lstStyle/>
-                    <a:p>
-                      <a:pPr indent="0" marL="0">
-                        <a:buNone/>
-                      </a:pPr>
-                      <a:r>
-                        <a:rPr lang="en-US" sz="950" dirty="0">
-                          <a:solidFill>
-                            <a:srgbClr val="6E6E73"/>
-                          </a:solidFill>
-                          <a:latin typeface="SF Pro Text" pitchFamily="34" charset="0"/>
-                          <a:ea typeface="SF Pro Text" pitchFamily="34" charset="-122"/>
-                          <a:cs typeface="SF Pro Text" pitchFamily="34" charset="-120"/>
-                        </a:rPr>
-                        <a:t>cleaner</a:t>
-                      </a:r>
-                      <a:endParaRPr lang="en-US" sz="950" dirty="0">
-                        <a:latin typeface="SF Pro Text" charset="0"/>
-                        <a:ea typeface="SF Pro Text" charset="0"/>
-                        <a:cs typeface="SF Pro Text" charset="0"/>
-                      </a:endParaRPr>
-                    </a:p>
-                  </a:txBody>
-                  <a:tcPr marL="91440" marR="91440" marT="27432" marB="27432" anchor="ctr">
-                    <a:lnL w="9525" cap="flat" cmpd="sng" algn="ctr">
-                      <a:solidFill>
-                        <a:srgbClr val="DCE1E7"/>
-                      </a:solidFill>
-                      <a:prstDash val="solid"/>
-                      <a:round/>
-                      <a:headEnd type="none" w="med" len="med"/>
-                      <a:tailEnd type="none" w="med" len="med"/>
-                    </a:lnL>
-                    <a:lnR w="9525" cap="flat" cmpd="sng" algn="ctr">
-                      <a:solidFill>
-                        <a:srgbClr val="DCE1E7"/>
-                      </a:solidFill>
-                      <a:prstDash val="solid"/>
-                      <a:round/>
-                      <a:headEnd type="none" w="med" len="med"/>
-                      <a:tailEnd type="none" w="med" len="med"/>
-                    </a:lnR>
-                    <a:lnT w="9525" cap="flat" cmpd="sng" algn="ctr">
-                      <a:solidFill>
-                        <a:srgbClr val="DCE1E7"/>
-                      </a:solidFill>
-                      <a:prstDash val="solid"/>
-                      <a:round/>
-                      <a:headEnd type="none" w="med" len="med"/>
-                      <a:tailEnd type="none" w="med" len="med"/>
-                    </a:lnT>
-                    <a:lnB w="9525" cap="flat" cmpd="sng" algn="ctr">
-                      <a:solidFill>
-                        <a:srgbClr val="DCE1E7"/>
-                      </a:solidFill>
-                      <a:prstDash val="solid"/>
-                      <a:round/>
-                      <a:headEnd type="none" w="med" len="med"/>
-                      <a:tailEnd type="none" w="med" len="med"/>
-                    </a:lnB>
-                    <a:solidFill>
-                      <a:srgbClr val="FFFFFF"/>
-                    </a:solidFill>
-                  </a:tcPr>
-                </a:tc>
-                <a:tc>
-                  <a:txBody>
-                    <a:bodyPr/>
-                    <a:lstStyle/>
-                    <a:p>
-                      <a:pPr indent="0" marL="0">
-                        <a:buNone/>
-                      </a:pPr>
-                      <a:r>
-                        <a:rPr lang="en-US" sz="950" dirty="0">
-                          <a:solidFill>
-                            <a:srgbClr val="6E6E73"/>
-                          </a:solidFill>
-                          <a:latin typeface="SF Pro Text" pitchFamily="34" charset="0"/>
-                          <a:ea typeface="SF Pro Text" pitchFamily="34" charset="-122"/>
-                          <a:cs typeface="SF Pro Text" pitchFamily="34" charset="-120"/>
-                        </a:rPr>
-                        <a:t>reschedule</a:t>
-                      </a:r>
-                      <a:endParaRPr lang="en-US" sz="950" dirty="0">
-                        <a:latin typeface="SF Pro Text" charset="0"/>
-                        <a:ea typeface="SF Pro Text" charset="0"/>
-                        <a:cs typeface="SF Pro Text" charset="0"/>
-                      </a:endParaRPr>
-                    </a:p>
-                  </a:txBody>
-                  <a:tcPr marL="91440" marR="91440" marT="27432" marB="27432" anchor="ctr">
-                    <a:lnL w="9525" cap="flat" cmpd="sng" algn="ctr">
-                      <a:solidFill>
-                        <a:srgbClr val="DCE1E7"/>
-                      </a:solidFill>
-                      <a:prstDash val="solid"/>
-                      <a:round/>
-                      <a:headEnd type="none" w="med" len="med"/>
-                      <a:tailEnd type="none" w="med" len="med"/>
-                    </a:lnL>
-                    <a:lnR w="9525" cap="flat" cmpd="sng" algn="ctr">
-                      <a:solidFill>
-                        <a:srgbClr val="DCE1E7"/>
-                      </a:solidFill>
-                      <a:prstDash val="solid"/>
-                      <a:round/>
-                      <a:headEnd type="none" w="med" len="med"/>
-                      <a:tailEnd type="none" w="med" len="med"/>
-                    </a:lnR>
-                    <a:lnT w="9525" cap="flat" cmpd="sng" algn="ctr">
-                      <a:solidFill>
-                        <a:srgbClr val="DCE1E7"/>
-                      </a:solidFill>
-                      <a:prstDash val="solid"/>
-                      <a:round/>
-                      <a:headEnd type="none" w="med" len="med"/>
-                      <a:tailEnd type="none" w="med" len="med"/>
-                    </a:lnT>
-                    <a:lnB w="9525" cap="flat" cmpd="sng" algn="ctr">
-                      <a:solidFill>
-                        <a:srgbClr val="DCE1E7"/>
-                      </a:solidFill>
-                      <a:prstDash val="solid"/>
-                      <a:round/>
-                      <a:headEnd type="none" w="med" len="med"/>
-                      <a:tailEnd type="none" w="med" len="med"/>
-                    </a:lnB>
-                    <a:solidFill>
-                      <a:srgbClr val="FFFFFF"/>
-                    </a:solidFill>
-                  </a:tcPr>
-                </a:tc>
-                <a:tc>
-                  <a:txBody>
-                    <a:bodyPr/>
-                    <a:lstStyle/>
-                    <a:p>
-                      <a:pPr indent="0" marL="0">
-                        <a:buNone/>
-                      </a:pPr>
-                      <a:r>
-                        <a:rPr lang="en-US" sz="950" dirty="0">
-                          <a:solidFill>
-                            <a:srgbClr val="6E6E73"/>
-                          </a:solidFill>
-                          <a:latin typeface="SF Pro Text" pitchFamily="34" charset="0"/>
-                          <a:ea typeface="SF Pro Text" pitchFamily="34" charset="-122"/>
-                          <a:cs typeface="SF Pro Text" pitchFamily="34" charset="-120"/>
-                        </a:rPr>
-                        <a:t>Moved again, to Sep 24, 12:30 PM</a:t>
-                      </a:r>
-                      <a:endParaRPr lang="en-US" sz="950" dirty="0">
-                        <a:latin typeface="SF Pro Text" charset="0"/>
-                        <a:ea typeface="SF Pro Text" charset="0"/>
-                        <a:cs typeface="SF Pro Text" charset="0"/>
-                      </a:endParaRPr>
-                    </a:p>
-                  </a:txBody>
-                  <a:tcPr marL="91440" marR="91440" marT="27432" marB="27432" anchor="ctr">
-                    <a:lnL w="9525" cap="flat" cmpd="sng" algn="ctr">
-                      <a:solidFill>
-                        <a:srgbClr val="DCE1E7"/>
-                      </a:solidFill>
-                      <a:prstDash val="solid"/>
-                      <a:round/>
-                      <a:headEnd type="none" w="med" len="med"/>
-                      <a:tailEnd type="none" w="med" len="med"/>
-                    </a:lnL>
-                    <a:lnR w="9525" cap="flat" cmpd="sng" algn="ctr">
-                      <a:solidFill>
-                        <a:srgbClr val="DCE1E7"/>
-                      </a:solidFill>
-                      <a:prstDash val="solid"/>
-                      <a:round/>
-                      <a:headEnd type="none" w="med" len="med"/>
-                      <a:tailEnd type="none" w="med" len="med"/>
-                    </a:lnR>
-                    <a:lnT w="9525" cap="flat" cmpd="sng" algn="ctr">
-                      <a:solidFill>
-                        <a:srgbClr val="DCE1E7"/>
-                      </a:solidFill>
-                      <a:prstDash val="solid"/>
-                      <a:round/>
-                      <a:headEnd type="none" w="med" len="med"/>
-                      <a:tailEnd type="none" w="med" len="med"/>
-                    </a:lnT>
-                    <a:lnB w="9525" cap="flat" cmpd="sng" algn="ctr">
-                      <a:solidFill>
-                        <a:srgbClr val="DCE1E7"/>
-                      </a:solidFill>
-                      <a:prstDash val="solid"/>
-                      <a:round/>
-                      <a:headEnd type="none" w="med" len="med"/>
-                      <a:tailEnd type="none" w="med" len="med"/>
-                    </a:lnB>
-                    <a:solidFill>
-                      <a:srgbClr val="FFFFFF"/>
-                    </a:solidFill>
-                  </a:tcPr>
-                </a:tc>
-              </a:tr>
-              <a:tr h="329184">
-                <a:tc>
-                  <a:txBody>
-                    <a:bodyPr/>
-                    <a:lstStyle/>
-                    <a:p>
-                      <a:pPr indent="0" marL="0">
-                        <a:buNone/>
-                      </a:pPr>
-                      <a:r>
-                        <a:rPr lang="en-US" sz="950" b="1" dirty="0">
-                          <a:solidFill>
-                            <a:srgbClr val="1D1D1F"/>
-                          </a:solidFill>
-                          <a:latin typeface="SF Pro Text" pitchFamily="34" charset="0"/>
-                          <a:ea typeface="SF Pro Text" pitchFamily="34" charset="-122"/>
-                          <a:cs typeface="SF Pro Text" pitchFamily="34" charset="-120"/>
-                        </a:rPr>
-                        <a:t>5</a:t>
-                      </a:r>
-                      <a:endParaRPr lang="en-US" sz="950" dirty="0">
-                        <a:latin typeface="SF Pro Text" charset="0"/>
-                        <a:ea typeface="SF Pro Text" charset="0"/>
-                        <a:cs typeface="SF Pro Text" charset="0"/>
-                      </a:endParaRPr>
-                    </a:p>
-                  </a:txBody>
-                  <a:tcPr marL="91440" marR="91440" marT="27432" marB="27432" anchor="ctr">
-                    <a:lnL w="9525" cap="flat" cmpd="sng" algn="ctr">
-                      <a:solidFill>
-                        <a:srgbClr val="DCE1E7"/>
-                      </a:solidFill>
-                      <a:prstDash val="solid"/>
-                      <a:round/>
-                      <a:headEnd type="none" w="med" len="med"/>
-                      <a:tailEnd type="none" w="med" len="med"/>
-                    </a:lnL>
-                    <a:lnR w="9525" cap="flat" cmpd="sng" algn="ctr">
-                      <a:solidFill>
-                        <a:srgbClr val="DCE1E7"/>
-                      </a:solidFill>
-                      <a:prstDash val="solid"/>
-                      <a:round/>
-                      <a:headEnd type="none" w="med" len="med"/>
-                      <a:tailEnd type="none" w="med" len="med"/>
-                    </a:lnR>
-                    <a:lnT w="9525" cap="flat" cmpd="sng" algn="ctr">
-                      <a:solidFill>
-                        <a:srgbClr val="DCE1E7"/>
-                      </a:solidFill>
-                      <a:prstDash val="solid"/>
-                      <a:round/>
-                      <a:headEnd type="none" w="med" len="med"/>
-                      <a:tailEnd type="none" w="med" len="med"/>
-                    </a:lnT>
-                    <a:lnB w="9525" cap="flat" cmpd="sng" algn="ctr">
-                      <a:solidFill>
-                        <a:srgbClr val="DCE1E7"/>
-                      </a:solidFill>
-                      <a:prstDash val="solid"/>
-                      <a:round/>
-                      <a:headEnd type="none" w="med" len="med"/>
-                      <a:tailEnd type="none" w="med" len="med"/>
-                    </a:lnB>
-                    <a:solidFill>
-                      <a:srgbClr val="FFFFFF"/>
-                    </a:solidFill>
-                  </a:tcPr>
-                </a:tc>
-                <a:tc>
-                  <a:txBody>
-                    <a:bodyPr/>
-                    <a:lstStyle/>
-                    <a:p>
-                      <a:pPr indent="0" marL="0">
-                        <a:buNone/>
-                      </a:pPr>
-                      <a:r>
-                        <a:rPr lang="en-US" sz="950" dirty="0">
-                          <a:solidFill>
-                            <a:srgbClr val="6E6E73"/>
-                          </a:solidFill>
-                          <a:latin typeface="SF Pro Text" pitchFamily="34" charset="0"/>
-                          <a:ea typeface="SF Pro Text" pitchFamily="34" charset="-122"/>
-                          <a:cs typeface="SF Pro Text" pitchFamily="34" charset="-120"/>
-                        </a:rPr>
-                        <a:t>Sep 24, 4:09 PM</a:t>
-                      </a:r>
-                      <a:endParaRPr lang="en-US" sz="950" dirty="0">
-                        <a:latin typeface="SF Pro Text" charset="0"/>
-                        <a:ea typeface="SF Pro Text" charset="0"/>
-                        <a:cs typeface="SF Pro Text" charset="0"/>
-                      </a:endParaRPr>
-                    </a:p>
-                  </a:txBody>
-                  <a:tcPr marL="91440" marR="91440" marT="27432" marB="27432" anchor="ctr">
-                    <a:lnL w="9525" cap="flat" cmpd="sng" algn="ctr">
-                      <a:solidFill>
-                        <a:srgbClr val="DCE1E7"/>
-                      </a:solidFill>
-                      <a:prstDash val="solid"/>
-                      <a:round/>
-                      <a:headEnd type="none" w="med" len="med"/>
-                      <a:tailEnd type="none" w="med" len="med"/>
-                    </a:lnL>
-                    <a:lnR w="9525" cap="flat" cmpd="sng" algn="ctr">
-                      <a:solidFill>
-                        <a:srgbClr val="DCE1E7"/>
-                      </a:solidFill>
-                      <a:prstDash val="solid"/>
-                      <a:round/>
-                      <a:headEnd type="none" w="med" len="med"/>
-                      <a:tailEnd type="none" w="med" len="med"/>
-                    </a:lnR>
-                    <a:lnT w="9525" cap="flat" cmpd="sng" algn="ctr">
-                      <a:solidFill>
-                        <a:srgbClr val="DCE1E7"/>
-                      </a:solidFill>
-                      <a:prstDash val="solid"/>
-                      <a:round/>
-                      <a:headEnd type="none" w="med" len="med"/>
-                      <a:tailEnd type="none" w="med" len="med"/>
-                    </a:lnT>
-                    <a:lnB w="9525" cap="flat" cmpd="sng" algn="ctr">
-                      <a:solidFill>
-                        <a:srgbClr val="DCE1E7"/>
-                      </a:solidFill>
-                      <a:prstDash val="solid"/>
-                      <a:round/>
-                      <a:headEnd type="none" w="med" len="med"/>
-                      <a:tailEnd type="none" w="med" len="med"/>
-                    </a:lnB>
-                    <a:solidFill>
-                      <a:srgbClr val="FFFFFF"/>
-                    </a:solidFill>
-                  </a:tcPr>
-                </a:tc>
-                <a:tc>
-                  <a:txBody>
-                    <a:bodyPr/>
-                    <a:lstStyle/>
-                    <a:p>
-                      <a:pPr indent="0" marL="0">
-                        <a:buNone/>
-                      </a:pPr>
-                      <a:r>
-                        <a:rPr lang="en-US" sz="950" dirty="0">
-                          <a:solidFill>
-                            <a:srgbClr val="6E6E73"/>
-                          </a:solidFill>
-                          <a:latin typeface="SF Pro Text" pitchFamily="34" charset="0"/>
-                          <a:ea typeface="SF Pro Text" pitchFamily="34" charset="-122"/>
-                          <a:cs typeface="SF Pro Text" pitchFamily="34" charset="-120"/>
-                        </a:rPr>
-                        <a:t>cleaner</a:t>
-                      </a:r>
-                      <a:endParaRPr lang="en-US" sz="950" dirty="0">
-                        <a:latin typeface="SF Pro Text" charset="0"/>
-                        <a:ea typeface="SF Pro Text" charset="0"/>
-                        <a:cs typeface="SF Pro Text" charset="0"/>
-                      </a:endParaRPr>
-                    </a:p>
-                  </a:txBody>
-                  <a:tcPr marL="91440" marR="91440" marT="27432" marB="27432" anchor="ctr">
-                    <a:lnL w="9525" cap="flat" cmpd="sng" algn="ctr">
-                      <a:solidFill>
-                        <a:srgbClr val="DCE1E7"/>
-                      </a:solidFill>
-                      <a:prstDash val="solid"/>
-                      <a:round/>
-                      <a:headEnd type="none" w="med" len="med"/>
-                      <a:tailEnd type="none" w="med" len="med"/>
-                    </a:lnL>
-                    <a:lnR w="9525" cap="flat" cmpd="sng" algn="ctr">
-                      <a:solidFill>
-                        <a:srgbClr val="DCE1E7"/>
-                      </a:solidFill>
-                      <a:prstDash val="solid"/>
-                      <a:round/>
-                      <a:headEnd type="none" w="med" len="med"/>
-                      <a:tailEnd type="none" w="med" len="med"/>
-                    </a:lnR>
-                    <a:lnT w="9525" cap="flat" cmpd="sng" algn="ctr">
-                      <a:solidFill>
-                        <a:srgbClr val="DCE1E7"/>
-                      </a:solidFill>
-                      <a:prstDash val="solid"/>
-                      <a:round/>
-                      <a:headEnd type="none" w="med" len="med"/>
-                      <a:tailEnd type="none" w="med" len="med"/>
-                    </a:lnT>
-                    <a:lnB w="9525" cap="flat" cmpd="sng" algn="ctr">
-                      <a:solidFill>
-                        <a:srgbClr val="DCE1E7"/>
-                      </a:solidFill>
-                      <a:prstDash val="solid"/>
-                      <a:round/>
-                      <a:headEnd type="none" w="med" len="med"/>
-                      <a:tailEnd type="none" w="med" len="med"/>
-                    </a:lnB>
-                    <a:solidFill>
-                      <a:srgbClr val="FFFFFF"/>
-                    </a:solidFill>
-                  </a:tcPr>
-                </a:tc>
-                <a:tc>
-                  <a:txBody>
-                    <a:bodyPr/>
-                    <a:lstStyle/>
-                    <a:p>
-                      <a:pPr indent="0" marL="0">
-                        <a:buNone/>
-                      </a:pPr>
-                      <a:r>
-                        <a:rPr lang="en-US" sz="950" dirty="0">
-                          <a:solidFill>
-                            <a:srgbClr val="6E6E73"/>
-                          </a:solidFill>
-                          <a:latin typeface="SF Pro Text" pitchFamily="34" charset="0"/>
-                          <a:ea typeface="SF Pro Text" pitchFamily="34" charset="-122"/>
-                          <a:cs typeface="SF Pro Text" pitchFamily="34" charset="-120"/>
-                        </a:rPr>
-                        <a:t>invoice</a:t>
-                      </a:r>
-                      <a:endParaRPr lang="en-US" sz="950" dirty="0">
-                        <a:latin typeface="SF Pro Text" charset="0"/>
-                        <a:ea typeface="SF Pro Text" charset="0"/>
-                        <a:cs typeface="SF Pro Text" charset="0"/>
-                      </a:endParaRPr>
-                    </a:p>
-                  </a:txBody>
-                  <a:tcPr marL="91440" marR="91440" marT="27432" marB="27432" anchor="ctr">
-                    <a:lnL w="9525" cap="flat" cmpd="sng" algn="ctr">
-                      <a:solidFill>
-                        <a:srgbClr val="DCE1E7"/>
-                      </a:solidFill>
-                      <a:prstDash val="solid"/>
-                      <a:round/>
-                      <a:headEnd type="none" w="med" len="med"/>
-                      <a:tailEnd type="none" w="med" len="med"/>
-                    </a:lnL>
-                    <a:lnR w="9525" cap="flat" cmpd="sng" algn="ctr">
-                      <a:solidFill>
-                        <a:srgbClr val="DCE1E7"/>
-                      </a:solidFill>
-                      <a:prstDash val="solid"/>
-                      <a:round/>
-                      <a:headEnd type="none" w="med" len="med"/>
-                      <a:tailEnd type="none" w="med" len="med"/>
-                    </a:lnR>
-                    <a:lnT w="9525" cap="flat" cmpd="sng" algn="ctr">
-                      <a:solidFill>
-                        <a:srgbClr val="DCE1E7"/>
-                      </a:solidFill>
-                      <a:prstDash val="solid"/>
-                      <a:round/>
-                      <a:headEnd type="none" w="med" len="med"/>
-                      <a:tailEnd type="none" w="med" len="med"/>
-                    </a:lnT>
-                    <a:lnB w="9525" cap="flat" cmpd="sng" algn="ctr">
-                      <a:solidFill>
-                        <a:srgbClr val="DCE1E7"/>
-                      </a:solidFill>
-                      <a:prstDash val="solid"/>
-                      <a:round/>
-                      <a:headEnd type="none" w="med" len="med"/>
-                      <a:tailEnd type="none" w="med" len="med"/>
-                    </a:lnB>
-                    <a:solidFill>
-                      <a:srgbClr val="FFFFFF"/>
-                    </a:solidFill>
-                  </a:tcPr>
-                </a:tc>
-                <a:tc>
-                  <a:txBody>
-                    <a:bodyPr/>
-                    <a:lstStyle/>
-                    <a:p>
-                      <a:pPr indent="0" marL="0">
-                        <a:buNone/>
-                      </a:pPr>
-                      <a:r>
-                        <a:rPr lang="en-US" sz="950" dirty="0">
-                          <a:solidFill>
-                            <a:srgbClr val="6E6E73"/>
-                          </a:solidFill>
-                          <a:latin typeface="SF Pro Text" pitchFamily="34" charset="0"/>
-                          <a:ea typeface="SF Pro Text" pitchFamily="34" charset="-122"/>
-                          <a:cs typeface="SF Pro Text" pitchFamily="34" charset="-120"/>
-                        </a:rPr>
-                        <a:t>Invoiced, from Pending Invoice</a:t>
-                      </a:r>
-                      <a:endParaRPr lang="en-US" sz="950" dirty="0">
-                        <a:latin typeface="SF Pro Text" charset="0"/>
-                        <a:ea typeface="SF Pro Text" charset="0"/>
-                        <a:cs typeface="SF Pro Text" charset="0"/>
-                      </a:endParaRPr>
-                    </a:p>
-                  </a:txBody>
-                  <a:tcPr marL="91440" marR="91440" marT="27432" marB="27432" anchor="ctr">
-                    <a:lnL w="9525" cap="flat" cmpd="sng" algn="ctr">
-                      <a:solidFill>
-                        <a:srgbClr val="DCE1E7"/>
-                      </a:solidFill>
-                      <a:prstDash val="solid"/>
-                      <a:round/>
-                      <a:headEnd type="none" w="med" len="med"/>
-                      <a:tailEnd type="none" w="med" len="med"/>
-                    </a:lnL>
-                    <a:lnR w="9525" cap="flat" cmpd="sng" algn="ctr">
-                      <a:solidFill>
-                        <a:srgbClr val="DCE1E7"/>
-                      </a:solidFill>
-                      <a:prstDash val="solid"/>
-                      <a:round/>
-                      <a:headEnd type="none" w="med" len="med"/>
-                      <a:tailEnd type="none" w="med" len="med"/>
-                    </a:lnR>
-                    <a:lnT w="9525" cap="flat" cmpd="sng" algn="ctr">
-                      <a:solidFill>
-                        <a:srgbClr val="DCE1E7"/>
-                      </a:solidFill>
-                      <a:prstDash val="solid"/>
-                      <a:round/>
-                      <a:headEnd type="none" w="med" len="med"/>
-                      <a:tailEnd type="none" w="med" len="med"/>
-                    </a:lnT>
-                    <a:lnB w="9525" cap="flat" cmpd="sng" algn="ctr">
-                      <a:solidFill>
-                        <a:srgbClr val="DCE1E7"/>
-                      </a:solidFill>
-                      <a:prstDash val="solid"/>
-                      <a:round/>
-                      <a:headEnd type="none" w="med" len="med"/>
-                      <a:tailEnd type="none" w="med" len="med"/>
-                    </a:lnB>
-                    <a:solidFill>
-                      <a:srgbClr val="FFFFFF"/>
-                    </a:solidFill>
-                  </a:tcPr>
-                </a:tc>
-              </a:tr>
-              <a:tr h="329184">
-                <a:tc>
-                  <a:txBody>
-                    <a:bodyPr/>
-                    <a:lstStyle/>
-                    <a:p>
-                      <a:pPr indent="0" marL="0">
-                        <a:buNone/>
-                      </a:pPr>
-                      <a:r>
-                        <a:rPr lang="en-US" sz="950" b="1" dirty="0">
-                          <a:solidFill>
-                            <a:srgbClr val="1D1D1F"/>
-                          </a:solidFill>
-                          <a:latin typeface="SF Pro Text" pitchFamily="34" charset="0"/>
-                          <a:ea typeface="SF Pro Text" pitchFamily="34" charset="-122"/>
-                          <a:cs typeface="SF Pro Text" pitchFamily="34" charset="-120"/>
-                        </a:rPr>
-                        <a:t>6</a:t>
-                      </a:r>
-                      <a:endParaRPr lang="en-US" sz="950" dirty="0">
-                        <a:latin typeface="SF Pro Text" charset="0"/>
-                        <a:ea typeface="SF Pro Text" charset="0"/>
-                        <a:cs typeface="SF Pro Text" charset="0"/>
-                      </a:endParaRPr>
-                    </a:p>
-                  </a:txBody>
-                  <a:tcPr marL="91440" marR="91440" marT="27432" marB="27432" anchor="ctr">
-                    <a:lnL w="9525" cap="flat" cmpd="sng" algn="ctr">
-                      <a:solidFill>
-                        <a:srgbClr val="DCE1E7"/>
-                      </a:solidFill>
-                      <a:prstDash val="solid"/>
-                      <a:round/>
-                      <a:headEnd type="none" w="med" len="med"/>
-                      <a:tailEnd type="none" w="med" len="med"/>
-                    </a:lnL>
-                    <a:lnR w="9525" cap="flat" cmpd="sng" algn="ctr">
-                      <a:solidFill>
-                        <a:srgbClr val="DCE1E7"/>
-                      </a:solidFill>
-                      <a:prstDash val="solid"/>
-                      <a:round/>
-                      <a:headEnd type="none" w="med" len="med"/>
-                      <a:tailEnd type="none" w="med" len="med"/>
-                    </a:lnR>
-                    <a:lnT w="9525" cap="flat" cmpd="sng" algn="ctr">
-                      <a:solidFill>
-                        <a:srgbClr val="DCE1E7"/>
-                      </a:solidFill>
-                      <a:prstDash val="solid"/>
-                      <a:round/>
-                      <a:headEnd type="none" w="med" len="med"/>
-                      <a:tailEnd type="none" w="med" len="med"/>
-                    </a:lnT>
-                    <a:lnB w="9525" cap="flat" cmpd="sng" algn="ctr">
-                      <a:solidFill>
-                        <a:srgbClr val="DCE1E7"/>
-                      </a:solidFill>
-                      <a:prstDash val="solid"/>
-                      <a:round/>
-                      <a:headEnd type="none" w="med" len="med"/>
-                      <a:tailEnd type="none" w="med" len="med"/>
-                    </a:lnB>
-                    <a:solidFill>
-                      <a:srgbClr val="FFFFFF"/>
-                    </a:solidFill>
-                  </a:tcPr>
-                </a:tc>
-                <a:tc>
-                  <a:txBody>
-                    <a:bodyPr/>
-                    <a:lstStyle/>
-                    <a:p>
-                      <a:pPr indent="0" marL="0">
-                        <a:buNone/>
-                      </a:pPr>
-                      <a:r>
-                        <a:rPr lang="en-US" sz="950" dirty="0">
-                          <a:solidFill>
-                            <a:srgbClr val="6E6E73"/>
-                          </a:solidFill>
-                          <a:latin typeface="SF Pro Text" pitchFamily="34" charset="0"/>
-                          <a:ea typeface="SF Pro Text" pitchFamily="34" charset="-122"/>
-                          <a:cs typeface="SF Pro Text" pitchFamily="34" charset="-120"/>
-                        </a:rPr>
-                        <a:t>Sep 24, 4:09 PM</a:t>
-                      </a:r>
-                      <a:endParaRPr lang="en-US" sz="950" dirty="0">
-                        <a:latin typeface="SF Pro Text" charset="0"/>
-                        <a:ea typeface="SF Pro Text" charset="0"/>
-                        <a:cs typeface="SF Pro Text" charset="0"/>
-                      </a:endParaRPr>
-                    </a:p>
-                  </a:txBody>
-                  <a:tcPr marL="91440" marR="91440" marT="27432" marB="27432" anchor="ctr">
-                    <a:lnL w="9525" cap="flat" cmpd="sng" algn="ctr">
-                      <a:solidFill>
-                        <a:srgbClr val="DCE1E7"/>
-                      </a:solidFill>
-                      <a:prstDash val="solid"/>
-                      <a:round/>
-                      <a:headEnd type="none" w="med" len="med"/>
-                      <a:tailEnd type="none" w="med" len="med"/>
-                    </a:lnL>
-                    <a:lnR w="9525" cap="flat" cmpd="sng" algn="ctr">
-                      <a:solidFill>
-                        <a:srgbClr val="DCE1E7"/>
-                      </a:solidFill>
-                      <a:prstDash val="solid"/>
-                      <a:round/>
-                      <a:headEnd type="none" w="med" len="med"/>
-                      <a:tailEnd type="none" w="med" len="med"/>
-                    </a:lnR>
-                    <a:lnT w="9525" cap="flat" cmpd="sng" algn="ctr">
-                      <a:solidFill>
-                        <a:srgbClr val="DCE1E7"/>
-                      </a:solidFill>
-                      <a:prstDash val="solid"/>
-                      <a:round/>
-                      <a:headEnd type="none" w="med" len="med"/>
-                      <a:tailEnd type="none" w="med" len="med"/>
-                    </a:lnT>
-                    <a:lnB w="9525" cap="flat" cmpd="sng" algn="ctr">
-                      <a:solidFill>
-                        <a:srgbClr val="DCE1E7"/>
-                      </a:solidFill>
-                      <a:prstDash val="solid"/>
-                      <a:round/>
-                      <a:headEnd type="none" w="med" len="med"/>
-                      <a:tailEnd type="none" w="med" len="med"/>
-                    </a:lnB>
-                    <a:solidFill>
-                      <a:srgbClr val="FFFFFF"/>
-                    </a:solidFill>
-                  </a:tcPr>
-                </a:tc>
-                <a:tc>
-                  <a:txBody>
-                    <a:bodyPr/>
-                    <a:lstStyle/>
-                    <a:p>
-                      <a:pPr indent="0" marL="0">
-                        <a:buNone/>
-                      </a:pPr>
-                      <a:r>
-                        <a:rPr lang="en-US" sz="950" dirty="0">
-                          <a:solidFill>
-                            <a:srgbClr val="6E6E73"/>
-                          </a:solidFill>
-                          <a:latin typeface="SF Pro Text" pitchFamily="34" charset="0"/>
-                          <a:ea typeface="SF Pro Text" pitchFamily="34" charset="-122"/>
-                          <a:cs typeface="SF Pro Text" pitchFamily="34" charset="-120"/>
-                        </a:rPr>
-                        <a:t>system</a:t>
-                      </a:r>
-                      <a:endParaRPr lang="en-US" sz="950" dirty="0">
-                        <a:latin typeface="SF Pro Text" charset="0"/>
-                        <a:ea typeface="SF Pro Text" charset="0"/>
-                        <a:cs typeface="SF Pro Text" charset="0"/>
-                      </a:endParaRPr>
-                    </a:p>
-                  </a:txBody>
-                  <a:tcPr marL="91440" marR="91440" marT="27432" marB="27432" anchor="ctr">
-                    <a:lnL w="9525" cap="flat" cmpd="sng" algn="ctr">
-                      <a:solidFill>
-                        <a:srgbClr val="DCE1E7"/>
-                      </a:solidFill>
-                      <a:prstDash val="solid"/>
-                      <a:round/>
-                      <a:headEnd type="none" w="med" len="med"/>
-                      <a:tailEnd type="none" w="med" len="med"/>
-                    </a:lnL>
-                    <a:lnR w="9525" cap="flat" cmpd="sng" algn="ctr">
-                      <a:solidFill>
-                        <a:srgbClr val="DCE1E7"/>
-                      </a:solidFill>
-                      <a:prstDash val="solid"/>
-                      <a:round/>
-                      <a:headEnd type="none" w="med" len="med"/>
-                      <a:tailEnd type="none" w="med" len="med"/>
-                    </a:lnR>
-                    <a:lnT w="9525" cap="flat" cmpd="sng" algn="ctr">
-                      <a:solidFill>
-                        <a:srgbClr val="DCE1E7"/>
-                      </a:solidFill>
-                      <a:prstDash val="solid"/>
-                      <a:round/>
-                      <a:headEnd type="none" w="med" len="med"/>
-                      <a:tailEnd type="none" w="med" len="med"/>
-                    </a:lnT>
-                    <a:lnB w="9525" cap="flat" cmpd="sng" algn="ctr">
-                      <a:solidFill>
-                        <a:srgbClr val="DCE1E7"/>
-                      </a:solidFill>
-                      <a:prstDash val="solid"/>
-                      <a:round/>
-                      <a:headEnd type="none" w="med" len="med"/>
-                      <a:tailEnd type="none" w="med" len="med"/>
-                    </a:lnB>
-                    <a:solidFill>
-                      <a:srgbClr val="FFFFFF"/>
-                    </a:solidFill>
-                  </a:tcPr>
-                </a:tc>
-                <a:tc>
-                  <a:txBody>
-                    <a:bodyPr/>
-                    <a:lstStyle/>
-                    <a:p>
-                      <a:pPr indent="0" marL="0">
-                        <a:buNone/>
-                      </a:pPr>
-                      <a:r>
-                        <a:rPr lang="en-US" sz="950" dirty="0">
-                          <a:solidFill>
-                            <a:srgbClr val="6E6E73"/>
-                          </a:solidFill>
-                          <a:latin typeface="SF Pro Text" pitchFamily="34" charset="0"/>
-                          <a:ea typeface="SF Pro Text" pitchFamily="34" charset="-122"/>
-                          <a:cs typeface="SF Pro Text" pitchFamily="34" charset="-120"/>
-                        </a:rPr>
-                        <a:t>log_snapshot_on_invoice</a:t>
-                      </a:r>
-                      <a:endParaRPr lang="en-US" sz="950" dirty="0">
-                        <a:latin typeface="SF Pro Text" charset="0"/>
-                        <a:ea typeface="SF Pro Text" charset="0"/>
-                        <a:cs typeface="SF Pro Text" charset="0"/>
-                      </a:endParaRPr>
-                    </a:p>
-                  </a:txBody>
-                  <a:tcPr marL="91440" marR="91440" marT="27432" marB="27432" anchor="ctr">
-                    <a:lnL w="9525" cap="flat" cmpd="sng" algn="ctr">
-                      <a:solidFill>
-                        <a:srgbClr val="DCE1E7"/>
-                      </a:solidFill>
-                      <a:prstDash val="solid"/>
-                      <a:round/>
-                      <a:headEnd type="none" w="med" len="med"/>
-                      <a:tailEnd type="none" w="med" len="med"/>
-                    </a:lnL>
-                    <a:lnR w="9525" cap="flat" cmpd="sng" algn="ctr">
-                      <a:solidFill>
-                        <a:srgbClr val="DCE1E7"/>
-                      </a:solidFill>
-                      <a:prstDash val="solid"/>
-                      <a:round/>
-                      <a:headEnd type="none" w="med" len="med"/>
-                      <a:tailEnd type="none" w="med" len="med"/>
-                    </a:lnR>
-                    <a:lnT w="9525" cap="flat" cmpd="sng" algn="ctr">
-                      <a:solidFill>
-                        <a:srgbClr val="DCE1E7"/>
-                      </a:solidFill>
-                      <a:prstDash val="solid"/>
-                      <a:round/>
-                      <a:headEnd type="none" w="med" len="med"/>
-                      <a:tailEnd type="none" w="med" len="med"/>
-                    </a:lnT>
-                    <a:lnB w="9525" cap="flat" cmpd="sng" algn="ctr">
-                      <a:solidFill>
-                        <a:srgbClr val="DCE1E7"/>
-                      </a:solidFill>
-                      <a:prstDash val="solid"/>
-                      <a:round/>
-                      <a:headEnd type="none" w="med" len="med"/>
-                      <a:tailEnd type="none" w="med" len="med"/>
-                    </a:lnB>
-                    <a:solidFill>
-                      <a:srgbClr val="FFFFFF"/>
-                    </a:solidFill>
-                  </a:tcPr>
-                </a:tc>
-                <a:tc>
-                  <a:txBody>
-                    <a:bodyPr/>
-                    <a:lstStyle/>
-                    <a:p>
-                      <a:pPr indent="0" marL="0">
-                        <a:buNone/>
-                      </a:pPr>
-                      <a:r>
-                        <a:rPr lang="en-US" sz="950" dirty="0">
-                          <a:solidFill>
-                            <a:srgbClr val="6E6E73"/>
-                          </a:solidFill>
-                          <a:latin typeface="SF Pro Text" pitchFamily="34" charset="0"/>
-                          <a:ea typeface="SF Pro Text" pitchFamily="34" charset="-122"/>
-                          <a:cs typeface="SF Pro Text" pitchFamily="34" charset="-120"/>
-                        </a:rPr>
-                        <a:t>The system logged the invoice</a:t>
-                      </a:r>
-                      <a:endParaRPr lang="en-US" sz="950" dirty="0">
-                        <a:latin typeface="SF Pro Text" charset="0"/>
-                        <a:ea typeface="SF Pro Text" charset="0"/>
-                        <a:cs typeface="SF Pro Text" charset="0"/>
-                      </a:endParaRPr>
-                    </a:p>
-                  </a:txBody>
-                  <a:tcPr marL="91440" marR="91440" marT="27432" marB="27432" anchor="ctr">
-                    <a:lnL w="9525" cap="flat" cmpd="sng" algn="ctr">
-                      <a:solidFill>
-                        <a:srgbClr val="DCE1E7"/>
-                      </a:solidFill>
-                      <a:prstDash val="solid"/>
-                      <a:round/>
-                      <a:headEnd type="none" w="med" len="med"/>
-                      <a:tailEnd type="none" w="med" len="med"/>
-                    </a:lnL>
-                    <a:lnR w="9525" cap="flat" cmpd="sng" algn="ctr">
-                      <a:solidFill>
-                        <a:srgbClr val="DCE1E7"/>
-                      </a:solidFill>
-                      <a:prstDash val="solid"/>
-                      <a:round/>
-                      <a:headEnd type="none" w="med" len="med"/>
-                      <a:tailEnd type="none" w="med" len="med"/>
-                    </a:lnR>
-                    <a:lnT w="9525" cap="flat" cmpd="sng" algn="ctr">
-                      <a:solidFill>
-                        <a:srgbClr val="DCE1E7"/>
-                      </a:solidFill>
-                      <a:prstDash val="solid"/>
-                      <a:round/>
-                      <a:headEnd type="none" w="med" len="med"/>
-                      <a:tailEnd type="none" w="med" len="med"/>
-                    </a:lnT>
-                    <a:lnB w="9525" cap="flat" cmpd="sng" algn="ctr">
-                      <a:solidFill>
-                        <a:srgbClr val="DCE1E7"/>
-                      </a:solidFill>
-                      <a:prstDash val="solid"/>
-                      <a:round/>
-                      <a:headEnd type="none" w="med" len="med"/>
-                      <a:tailEnd type="none" w="med" len="med"/>
-                    </a:lnB>
-                    <a:solidFill>
-                      <a:srgbClr val="FFFFFF"/>
-                    </a:solidFill>
-                  </a:tcPr>
-                </a:tc>
-              </a:tr>
-            </a:tbl>
-          </a:graphicData>
-        </a:graphic>
-      </p:graphicFrame>
-      <p:sp>
-        <p:nvSpPr>
-          <p:cNvPr id="7" name="Shape 3"/>
+      <p:sp>
+        <p:nvSpPr>
+          <p:cNvPr id="6" name="Shape 3"/>
           <p:cNvSpPr/>
           <p:nvPr/>
         </p:nvSpPr>
         <p:spPr>
           <a:xfrm>
-            <a:off x="411480" y="3703320"/>
-            <a:ext cx="8321040" cy="594360"/>
+            <a:off x="411480" y="1188720"/>
+            <a:ext cx="5257800" cy="2651760"/>
           </a:xfrm>
           <a:prstGeom prst="roundRect">
             <a:avLst>
-              <a:gd name="adj" fmla="val 12308"/>
+              <a:gd name="adj" fmla="val 2759"/>
+            </a:avLst>
+          </a:prstGeom>
+          <a:solidFill>
+            <a:srgbClr val="FFFFFF"/>
+          </a:solidFill>
+          <a:ln w="9525">
+            <a:solidFill>
+              <a:srgbClr val="DCE1E7"/>
+            </a:solidFill>
+            <a:prstDash val="solid"/>
+          </a:ln>
+        </p:spPr>
+      </p:sp>
+      <p:pic>
+        <p:nvPicPr>
+          <p:cNvPr id="7" name="Image 0" descr="/tmp/claude-0/-workspace-training/3ce5cff6-cccf-5f33-b0ee-0b147a55120e/scratchpad/img3/jh_table.png">    </p:cNvPr>
+          <p:cNvPicPr>
+            <a:picLocks noChangeAspect="1"/>
+          </p:cNvPicPr>
+          <p:nvPr/>
+        </p:nvPicPr>
+        <p:blipFill>
+          <a:blip r:embed="rId1"/>
+          <a:stretch>
+            <a:fillRect/>
+          </a:stretch>
+        </p:blipFill>
+        <p:spPr>
+          <a:xfrm>
+            <a:off x="484632" y="1298989"/>
+            <a:ext cx="5111496" cy="2431222"/>
+          </a:xfrm>
+          <a:prstGeom prst="rect">
+            <a:avLst/>
+          </a:prstGeom>
+        </p:spPr>
+      </p:pic>
+      <p:pic>
+        <p:nvPicPr>
+          <p:cNvPr id="8" name="Image 1" descr="preencoded.png">    </p:cNvPr>
+          <p:cNvPicPr>
+            <a:picLocks noChangeAspect="1"/>
+          </p:cNvPicPr>
+          <p:nvPr/>
+        </p:nvPicPr>
+        <p:blipFill>
+          <a:blip r:embed="rId2"/>
+          <a:stretch>
+            <a:fillRect/>
+          </a:stretch>
+        </p:blipFill>
+        <p:spPr>
+          <a:xfrm>
+            <a:off x="502920" y="3931920"/>
+            <a:ext cx="182880" cy="182880"/>
+          </a:xfrm>
+          <a:prstGeom prst="rect">
+            <a:avLst/>
+          </a:prstGeom>
+        </p:spPr>
+      </p:pic>
+      <p:sp>
+        <p:nvSpPr>
+          <p:cNvPr id="9" name="Text 4"/>
+          <p:cNvSpPr txBox="1"/>
+          <p:nvPr/>
+        </p:nvSpPr>
+        <p:spPr>
+          <a:xfrm>
+            <a:off x="731520" y="3904488"/>
+            <a:ext cx="2743200" cy="237744"/>
+          </a:xfrm>
+          <a:prstGeom prst="rect">
+            <a:avLst/>
+          </a:prstGeom>
+          <a:noFill/>
+          <a:ln/>
+        </p:spPr>
+        <p:txBody>
+          <a:bodyPr wrap="square" lIns="0" tIns="0" rIns="0" bIns="0" rtlCol="0" anchor="ctr"/>
+          <a:lstStyle/>
+          <a:p>
+            <a:pPr indent="0" marL="0">
+              <a:buNone/>
+            </a:pPr>
+            <a:r>
+              <a:rPr lang="en-US" sz="950" b="1" dirty="0">
+                <a:solidFill>
+                  <a:srgbClr val="0B7A6F"/>
+                </a:solidFill>
+                <a:latin typeface="SF Pro Text" pitchFamily="34" charset="0"/>
+                <a:ea typeface="SF Pro Text" pitchFamily="34" charset="-122"/>
+                <a:cs typeface="SF Pro Text" pitchFamily="34" charset="-120"/>
+              </a:rPr>
+              <a:t>Read bottom to top</a:t>
+            </a:r>
+            <a:endParaRPr lang="en-US" sz="950" dirty="0"/>
+          </a:p>
+        </p:txBody>
+      </p:sp>
+      <p:sp>
+        <p:nvSpPr>
+          <p:cNvPr id="10" name="Shape 5"/>
+          <p:cNvSpPr/>
+          <p:nvPr/>
+        </p:nvSpPr>
+        <p:spPr>
+          <a:xfrm>
+            <a:off x="5806440" y="1188720"/>
+            <a:ext cx="2926080" cy="457200"/>
+          </a:xfrm>
+          <a:prstGeom prst="roundRect">
+            <a:avLst>
+              <a:gd name="adj" fmla="val 20000"/>
+            </a:avLst>
+          </a:prstGeom>
+          <a:solidFill>
+            <a:srgbClr val="0B7A6F"/>
+          </a:solidFill>
+          <a:ln w="12700">
+            <a:solidFill>
+              <a:srgbClr val="0B7A6F"/>
+            </a:solidFill>
+            <a:prstDash val="solid"/>
+          </a:ln>
+        </p:spPr>
+      </p:sp>
+      <p:pic>
+        <p:nvPicPr>
+          <p:cNvPr id="11" name="Image 2" descr="preencoded.png">    </p:cNvPr>
+          <p:cNvPicPr>
+            <a:picLocks noChangeAspect="1"/>
+          </p:cNvPicPr>
+          <p:nvPr/>
+        </p:nvPicPr>
+        <p:blipFill>
+          <a:blip r:embed="rId3"/>
+          <a:stretch>
+            <a:fillRect/>
+          </a:stretch>
+        </p:blipFill>
+        <p:spPr>
+          <a:xfrm>
+            <a:off x="5989320" y="1307592"/>
+            <a:ext cx="219456" cy="219456"/>
+          </a:xfrm>
+          <a:prstGeom prst="rect">
+            <a:avLst/>
+          </a:prstGeom>
+        </p:spPr>
+      </p:pic>
+      <p:sp>
+        <p:nvSpPr>
+          <p:cNvPr id="12" name="Text 6"/>
+          <p:cNvSpPr txBox="1"/>
+          <p:nvPr/>
+        </p:nvSpPr>
+        <p:spPr>
+          <a:xfrm>
+            <a:off x="6309360" y="1188720"/>
+            <a:ext cx="2286000" cy="457200"/>
+          </a:xfrm>
+          <a:prstGeom prst="rect">
+            <a:avLst/>
+          </a:prstGeom>
+          <a:noFill/>
+          <a:ln/>
+        </p:spPr>
+        <p:txBody>
+          <a:bodyPr wrap="square" lIns="0" tIns="0" rIns="0" bIns="0" rtlCol="0" anchor="ctr"/>
+          <a:lstStyle/>
+          <a:p>
+            <a:pPr indent="0" marL="0">
+              <a:buNone/>
+            </a:pPr>
+            <a:r>
+              <a:rPr lang="en-US" sz="1300" b="1" dirty="0">
+                <a:solidFill>
+                  <a:srgbClr val="FFFFFF"/>
+                </a:solidFill>
+                <a:latin typeface="SF Pro Display" pitchFamily="34" charset="0"/>
+                <a:ea typeface="SF Pro Display" pitchFamily="34" charset="-122"/>
+                <a:cs typeface="SF Pro Display" pitchFamily="34" charset="-120"/>
+              </a:rPr>
+              <a:t>The Story</a:t>
+            </a:r>
+            <a:endParaRPr lang="en-US" sz="1300" dirty="0"/>
+          </a:p>
+        </p:txBody>
+      </p:sp>
+      <p:sp>
+        <p:nvSpPr>
+          <p:cNvPr id="13" name="Shape 7"/>
+          <p:cNvSpPr/>
+          <p:nvPr/>
+        </p:nvSpPr>
+        <p:spPr>
+          <a:xfrm>
+            <a:off x="5806440" y="1737360"/>
+            <a:ext cx="2926080" cy="2971800"/>
+          </a:xfrm>
+          <a:prstGeom prst="roundRect">
+            <a:avLst>
+              <a:gd name="adj" fmla="val 2500"/>
             </a:avLst>
           </a:prstGeom>
           <a:solidFill>
@@ -25425,14 +23213,14 @@
       </p:sp>
       <p:sp>
         <p:nvSpPr>
-          <p:cNvPr id="8" name="Text 4"/>
+          <p:cNvPr id="14" name="storyText"/>
           <p:cNvSpPr txBox="1"/>
           <p:nvPr/>
         </p:nvSpPr>
         <p:spPr>
           <a:xfrm>
-            <a:off x="640080" y="3703320"/>
-            <a:ext cx="7955280" cy="594360"/>
+            <a:off x="5943600" y="1847088"/>
+            <a:ext cx="2651760" cy="2788920"/>
           </a:xfrm>
           <a:prstGeom prst="rect">
             <a:avLst/>
@@ -25441,14 +23229,17 @@
           <a:ln/>
         </p:spPr>
         <p:txBody>
-          <a:bodyPr wrap="square" lIns="0" tIns="0" rIns="0" bIns="0" rtlCol="0" anchor="ctr"/>
+          <a:bodyPr wrap="square" lIns="0" tIns="0" rIns="0" bIns="0" rtlCol="0" anchor="t"/>
           <a:lstStyle/>
           <a:p>
             <a:pPr indent="0" marL="0">
+              <a:spcAft>
+                <a:spcPts val="500"/>
+              </a:spcAft>
               <a:buNone/>
             </a:pPr>
             <a:r>
-              <a:rPr lang="en-US" sz="1050" b="1" dirty="0">
+              <a:rPr lang="en-US" sz="900" b="1" dirty="0">
                 <a:solidFill>
                   <a:srgbClr val="0B7A6F"/>
                 </a:solidFill>
@@ -25456,13 +23247,16 @@
                 <a:ea typeface="SF Pro Text" pitchFamily="34" charset="-122"/>
                 <a:cs typeface="SF Pro Text" pitchFamily="34" charset="-120"/>
               </a:rPr>
-              <a:t>The story:  </a:t>
+              <a:t>Sept 7, 2026: </a:t>
             </a:r>
             <a:pPr indent="0" marL="0">
+              <a:spcAft>
+                <a:spcPts val="500"/>
+              </a:spcAft>
               <a:buNone/>
             </a:pPr>
             <a:r>
-              <a:rPr lang="en-US" sz="1050" dirty="0">
+              <a:rPr lang="en-US" sz="900" dirty="0">
                 <a:solidFill>
                   <a:srgbClr val="1D1D1F"/>
                 </a:solidFill>
@@ -25470,9 +23264,157 @@
                 <a:ea typeface="SF Pro Text" pitchFamily="34" charset="-122"/>
                 <a:cs typeface="SF Pro Text" pitchFamily="34" charset="-120"/>
               </a:rPr>
-              <a:t>booked for Sep 21, claimed Sep 14, rescheduled twice by the cleaner, then invoiced on Sep 24.</a:t>
-            </a:r>
-            <a:endParaRPr lang="en-US" sz="1050" dirty="0"/>
+              <a:t>the system booked a cleaning for C Anjuli Kintanar for Sept 21, 10 AM CT, through the recurring cleaning plan.</a:t>
+            </a:r>
+            <a:endParaRPr lang="en-US" sz="900" dirty="0"/>
+          </a:p>
+          <a:p>
+            <a:pPr indent="0" marL="0">
+              <a:spcAft>
+                <a:spcPts val="500"/>
+              </a:spcAft>
+              <a:buNone/>
+            </a:pPr>
+            <a:r>
+              <a:rPr lang="en-US" sz="900" b="1" dirty="0">
+                <a:solidFill>
+                  <a:srgbClr val="0B7A6F"/>
+                </a:solidFill>
+                <a:latin typeface="SF Pro Text" pitchFamily="34" charset="0"/>
+                <a:ea typeface="SF Pro Text" pitchFamily="34" charset="-122"/>
+                <a:cs typeface="SF Pro Text" pitchFamily="34" charset="-120"/>
+              </a:rPr>
+              <a:t>Sept 14: </a:t>
+            </a:r>
+            <a:pPr indent="0" marL="0">
+              <a:spcAft>
+                <a:spcPts val="500"/>
+              </a:spcAft>
+              <a:buNone/>
+            </a:pPr>
+            <a:r>
+              <a:rPr lang="en-US" sz="900" dirty="0">
+                <a:solidFill>
+                  <a:srgbClr val="1D1D1F"/>
+                </a:solidFill>
+                <a:latin typeface="SF Pro Text" pitchFamily="34" charset="0"/>
+                <a:ea typeface="SF Pro Text" pitchFamily="34" charset="-122"/>
+                <a:cs typeface="SF Pro Text" pitchFamily="34" charset="-120"/>
+              </a:rPr>
+              <a:t>CP Truffle Wuffle claimed the job as scheduled.</a:t>
+            </a:r>
+            <a:endParaRPr lang="en-US" sz="900" dirty="0"/>
+          </a:p>
+          <a:p>
+            <a:pPr indent="0" marL="0">
+              <a:spcAft>
+                <a:spcPts val="500"/>
+              </a:spcAft>
+              <a:buNone/>
+            </a:pPr>
+            <a:r>
+              <a:rPr lang="en-US" sz="900" b="1" dirty="0">
+                <a:solidFill>
+                  <a:srgbClr val="0B7A6F"/>
+                </a:solidFill>
+                <a:latin typeface="SF Pro Text" pitchFamily="34" charset="0"/>
+                <a:ea typeface="SF Pro Text" pitchFamily="34" charset="-122"/>
+                <a:cs typeface="SF Pro Text" pitchFamily="34" charset="-120"/>
+              </a:rPr>
+              <a:t>Sept 21, 9:19 AM CT: </a:t>
+            </a:r>
+            <a:pPr indent="0" marL="0">
+              <a:spcAft>
+                <a:spcPts val="500"/>
+              </a:spcAft>
+              <a:buNone/>
+            </a:pPr>
+            <a:r>
+              <a:rPr lang="en-US" sz="900" dirty="0">
+                <a:solidFill>
+                  <a:srgbClr val="1D1D1F"/>
+                </a:solidFill>
+                <a:latin typeface="SF Pro Text" pitchFamily="34" charset="0"/>
+                <a:ea typeface="SF Pro Text" pitchFamily="34" charset="-122"/>
+                <a:cs typeface="SF Pro Text" pitchFamily="34" charset="-120"/>
+              </a:rPr>
+              <a:t>CP Truffle Wuffle rescheduled from Sept 21, 10 AM CT to Sept 22, 11 AM.</a:t>
+            </a:r>
+            <a:endParaRPr lang="en-US" sz="900" dirty="0"/>
+          </a:p>
+          <a:p>
+            <a:pPr indent="0" marL="0">
+              <a:spcAft>
+                <a:spcPts val="500"/>
+              </a:spcAft>
+              <a:buNone/>
+            </a:pPr>
+            <a:r>
+              <a:rPr lang="en-US" sz="900" b="1" dirty="0">
+                <a:solidFill>
+                  <a:srgbClr val="0B7A6F"/>
+                </a:solidFill>
+                <a:latin typeface="SF Pro Text" pitchFamily="34" charset="0"/>
+                <a:ea typeface="SF Pro Text" pitchFamily="34" charset="-122"/>
+                <a:cs typeface="SF Pro Text" pitchFamily="34" charset="-120"/>
+              </a:rPr>
+              <a:t>Sept 21, 9:50 AM CT: </a:t>
+            </a:r>
+            <a:pPr indent="0" marL="0">
+              <a:spcAft>
+                <a:spcPts val="500"/>
+              </a:spcAft>
+              <a:buNone/>
+            </a:pPr>
+            <a:r>
+              <a:rPr lang="en-US" sz="900" dirty="0">
+                <a:solidFill>
+                  <a:srgbClr val="1D1D1F"/>
+                </a:solidFill>
+                <a:latin typeface="SF Pro Text" pitchFamily="34" charset="0"/>
+                <a:ea typeface="SF Pro Text" pitchFamily="34" charset="-122"/>
+                <a:cs typeface="SF Pro Text" pitchFamily="34" charset="-120"/>
+              </a:rPr>
+              <a:t>CP Truffle Wuffle rescheduled again, from Sept 22, 11 AM to Sept 24, 12:30 PM CT.</a:t>
+            </a:r>
+            <a:endParaRPr lang="en-US" sz="900" dirty="0"/>
+          </a:p>
+          <a:p>
+            <a:pPr indent="0" marL="0">
+              <a:spcAft>
+                <a:spcPts val="500"/>
+              </a:spcAft>
+              <a:buNone/>
+            </a:pPr>
+            <a:r>
+              <a:rPr lang="en-US" sz="900" b="1" dirty="0">
+                <a:solidFill>
+                  <a:srgbClr val="0B7A6F"/>
+                </a:solidFill>
+                <a:latin typeface="SF Pro Text" pitchFamily="34" charset="0"/>
+                <a:ea typeface="SF Pro Text" pitchFamily="34" charset="-122"/>
+                <a:cs typeface="SF Pro Text" pitchFamily="34" charset="-120"/>
+              </a:rPr>
+              <a:t>Sept 24, 4:09 PM CT: </a:t>
+            </a:r>
+            <a:pPr indent="0" marL="0">
+              <a:spcAft>
+                <a:spcPts val="500"/>
+              </a:spcAft>
+              <a:buNone/>
+            </a:pPr>
+            <a:r>
+              <a:rPr lang="en-US" sz="900" dirty="0">
+                <a:solidFill>
+                  <a:srgbClr val="1D1D1F"/>
+                </a:solidFill>
+                <a:latin typeface="SF Pro Text" pitchFamily="34" charset="0"/>
+                <a:ea typeface="SF Pro Text" pitchFamily="34" charset="-122"/>
+                <a:cs typeface="SF Pro Text" pitchFamily="34" charset="-120"/>
+              </a:rPr>
+              <a:t>CP Truffle Wuffle invoiced the appointment and the system logged it in snapshot.</a:t>
+            </a:r>
+            <a:endParaRPr lang="en-US" sz="900" dirty="0"/>
           </a:p>
         </p:txBody>
       </p:sp>
@@ -25529,6 +23471,344 @@
   <p:clrMapOvr>
     <a:masterClrMapping/>
   </p:clrMapOvr>
+  <p:timing>
+    <p:tnLst>
+      <p:par>
+        <p:cTn id="1" dur="indefinite" restart="never" nodeType="tmRoot">
+          <p:childTnLst>
+            <p:seq concurrent="1" nextAc="seek">
+              <p:cTn id="2" dur="indefinite" nodeType="mainSeq">
+                <p:childTnLst>
+                  <p:par>
+                    <p:cTn id="3" fill="hold">
+                      <p:stCondLst>
+                        <p:cond delay="indefinite"/>
+                      </p:stCondLst>
+                      <p:childTnLst>
+                        <p:par>
+                          <p:cTn id="4" fill="hold">
+                            <p:stCondLst>
+                              <p:cond delay="0"/>
+                            </p:stCondLst>
+                            <p:childTnLst>
+                              <p:par>
+                                <p:cTn id="5" presetID="10" presetClass="entr" presetSubtype="0" fill="hold" grpId="0" nodeType="clickEffect">
+                                  <p:stCondLst>
+                                    <p:cond delay="0"/>
+                                  </p:stCondLst>
+                                  <p:childTnLst>
+                                    <p:set>
+                                      <p:cBhvr>
+                                        <p:cTn id="6" dur="1" fill="hold">
+                                          <p:stCondLst>
+                                            <p:cond delay="0"/>
+                                          </p:stCondLst>
+                                        </p:cTn>
+                                        <p:tgtEl>
+                                          <p:spTgt spid="14">
+                                            <p:txEl>
+                                              <p:pRg st="0" end="0"/>
+                                            </p:txEl>
+                                          </p:spTgt>
+                                        </p:tgtEl>
+                                        <p:attrNameLst>
+                                          <p:attrName>style.visibility</p:attrName>
+                                        </p:attrNameLst>
+                                      </p:cBhvr>
+                                      <p:to>
+                                        <p:strVal val="visible"/>
+                                      </p:to>
+                                    </p:set>
+                                    <p:animEffect transition="in" filter="fade">
+                                      <p:cBhvr>
+                                        <p:cTn id="7" dur="600"/>
+                                        <p:tgtEl>
+                                          <p:spTgt spid="14">
+                                            <p:txEl>
+                                              <p:pRg st="0" end="0"/>
+                                            </p:txEl>
+                                          </p:spTgt>
+                                        </p:tgtEl>
+                                      </p:cBhvr>
+                                    </p:animEffect>
+                                  </p:childTnLst>
+                                </p:cTn>
+                              </p:par>
+                            </p:childTnLst>
+                          </p:cTn>
+                        </p:par>
+                      </p:childTnLst>
+                    </p:cTn>
+                  </p:par>
+                  <p:par>
+                    <p:cTn id="8" fill="hold">
+                      <p:stCondLst>
+                        <p:cond delay="indefinite"/>
+                      </p:stCondLst>
+                      <p:childTnLst>
+                        <p:par>
+                          <p:cTn id="9" fill="hold">
+                            <p:stCondLst>
+                              <p:cond delay="0"/>
+                            </p:stCondLst>
+                            <p:childTnLst>
+                              <p:par>
+                                <p:cTn id="10" presetID="10" presetClass="entr" presetSubtype="0" fill="hold" grpId="0" nodeType="clickEffect">
+                                  <p:stCondLst>
+                                    <p:cond delay="0"/>
+                                  </p:stCondLst>
+                                  <p:childTnLst>
+                                    <p:set>
+                                      <p:cBhvr>
+                                        <p:cTn id="11" dur="1" fill="hold">
+                                          <p:stCondLst>
+                                            <p:cond delay="0"/>
+                                          </p:stCondLst>
+                                        </p:cTn>
+                                        <p:tgtEl>
+                                          <p:spTgt spid="14">
+                                            <p:txEl>
+                                              <p:pRg st="1" end="1"/>
+                                            </p:txEl>
+                                          </p:spTgt>
+                                        </p:tgtEl>
+                                        <p:attrNameLst>
+                                          <p:attrName>style.visibility</p:attrName>
+                                        </p:attrNameLst>
+                                      </p:cBhvr>
+                                      <p:to>
+                                        <p:strVal val="visible"/>
+                                      </p:to>
+                                    </p:set>
+                                    <p:animEffect transition="in" filter="fade">
+                                      <p:cBhvr>
+                                        <p:cTn id="12" dur="600"/>
+                                        <p:tgtEl>
+                                          <p:spTgt spid="14">
+                                            <p:txEl>
+                                              <p:pRg st="1" end="1"/>
+                                            </p:txEl>
+                                          </p:spTgt>
+                                        </p:tgtEl>
+                                      </p:cBhvr>
+                                    </p:animEffect>
+                                  </p:childTnLst>
+                                </p:cTn>
+                              </p:par>
+                            </p:childTnLst>
+                          </p:cTn>
+                        </p:par>
+                      </p:childTnLst>
+                    </p:cTn>
+                  </p:par>
+                  <p:par>
+                    <p:cTn id="13" fill="hold">
+                      <p:stCondLst>
+                        <p:cond delay="indefinite"/>
+                      </p:stCondLst>
+                      <p:childTnLst>
+                        <p:par>
+                          <p:cTn id="14" fill="hold">
+                            <p:stCondLst>
+                              <p:cond delay="0"/>
+                            </p:stCondLst>
+                            <p:childTnLst>
+                              <p:par>
+                                <p:cTn id="15" presetID="10" presetClass="entr" presetSubtype="0" fill="hold" grpId="0" nodeType="clickEffect">
+                                  <p:stCondLst>
+                                    <p:cond delay="0"/>
+                                  </p:stCondLst>
+                                  <p:childTnLst>
+                                    <p:set>
+                                      <p:cBhvr>
+                                        <p:cTn id="16" dur="1" fill="hold">
+                                          <p:stCondLst>
+                                            <p:cond delay="0"/>
+                                          </p:stCondLst>
+                                        </p:cTn>
+                                        <p:tgtEl>
+                                          <p:spTgt spid="14">
+                                            <p:txEl>
+                                              <p:pRg st="2" end="2"/>
+                                            </p:txEl>
+                                          </p:spTgt>
+                                        </p:tgtEl>
+                                        <p:attrNameLst>
+                                          <p:attrName>style.visibility</p:attrName>
+                                        </p:attrNameLst>
+                                      </p:cBhvr>
+                                      <p:to>
+                                        <p:strVal val="visible"/>
+                                      </p:to>
+                                    </p:set>
+                                    <p:animEffect transition="in" filter="fade">
+                                      <p:cBhvr>
+                                        <p:cTn id="17" dur="600"/>
+                                        <p:tgtEl>
+                                          <p:spTgt spid="14">
+                                            <p:txEl>
+                                              <p:pRg st="2" end="2"/>
+                                            </p:txEl>
+                                          </p:spTgt>
+                                        </p:tgtEl>
+                                      </p:cBhvr>
+                                    </p:animEffect>
+                                  </p:childTnLst>
+                                </p:cTn>
+                              </p:par>
+                            </p:childTnLst>
+                          </p:cTn>
+                        </p:par>
+                      </p:childTnLst>
+                    </p:cTn>
+                  </p:par>
+                  <p:par>
+                    <p:cTn id="18" fill="hold">
+                      <p:stCondLst>
+                        <p:cond delay="indefinite"/>
+                      </p:stCondLst>
+                      <p:childTnLst>
+                        <p:par>
+                          <p:cTn id="19" fill="hold">
+                            <p:stCondLst>
+                              <p:cond delay="0"/>
+                            </p:stCondLst>
+                            <p:childTnLst>
+                              <p:par>
+                                <p:cTn id="20" presetID="10" presetClass="entr" presetSubtype="0" fill="hold" grpId="0" nodeType="clickEffect">
+                                  <p:stCondLst>
+                                    <p:cond delay="0"/>
+                                  </p:stCondLst>
+                                  <p:childTnLst>
+                                    <p:set>
+                                      <p:cBhvr>
+                                        <p:cTn id="21" dur="1" fill="hold">
+                                          <p:stCondLst>
+                                            <p:cond delay="0"/>
+                                          </p:stCondLst>
+                                        </p:cTn>
+                                        <p:tgtEl>
+                                          <p:spTgt spid="14">
+                                            <p:txEl>
+                                              <p:pRg st="3" end="3"/>
+                                            </p:txEl>
+                                          </p:spTgt>
+                                        </p:tgtEl>
+                                        <p:attrNameLst>
+                                          <p:attrName>style.visibility</p:attrName>
+                                        </p:attrNameLst>
+                                      </p:cBhvr>
+                                      <p:to>
+                                        <p:strVal val="visible"/>
+                                      </p:to>
+                                    </p:set>
+                                    <p:animEffect transition="in" filter="fade">
+                                      <p:cBhvr>
+                                        <p:cTn id="22" dur="600"/>
+                                        <p:tgtEl>
+                                          <p:spTgt spid="14">
+                                            <p:txEl>
+                                              <p:pRg st="3" end="3"/>
+                                            </p:txEl>
+                                          </p:spTgt>
+                                        </p:tgtEl>
+                                      </p:cBhvr>
+                                    </p:animEffect>
+                                  </p:childTnLst>
+                                </p:cTn>
+                              </p:par>
+                            </p:childTnLst>
+                          </p:cTn>
+                        </p:par>
+                      </p:childTnLst>
+                    </p:cTn>
+                  </p:par>
+                  <p:par>
+                    <p:cTn id="23" fill="hold">
+                      <p:stCondLst>
+                        <p:cond delay="indefinite"/>
+                      </p:stCondLst>
+                      <p:childTnLst>
+                        <p:par>
+                          <p:cTn id="24" fill="hold">
+                            <p:stCondLst>
+                              <p:cond delay="0"/>
+                            </p:stCondLst>
+                            <p:childTnLst>
+                              <p:par>
+                                <p:cTn id="25" presetID="10" presetClass="entr" presetSubtype="0" fill="hold" grpId="0" nodeType="clickEffect">
+                                  <p:stCondLst>
+                                    <p:cond delay="0"/>
+                                  </p:stCondLst>
+                                  <p:childTnLst>
+                                    <p:set>
+                                      <p:cBhvr>
+                                        <p:cTn id="26" dur="1" fill="hold">
+                                          <p:stCondLst>
+                                            <p:cond delay="0"/>
+                                          </p:stCondLst>
+                                        </p:cTn>
+                                        <p:tgtEl>
+                                          <p:spTgt spid="14">
+                                            <p:txEl>
+                                              <p:pRg st="4" end="4"/>
+                                            </p:txEl>
+                                          </p:spTgt>
+                                        </p:tgtEl>
+                                        <p:attrNameLst>
+                                          <p:attrName>style.visibility</p:attrName>
+                                        </p:attrNameLst>
+                                      </p:cBhvr>
+                                      <p:to>
+                                        <p:strVal val="visible"/>
+                                      </p:to>
+                                    </p:set>
+                                    <p:animEffect transition="in" filter="fade">
+                                      <p:cBhvr>
+                                        <p:cTn id="27" dur="600"/>
+                                        <p:tgtEl>
+                                          <p:spTgt spid="14">
+                                            <p:txEl>
+                                              <p:pRg st="4" end="4"/>
+                                            </p:txEl>
+                                          </p:spTgt>
+                                        </p:tgtEl>
+                                      </p:cBhvr>
+                                    </p:animEffect>
+                                  </p:childTnLst>
+                                </p:cTn>
+                              </p:par>
+                            </p:childTnLst>
+                          </p:cTn>
+                        </p:par>
+                      </p:childTnLst>
+                    </p:cTn>
+                  </p:par>
+                </p:childTnLst>
+              </p:cTn>
+              <p:prevCondLst>
+                <p:cond evt="onPrev" delay="0">
+                  <p:tgtEl>
+                    <p:sldTgt/>
+                  </p:tgtEl>
+                </p:cond>
+              </p:prevCondLst>
+              <p:nextCondLst>
+                <p:cond evt="onNext" delay="0">
+                  <p:tgtEl>
+                    <p:sldTgt/>
+                  </p:tgtEl>
+                </p:cond>
+              </p:nextCondLst>
+            </p:seq>
+          </p:childTnLst>
+        </p:cTn>
+      </p:par>
+    </p:tnLst>
+    <p:bldLst>
+      <p:bldP spid="14" grpId="0" build="p"/>
+    </p:bldLst>
+  </p:timing>
 </p:sld>
 </file>
 

--- a/platform-mechanics/platform-operating-mechanics.pptx
+++ b/platform-mechanics/platform-operating-mechanics.pptx
@@ -33,9 +33,10 @@
     <p:sldId id="281" r:id="rId27"/>
     <p:sldId id="282" r:id="rId28"/>
     <p:sldId id="283" r:id="rId29"/>
+    <p:sldId id="284" r:id="rId30"/>
   </p:sldIdLst>
   <p:notesMasterIdLst>
-    <p:notesMasterId r:id="rId30"/>
+    <p:notesMasterId r:id="rId31"/>
   </p:notesMasterIdLst>
   <p:sldSz cx="9144000" cy="5143500"/>
   <p:notesSz cx="5143500" cy="9144000"/>
@@ -1849,7 +1850,7 @@
           <a:p>
             <a:r>
               <a:rPr lang="en-US" dirty="0"/>
-              <a:t>CA/CAWA: CP's hourly rate x duration + tips + surge bonus, for first-time and repeat clients. General: first-time client (CP's hourly rate - $5.00 match fee) x duration + tips + surge bonus; repeat client CP's hourly rate x duration + tips + surge bonus. Key point: Homeaglow pays the CP directly via direct deposit regardless of whether the customer's own charge succeeds; a failed card, voucher or credits never affects CP pay. Tips: 100% go to the CP. Surge bonus: an extra $1-$50 Homeaglow may pay on certain jobs upon invoicing, positioned to CPs as "Homeaglow is especially busy."</a:t>
+              <a:t>TRAINER: give trainees time to calculate, then click Show Answers (or press the right arrow). Each click reveals one cohort. Working: billable hours = 4 - 1.5 voucher = 2.5. FC: $25 x 2.5 = $62.50; + 15% processing = $71.88; + 8% tax = $77.63; - $12 credits = $65.63. Non-FC: ($25 + $15) x 2.5 = $100.00; + 5% = $105.00; + 8% = $113.40; - $12 = $101.40. Deactivated (cancelled) FC: ($25 + $30) x 2.5 = $137.50; + 5% = $144.38; + 8% = $155.93; - $12 = $143.93.</a:t>
             </a:r>
             <a:endParaRPr lang="en-US" dirty="0"/>
           </a:p>
@@ -1937,7 +1938,7 @@
           <a:p>
             <a:r>
               <a:rPr lang="en-US" dirty="0"/>
-              <a:t>FC, General, first C/CP pairing: customer pays the CP's rate; the platform fee line is the $5/hr marketing fee deducted from the cleaner's pay, not an extra cost to the customer. FC, General, repeat pairing: nothing. FC, CA/CAWA, CP sets different first and repeat rates: customer pays the higher of the two whichever pairing it is; the line is the difference; the CP is paid their applicable rate and the difference goes to Homeaglow. FC, CA/CAWA, one rate: nothing. Non-FC or deactivated FC: customer pays the max CP rate, not the CP's actual rate; the line is the cohort platform fee ($15/hr non-FC, $30/hr deactivated FC) plus the gap between max rate and the CP's actual rate. Why the models differ: no marketing fee in CA/CAWA (state regulation); in exchange CPs may set separate first-pairing and repeat rates and we charge the higher.</a:t>
+              <a:t>CA/CAWA: CP's hourly rate x duration + tips + surge bonus, for first-time and repeat clients. General: first-time client (CP's hourly rate - $5.00 match fee) x duration + tips + surge bonus; repeat client CP's hourly rate x duration + tips + surge bonus. Key point: Homeaglow pays the CP directly via direct deposit regardless of whether the customer's own charge succeeds; a failed card, voucher or credits never affects CP pay. Tips: 100% go to the CP. Surge bonus: an extra $1-$50 Homeaglow may pay on certain jobs upon invoicing, positioned to CPs as "Homeaglow is especially busy."</a:t>
             </a:r>
             <a:endParaRPr lang="en-US" dirty="0"/>
           </a:p>
@@ -2025,7 +2026,7 @@
           <a:p>
             <a:r>
               <a:rPr lang="en-US" dirty="0"/>
-              <a:t>Deactivated-FC customer, max rate $25, claiming CP's rate $15, platform fee shows $40/hr. That is the $30/hr deactivated-FC platform fee plus the $10/hr gap. The charge is correct: do not reprice it and do not refund the difference. Max rate behaves differently by membership: FC customers have a max rate too, but are charged the CP's actual rate; non-FC and deactivated-FC customers are charged the max rate while the CP is paid their own rate.</a:t>
+              <a:t>FC, General, first C/CP pairing: customer pays the CP's rate; the platform fee line is the $5/hr marketing fee deducted from the cleaner's pay, not an extra cost to the customer. FC, General, repeat pairing: nothing. FC, CA/CAWA, CP sets different first and repeat rates: customer pays the higher of the two whichever pairing it is; the line is the difference; the CP is paid their applicable rate and the difference goes to Homeaglow. FC, CA/CAWA, one rate: nothing. Non-FC or deactivated FC: customer pays the max CP rate, not the CP's actual rate; the line is the cohort platform fee ($15/hr non-FC, $30/hr deactivated FC) plus the gap between max rate and the CP's actual rate. Why the models differ: no marketing fee in CA/CAWA (state regulation); in exchange CPs may set separate first-pairing and repeat rates and we charge the higher.</a:t>
             </a:r>
             <a:endParaRPr lang="en-US" dirty="0"/>
           </a:p>
@@ -2113,7 +2114,7 @@
           <a:p>
             <a:r>
               <a:rPr lang="en-US" dirty="0"/>
-              <a:t>For non-FC customers, pricing follows the highest hourly rate among all the CPs they requested, not whichever CP claims. Example: the customer requests Mona ($25/hr), Cassandra ($30/hr) and Yolanda ($23/hr); the max requested rate is $30/hr. If a requested CP claims (say Mona), the customer is charged Mona's actual rate ($25/hr). If a non-requested CP claims (say Jeff at $18/hr), the customer is still charged $30/hr; Jeff is paid $18/hr and the difference goes to Homeaglow. Why: requesting Cassandra signals willingness to pay her rate, so it becomes their ceiling.</a:t>
+              <a:t>Deactivated-FC customer, max rate $25, claiming CP's rate $15, platform fee shows $40/hr. That is the $30/hr deactivated-FC platform fee plus the $10/hr gap. The charge is correct: do not reprice it and do not refund the difference. Max rate behaves differently by membership: FC customers have a max rate too, but are charged the CP's actual rate; non-FC and deactivated-FC customers are charged the max rate while the CP is paid their own rate.</a:t>
             </a:r>
             <a:endParaRPr lang="en-US" dirty="0"/>
           </a:p>
@@ -2201,7 +2202,7 @@
           <a:p>
             <a:r>
               <a:rPr lang="en-US" dirty="0"/>
-              <a:t>Before explaining or refunding any platform-fee line, establish the operating model, the membership status, and whether it is that CP's first job with this customer. Those three answers decide which row of the platform fee table you are in.</a:t>
+              <a:t>For non-FC customers, pricing follows the highest hourly rate among all the CPs they requested, not whichever CP claims. Example: the customer requests Mona ($25/hr), Cassandra ($30/hr) and Yolanda ($23/hr); the max requested rate is $30/hr. If a requested CP claims (say Mona), the customer is charged Mona's actual rate ($25/hr). If a non-requested CP claims (say Jeff at $18/hr), the customer is still charged $30/hr; Jeff is paid $18/hr and the difference goes to Homeaglow. Why: requesting Cassandra signals willingness to pay her rate, so it becomes their ceiling.</a:t>
             </a:r>
             <a:endParaRPr lang="en-US" dirty="0"/>
           </a:p>
@@ -2289,7 +2290,7 @@
           <a:p>
             <a:r>
               <a:rPr lang="en-US" dirty="0"/>
-              <a:t>Open the floor for questions.</a:t>
+              <a:t>Before explaining or refunding any platform-fee line, establish the operating model, the membership status, and whether it is that CP's first job with this customer. Those three answers decide which row of the platform fee table you are in.</a:t>
             </a:r>
             <a:endParaRPr lang="en-US" dirty="0"/>
           </a:p>
@@ -2313,6 +2314,94 @@
             <a:fld id="{F7021451-1387-4CA6-816F-3879F97B5CBC}" type="slidenum">
               <a:rPr lang="en-US"/>
               <a:t>28</a:t>
+            </a:fld>
+            <a:endParaRPr lang="en-US"/>
+          </a:p>
+        </p:txBody>
+      </p:sp>
+    </p:spTree>
+    <p:extLst>
+      <p:ext uri="{BB962C8B-B14F-4D97-AF65-F5344CB8AC3E}">
+        <p14:creationId xmlns:p14="http://schemas.microsoft.com/office/powerpoint/2010/main" val="1024086991"/>
+      </p:ext>
+    </p:extLst>
+  </p:cSld>
+  <p:clrMapOvr>
+    <a:masterClrMapping/>
+  </p:clrMapOvr>
+</p:notes>
+</file>
+
+<file path=ppt/notesSlides/notesSlide29.xml><?xml version="1.0" encoding="utf-8"?>
+<p:notes xmlns:a="http://schemas.openxmlformats.org/drawingml/2006/main" xmlns:r="http://schemas.openxmlformats.org/officeDocument/2006/relationships" xmlns:p="http://schemas.openxmlformats.org/presentationml/2006/main">
+  <p:cSld>
+    <p:spTree>
+      <p:nvGrpSpPr>
+        <p:cNvPr id="1" name=""/>
+        <p:cNvGrpSpPr/>
+        <p:nvPr/>
+      </p:nvGrpSpPr>
+      <p:grpSpPr>
+        <a:xfrm>
+          <a:off x="0" y="0"/>
+          <a:ext cx="0" cy="0"/>
+          <a:chOff x="0" y="0"/>
+          <a:chExt cx="0" cy="0"/>
+        </a:xfrm>
+      </p:grpSpPr>
+      <p:sp>
+        <p:nvSpPr>
+          <p:cNvPr id="2" name="Slide Image Placeholder 1"/>
+          <p:cNvSpPr>
+            <a:spLocks noGrp="1" noRot="1" noChangeAspect="1"/>
+          </p:cNvSpPr>
+          <p:nvPr>
+            <p:ph type="sldImg"/>
+          </p:nvPr>
+        </p:nvSpPr>
+        <p:spPr/>
+      </p:sp>
+      <p:sp>
+        <p:nvSpPr>
+          <p:cNvPr id="3" name="Notes Placeholder 2"/>
+          <p:cNvSpPr>
+            <a:spLocks noGrp="1"/>
+          </p:cNvSpPr>
+          <p:nvPr>
+            <p:ph type="body" idx="1"/>
+          </p:nvPr>
+        </p:nvSpPr>
+        <p:spPr/>
+        <p:txBody>
+          <a:bodyPr/>
+          <a:lstStyle/>
+          <a:p>
+            <a:r>
+              <a:rPr lang="en-US" dirty="0"/>
+              <a:t>Open the floor for questions.</a:t>
+            </a:r>
+            <a:endParaRPr lang="en-US" dirty="0"/>
+          </a:p>
+        </p:txBody>
+      </p:sp>
+      <p:sp>
+        <p:nvSpPr>
+          <p:cNvPr id="4" name="Slide Number Placeholder 3"/>
+          <p:cNvSpPr>
+            <a:spLocks noGrp="1"/>
+          </p:cNvSpPr>
+          <p:nvPr>
+            <p:ph type="sldNum" sz="quarter" idx="10"/>
+          </p:nvPr>
+        </p:nvSpPr>
+        <p:spPr/>
+        <p:txBody>
+          <a:bodyPr/>
+          <a:lstStyle/>
+          <a:p>
+            <a:fld id="{F7021451-1387-4CA6-816F-3879F97B5CBC}" type="slidenum">
+              <a:rPr lang="en-US"/>
+              <a:t>29</a:t>
             </a:fld>
             <a:endParaRPr lang="en-US"/>
           </a:p>
@@ -14027,6 +14116,1344 @@
                 <a:ea typeface="SF Pro Display" pitchFamily="34" charset="-122"/>
                 <a:cs typeface="SF Pro Display" pitchFamily="34" charset="-120"/>
               </a:rPr>
+              <a:t>Let's practice!</a:t>
+            </a:r>
+            <a:endParaRPr lang="en-US" sz="2400" dirty="0"/>
+          </a:p>
+        </p:txBody>
+      </p:sp>
+      <p:sp>
+        <p:nvSpPr>
+          <p:cNvPr id="4" name="Text 2"/>
+          <p:cNvSpPr txBox="1"/>
+          <p:nvPr/>
+        </p:nvSpPr>
+        <p:spPr>
+          <a:xfrm>
+            <a:off x="438912" y="960120"/>
+            <a:ext cx="8229600" cy="274320"/>
+          </a:xfrm>
+          <a:prstGeom prst="rect">
+            <a:avLst/>
+          </a:prstGeom>
+          <a:noFill/>
+          <a:ln/>
+        </p:spPr>
+        <p:txBody>
+          <a:bodyPr wrap="square" lIns="0" tIns="0" rIns="0" bIns="0" rtlCol="0" anchor="t"/>
+          <a:lstStyle/>
+          <a:p>
+            <a:pPr indent="0" marL="0">
+              <a:buNone/>
+            </a:pPr>
+            <a:r>
+              <a:rPr lang="en-US" sz="1200" dirty="0">
+                <a:solidFill>
+                  <a:srgbClr val="6E6E73"/>
+                </a:solidFill>
+                <a:latin typeface="SF Pro Text" pitchFamily="34" charset="0"/>
+                <a:ea typeface="SF Pro Text" pitchFamily="34" charset="-122"/>
+                <a:cs typeface="SF Pro Text" pitchFamily="34" charset="-120"/>
+              </a:rPr>
+              <a:t>Calculate the job cost for all 3 customer pricing cohorts using the details below.</a:t>
+            </a:r>
+            <a:endParaRPr lang="en-US" sz="1200" dirty="0"/>
+          </a:p>
+        </p:txBody>
+      </p:sp>
+      <p:sp>
+        <p:nvSpPr>
+          <p:cNvPr id="6" name="Shape 3"/>
+          <p:cNvSpPr/>
+          <p:nvPr/>
+        </p:nvSpPr>
+        <p:spPr>
+          <a:xfrm>
+            <a:off x="411480" y="1280160"/>
+            <a:ext cx="3017520" cy="3383280"/>
+          </a:xfrm>
+          <a:prstGeom prst="roundRect">
+            <a:avLst>
+              <a:gd name="adj" fmla="val 2424"/>
+            </a:avLst>
+          </a:prstGeom>
+          <a:solidFill>
+            <a:srgbClr val="FFFFFF"/>
+          </a:solidFill>
+          <a:ln w="9525">
+            <a:solidFill>
+              <a:srgbClr val="DCE1E7"/>
+            </a:solidFill>
+            <a:prstDash val="solid"/>
+          </a:ln>
+        </p:spPr>
+      </p:sp>
+      <p:sp>
+        <p:nvSpPr>
+          <p:cNvPr id="7" name="Shape 4"/>
+          <p:cNvSpPr/>
+          <p:nvPr/>
+        </p:nvSpPr>
+        <p:spPr>
+          <a:xfrm>
+            <a:off x="594360" y="1444752"/>
+            <a:ext cx="384048" cy="384048"/>
+          </a:xfrm>
+          <a:prstGeom prst="ellipse">
+            <a:avLst/>
+          </a:prstGeom>
+          <a:solidFill>
+            <a:srgbClr val="E3F4F1"/>
+          </a:solidFill>
+          <a:ln w="12700">
+            <a:solidFill>
+              <a:srgbClr val="E3F4F1"/>
+            </a:solidFill>
+            <a:prstDash val="solid"/>
+          </a:ln>
+        </p:spPr>
+      </p:sp>
+      <p:pic>
+        <p:nvPicPr>
+          <p:cNvPr id="8" name="Image 0" descr="preencoded.png">    </p:cNvPr>
+          <p:cNvPicPr>
+            <a:picLocks noChangeAspect="1"/>
+          </p:cNvPicPr>
+          <p:nvPr/>
+        </p:nvPicPr>
+        <p:blipFill>
+          <a:blip r:embed="rId1"/>
+          <a:stretch>
+            <a:fillRect/>
+          </a:stretch>
+        </p:blipFill>
+        <p:spPr>
+          <a:xfrm>
+            <a:off x="686532" y="1536924"/>
+            <a:ext cx="199705" cy="199705"/>
+          </a:xfrm>
+          <a:prstGeom prst="rect">
+            <a:avLst/>
+          </a:prstGeom>
+        </p:spPr>
+      </p:pic>
+      <p:sp>
+        <p:nvSpPr>
+          <p:cNvPr id="9" name="Text 5"/>
+          <p:cNvSpPr txBox="1"/>
+          <p:nvPr/>
+        </p:nvSpPr>
+        <p:spPr>
+          <a:xfrm>
+            <a:off x="1097280" y="1444752"/>
+            <a:ext cx="2194560" cy="384048"/>
+          </a:xfrm>
+          <a:prstGeom prst="rect">
+            <a:avLst/>
+          </a:prstGeom>
+          <a:noFill/>
+          <a:ln/>
+        </p:spPr>
+        <p:txBody>
+          <a:bodyPr wrap="square" lIns="0" tIns="0" rIns="0" bIns="0" rtlCol="0" anchor="ctr"/>
+          <a:lstStyle/>
+          <a:p>
+            <a:pPr indent="0" marL="0">
+              <a:buNone/>
+            </a:pPr>
+            <a:r>
+              <a:rPr lang="en-US" sz="1400" b="1" dirty="0">
+                <a:solidFill>
+                  <a:srgbClr val="1D1D1F"/>
+                </a:solidFill>
+                <a:latin typeface="SF Pro Display" pitchFamily="34" charset="0"/>
+                <a:ea typeface="SF Pro Display" pitchFamily="34" charset="-122"/>
+                <a:cs typeface="SF Pro Display" pitchFamily="34" charset="-120"/>
+              </a:rPr>
+              <a:t>Scenario</a:t>
+            </a:r>
+            <a:endParaRPr lang="en-US" sz="1400" dirty="0"/>
+          </a:p>
+        </p:txBody>
+      </p:sp>
+      <p:sp>
+        <p:nvSpPr>
+          <p:cNvPr id="10" name="Shape 6"/>
+          <p:cNvSpPr/>
+          <p:nvPr/>
+        </p:nvSpPr>
+        <p:spPr>
+          <a:xfrm>
+            <a:off x="594360" y="2011680"/>
+            <a:ext cx="2651760" cy="384048"/>
+          </a:xfrm>
+          <a:prstGeom prst="roundRect">
+            <a:avLst>
+              <a:gd name="adj" fmla="val 19048"/>
+            </a:avLst>
+          </a:prstGeom>
+          <a:solidFill>
+            <a:srgbClr val="F6F7F9"/>
+          </a:solidFill>
+          <a:ln w="9525">
+            <a:solidFill>
+              <a:srgbClr val="DCE1E7"/>
+            </a:solidFill>
+            <a:prstDash val="solid"/>
+          </a:ln>
+        </p:spPr>
+      </p:sp>
+      <p:sp>
+        <p:nvSpPr>
+          <p:cNvPr id="11" name="Text 7"/>
+          <p:cNvSpPr txBox="1"/>
+          <p:nvPr/>
+        </p:nvSpPr>
+        <p:spPr>
+          <a:xfrm>
+            <a:off x="731520" y="2011680"/>
+            <a:ext cx="1188720" cy="384048"/>
+          </a:xfrm>
+          <a:prstGeom prst="rect">
+            <a:avLst/>
+          </a:prstGeom>
+          <a:noFill/>
+          <a:ln/>
+        </p:spPr>
+        <p:txBody>
+          <a:bodyPr wrap="square" lIns="0" tIns="0" rIns="0" bIns="0" rtlCol="0" anchor="ctr"/>
+          <a:lstStyle/>
+          <a:p>
+            <a:pPr indent="0" marL="0">
+              <a:buNone/>
+            </a:pPr>
+            <a:r>
+              <a:rPr lang="en-US" sz="1050" dirty="0">
+                <a:solidFill>
+                  <a:srgbClr val="6E6E73"/>
+                </a:solidFill>
+                <a:latin typeface="SF Pro Text" pitchFamily="34" charset="0"/>
+                <a:ea typeface="SF Pro Text" pitchFamily="34" charset="-122"/>
+                <a:cs typeface="SF Pro Text" pitchFamily="34" charset="-120"/>
+              </a:rPr>
+              <a:t>CP rate</a:t>
+            </a:r>
+            <a:endParaRPr lang="en-US" sz="1050" dirty="0"/>
+          </a:p>
+        </p:txBody>
+      </p:sp>
+      <p:sp>
+        <p:nvSpPr>
+          <p:cNvPr id="12" name="Text 8"/>
+          <p:cNvSpPr txBox="1"/>
+          <p:nvPr/>
+        </p:nvSpPr>
+        <p:spPr>
+          <a:xfrm>
+            <a:off x="1828800" y="2011680"/>
+            <a:ext cx="1325880" cy="384048"/>
+          </a:xfrm>
+          <a:prstGeom prst="rect">
+            <a:avLst/>
+          </a:prstGeom>
+          <a:noFill/>
+          <a:ln/>
+        </p:spPr>
+        <p:txBody>
+          <a:bodyPr wrap="square" lIns="0" tIns="0" rIns="0" bIns="0" rtlCol="0" anchor="ctr"/>
+          <a:lstStyle/>
+          <a:p>
+            <a:pPr algn="r" indent="0" marL="0">
+              <a:buNone/>
+            </a:pPr>
+            <a:r>
+              <a:rPr lang="en-US" sz="1200" b="1" dirty="0">
+                <a:solidFill>
+                  <a:srgbClr val="1D1D1F"/>
+                </a:solidFill>
+                <a:latin typeface="SF Pro Display" pitchFamily="34" charset="0"/>
+                <a:ea typeface="SF Pro Display" pitchFamily="34" charset="-122"/>
+                <a:cs typeface="SF Pro Display" pitchFamily="34" charset="-120"/>
+              </a:rPr>
+              <a:t>$25.00/hr</a:t>
+            </a:r>
+            <a:endParaRPr lang="en-US" sz="1200" dirty="0"/>
+          </a:p>
+        </p:txBody>
+      </p:sp>
+      <p:sp>
+        <p:nvSpPr>
+          <p:cNvPr id="13" name="Shape 9"/>
+          <p:cNvSpPr/>
+          <p:nvPr/>
+        </p:nvSpPr>
+        <p:spPr>
+          <a:xfrm>
+            <a:off x="594360" y="2487168"/>
+            <a:ext cx="2651760" cy="384048"/>
+          </a:xfrm>
+          <a:prstGeom prst="roundRect">
+            <a:avLst>
+              <a:gd name="adj" fmla="val 19048"/>
+            </a:avLst>
+          </a:prstGeom>
+          <a:solidFill>
+            <a:srgbClr val="FFFFFF"/>
+          </a:solidFill>
+          <a:ln w="9525">
+            <a:solidFill>
+              <a:srgbClr val="DCE1E7"/>
+            </a:solidFill>
+            <a:prstDash val="solid"/>
+          </a:ln>
+        </p:spPr>
+      </p:sp>
+      <p:sp>
+        <p:nvSpPr>
+          <p:cNvPr id="14" name="Text 10"/>
+          <p:cNvSpPr txBox="1"/>
+          <p:nvPr/>
+        </p:nvSpPr>
+        <p:spPr>
+          <a:xfrm>
+            <a:off x="731520" y="2487168"/>
+            <a:ext cx="1188720" cy="384048"/>
+          </a:xfrm>
+          <a:prstGeom prst="rect">
+            <a:avLst/>
+          </a:prstGeom>
+          <a:noFill/>
+          <a:ln/>
+        </p:spPr>
+        <p:txBody>
+          <a:bodyPr wrap="square" lIns="0" tIns="0" rIns="0" bIns="0" rtlCol="0" anchor="ctr"/>
+          <a:lstStyle/>
+          <a:p>
+            <a:pPr indent="0" marL="0">
+              <a:buNone/>
+            </a:pPr>
+            <a:r>
+              <a:rPr lang="en-US" sz="1050" dirty="0">
+                <a:solidFill>
+                  <a:srgbClr val="6E6E73"/>
+                </a:solidFill>
+                <a:latin typeface="SF Pro Text" pitchFamily="34" charset="0"/>
+                <a:ea typeface="SF Pro Text" pitchFamily="34" charset="-122"/>
+                <a:cs typeface="SF Pro Text" pitchFamily="34" charset="-120"/>
+              </a:rPr>
+              <a:t>Duration</a:t>
+            </a:r>
+            <a:endParaRPr lang="en-US" sz="1050" dirty="0"/>
+          </a:p>
+        </p:txBody>
+      </p:sp>
+      <p:sp>
+        <p:nvSpPr>
+          <p:cNvPr id="15" name="Text 11"/>
+          <p:cNvSpPr txBox="1"/>
+          <p:nvPr/>
+        </p:nvSpPr>
+        <p:spPr>
+          <a:xfrm>
+            <a:off x="1828800" y="2487168"/>
+            <a:ext cx="1325880" cy="384048"/>
+          </a:xfrm>
+          <a:prstGeom prst="rect">
+            <a:avLst/>
+          </a:prstGeom>
+          <a:noFill/>
+          <a:ln/>
+        </p:spPr>
+        <p:txBody>
+          <a:bodyPr wrap="square" lIns="0" tIns="0" rIns="0" bIns="0" rtlCol="0" anchor="ctr"/>
+          <a:lstStyle/>
+          <a:p>
+            <a:pPr algn="r" indent="0" marL="0">
+              <a:buNone/>
+            </a:pPr>
+            <a:r>
+              <a:rPr lang="en-US" sz="1200" b="1" dirty="0">
+                <a:solidFill>
+                  <a:srgbClr val="1D1D1F"/>
+                </a:solidFill>
+                <a:latin typeface="SF Pro Display" pitchFamily="34" charset="0"/>
+                <a:ea typeface="SF Pro Display" pitchFamily="34" charset="-122"/>
+                <a:cs typeface="SF Pro Display" pitchFamily="34" charset="-120"/>
+              </a:rPr>
+              <a:t>4 hours</a:t>
+            </a:r>
+            <a:endParaRPr lang="en-US" sz="1200" dirty="0"/>
+          </a:p>
+        </p:txBody>
+      </p:sp>
+      <p:sp>
+        <p:nvSpPr>
+          <p:cNvPr id="16" name="Shape 12"/>
+          <p:cNvSpPr/>
+          <p:nvPr/>
+        </p:nvSpPr>
+        <p:spPr>
+          <a:xfrm>
+            <a:off x="594360" y="2962656"/>
+            <a:ext cx="2651760" cy="384048"/>
+          </a:xfrm>
+          <a:prstGeom prst="roundRect">
+            <a:avLst>
+              <a:gd name="adj" fmla="val 19048"/>
+            </a:avLst>
+          </a:prstGeom>
+          <a:solidFill>
+            <a:srgbClr val="F6F7F9"/>
+          </a:solidFill>
+          <a:ln w="9525">
+            <a:solidFill>
+              <a:srgbClr val="DCE1E7"/>
+            </a:solidFill>
+            <a:prstDash val="solid"/>
+          </a:ln>
+        </p:spPr>
+      </p:sp>
+      <p:sp>
+        <p:nvSpPr>
+          <p:cNvPr id="17" name="Text 13"/>
+          <p:cNvSpPr txBox="1"/>
+          <p:nvPr/>
+        </p:nvSpPr>
+        <p:spPr>
+          <a:xfrm>
+            <a:off x="731520" y="2962656"/>
+            <a:ext cx="1188720" cy="384048"/>
+          </a:xfrm>
+          <a:prstGeom prst="rect">
+            <a:avLst/>
+          </a:prstGeom>
+          <a:noFill/>
+          <a:ln/>
+        </p:spPr>
+        <p:txBody>
+          <a:bodyPr wrap="square" lIns="0" tIns="0" rIns="0" bIns="0" rtlCol="0" anchor="ctr"/>
+          <a:lstStyle/>
+          <a:p>
+            <a:pPr indent="0" marL="0">
+              <a:buNone/>
+            </a:pPr>
+            <a:r>
+              <a:rPr lang="en-US" sz="1050" dirty="0">
+                <a:solidFill>
+                  <a:srgbClr val="6E6E73"/>
+                </a:solidFill>
+                <a:latin typeface="SF Pro Text" pitchFamily="34" charset="0"/>
+                <a:ea typeface="SF Pro Text" pitchFamily="34" charset="-122"/>
+                <a:cs typeface="SF Pro Text" pitchFamily="34" charset="-120"/>
+              </a:rPr>
+              <a:t>Voucher</a:t>
+            </a:r>
+            <a:endParaRPr lang="en-US" sz="1050" dirty="0"/>
+          </a:p>
+        </p:txBody>
+      </p:sp>
+      <p:sp>
+        <p:nvSpPr>
+          <p:cNvPr id="18" name="Text 14"/>
+          <p:cNvSpPr txBox="1"/>
+          <p:nvPr/>
+        </p:nvSpPr>
+        <p:spPr>
+          <a:xfrm>
+            <a:off x="1828800" y="2962656"/>
+            <a:ext cx="1325880" cy="384048"/>
+          </a:xfrm>
+          <a:prstGeom prst="rect">
+            <a:avLst/>
+          </a:prstGeom>
+          <a:noFill/>
+          <a:ln/>
+        </p:spPr>
+        <p:txBody>
+          <a:bodyPr wrap="square" lIns="0" tIns="0" rIns="0" bIns="0" rtlCol="0" anchor="ctr"/>
+          <a:lstStyle/>
+          <a:p>
+            <a:pPr algn="r" indent="0" marL="0">
+              <a:buNone/>
+            </a:pPr>
+            <a:r>
+              <a:rPr lang="en-US" sz="1200" b="1" dirty="0">
+                <a:solidFill>
+                  <a:srgbClr val="1D1D1F"/>
+                </a:solidFill>
+                <a:latin typeface="SF Pro Display" pitchFamily="34" charset="0"/>
+                <a:ea typeface="SF Pro Display" pitchFamily="34" charset="-122"/>
+                <a:cs typeface="SF Pro Display" pitchFamily="34" charset="-120"/>
+              </a:rPr>
+              <a:t>1.5 hours</a:t>
+            </a:r>
+            <a:endParaRPr lang="en-US" sz="1200" dirty="0"/>
+          </a:p>
+        </p:txBody>
+      </p:sp>
+      <p:sp>
+        <p:nvSpPr>
+          <p:cNvPr id="19" name="Shape 15"/>
+          <p:cNvSpPr/>
+          <p:nvPr/>
+        </p:nvSpPr>
+        <p:spPr>
+          <a:xfrm>
+            <a:off x="594360" y="3438144"/>
+            <a:ext cx="2651760" cy="384048"/>
+          </a:xfrm>
+          <a:prstGeom prst="roundRect">
+            <a:avLst>
+              <a:gd name="adj" fmla="val 19048"/>
+            </a:avLst>
+          </a:prstGeom>
+          <a:solidFill>
+            <a:srgbClr val="FFFFFF"/>
+          </a:solidFill>
+          <a:ln w="9525">
+            <a:solidFill>
+              <a:srgbClr val="DCE1E7"/>
+            </a:solidFill>
+            <a:prstDash val="solid"/>
+          </a:ln>
+        </p:spPr>
+      </p:sp>
+      <p:sp>
+        <p:nvSpPr>
+          <p:cNvPr id="20" name="Text 16"/>
+          <p:cNvSpPr txBox="1"/>
+          <p:nvPr/>
+        </p:nvSpPr>
+        <p:spPr>
+          <a:xfrm>
+            <a:off x="731520" y="3438144"/>
+            <a:ext cx="1188720" cy="384048"/>
+          </a:xfrm>
+          <a:prstGeom prst="rect">
+            <a:avLst/>
+          </a:prstGeom>
+          <a:noFill/>
+          <a:ln/>
+        </p:spPr>
+        <p:txBody>
+          <a:bodyPr wrap="square" lIns="0" tIns="0" rIns="0" bIns="0" rtlCol="0" anchor="ctr"/>
+          <a:lstStyle/>
+          <a:p>
+            <a:pPr indent="0" marL="0">
+              <a:buNone/>
+            </a:pPr>
+            <a:r>
+              <a:rPr lang="en-US" sz="1050" dirty="0">
+                <a:solidFill>
+                  <a:srgbClr val="6E6E73"/>
+                </a:solidFill>
+                <a:latin typeface="SF Pro Text" pitchFamily="34" charset="0"/>
+                <a:ea typeface="SF Pro Text" pitchFamily="34" charset="-122"/>
+                <a:cs typeface="SF Pro Text" pitchFamily="34" charset="-120"/>
+              </a:rPr>
+              <a:t>Sales tax</a:t>
+            </a:r>
+            <a:endParaRPr lang="en-US" sz="1050" dirty="0"/>
+          </a:p>
+        </p:txBody>
+      </p:sp>
+      <p:sp>
+        <p:nvSpPr>
+          <p:cNvPr id="21" name="Text 17"/>
+          <p:cNvSpPr txBox="1"/>
+          <p:nvPr/>
+        </p:nvSpPr>
+        <p:spPr>
+          <a:xfrm>
+            <a:off x="1828800" y="3438144"/>
+            <a:ext cx="1325880" cy="384048"/>
+          </a:xfrm>
+          <a:prstGeom prst="rect">
+            <a:avLst/>
+          </a:prstGeom>
+          <a:noFill/>
+          <a:ln/>
+        </p:spPr>
+        <p:txBody>
+          <a:bodyPr wrap="square" lIns="0" tIns="0" rIns="0" bIns="0" rtlCol="0" anchor="ctr"/>
+          <a:lstStyle/>
+          <a:p>
+            <a:pPr algn="r" indent="0" marL="0">
+              <a:buNone/>
+            </a:pPr>
+            <a:r>
+              <a:rPr lang="en-US" sz="1200" b="1" dirty="0">
+                <a:solidFill>
+                  <a:srgbClr val="1D1D1F"/>
+                </a:solidFill>
+                <a:latin typeface="SF Pro Display" pitchFamily="34" charset="0"/>
+                <a:ea typeface="SF Pro Display" pitchFamily="34" charset="-122"/>
+                <a:cs typeface="SF Pro Display" pitchFamily="34" charset="-120"/>
+              </a:rPr>
+              <a:t>8%</a:t>
+            </a:r>
+            <a:endParaRPr lang="en-US" sz="1200" dirty="0"/>
+          </a:p>
+        </p:txBody>
+      </p:sp>
+      <p:sp>
+        <p:nvSpPr>
+          <p:cNvPr id="22" name="Shape 18"/>
+          <p:cNvSpPr/>
+          <p:nvPr/>
+        </p:nvSpPr>
+        <p:spPr>
+          <a:xfrm>
+            <a:off x="594360" y="3913632"/>
+            <a:ext cx="2651760" cy="384048"/>
+          </a:xfrm>
+          <a:prstGeom prst="roundRect">
+            <a:avLst>
+              <a:gd name="adj" fmla="val 19048"/>
+            </a:avLst>
+          </a:prstGeom>
+          <a:solidFill>
+            <a:srgbClr val="F6F7F9"/>
+          </a:solidFill>
+          <a:ln w="9525">
+            <a:solidFill>
+              <a:srgbClr val="DCE1E7"/>
+            </a:solidFill>
+            <a:prstDash val="solid"/>
+          </a:ln>
+        </p:spPr>
+      </p:sp>
+      <p:sp>
+        <p:nvSpPr>
+          <p:cNvPr id="23" name="Text 19"/>
+          <p:cNvSpPr txBox="1"/>
+          <p:nvPr/>
+        </p:nvSpPr>
+        <p:spPr>
+          <a:xfrm>
+            <a:off x="731520" y="3913632"/>
+            <a:ext cx="1188720" cy="384048"/>
+          </a:xfrm>
+          <a:prstGeom prst="rect">
+            <a:avLst/>
+          </a:prstGeom>
+          <a:noFill/>
+          <a:ln/>
+        </p:spPr>
+        <p:txBody>
+          <a:bodyPr wrap="square" lIns="0" tIns="0" rIns="0" bIns="0" rtlCol="0" anchor="ctr"/>
+          <a:lstStyle/>
+          <a:p>
+            <a:pPr indent="0" marL="0">
+              <a:buNone/>
+            </a:pPr>
+            <a:r>
+              <a:rPr lang="en-US" sz="1050" dirty="0">
+                <a:solidFill>
+                  <a:srgbClr val="6E6E73"/>
+                </a:solidFill>
+                <a:latin typeface="SF Pro Text" pitchFamily="34" charset="0"/>
+                <a:ea typeface="SF Pro Text" pitchFamily="34" charset="-122"/>
+                <a:cs typeface="SF Pro Text" pitchFamily="34" charset="-120"/>
+              </a:rPr>
+              <a:t>Credits</a:t>
+            </a:r>
+            <a:endParaRPr lang="en-US" sz="1050" dirty="0"/>
+          </a:p>
+        </p:txBody>
+      </p:sp>
+      <p:sp>
+        <p:nvSpPr>
+          <p:cNvPr id="24" name="Text 20"/>
+          <p:cNvSpPr txBox="1"/>
+          <p:nvPr/>
+        </p:nvSpPr>
+        <p:spPr>
+          <a:xfrm>
+            <a:off x="1828800" y="3913632"/>
+            <a:ext cx="1325880" cy="384048"/>
+          </a:xfrm>
+          <a:prstGeom prst="rect">
+            <a:avLst/>
+          </a:prstGeom>
+          <a:noFill/>
+          <a:ln/>
+        </p:spPr>
+        <p:txBody>
+          <a:bodyPr wrap="square" lIns="0" tIns="0" rIns="0" bIns="0" rtlCol="0" anchor="ctr"/>
+          <a:lstStyle/>
+          <a:p>
+            <a:pPr algn="r" indent="0" marL="0">
+              <a:buNone/>
+            </a:pPr>
+            <a:r>
+              <a:rPr lang="en-US" sz="1200" b="1" dirty="0">
+                <a:solidFill>
+                  <a:srgbClr val="1D1D1F"/>
+                </a:solidFill>
+                <a:latin typeface="SF Pro Display" pitchFamily="34" charset="0"/>
+                <a:ea typeface="SF Pro Display" pitchFamily="34" charset="-122"/>
+                <a:cs typeface="SF Pro Display" pitchFamily="34" charset="-120"/>
+              </a:rPr>
+              <a:t>$12.00</a:t>
+            </a:r>
+            <a:endParaRPr lang="en-US" sz="1200" dirty="0"/>
+          </a:p>
+        </p:txBody>
+      </p:sp>
+      <p:sp>
+        <p:nvSpPr>
+          <p:cNvPr id="25" name="Shape 21"/>
+          <p:cNvSpPr/>
+          <p:nvPr/>
+        </p:nvSpPr>
+        <p:spPr>
+          <a:xfrm>
+            <a:off x="3611880" y="1280160"/>
+            <a:ext cx="5120640" cy="457200"/>
+          </a:xfrm>
+          <a:prstGeom prst="roundRect">
+            <a:avLst>
+              <a:gd name="adj" fmla="val 20000"/>
+            </a:avLst>
+          </a:prstGeom>
+          <a:solidFill>
+            <a:srgbClr val="0B7A6F"/>
+          </a:solidFill>
+          <a:ln w="12700">
+            <a:solidFill>
+              <a:srgbClr val="0B7A6F"/>
+            </a:solidFill>
+            <a:prstDash val="solid"/>
+          </a:ln>
+        </p:spPr>
+      </p:sp>
+      <p:pic>
+        <p:nvPicPr>
+          <p:cNvPr id="26" name="Image 1" descr="preencoded.png">    </p:cNvPr>
+          <p:cNvPicPr>
+            <a:picLocks noChangeAspect="1"/>
+          </p:cNvPicPr>
+          <p:nvPr/>
+        </p:nvPicPr>
+        <p:blipFill>
+          <a:blip r:embed="rId2"/>
+          <a:stretch>
+            <a:fillRect/>
+          </a:stretch>
+        </p:blipFill>
+        <p:spPr>
+          <a:xfrm>
+            <a:off x="3794760" y="1399032"/>
+            <a:ext cx="219456" cy="219456"/>
+          </a:xfrm>
+          <a:prstGeom prst="rect">
+            <a:avLst/>
+          </a:prstGeom>
+        </p:spPr>
+      </p:pic>
+      <p:sp>
+        <p:nvSpPr>
+          <p:cNvPr id="27" name="Text 22"/>
+          <p:cNvSpPr txBox="1"/>
+          <p:nvPr/>
+        </p:nvSpPr>
+        <p:spPr>
+          <a:xfrm>
+            <a:off x="4114800" y="1280160"/>
+            <a:ext cx="4114800" cy="457200"/>
+          </a:xfrm>
+          <a:prstGeom prst="rect">
+            <a:avLst/>
+          </a:prstGeom>
+          <a:noFill/>
+          <a:ln/>
+        </p:spPr>
+        <p:txBody>
+          <a:bodyPr wrap="square" lIns="0" tIns="0" rIns="0" bIns="0" rtlCol="0" anchor="ctr"/>
+          <a:lstStyle/>
+          <a:p>
+            <a:pPr indent="0" marL="0">
+              <a:buNone/>
+            </a:pPr>
+            <a:r>
+              <a:rPr lang="en-US" sz="1300" b="1" dirty="0">
+                <a:solidFill>
+                  <a:srgbClr val="FFFFFF"/>
+                </a:solidFill>
+                <a:latin typeface="SF Pro Display" pitchFamily="34" charset="0"/>
+                <a:ea typeface="SF Pro Display" pitchFamily="34" charset="-122"/>
+                <a:cs typeface="SF Pro Display" pitchFamily="34" charset="-120"/>
+              </a:rPr>
+              <a:t>Show Answers</a:t>
+            </a:r>
+            <a:endParaRPr lang="en-US" sz="1300" dirty="0"/>
+          </a:p>
+        </p:txBody>
+      </p:sp>
+      <p:sp>
+        <p:nvSpPr>
+          <p:cNvPr id="28" name="Shape 23"/>
+          <p:cNvSpPr/>
+          <p:nvPr/>
+        </p:nvSpPr>
+        <p:spPr>
+          <a:xfrm>
+            <a:off x="3611880" y="1828800"/>
+            <a:ext cx="5120640" cy="2834640"/>
+          </a:xfrm>
+          <a:prstGeom prst="roundRect">
+            <a:avLst>
+              <a:gd name="adj" fmla="val 2581"/>
+            </a:avLst>
+          </a:prstGeom>
+          <a:solidFill>
+            <a:srgbClr val="E3F4F1"/>
+          </a:solidFill>
+          <a:ln w="9525">
+            <a:solidFill>
+              <a:srgbClr val="E3F4F1"/>
+            </a:solidFill>
+            <a:prstDash val="solid"/>
+          </a:ln>
+        </p:spPr>
+      </p:sp>
+      <p:sp>
+        <p:nvSpPr>
+          <p:cNvPr id="29" name="revealAnswers"/>
+          <p:cNvSpPr txBox="1"/>
+          <p:nvPr/>
+        </p:nvSpPr>
+        <p:spPr>
+          <a:xfrm>
+            <a:off x="3794760" y="1965960"/>
+            <a:ext cx="4754880" cy="2606040"/>
+          </a:xfrm>
+          <a:prstGeom prst="rect">
+            <a:avLst/>
+          </a:prstGeom>
+          <a:noFill/>
+          <a:ln/>
+        </p:spPr>
+        <p:txBody>
+          <a:bodyPr wrap="square" lIns="0" tIns="0" rIns="0" bIns="0" rtlCol="0" anchor="t"/>
+          <a:lstStyle/>
+          <a:p>
+            <a:pPr indent="0" marL="0">
+              <a:spcAft>
+                <a:spcPts val="1000"/>
+              </a:spcAft>
+              <a:buNone/>
+            </a:pPr>
+            <a:r>
+              <a:rPr lang="en-US" sz="1250" b="1" dirty="0">
+                <a:solidFill>
+                  <a:srgbClr val="0B7A6F"/>
+                </a:solidFill>
+                <a:latin typeface="SF Pro Display" pitchFamily="34" charset="0"/>
+                <a:ea typeface="SF Pro Display" pitchFamily="34" charset="-122"/>
+                <a:cs typeface="SF Pro Display" pitchFamily="34" charset="-120"/>
+              </a:rPr>
+              <a:t>FC customer:  $65.63</a:t>
+            </a:r>
+            <a:br/>
+            <a:pPr indent="0" marL="0">
+              <a:spcAft>
+                <a:spcPts val="1000"/>
+              </a:spcAft>
+              <a:buNone/>
+            </a:pPr>
+            <a:r>
+              <a:rPr lang="en-US" sz="950" dirty="0">
+                <a:solidFill>
+                  <a:srgbClr val="1D1D1F"/>
+                </a:solidFill>
+                <a:latin typeface="SF Pro Text" pitchFamily="34" charset="0"/>
+                <a:ea typeface="SF Pro Text" pitchFamily="34" charset="-122"/>
+                <a:cs typeface="SF Pro Text" pitchFamily="34" charset="-120"/>
+              </a:rPr>
+              <a:t>$25/hr CP rate × 2.5 hrs + 15% processing fee + 8% tax − $12 credits</a:t>
+            </a:r>
+            <a:endParaRPr lang="en-US" sz="1250" dirty="0"/>
+          </a:p>
+          <a:p>
+            <a:pPr indent="0" marL="0">
+              <a:spcAft>
+                <a:spcPts val="1000"/>
+              </a:spcAft>
+              <a:buNone/>
+            </a:pPr>
+            <a:r>
+              <a:rPr lang="en-US" sz="1250" b="1" dirty="0">
+                <a:solidFill>
+                  <a:srgbClr val="0B7A6F"/>
+                </a:solidFill>
+                <a:latin typeface="SF Pro Display" pitchFamily="34" charset="0"/>
+                <a:ea typeface="SF Pro Display" pitchFamily="34" charset="-122"/>
+                <a:cs typeface="SF Pro Display" pitchFamily="34" charset="-120"/>
+              </a:rPr>
+              <a:t>Non-FC customer:  $101.40</a:t>
+            </a:r>
+            <a:br/>
+            <a:pPr indent="0" marL="0">
+              <a:spcAft>
+                <a:spcPts val="1000"/>
+              </a:spcAft>
+              <a:buNone/>
+            </a:pPr>
+            <a:r>
+              <a:rPr lang="en-US" sz="950" dirty="0">
+                <a:solidFill>
+                  <a:srgbClr val="1D1D1F"/>
+                </a:solidFill>
+                <a:latin typeface="SF Pro Text" pitchFamily="34" charset="0"/>
+                <a:ea typeface="SF Pro Text" pitchFamily="34" charset="-122"/>
+                <a:cs typeface="SF Pro Text" pitchFamily="34" charset="-120"/>
+              </a:rPr>
+              <a:t>($25/hr CP rate + $15/hr platform fee) × 2.5 hrs + 5% processing fee + 8% tax − $12 credits</a:t>
+            </a:r>
+            <a:endParaRPr lang="en-US" sz="1250" dirty="0"/>
+          </a:p>
+          <a:p>
+            <a:pPr indent="0" marL="0">
+              <a:spcAft>
+                <a:spcPts val="1000"/>
+              </a:spcAft>
+              <a:buNone/>
+            </a:pPr>
+            <a:r>
+              <a:rPr lang="en-US" sz="1250" b="1" dirty="0">
+                <a:solidFill>
+                  <a:srgbClr val="0B7A6F"/>
+                </a:solidFill>
+                <a:latin typeface="SF Pro Display" pitchFamily="34" charset="0"/>
+                <a:ea typeface="SF Pro Display" pitchFamily="34" charset="-122"/>
+                <a:cs typeface="SF Pro Display" pitchFamily="34" charset="-120"/>
+              </a:rPr>
+              <a:t>Deactivated (cancelled) FC customer:  $143.93</a:t>
+            </a:r>
+            <a:br/>
+            <a:pPr indent="0" marL="0">
+              <a:spcAft>
+                <a:spcPts val="1000"/>
+              </a:spcAft>
+              <a:buNone/>
+            </a:pPr>
+            <a:r>
+              <a:rPr lang="en-US" sz="950" dirty="0">
+                <a:solidFill>
+                  <a:srgbClr val="1D1D1F"/>
+                </a:solidFill>
+                <a:latin typeface="SF Pro Text" pitchFamily="34" charset="0"/>
+                <a:ea typeface="SF Pro Text" pitchFamily="34" charset="-122"/>
+                <a:cs typeface="SF Pro Text" pitchFamily="34" charset="-120"/>
+              </a:rPr>
+              <a:t>($25/hr CP rate + $30/hr platform fee) × 2.5 hrs + 5% processing fee + 8% tax − $12 credits</a:t>
+            </a:r>
+            <a:endParaRPr lang="en-US" sz="1250" dirty="0"/>
+          </a:p>
+        </p:txBody>
+      </p:sp>
+      <p:sp>
+        <p:nvSpPr>
+          <p:cNvPr id="30" name="Text 25"/>
+          <p:cNvSpPr txBox="1"/>
+          <p:nvPr/>
+        </p:nvSpPr>
+        <p:spPr>
+          <a:xfrm>
+            <a:off x="594360" y="4389120"/>
+            <a:ext cx="2743200" cy="201168"/>
+          </a:xfrm>
+          <a:prstGeom prst="rect">
+            <a:avLst/>
+          </a:prstGeom>
+          <a:noFill/>
+          <a:ln/>
+        </p:spPr>
+        <p:txBody>
+          <a:bodyPr wrap="square" lIns="0" tIns="0" rIns="0" bIns="0" rtlCol="0" anchor="t"/>
+          <a:lstStyle/>
+          <a:p>
+            <a:pPr indent="0" marL="0">
+              <a:buNone/>
+            </a:pPr>
+            <a:r>
+              <a:rPr lang="en-US" sz="850" i="1" dirty="0">
+                <a:solidFill>
+                  <a:srgbClr val="6E6E73"/>
+                </a:solidFill>
+                <a:latin typeface="SF Pro Text" pitchFamily="34" charset="0"/>
+                <a:ea typeface="SF Pro Text" pitchFamily="34" charset="-122"/>
+                <a:cs typeface="SF Pro Text" pitchFamily="34" charset="-120"/>
+              </a:rPr>
+              <a:t>Hint: take the voucher hours off the duration first.</a:t>
+            </a:r>
+            <a:endParaRPr lang="en-US" sz="850" dirty="0"/>
+          </a:p>
+        </p:txBody>
+      </p:sp>
+      <p:sp>
+        <p:nvSpPr>
+          <p:cNvPr id="25" name="Slide Number Placeholder 0"/>
+          <p:cNvSpPr>
+            <a:spLocks noGrp="1"/>
+          </p:cNvSpPr>
+          <p:nvPr>
+            <p:ph type="sldNum" sz="quarter" idx="4294967295"/>
+          </p:nvPr>
+        </p:nvSpPr>
+        <p:spPr>
+          <a:xfrm>
+            <a:off x="8229600" y="4800600"/>
+            <a:ext cx="457200" cy="182880"/>
+          </a:xfrm>
+          <a:prstGeom prst="rect">
+            <a:avLst/>
+          </a:prstGeom>
+          <a:extLst>
+            <a:ext uri="{C572A759-6A51-4108-AA02-DFA0A04FC94B}">
+              <ma14:wrappingTextBoxFlag xmlns:ma14="http://schemas.microsoft.com/office/mac/drawingml/2011/main" val="0"/>
+            </a:ext>
+          </a:extLst>
+        </p:spPr>
+        <p:txBody>
+          <a:bodyPr/>
+          <a:lstStyle>
+            <a:lvl1pPr>
+              <a:defRPr sz="700">
+                <a:solidFill>
+                  <a:srgbClr val="6E6E73"/>
+                </a:solidFill>
+                <a:latin typeface="SF Pro Text"/>
+                <a:ea typeface="SF Pro Text"/>
+                <a:cs typeface="SF Pro Text"/>
+              </a:defRPr>
+            </a:lvl1pPr>
+          </a:lstStyle>
+          <a:p>
+            <a:pPr algn="r"/>
+            <a:fld id="{F7021451-1387-4CA6-816F-3879F97B5CBC}" type="slidenum">
+              <a:rPr b="0" lang="en-US"/>
+              <a:t>23</a:t>
+            </a:fld>
+            <a:endParaRPr lang="en-US"/>
+          </a:p>
+        </p:txBody>
+      </p:sp>
+    </p:spTree>
+  </p:cSld>
+  <p:clrMapOvr>
+    <a:masterClrMapping/>
+  </p:clrMapOvr>
+  <p:timing>
+    <p:tnLst>
+      <p:par>
+        <p:cTn id="1" dur="indefinite" restart="never" nodeType="tmRoot">
+          <p:childTnLst>
+            <p:seq concurrent="1" nextAc="seek">
+              <p:cTn id="2" dur="indefinite" nodeType="mainSeq">
+                <p:childTnLst>
+                  <p:par>
+                    <p:cTn id="3" fill="hold">
+                      <p:stCondLst>
+                        <p:cond delay="indefinite"/>
+                      </p:stCondLst>
+                      <p:childTnLst>
+                        <p:par>
+                          <p:cTn id="4" fill="hold">
+                            <p:stCondLst>
+                              <p:cond delay="0"/>
+                            </p:stCondLst>
+                            <p:childTnLst>
+                              <p:par>
+                                <p:cTn id="5" presetID="22" presetClass="entr" presetSubtype="8" fill="hold" grpId="0" nodeType="clickEffect">
+                                  <p:stCondLst>
+                                    <p:cond delay="0"/>
+                                  </p:stCondLst>
+                                  <p:childTnLst>
+                                    <p:set>
+                                      <p:cBhvr>
+                                        <p:cTn id="6" dur="1" fill="hold">
+                                          <p:stCondLst>
+                                            <p:cond delay="0"/>
+                                          </p:stCondLst>
+                                        </p:cTn>
+                                        <p:tgtEl>
+                                          <p:spTgt spid="29">
+                                            <p:txEl>
+                                              <p:pRg st="0" end="0"/>
+                                            </p:txEl>
+                                          </p:spTgt>
+                                        </p:tgtEl>
+                                        <p:attrNameLst>
+                                          <p:attrName>style.visibility</p:attrName>
+                                        </p:attrNameLst>
+                                      </p:cBhvr>
+                                      <p:to>
+                                        <p:strVal val="visible"/>
+                                      </p:to>
+                                    </p:set>
+                                    <p:animEffect transition="in" filter="wipe(left)">
+                                      <p:cBhvr>
+                                        <p:cTn id="7" dur="1200"/>
+                                        <p:tgtEl>
+                                          <p:spTgt spid="29">
+                                            <p:txEl>
+                                              <p:pRg st="0" end="0"/>
+                                            </p:txEl>
+                                          </p:spTgt>
+                                        </p:tgtEl>
+                                      </p:cBhvr>
+                                    </p:animEffect>
+                                  </p:childTnLst>
+                                </p:cTn>
+                              </p:par>
+                            </p:childTnLst>
+                          </p:cTn>
+                        </p:par>
+                      </p:childTnLst>
+                    </p:cTn>
+                  </p:par>
+                  <p:par>
+                    <p:cTn id="8" fill="hold">
+                      <p:stCondLst>
+                        <p:cond delay="indefinite"/>
+                      </p:stCondLst>
+                      <p:childTnLst>
+                        <p:par>
+                          <p:cTn id="9" fill="hold">
+                            <p:stCondLst>
+                              <p:cond delay="0"/>
+                            </p:stCondLst>
+                            <p:childTnLst>
+                              <p:par>
+                                <p:cTn id="10" presetID="22" presetClass="entr" presetSubtype="8" fill="hold" grpId="0" nodeType="clickEffect">
+                                  <p:stCondLst>
+                                    <p:cond delay="0"/>
+                                  </p:stCondLst>
+                                  <p:childTnLst>
+                                    <p:set>
+                                      <p:cBhvr>
+                                        <p:cTn id="11" dur="1" fill="hold">
+                                          <p:stCondLst>
+                                            <p:cond delay="0"/>
+                                          </p:stCondLst>
+                                        </p:cTn>
+                                        <p:tgtEl>
+                                          <p:spTgt spid="29">
+                                            <p:txEl>
+                                              <p:pRg st="1" end="1"/>
+                                            </p:txEl>
+                                          </p:spTgt>
+                                        </p:tgtEl>
+                                        <p:attrNameLst>
+                                          <p:attrName>style.visibility</p:attrName>
+                                        </p:attrNameLst>
+                                      </p:cBhvr>
+                                      <p:to>
+                                        <p:strVal val="visible"/>
+                                      </p:to>
+                                    </p:set>
+                                    <p:animEffect transition="in" filter="wipe(left)">
+                                      <p:cBhvr>
+                                        <p:cTn id="12" dur="1200"/>
+                                        <p:tgtEl>
+                                          <p:spTgt spid="29">
+                                            <p:txEl>
+                                              <p:pRg st="1" end="1"/>
+                                            </p:txEl>
+                                          </p:spTgt>
+                                        </p:tgtEl>
+                                      </p:cBhvr>
+                                    </p:animEffect>
+                                  </p:childTnLst>
+                                </p:cTn>
+                              </p:par>
+                            </p:childTnLst>
+                          </p:cTn>
+                        </p:par>
+                      </p:childTnLst>
+                    </p:cTn>
+                  </p:par>
+                  <p:par>
+                    <p:cTn id="13" fill="hold">
+                      <p:stCondLst>
+                        <p:cond delay="indefinite"/>
+                      </p:stCondLst>
+                      <p:childTnLst>
+                        <p:par>
+                          <p:cTn id="14" fill="hold">
+                            <p:stCondLst>
+                              <p:cond delay="0"/>
+                            </p:stCondLst>
+                            <p:childTnLst>
+                              <p:par>
+                                <p:cTn id="15" presetID="22" presetClass="entr" presetSubtype="8" fill="hold" grpId="0" nodeType="clickEffect">
+                                  <p:stCondLst>
+                                    <p:cond delay="0"/>
+                                  </p:stCondLst>
+                                  <p:childTnLst>
+                                    <p:set>
+                                      <p:cBhvr>
+                                        <p:cTn id="16" dur="1" fill="hold">
+                                          <p:stCondLst>
+                                            <p:cond delay="0"/>
+                                          </p:stCondLst>
+                                        </p:cTn>
+                                        <p:tgtEl>
+                                          <p:spTgt spid="29">
+                                            <p:txEl>
+                                              <p:pRg st="2" end="2"/>
+                                            </p:txEl>
+                                          </p:spTgt>
+                                        </p:tgtEl>
+                                        <p:attrNameLst>
+                                          <p:attrName>style.visibility</p:attrName>
+                                        </p:attrNameLst>
+                                      </p:cBhvr>
+                                      <p:to>
+                                        <p:strVal val="visible"/>
+                                      </p:to>
+                                    </p:set>
+                                    <p:animEffect transition="in" filter="wipe(left)">
+                                      <p:cBhvr>
+                                        <p:cTn id="17" dur="1200"/>
+                                        <p:tgtEl>
+                                          <p:spTgt spid="29">
+                                            <p:txEl>
+                                              <p:pRg st="2" end="2"/>
+                                            </p:txEl>
+                                          </p:spTgt>
+                                        </p:tgtEl>
+                                      </p:cBhvr>
+                                    </p:animEffect>
+                                  </p:childTnLst>
+                                </p:cTn>
+                              </p:par>
+                            </p:childTnLst>
+                          </p:cTn>
+                        </p:par>
+                      </p:childTnLst>
+                    </p:cTn>
+                  </p:par>
+                </p:childTnLst>
+              </p:cTn>
+              <p:prevCondLst>
+                <p:cond evt="onPrev" delay="0">
+                  <p:tgtEl>
+                    <p:sldTgt/>
+                  </p:tgtEl>
+                </p:cond>
+              </p:prevCondLst>
+              <p:nextCondLst>
+                <p:cond evt="onNext" delay="0">
+                  <p:tgtEl>
+                    <p:sldTgt/>
+                  </p:tgtEl>
+                </p:cond>
+              </p:nextCondLst>
+            </p:seq>
+          </p:childTnLst>
+        </p:cTn>
+      </p:par>
+    </p:tnLst>
+    <p:bldLst>
+      <p:bldP spid="29" grpId="0" build="p"/>
+    </p:bldLst>
+  </p:timing>
+</p:sld>
+</file>
+
+<file path=ppt/slides/slide24.xml><?xml version="1.0" encoding="utf-8"?>
+<p:sld xmlns:a="http://schemas.openxmlformats.org/drawingml/2006/main" xmlns:r="http://schemas.openxmlformats.org/officeDocument/2006/relationships" xmlns:p="http://schemas.openxmlformats.org/presentationml/2006/main">
+  <p:cSld name="Slide 24">
+    <p:spTree>
+      <p:nvGrpSpPr>
+        <p:cNvPr id="1" name=""/>
+        <p:cNvGrpSpPr/>
+        <p:nvPr/>
+      </p:nvGrpSpPr>
+      <p:grpSpPr>
+        <a:xfrm>
+          <a:off x="0" y="0"/>
+          <a:ext cx="0" cy="0"/>
+          <a:chOff x="0" y="0"/>
+          <a:chExt cx="0" cy="0"/>
+        </a:xfrm>
+      </p:grpSpPr>
+      <p:sp>
+        <p:nvSpPr>
+          <p:cNvPr id="2" name="Text 0"/>
+          <p:cNvSpPr txBox="1"/>
+          <p:nvPr/>
+        </p:nvSpPr>
+        <p:spPr>
+          <a:xfrm>
+            <a:off x="438912" y="274320"/>
+            <a:ext cx="8229600" cy="182880"/>
+          </a:xfrm>
+          <a:prstGeom prst="rect">
+            <a:avLst/>
+          </a:prstGeom>
+          <a:noFill/>
+          <a:ln/>
+        </p:spPr>
+        <p:txBody>
+          <a:bodyPr wrap="square" lIns="0" tIns="0" rIns="0" bIns="0" rtlCol="0" anchor="t"/>
+          <a:lstStyle/>
+          <a:p>
+            <a:pPr indent="0" marL="0">
+              <a:buNone/>
+            </a:pPr>
+            <a:r>
+              <a:rPr lang="en-US" sz="800" b="1" spc="50" kern="0" dirty="0">
+                <a:solidFill>
+                  <a:srgbClr val="0B7A6F"/>
+                </a:solidFill>
+                <a:latin typeface="SF Pro Display" pitchFamily="34" charset="0"/>
+                <a:ea typeface="SF Pro Display" pitchFamily="34" charset="-122"/>
+                <a:cs typeface="SF Pro Display" pitchFamily="34" charset="-120"/>
+              </a:rPr>
+              <a:t>C PRICE VS CP PAY</a:t>
+            </a:r>
+            <a:endParaRPr lang="en-US" sz="800" dirty="0"/>
+          </a:p>
+        </p:txBody>
+      </p:sp>
+      <p:sp>
+        <p:nvSpPr>
+          <p:cNvPr id="3" name="Text 1"/>
+          <p:cNvSpPr txBox="1"/>
+          <p:nvPr/>
+        </p:nvSpPr>
+        <p:spPr>
+          <a:xfrm>
+            <a:off x="438912" y="457200"/>
+            <a:ext cx="8229600" cy="457200"/>
+          </a:xfrm>
+          <a:prstGeom prst="rect">
+            <a:avLst/>
+          </a:prstGeom>
+          <a:noFill/>
+          <a:ln/>
+        </p:spPr>
+        <p:txBody>
+          <a:bodyPr wrap="square" lIns="0" tIns="0" rIns="0" bIns="0" rtlCol="0" anchor="t"/>
+          <a:lstStyle/>
+          <a:p>
+            <a:pPr indent="0" marL="0">
+              <a:buNone/>
+            </a:pPr>
+            <a:r>
+              <a:rPr lang="en-US" sz="2400" b="1" dirty="0">
+                <a:solidFill>
+                  <a:srgbClr val="1D1D1F"/>
+                </a:solidFill>
+                <a:latin typeface="SF Pro Display" pitchFamily="34" charset="0"/>
+                <a:ea typeface="SF Pro Display" pitchFamily="34" charset="-122"/>
+                <a:cs typeface="SF Pro Display" pitchFamily="34" charset="-120"/>
+              </a:rPr>
               <a:t>How the cleaner is paid</a:t>
             </a:r>
             <a:endParaRPr lang="en-US" sz="2400" dirty="0"/>
@@ -14035,7 +15462,7 @@
       </p:sp>
       <p:graphicFrame>
         <p:nvGraphicFramePr>
-          <p:cNvPr id="24" name="Table 0"/>
+          <p:cNvPr id="25" name="Table 0"/>
           <p:cNvGraphicFramePr>
             <a:graphicFrameLocks noGrp="1"/>
           </p:cNvGraphicFramePr>
@@ -15186,7 +16613,7 @@
             <a:pPr algn="r"/>
             <a:fld id="{F7021451-1387-4CA6-816F-3879F97B5CBC}" type="slidenum">
               <a:rPr b="0" lang="en-US"/>
-              <a:t>23</a:t>
+              <a:t>24</a:t>
             </a:fld>
             <a:endParaRPr lang="en-US"/>
           </a:p>
@@ -15200,9 +16627,9 @@
 </p:sld>
 </file>
 
-<file path=ppt/slides/slide24.xml><?xml version="1.0" encoding="utf-8"?>
+<file path=ppt/slides/slide25.xml><?xml version="1.0" encoding="utf-8"?>
 <p:sld xmlns:a="http://schemas.openxmlformats.org/drawingml/2006/main" xmlns:r="http://schemas.openxmlformats.org/officeDocument/2006/relationships" xmlns:p="http://schemas.openxmlformats.org/presentationml/2006/main">
-  <p:cSld name="Slide 24">
+  <p:cSld name="Slide 25">
     <p:spTree>
       <p:nvGrpSpPr>
         <p:cNvPr id="1" name=""/>
@@ -15336,7 +16763,7 @@
       </p:sp>
       <p:graphicFrame>
         <p:nvGraphicFramePr>
-          <p:cNvPr id="25" name="Table 0"/>
+          <p:cNvPr id="26" name="Table 0"/>
           <p:cNvGraphicFramePr>
             <a:graphicFrameLocks noGrp="1"/>
           </p:cNvGraphicFramePr>
@@ -16747,744 +18174,6 @@
             <a:pPr algn="r"/>
             <a:fld id="{F7021451-1387-4CA6-816F-3879F97B5CBC}" type="slidenum">
               <a:rPr b="0" lang="en-US"/>
-              <a:t>24</a:t>
-            </a:fld>
-            <a:endParaRPr lang="en-US"/>
-          </a:p>
-        </p:txBody>
-      </p:sp>
-    </p:spTree>
-  </p:cSld>
-  <p:clrMapOvr>
-    <a:masterClrMapping/>
-  </p:clrMapOvr>
-</p:sld>
-</file>
-
-<file path=ppt/slides/slide25.xml><?xml version="1.0" encoding="utf-8"?>
-<p:sld xmlns:a="http://schemas.openxmlformats.org/drawingml/2006/main" xmlns:r="http://schemas.openxmlformats.org/officeDocument/2006/relationships" xmlns:p="http://schemas.openxmlformats.org/presentationml/2006/main">
-  <p:cSld name="Slide 25">
-    <p:spTree>
-      <p:nvGrpSpPr>
-        <p:cNvPr id="1" name=""/>
-        <p:cNvGrpSpPr/>
-        <p:nvPr/>
-      </p:nvGrpSpPr>
-      <p:grpSpPr>
-        <a:xfrm>
-          <a:off x="0" y="0"/>
-          <a:ext cx="0" cy="0"/>
-          <a:chOff x="0" y="0"/>
-          <a:chExt cx="0" cy="0"/>
-        </a:xfrm>
-      </p:grpSpPr>
-      <p:sp>
-        <p:nvSpPr>
-          <p:cNvPr id="2" name="Text 0"/>
-          <p:cNvSpPr txBox="1"/>
-          <p:nvPr/>
-        </p:nvSpPr>
-        <p:spPr>
-          <a:xfrm>
-            <a:off x="438912" y="274320"/>
-            <a:ext cx="8229600" cy="182880"/>
-          </a:xfrm>
-          <a:prstGeom prst="rect">
-            <a:avLst/>
-          </a:prstGeom>
-          <a:noFill/>
-          <a:ln/>
-        </p:spPr>
-        <p:txBody>
-          <a:bodyPr wrap="square" lIns="0" tIns="0" rIns="0" bIns="0" rtlCol="0" anchor="t"/>
-          <a:lstStyle/>
-          <a:p>
-            <a:pPr indent="0" marL="0">
-              <a:buNone/>
-            </a:pPr>
-            <a:r>
-              <a:rPr lang="en-US" sz="800" b="1" spc="50" kern="0" dirty="0">
-                <a:solidFill>
-                  <a:srgbClr val="0B7A6F"/>
-                </a:solidFill>
-                <a:latin typeface="SF Pro Display" pitchFamily="34" charset="0"/>
-                <a:ea typeface="SF Pro Display" pitchFamily="34" charset="-122"/>
-                <a:cs typeface="SF Pro Display" pitchFamily="34" charset="-120"/>
-              </a:rPr>
-              <a:t>C PRICE VS CP PAY</a:t>
-            </a:r>
-            <a:endParaRPr lang="en-US" sz="800" dirty="0"/>
-          </a:p>
-        </p:txBody>
-      </p:sp>
-      <p:sp>
-        <p:nvSpPr>
-          <p:cNvPr id="3" name="Text 1"/>
-          <p:cNvSpPr txBox="1"/>
-          <p:nvPr/>
-        </p:nvSpPr>
-        <p:spPr>
-          <a:xfrm>
-            <a:off x="438912" y="457200"/>
-            <a:ext cx="8229600" cy="457200"/>
-          </a:xfrm>
-          <a:prstGeom prst="rect">
-            <a:avLst/>
-          </a:prstGeom>
-          <a:noFill/>
-          <a:ln/>
-        </p:spPr>
-        <p:txBody>
-          <a:bodyPr wrap="square" lIns="0" tIns="0" rIns="0" bIns="0" rtlCol="0" anchor="t"/>
-          <a:lstStyle/>
-          <a:p>
-            <a:pPr indent="0" marL="0">
-              <a:buNone/>
-            </a:pPr>
-            <a:r>
-              <a:rPr lang="en-US" sz="2400" b="1" dirty="0">
-                <a:solidFill>
-                  <a:srgbClr val="1D1D1F"/>
-                </a:solidFill>
-                <a:latin typeface="SF Pro Display" pitchFamily="34" charset="0"/>
-                <a:ea typeface="SF Pro Display" pitchFamily="34" charset="-122"/>
-                <a:cs typeface="SF Pro Display" pitchFamily="34" charset="-120"/>
-              </a:rPr>
-              <a:t>Worked example</a:t>
-            </a:r>
-            <a:endParaRPr lang="en-US" sz="2400" dirty="0"/>
-          </a:p>
-        </p:txBody>
-      </p:sp>
-      <p:sp>
-        <p:nvSpPr>
-          <p:cNvPr id="4" name="Text 2"/>
-          <p:cNvSpPr txBox="1"/>
-          <p:nvPr/>
-        </p:nvSpPr>
-        <p:spPr>
-          <a:xfrm>
-            <a:off x="438912" y="960120"/>
-            <a:ext cx="8229600" cy="274320"/>
-          </a:xfrm>
-          <a:prstGeom prst="rect">
-            <a:avLst/>
-          </a:prstGeom>
-          <a:noFill/>
-          <a:ln/>
-        </p:spPr>
-        <p:txBody>
-          <a:bodyPr wrap="square" lIns="0" tIns="0" rIns="0" bIns="0" rtlCol="0" anchor="t"/>
-          <a:lstStyle/>
-          <a:p>
-            <a:pPr indent="0" marL="0">
-              <a:buNone/>
-            </a:pPr>
-            <a:r>
-              <a:rPr lang="en-US" sz="1200" dirty="0">
-                <a:solidFill>
-                  <a:srgbClr val="6E6E73"/>
-                </a:solidFill>
-                <a:latin typeface="SF Pro Text" pitchFamily="34" charset="0"/>
-                <a:ea typeface="SF Pro Text" pitchFamily="34" charset="-122"/>
-                <a:cs typeface="SF Pro Text" pitchFamily="34" charset="-120"/>
-              </a:rPr>
-              <a:t>A deactivated FC customer sees a $40/hr platform fee. Is it right?</a:t>
-            </a:r>
-            <a:endParaRPr lang="en-US" sz="1200" dirty="0"/>
-          </a:p>
-        </p:txBody>
-      </p:sp>
-      <p:sp>
-        <p:nvSpPr>
-          <p:cNvPr id="6" name="Shape 3"/>
-          <p:cNvSpPr/>
-          <p:nvPr/>
-        </p:nvSpPr>
-        <p:spPr>
-          <a:xfrm>
-            <a:off x="594360" y="1371600"/>
-            <a:ext cx="2194560" cy="1600200"/>
-          </a:xfrm>
-          <a:prstGeom prst="roundRect">
-            <a:avLst>
-              <a:gd name="adj" fmla="val 4571"/>
-            </a:avLst>
-          </a:prstGeom>
-          <a:solidFill>
-            <a:srgbClr val="FFFFFF"/>
-          </a:solidFill>
-          <a:ln w="9525">
-            <a:solidFill>
-              <a:srgbClr val="DCE1E7"/>
-            </a:solidFill>
-            <a:prstDash val="solid"/>
-          </a:ln>
-        </p:spPr>
-      </p:sp>
-      <p:sp>
-        <p:nvSpPr>
-          <p:cNvPr id="7" name="Text 4"/>
-          <p:cNvSpPr txBox="1"/>
-          <p:nvPr/>
-        </p:nvSpPr>
-        <p:spPr>
-          <a:xfrm>
-            <a:off x="594360" y="1508760"/>
-            <a:ext cx="2194560" cy="640080"/>
-          </a:xfrm>
-          <a:prstGeom prst="rect">
-            <a:avLst/>
-          </a:prstGeom>
-          <a:noFill/>
-          <a:ln/>
-        </p:spPr>
-        <p:txBody>
-          <a:bodyPr wrap="square" lIns="0" tIns="0" rIns="0" bIns="0" rtlCol="0" anchor="ctr"/>
-          <a:lstStyle/>
-          <a:p>
-            <a:pPr algn="ctr" indent="0" marL="0">
-              <a:buNone/>
-            </a:pPr>
-            <a:r>
-              <a:rPr lang="en-US" sz="2800" b="1" dirty="0">
-                <a:solidFill>
-                  <a:srgbClr val="0B7A6F"/>
-                </a:solidFill>
-                <a:latin typeface="SF Pro Display" pitchFamily="34" charset="0"/>
-                <a:ea typeface="SF Pro Display" pitchFamily="34" charset="-122"/>
-                <a:cs typeface="SF Pro Display" pitchFamily="34" charset="-120"/>
-              </a:rPr>
-              <a:t>$30/hr</a:t>
-            </a:r>
-            <a:endParaRPr lang="en-US" sz="2800" dirty="0"/>
-          </a:p>
-        </p:txBody>
-      </p:sp>
-      <p:sp>
-        <p:nvSpPr>
-          <p:cNvPr id="8" name="Text 5"/>
-          <p:cNvSpPr txBox="1"/>
-          <p:nvPr/>
-        </p:nvSpPr>
-        <p:spPr>
-          <a:xfrm>
-            <a:off x="594360" y="2194560"/>
-            <a:ext cx="2194560" cy="640080"/>
-          </a:xfrm>
-          <a:prstGeom prst="rect">
-            <a:avLst/>
-          </a:prstGeom>
-          <a:noFill/>
-          <a:ln/>
-        </p:spPr>
-        <p:txBody>
-          <a:bodyPr wrap="square" lIns="0" tIns="0" rIns="0" bIns="0" rtlCol="0" anchor="t"/>
-          <a:lstStyle/>
-          <a:p>
-            <a:pPr algn="ctr" indent="0" marL="0">
-              <a:buNone/>
-            </a:pPr>
-            <a:r>
-              <a:rPr lang="en-US" sz="1000" dirty="0">
-                <a:solidFill>
-                  <a:srgbClr val="6E6E73"/>
-                </a:solidFill>
-                <a:latin typeface="SF Pro Text" pitchFamily="34" charset="0"/>
-                <a:ea typeface="SF Pro Text" pitchFamily="34" charset="-122"/>
-                <a:cs typeface="SF Pro Text" pitchFamily="34" charset="-120"/>
-              </a:rPr>
-              <a:t>Deactivated FC</a:t>
-            </a:r>
-            <a:endParaRPr lang="en-US" sz="1000" dirty="0"/>
-          </a:p>
-          <a:p>
-            <a:pPr algn="ctr" indent="0" marL="0">
-              <a:buNone/>
-            </a:pPr>
-            <a:r>
-              <a:rPr lang="en-US" sz="1000" dirty="0">
-                <a:solidFill>
-                  <a:srgbClr val="6E6E73"/>
-                </a:solidFill>
-                <a:latin typeface="SF Pro Text" pitchFamily="34" charset="0"/>
-                <a:ea typeface="SF Pro Text" pitchFamily="34" charset="-122"/>
-                <a:cs typeface="SF Pro Text" pitchFamily="34" charset="-120"/>
-              </a:rPr>
-              <a:t>platform fee</a:t>
-            </a:r>
-            <a:endParaRPr lang="en-US" sz="1000" dirty="0"/>
-          </a:p>
-        </p:txBody>
-      </p:sp>
-      <p:sp>
-        <p:nvSpPr>
-          <p:cNvPr id="9" name="Text 6"/>
-          <p:cNvSpPr txBox="1"/>
-          <p:nvPr/>
-        </p:nvSpPr>
-        <p:spPr>
-          <a:xfrm>
-            <a:off x="2880360" y="1371600"/>
-            <a:ext cx="457200" cy="1600200"/>
-          </a:xfrm>
-          <a:prstGeom prst="rect">
-            <a:avLst/>
-          </a:prstGeom>
-          <a:noFill/>
-          <a:ln/>
-        </p:spPr>
-        <p:txBody>
-          <a:bodyPr wrap="square" lIns="0" tIns="0" rIns="0" bIns="0" rtlCol="0" anchor="ctr"/>
-          <a:lstStyle/>
-          <a:p>
-            <a:pPr algn="ctr" indent="0" marL="0">
-              <a:buNone/>
-            </a:pPr>
-            <a:r>
-              <a:rPr lang="en-US" sz="2600" b="1" dirty="0">
-                <a:solidFill>
-                  <a:srgbClr val="6E6E73"/>
-                </a:solidFill>
-                <a:latin typeface="SF Pro Display" pitchFamily="34" charset="0"/>
-                <a:ea typeface="SF Pro Display" pitchFamily="34" charset="-122"/>
-                <a:cs typeface="SF Pro Display" pitchFamily="34" charset="-120"/>
-              </a:rPr>
-              <a:t>+</a:t>
-            </a:r>
-            <a:endParaRPr lang="en-US" sz="2600" dirty="0"/>
-          </a:p>
-        </p:txBody>
-      </p:sp>
-      <p:sp>
-        <p:nvSpPr>
-          <p:cNvPr id="10" name="Shape 7"/>
-          <p:cNvSpPr/>
-          <p:nvPr/>
-        </p:nvSpPr>
-        <p:spPr>
-          <a:xfrm>
-            <a:off x="3429000" y="1371600"/>
-            <a:ext cx="2194560" cy="1600200"/>
-          </a:xfrm>
-          <a:prstGeom prst="roundRect">
-            <a:avLst>
-              <a:gd name="adj" fmla="val 4571"/>
-            </a:avLst>
-          </a:prstGeom>
-          <a:solidFill>
-            <a:srgbClr val="FFFFFF"/>
-          </a:solidFill>
-          <a:ln w="9525">
-            <a:solidFill>
-              <a:srgbClr val="DCE1E7"/>
-            </a:solidFill>
-            <a:prstDash val="solid"/>
-          </a:ln>
-        </p:spPr>
-      </p:sp>
-      <p:sp>
-        <p:nvSpPr>
-          <p:cNvPr id="11" name="Text 8"/>
-          <p:cNvSpPr txBox="1"/>
-          <p:nvPr/>
-        </p:nvSpPr>
-        <p:spPr>
-          <a:xfrm>
-            <a:off x="3429000" y="1508760"/>
-            <a:ext cx="2194560" cy="640080"/>
-          </a:xfrm>
-          <a:prstGeom prst="rect">
-            <a:avLst/>
-          </a:prstGeom>
-          <a:noFill/>
-          <a:ln/>
-        </p:spPr>
-        <p:txBody>
-          <a:bodyPr wrap="square" lIns="0" tIns="0" rIns="0" bIns="0" rtlCol="0" anchor="ctr"/>
-          <a:lstStyle/>
-          <a:p>
-            <a:pPr algn="ctr" indent="0" marL="0">
-              <a:buNone/>
-            </a:pPr>
-            <a:r>
-              <a:rPr lang="en-US" sz="2800" b="1" dirty="0">
-                <a:solidFill>
-                  <a:srgbClr val="0B7A6F"/>
-                </a:solidFill>
-                <a:latin typeface="SF Pro Display" pitchFamily="34" charset="0"/>
-                <a:ea typeface="SF Pro Display" pitchFamily="34" charset="-122"/>
-                <a:cs typeface="SF Pro Display" pitchFamily="34" charset="-120"/>
-              </a:rPr>
-              <a:t>$10/hr</a:t>
-            </a:r>
-            <a:endParaRPr lang="en-US" sz="2800" dirty="0"/>
-          </a:p>
-        </p:txBody>
-      </p:sp>
-      <p:sp>
-        <p:nvSpPr>
-          <p:cNvPr id="12" name="Text 9"/>
-          <p:cNvSpPr txBox="1"/>
-          <p:nvPr/>
-        </p:nvSpPr>
-        <p:spPr>
-          <a:xfrm>
-            <a:off x="3429000" y="2194560"/>
-            <a:ext cx="2194560" cy="640080"/>
-          </a:xfrm>
-          <a:prstGeom prst="rect">
-            <a:avLst/>
-          </a:prstGeom>
-          <a:noFill/>
-          <a:ln/>
-        </p:spPr>
-        <p:txBody>
-          <a:bodyPr wrap="square" lIns="0" tIns="0" rIns="0" bIns="0" rtlCol="0" anchor="t"/>
-          <a:lstStyle/>
-          <a:p>
-            <a:pPr algn="ctr" indent="0" marL="0">
-              <a:buNone/>
-            </a:pPr>
-            <a:r>
-              <a:rPr lang="en-US" sz="1000" dirty="0">
-                <a:solidFill>
-                  <a:srgbClr val="6E6E73"/>
-                </a:solidFill>
-                <a:latin typeface="SF Pro Text" pitchFamily="34" charset="0"/>
-                <a:ea typeface="SF Pro Text" pitchFamily="34" charset="-122"/>
-                <a:cs typeface="SF Pro Text" pitchFamily="34" charset="-120"/>
-              </a:rPr>
-              <a:t>Max rate $25 −</a:t>
-            </a:r>
-            <a:endParaRPr lang="en-US" sz="1000" dirty="0"/>
-          </a:p>
-          <a:p>
-            <a:pPr algn="ctr" indent="0" marL="0">
-              <a:buNone/>
-            </a:pPr>
-            <a:r>
-              <a:rPr lang="en-US" sz="1000" dirty="0">
-                <a:solidFill>
-                  <a:srgbClr val="6E6E73"/>
-                </a:solidFill>
-                <a:latin typeface="SF Pro Text" pitchFamily="34" charset="0"/>
-                <a:ea typeface="SF Pro Text" pitchFamily="34" charset="-122"/>
-                <a:cs typeface="SF Pro Text" pitchFamily="34" charset="-120"/>
-              </a:rPr>
-              <a:t>cleaner's rate $15</a:t>
-            </a:r>
-            <a:endParaRPr lang="en-US" sz="1000" dirty="0"/>
-          </a:p>
-        </p:txBody>
-      </p:sp>
-      <p:sp>
-        <p:nvSpPr>
-          <p:cNvPr id="13" name="Text 10"/>
-          <p:cNvSpPr txBox="1"/>
-          <p:nvPr/>
-        </p:nvSpPr>
-        <p:spPr>
-          <a:xfrm>
-            <a:off x="5715000" y="1371600"/>
-            <a:ext cx="457200" cy="1600200"/>
-          </a:xfrm>
-          <a:prstGeom prst="rect">
-            <a:avLst/>
-          </a:prstGeom>
-          <a:noFill/>
-          <a:ln/>
-        </p:spPr>
-        <p:txBody>
-          <a:bodyPr wrap="square" lIns="0" tIns="0" rIns="0" bIns="0" rtlCol="0" anchor="ctr"/>
-          <a:lstStyle/>
-          <a:p>
-            <a:pPr algn="ctr" indent="0" marL="0">
-              <a:buNone/>
-            </a:pPr>
-            <a:r>
-              <a:rPr lang="en-US" sz="2600" b="1" dirty="0">
-                <a:solidFill>
-                  <a:srgbClr val="6E6E73"/>
-                </a:solidFill>
-                <a:latin typeface="SF Pro Display" pitchFamily="34" charset="0"/>
-                <a:ea typeface="SF Pro Display" pitchFamily="34" charset="-122"/>
-                <a:cs typeface="SF Pro Display" pitchFamily="34" charset="-120"/>
-              </a:rPr>
-              <a:t>=</a:t>
-            </a:r>
-            <a:endParaRPr lang="en-US" sz="2600" dirty="0"/>
-          </a:p>
-        </p:txBody>
-      </p:sp>
-      <p:sp>
-        <p:nvSpPr>
-          <p:cNvPr id="14" name="Shape 11"/>
-          <p:cNvSpPr/>
-          <p:nvPr/>
-        </p:nvSpPr>
-        <p:spPr>
-          <a:xfrm>
-            <a:off x="6263640" y="1371600"/>
-            <a:ext cx="2194560" cy="1600200"/>
-          </a:xfrm>
-          <a:prstGeom prst="roundRect">
-            <a:avLst>
-              <a:gd name="adj" fmla="val 4571"/>
-            </a:avLst>
-          </a:prstGeom>
-          <a:solidFill>
-            <a:srgbClr val="0B7A6F"/>
-          </a:solidFill>
-          <a:ln w="9525">
-            <a:solidFill>
-              <a:srgbClr val="0B7A6F"/>
-            </a:solidFill>
-            <a:prstDash val="solid"/>
-          </a:ln>
-        </p:spPr>
-      </p:sp>
-      <p:sp>
-        <p:nvSpPr>
-          <p:cNvPr id="15" name="Text 12"/>
-          <p:cNvSpPr txBox="1"/>
-          <p:nvPr/>
-        </p:nvSpPr>
-        <p:spPr>
-          <a:xfrm>
-            <a:off x="6263640" y="1508760"/>
-            <a:ext cx="2194560" cy="640080"/>
-          </a:xfrm>
-          <a:prstGeom prst="rect">
-            <a:avLst/>
-          </a:prstGeom>
-          <a:noFill/>
-          <a:ln/>
-        </p:spPr>
-        <p:txBody>
-          <a:bodyPr wrap="square" lIns="0" tIns="0" rIns="0" bIns="0" rtlCol="0" anchor="ctr"/>
-          <a:lstStyle/>
-          <a:p>
-            <a:pPr algn="ctr" indent="0" marL="0">
-              <a:buNone/>
-            </a:pPr>
-            <a:r>
-              <a:rPr lang="en-US" sz="2800" b="1" dirty="0">
-                <a:solidFill>
-                  <a:srgbClr val="FFFFFF"/>
-                </a:solidFill>
-                <a:latin typeface="SF Pro Display" pitchFamily="34" charset="0"/>
-                <a:ea typeface="SF Pro Display" pitchFamily="34" charset="-122"/>
-                <a:cs typeface="SF Pro Display" pitchFamily="34" charset="-120"/>
-              </a:rPr>
-              <a:t>$40/hr</a:t>
-            </a:r>
-            <a:endParaRPr lang="en-US" sz="2800" dirty="0"/>
-          </a:p>
-        </p:txBody>
-      </p:sp>
-      <p:sp>
-        <p:nvSpPr>
-          <p:cNvPr id="16" name="Text 13"/>
-          <p:cNvSpPr txBox="1"/>
-          <p:nvPr/>
-        </p:nvSpPr>
-        <p:spPr>
-          <a:xfrm>
-            <a:off x="6263640" y="2194560"/>
-            <a:ext cx="2194560" cy="640080"/>
-          </a:xfrm>
-          <a:prstGeom prst="rect">
-            <a:avLst/>
-          </a:prstGeom>
-          <a:noFill/>
-          <a:ln/>
-        </p:spPr>
-        <p:txBody>
-          <a:bodyPr wrap="square" lIns="0" tIns="0" rIns="0" bIns="0" rtlCol="0" anchor="t"/>
-          <a:lstStyle/>
-          <a:p>
-            <a:pPr algn="ctr" indent="0" marL="0">
-              <a:buNone/>
-            </a:pPr>
-            <a:r>
-              <a:rPr lang="en-US" sz="1000" dirty="0">
-                <a:solidFill>
-                  <a:srgbClr val="FFFFFF"/>
-                </a:solidFill>
-                <a:latin typeface="SF Pro Text" pitchFamily="34" charset="0"/>
-                <a:ea typeface="SF Pro Text" pitchFamily="34" charset="-122"/>
-                <a:cs typeface="SF Pro Text" pitchFamily="34" charset="-120"/>
-              </a:rPr>
-              <a:t>Platform fee</a:t>
-            </a:r>
-            <a:endParaRPr lang="en-US" sz="1000" dirty="0"/>
-          </a:p>
-          <a:p>
-            <a:pPr algn="ctr" indent="0" marL="0">
-              <a:buNone/>
-            </a:pPr>
-            <a:r>
-              <a:rPr lang="en-US" sz="1000" dirty="0">
-                <a:solidFill>
-                  <a:srgbClr val="FFFFFF"/>
-                </a:solidFill>
-                <a:latin typeface="SF Pro Text" pitchFamily="34" charset="0"/>
-                <a:ea typeface="SF Pro Text" pitchFamily="34" charset="-122"/>
-                <a:cs typeface="SF Pro Text" pitchFamily="34" charset="-120"/>
-              </a:rPr>
-              <a:t>on the invoice</a:t>
-            </a:r>
-            <a:endParaRPr lang="en-US" sz="1000" dirty="0"/>
-          </a:p>
-        </p:txBody>
-      </p:sp>
-      <p:sp>
-        <p:nvSpPr>
-          <p:cNvPr id="17" name="Shape 14"/>
-          <p:cNvSpPr/>
-          <p:nvPr/>
-        </p:nvSpPr>
-        <p:spPr>
-          <a:xfrm>
-            <a:off x="411480" y="3246120"/>
-            <a:ext cx="8321040" cy="384048"/>
-          </a:xfrm>
-          <a:prstGeom prst="roundRect">
-            <a:avLst>
-              <a:gd name="adj" fmla="val 19048"/>
-            </a:avLst>
-          </a:prstGeom>
-          <a:solidFill>
-            <a:srgbClr val="FFF3D6"/>
-          </a:solidFill>
-          <a:ln w="9525">
-            <a:solidFill>
-              <a:srgbClr val="FFF3D6"/>
-            </a:solidFill>
-            <a:prstDash val="solid"/>
-          </a:ln>
-        </p:spPr>
-      </p:sp>
-      <p:pic>
-        <p:nvPicPr>
-          <p:cNvPr id="18" name="Image 0" descr="preencoded.png">    </p:cNvPr>
-          <p:cNvPicPr>
-            <a:picLocks noChangeAspect="1"/>
-          </p:cNvPicPr>
-          <p:nvPr/>
-        </p:nvPicPr>
-        <p:blipFill>
-          <a:blip r:embed="rId1"/>
-          <a:stretch>
-            <a:fillRect/>
-          </a:stretch>
-        </p:blipFill>
-        <p:spPr>
-          <a:xfrm>
-            <a:off x="566928" y="3355848"/>
-            <a:ext cx="164592" cy="164592"/>
-          </a:xfrm>
-          <a:prstGeom prst="rect">
-            <a:avLst/>
-          </a:prstGeom>
-        </p:spPr>
-      </p:pic>
-      <p:sp>
-        <p:nvSpPr>
-          <p:cNvPr id="19" name="Text 15"/>
-          <p:cNvSpPr txBox="1"/>
-          <p:nvPr/>
-        </p:nvSpPr>
-        <p:spPr>
-          <a:xfrm>
-            <a:off x="822960" y="3346704"/>
-            <a:ext cx="7772400" cy="201168"/>
-          </a:xfrm>
-          <a:prstGeom prst="rect">
-            <a:avLst/>
-          </a:prstGeom>
-          <a:noFill/>
-          <a:ln/>
-        </p:spPr>
-        <p:txBody>
-          <a:bodyPr wrap="square" lIns="0" tIns="0" rIns="0" bIns="0" rtlCol="0" anchor="t"/>
-          <a:lstStyle/>
-          <a:p>
-            <a:pPr indent="0" marL="0">
-              <a:buNone/>
-            </a:pPr>
-            <a:r>
-              <a:rPr lang="en-US" sz="1000" b="1" dirty="0">
-                <a:solidFill>
-                  <a:srgbClr val="9A6410"/>
-                </a:solidFill>
-                <a:latin typeface="SF Pro Text" pitchFamily="34" charset="0"/>
-                <a:ea typeface="SF Pro Text" pitchFamily="34" charset="-122"/>
-                <a:cs typeface="SF Pro Text" pitchFamily="34" charset="-120"/>
-              </a:rPr>
-              <a:t>Correct charge:  </a:t>
-            </a:r>
-            <a:pPr indent="0" marL="0">
-              <a:buNone/>
-            </a:pPr>
-            <a:r>
-              <a:rPr lang="en-US" sz="1000" dirty="0">
-                <a:solidFill>
-                  <a:srgbClr val="1D1D1F"/>
-                </a:solidFill>
-                <a:latin typeface="SF Pro Text" pitchFamily="34" charset="0"/>
-                <a:ea typeface="SF Pro Text" pitchFamily="34" charset="-122"/>
-                <a:cs typeface="SF Pro Text" pitchFamily="34" charset="-120"/>
-              </a:rPr>
-              <a:t>don't reprice it and don't refund the difference. The cleaner is still paid $15/hr.</a:t>
-            </a:r>
-            <a:endParaRPr lang="en-US" sz="1000" dirty="0"/>
-          </a:p>
-        </p:txBody>
-      </p:sp>
-      <p:sp>
-        <p:nvSpPr>
-          <p:cNvPr id="25" name="Slide Number Placeholder 0"/>
-          <p:cNvSpPr>
-            <a:spLocks noGrp="1"/>
-          </p:cNvSpPr>
-          <p:nvPr>
-            <p:ph type="sldNum" sz="quarter" idx="4294967295"/>
-          </p:nvPr>
-        </p:nvSpPr>
-        <p:spPr>
-          <a:xfrm>
-            <a:off x="8229600" y="4800600"/>
-            <a:ext cx="457200" cy="182880"/>
-          </a:xfrm>
-          <a:prstGeom prst="rect">
-            <a:avLst/>
-          </a:prstGeom>
-          <a:extLst>
-            <a:ext uri="{C572A759-6A51-4108-AA02-DFA0A04FC94B}">
-              <ma14:wrappingTextBoxFlag xmlns:ma14="http://schemas.microsoft.com/office/mac/drawingml/2011/main" val="0"/>
-            </a:ext>
-          </a:extLst>
-        </p:spPr>
-        <p:txBody>
-          <a:bodyPr/>
-          <a:lstStyle>
-            <a:lvl1pPr>
-              <a:defRPr sz="700">
-                <a:solidFill>
-                  <a:srgbClr val="6E6E73"/>
-                </a:solidFill>
-                <a:latin typeface="SF Pro Text"/>
-                <a:ea typeface="SF Pro Text"/>
-                <a:cs typeface="SF Pro Text"/>
-              </a:defRPr>
-            </a:lvl1pPr>
-          </a:lstStyle>
-          <a:p>
-            <a:pPr algn="r"/>
-            <a:fld id="{F7021451-1387-4CA6-816F-3879F97B5CBC}" type="slidenum">
-              <a:rPr b="0" lang="en-US"/>
               <a:t>25</a:t>
             </a:fld>
             <a:endParaRPr lang="en-US"/>
@@ -17588,7 +18277,7 @@
                 <a:ea typeface="SF Pro Display" pitchFamily="34" charset="-122"/>
                 <a:cs typeface="SF Pro Display" pitchFamily="34" charset="-120"/>
               </a:rPr>
-              <a:t>Max requested rate</a:t>
+              <a:t>Worked example</a:t>
             </a:r>
             <a:endParaRPr lang="en-US" sz="2400" dirty="0"/>
           </a:p>
@@ -17627,7 +18316,7 @@
                 <a:ea typeface="SF Pro Text" pitchFamily="34" charset="-122"/>
                 <a:cs typeface="SF Pro Text" pitchFamily="34" charset="-120"/>
               </a:rPr>
-              <a:t>Non-FC and deactivated FC customers are priced at the highest rate among the cleaners they requested.</a:t>
+              <a:t>A deactivated FC customer sees a $40/hr platform fee. Is it right?</a:t>
             </a:r>
             <a:endParaRPr lang="en-US" sz="1200" dirty="0"/>
           </a:p>
@@ -17635,57 +18324,18 @@
       </p:sp>
       <p:sp>
         <p:nvSpPr>
-          <p:cNvPr id="6" name="Text 3"/>
-          <p:cNvSpPr txBox="1"/>
-          <p:nvPr/>
-        </p:nvSpPr>
-        <p:spPr>
-          <a:xfrm>
-            <a:off x="438912" y="1325880"/>
-            <a:ext cx="4572000" cy="182880"/>
-          </a:xfrm>
-          <a:prstGeom prst="rect">
-            <a:avLst/>
-          </a:prstGeom>
-          <a:noFill/>
-          <a:ln/>
-        </p:spPr>
-        <p:txBody>
-          <a:bodyPr wrap="square" lIns="0" tIns="0" rIns="0" bIns="0" rtlCol="0" anchor="t"/>
-          <a:lstStyle/>
-          <a:p>
-            <a:pPr indent="0" marL="0">
-              <a:buNone/>
-            </a:pPr>
-            <a:r>
-              <a:rPr lang="en-US" sz="800" b="1" spc="50" kern="0" dirty="0">
-                <a:solidFill>
-                  <a:srgbClr val="6E6E73"/>
-                </a:solidFill>
-                <a:latin typeface="SF Pro Display" pitchFamily="34" charset="0"/>
-                <a:ea typeface="SF Pro Display" pitchFamily="34" charset="-122"/>
-                <a:cs typeface="SF Pro Display" pitchFamily="34" charset="-120"/>
-              </a:rPr>
-              <a:t>REQUESTED CLEANERS</a:t>
-            </a:r>
-            <a:endParaRPr lang="en-US" sz="800" dirty="0"/>
-          </a:p>
-        </p:txBody>
-      </p:sp>
-      <p:sp>
-        <p:nvSpPr>
-          <p:cNvPr id="7" name="Shape 4"/>
+          <p:cNvPr id="6" name="Shape 3"/>
           <p:cNvSpPr/>
           <p:nvPr/>
         </p:nvSpPr>
         <p:spPr>
           <a:xfrm>
-            <a:off x="411480" y="1572768"/>
-            <a:ext cx="1261872" cy="914400"/>
+            <a:off x="594360" y="1371600"/>
+            <a:ext cx="2194560" cy="1600200"/>
           </a:xfrm>
           <a:prstGeom prst="roundRect">
             <a:avLst>
-              <a:gd name="adj" fmla="val 8000"/>
+              <a:gd name="adj" fmla="val 4571"/>
             </a:avLst>
           </a:prstGeom>
           <a:solidFill>
@@ -17701,14 +18351,14 @@
       </p:sp>
       <p:sp>
         <p:nvSpPr>
-          <p:cNvPr id="8" name="Text 5"/>
+          <p:cNvPr id="7" name="Text 4"/>
           <p:cNvSpPr txBox="1"/>
           <p:nvPr/>
         </p:nvSpPr>
         <p:spPr>
           <a:xfrm>
-            <a:off x="411480" y="1645920"/>
-            <a:ext cx="1261872" cy="320040"/>
+            <a:off x="594360" y="1508760"/>
+            <a:ext cx="2194560" cy="640080"/>
           </a:xfrm>
           <a:prstGeom prst="rect">
             <a:avLst/>
@@ -17717,24 +18367,80 @@
           <a:ln/>
         </p:spPr>
         <p:txBody>
-          <a:bodyPr wrap="square" lIns="0" tIns="0" rIns="0" bIns="0" rtlCol="0" anchor="t"/>
+          <a:bodyPr wrap="square" lIns="0" tIns="0" rIns="0" bIns="0" rtlCol="0" anchor="ctr"/>
           <a:lstStyle/>
           <a:p>
             <a:pPr algn="ctr" indent="0" marL="0">
               <a:buNone/>
             </a:pPr>
             <a:r>
-              <a:rPr lang="en-US" sz="1200" b="1" dirty="0">
-                <a:solidFill>
-                  <a:srgbClr val="1D1D1F"/>
+              <a:rPr lang="en-US" sz="2800" b="1" dirty="0">
+                <a:solidFill>
+                  <a:srgbClr val="0B7A6F"/>
                 </a:solidFill>
                 <a:latin typeface="SF Pro Display" pitchFamily="34" charset="0"/>
                 <a:ea typeface="SF Pro Display" pitchFamily="34" charset="-122"/>
                 <a:cs typeface="SF Pro Display" pitchFamily="34" charset="-120"/>
               </a:rPr>
-              <a:t>Mona</a:t>
-            </a:r>
-            <a:endParaRPr lang="en-US" sz="1200" dirty="0"/>
+              <a:t>$30/hr</a:t>
+            </a:r>
+            <a:endParaRPr lang="en-US" sz="2800" dirty="0"/>
+          </a:p>
+        </p:txBody>
+      </p:sp>
+      <p:sp>
+        <p:nvSpPr>
+          <p:cNvPr id="8" name="Text 5"/>
+          <p:cNvSpPr txBox="1"/>
+          <p:nvPr/>
+        </p:nvSpPr>
+        <p:spPr>
+          <a:xfrm>
+            <a:off x="594360" y="2194560"/>
+            <a:ext cx="2194560" cy="640080"/>
+          </a:xfrm>
+          <a:prstGeom prst="rect">
+            <a:avLst/>
+          </a:prstGeom>
+          <a:noFill/>
+          <a:ln/>
+        </p:spPr>
+        <p:txBody>
+          <a:bodyPr wrap="square" lIns="0" tIns="0" rIns="0" bIns="0" rtlCol="0" anchor="t"/>
+          <a:lstStyle/>
+          <a:p>
+            <a:pPr algn="ctr" indent="0" marL="0">
+              <a:buNone/>
+            </a:pPr>
+            <a:r>
+              <a:rPr lang="en-US" sz="1000" dirty="0">
+                <a:solidFill>
+                  <a:srgbClr val="6E6E73"/>
+                </a:solidFill>
+                <a:latin typeface="SF Pro Text" pitchFamily="34" charset="0"/>
+                <a:ea typeface="SF Pro Text" pitchFamily="34" charset="-122"/>
+                <a:cs typeface="SF Pro Text" pitchFamily="34" charset="-120"/>
+              </a:rPr>
+              <a:t>Deactivated FC</a:t>
+            </a:r>
+            <a:endParaRPr lang="en-US" sz="1000" dirty="0"/>
+          </a:p>
+          <a:p>
+            <a:pPr algn="ctr" indent="0" marL="0">
+              <a:buNone/>
+            </a:pPr>
+            <a:r>
+              <a:rPr lang="en-US" sz="1000" dirty="0">
+                <a:solidFill>
+                  <a:srgbClr val="6E6E73"/>
+                </a:solidFill>
+                <a:latin typeface="SF Pro Text" pitchFamily="34" charset="0"/>
+                <a:ea typeface="SF Pro Text" pitchFamily="34" charset="-122"/>
+                <a:cs typeface="SF Pro Text" pitchFamily="34" charset="-120"/>
+              </a:rPr>
+              <a:t>platform fee</a:t>
+            </a:r>
+            <a:endParaRPr lang="en-US" sz="1000" dirty="0"/>
           </a:p>
         </p:txBody>
       </p:sp>
@@ -17746,8 +18452,8 @@
         </p:nvSpPr>
         <p:spPr>
           <a:xfrm>
-            <a:off x="411480" y="1965960"/>
-            <a:ext cx="1261872" cy="365760"/>
+            <a:off x="2880360" y="1371600"/>
+            <a:ext cx="457200" cy="1600200"/>
           </a:xfrm>
           <a:prstGeom prst="rect">
             <a:avLst/>
@@ -17756,24 +18462,24 @@
           <a:ln/>
         </p:spPr>
         <p:txBody>
-          <a:bodyPr wrap="square" lIns="0" tIns="0" rIns="0" bIns="0" rtlCol="0" anchor="t"/>
+          <a:bodyPr wrap="square" lIns="0" tIns="0" rIns="0" bIns="0" rtlCol="0" anchor="ctr"/>
           <a:lstStyle/>
           <a:p>
             <a:pPr algn="ctr" indent="0" marL="0">
               <a:buNone/>
             </a:pPr>
             <a:r>
-              <a:rPr lang="en-US" sz="1500" b="1" dirty="0">
-                <a:solidFill>
-                  <a:srgbClr val="0B7A6F"/>
+              <a:rPr lang="en-US" sz="2600" b="1" dirty="0">
+                <a:solidFill>
+                  <a:srgbClr val="6E6E73"/>
                 </a:solidFill>
                 <a:latin typeface="SF Pro Display" pitchFamily="34" charset="0"/>
                 <a:ea typeface="SF Pro Display" pitchFamily="34" charset="-122"/>
                 <a:cs typeface="SF Pro Display" pitchFamily="34" charset="-120"/>
               </a:rPr>
-              <a:t>$25/hr</a:t>
-            </a:r>
-            <a:endParaRPr lang="en-US" sz="1500" dirty="0"/>
+              <a:t>+</a:t>
+            </a:r>
+            <a:endParaRPr lang="en-US" sz="2600" dirty="0"/>
           </a:p>
         </p:txBody>
       </p:sp>
@@ -17785,12 +18491,173 @@
         </p:nvSpPr>
         <p:spPr>
           <a:xfrm>
-            <a:off x="1783080" y="1572768"/>
-            <a:ext cx="1261872" cy="914400"/>
+            <a:off x="3429000" y="1371600"/>
+            <a:ext cx="2194560" cy="1600200"/>
           </a:xfrm>
           <a:prstGeom prst="roundRect">
             <a:avLst>
-              <a:gd name="adj" fmla="val 8000"/>
+              <a:gd name="adj" fmla="val 4571"/>
+            </a:avLst>
+          </a:prstGeom>
+          <a:solidFill>
+            <a:srgbClr val="FFFFFF"/>
+          </a:solidFill>
+          <a:ln w="9525">
+            <a:solidFill>
+              <a:srgbClr val="DCE1E7"/>
+            </a:solidFill>
+            <a:prstDash val="solid"/>
+          </a:ln>
+        </p:spPr>
+      </p:sp>
+      <p:sp>
+        <p:nvSpPr>
+          <p:cNvPr id="11" name="Text 8"/>
+          <p:cNvSpPr txBox="1"/>
+          <p:nvPr/>
+        </p:nvSpPr>
+        <p:spPr>
+          <a:xfrm>
+            <a:off x="3429000" y="1508760"/>
+            <a:ext cx="2194560" cy="640080"/>
+          </a:xfrm>
+          <a:prstGeom prst="rect">
+            <a:avLst/>
+          </a:prstGeom>
+          <a:noFill/>
+          <a:ln/>
+        </p:spPr>
+        <p:txBody>
+          <a:bodyPr wrap="square" lIns="0" tIns="0" rIns="0" bIns="0" rtlCol="0" anchor="ctr"/>
+          <a:lstStyle/>
+          <a:p>
+            <a:pPr algn="ctr" indent="0" marL="0">
+              <a:buNone/>
+            </a:pPr>
+            <a:r>
+              <a:rPr lang="en-US" sz="2800" b="1" dirty="0">
+                <a:solidFill>
+                  <a:srgbClr val="0B7A6F"/>
+                </a:solidFill>
+                <a:latin typeface="SF Pro Display" pitchFamily="34" charset="0"/>
+                <a:ea typeface="SF Pro Display" pitchFamily="34" charset="-122"/>
+                <a:cs typeface="SF Pro Display" pitchFamily="34" charset="-120"/>
+              </a:rPr>
+              <a:t>$10/hr</a:t>
+            </a:r>
+            <a:endParaRPr lang="en-US" sz="2800" dirty="0"/>
+          </a:p>
+        </p:txBody>
+      </p:sp>
+      <p:sp>
+        <p:nvSpPr>
+          <p:cNvPr id="12" name="Text 9"/>
+          <p:cNvSpPr txBox="1"/>
+          <p:nvPr/>
+        </p:nvSpPr>
+        <p:spPr>
+          <a:xfrm>
+            <a:off x="3429000" y="2194560"/>
+            <a:ext cx="2194560" cy="640080"/>
+          </a:xfrm>
+          <a:prstGeom prst="rect">
+            <a:avLst/>
+          </a:prstGeom>
+          <a:noFill/>
+          <a:ln/>
+        </p:spPr>
+        <p:txBody>
+          <a:bodyPr wrap="square" lIns="0" tIns="0" rIns="0" bIns="0" rtlCol="0" anchor="t"/>
+          <a:lstStyle/>
+          <a:p>
+            <a:pPr algn="ctr" indent="0" marL="0">
+              <a:buNone/>
+            </a:pPr>
+            <a:r>
+              <a:rPr lang="en-US" sz="1000" dirty="0">
+                <a:solidFill>
+                  <a:srgbClr val="6E6E73"/>
+                </a:solidFill>
+                <a:latin typeface="SF Pro Text" pitchFamily="34" charset="0"/>
+                <a:ea typeface="SF Pro Text" pitchFamily="34" charset="-122"/>
+                <a:cs typeface="SF Pro Text" pitchFamily="34" charset="-120"/>
+              </a:rPr>
+              <a:t>Max rate $25 −</a:t>
+            </a:r>
+            <a:endParaRPr lang="en-US" sz="1000" dirty="0"/>
+          </a:p>
+          <a:p>
+            <a:pPr algn="ctr" indent="0" marL="0">
+              <a:buNone/>
+            </a:pPr>
+            <a:r>
+              <a:rPr lang="en-US" sz="1000" dirty="0">
+                <a:solidFill>
+                  <a:srgbClr val="6E6E73"/>
+                </a:solidFill>
+                <a:latin typeface="SF Pro Text" pitchFamily="34" charset="0"/>
+                <a:ea typeface="SF Pro Text" pitchFamily="34" charset="-122"/>
+                <a:cs typeface="SF Pro Text" pitchFamily="34" charset="-120"/>
+              </a:rPr>
+              <a:t>cleaner's rate $15</a:t>
+            </a:r>
+            <a:endParaRPr lang="en-US" sz="1000" dirty="0"/>
+          </a:p>
+        </p:txBody>
+      </p:sp>
+      <p:sp>
+        <p:nvSpPr>
+          <p:cNvPr id="13" name="Text 10"/>
+          <p:cNvSpPr txBox="1"/>
+          <p:nvPr/>
+        </p:nvSpPr>
+        <p:spPr>
+          <a:xfrm>
+            <a:off x="5715000" y="1371600"/>
+            <a:ext cx="457200" cy="1600200"/>
+          </a:xfrm>
+          <a:prstGeom prst="rect">
+            <a:avLst/>
+          </a:prstGeom>
+          <a:noFill/>
+          <a:ln/>
+        </p:spPr>
+        <p:txBody>
+          <a:bodyPr wrap="square" lIns="0" tIns="0" rIns="0" bIns="0" rtlCol="0" anchor="ctr"/>
+          <a:lstStyle/>
+          <a:p>
+            <a:pPr algn="ctr" indent="0" marL="0">
+              <a:buNone/>
+            </a:pPr>
+            <a:r>
+              <a:rPr lang="en-US" sz="2600" b="1" dirty="0">
+                <a:solidFill>
+                  <a:srgbClr val="6E6E73"/>
+                </a:solidFill>
+                <a:latin typeface="SF Pro Display" pitchFamily="34" charset="0"/>
+                <a:ea typeface="SF Pro Display" pitchFamily="34" charset="-122"/>
+                <a:cs typeface="SF Pro Display" pitchFamily="34" charset="-120"/>
+              </a:rPr>
+              <a:t>=</a:t>
+            </a:r>
+            <a:endParaRPr lang="en-US" sz="2600" dirty="0"/>
+          </a:p>
+        </p:txBody>
+      </p:sp>
+      <p:sp>
+        <p:nvSpPr>
+          <p:cNvPr id="14" name="Shape 11"/>
+          <p:cNvSpPr/>
+          <p:nvPr/>
+        </p:nvSpPr>
+        <p:spPr>
+          <a:xfrm>
+            <a:off x="6263640" y="1371600"/>
+            <a:ext cx="2194560" cy="1600200"/>
+          </a:xfrm>
+          <a:prstGeom prst="roundRect">
+            <a:avLst>
+              <a:gd name="adj" fmla="val 4571"/>
             </a:avLst>
           </a:prstGeom>
           <a:solidFill>
@@ -17806,14 +18673,14 @@
       </p:sp>
       <p:sp>
         <p:nvSpPr>
-          <p:cNvPr id="11" name="Text 8"/>
+          <p:cNvPr id="15" name="Text 12"/>
           <p:cNvSpPr txBox="1"/>
           <p:nvPr/>
         </p:nvSpPr>
         <p:spPr>
           <a:xfrm>
-            <a:off x="1783080" y="1645920"/>
-            <a:ext cx="1261872" cy="320040"/>
+            <a:off x="6263640" y="1508760"/>
+            <a:ext cx="2194560" cy="640080"/>
           </a:xfrm>
           <a:prstGeom prst="rect">
             <a:avLst/>
@@ -17822,14 +18689,14 @@
           <a:ln/>
         </p:spPr>
         <p:txBody>
-          <a:bodyPr wrap="square" lIns="0" tIns="0" rIns="0" bIns="0" rtlCol="0" anchor="t"/>
+          <a:bodyPr wrap="square" lIns="0" tIns="0" rIns="0" bIns="0" rtlCol="0" anchor="ctr"/>
           <a:lstStyle/>
           <a:p>
             <a:pPr algn="ctr" indent="0" marL="0">
               <a:buNone/>
             </a:pPr>
             <a:r>
-              <a:rPr lang="en-US" sz="1200" b="1" dirty="0">
+              <a:rPr lang="en-US" sz="2800" b="1" dirty="0">
                 <a:solidFill>
                   <a:srgbClr val="FFFFFF"/>
                 </a:solidFill>
@@ -17837,22 +18704,22 @@
                 <a:ea typeface="SF Pro Display" pitchFamily="34" charset="-122"/>
                 <a:cs typeface="SF Pro Display" pitchFamily="34" charset="-120"/>
               </a:rPr>
-              <a:t>Cassandra</a:t>
-            </a:r>
-            <a:endParaRPr lang="en-US" sz="1200" dirty="0"/>
-          </a:p>
-        </p:txBody>
-      </p:sp>
-      <p:sp>
-        <p:nvSpPr>
-          <p:cNvPr id="12" name="Text 9"/>
+              <a:t>$40/hr</a:t>
+            </a:r>
+            <a:endParaRPr lang="en-US" sz="2800" dirty="0"/>
+          </a:p>
+        </p:txBody>
+      </p:sp>
+      <p:sp>
+        <p:nvSpPr>
+          <p:cNvPr id="16" name="Text 13"/>
           <p:cNvSpPr txBox="1"/>
           <p:nvPr/>
         </p:nvSpPr>
         <p:spPr>
           <a:xfrm>
-            <a:off x="1783080" y="1965960"/>
-            <a:ext cx="1261872" cy="365760"/>
+            <a:off x="6263640" y="2194560"/>
+            <a:ext cx="2194560" cy="640080"/>
           </a:xfrm>
           <a:prstGeom prst="rect">
             <a:avLst/>
@@ -17868,219 +18735,67 @@
               <a:buNone/>
             </a:pPr>
             <a:r>
-              <a:rPr lang="en-US" sz="1500" b="1" dirty="0">
+              <a:rPr lang="en-US" sz="1000" dirty="0">
                 <a:solidFill>
                   <a:srgbClr val="FFFFFF"/>
                 </a:solidFill>
-                <a:latin typeface="SF Pro Display" pitchFamily="34" charset="0"/>
-                <a:ea typeface="SF Pro Display" pitchFamily="34" charset="-122"/>
-                <a:cs typeface="SF Pro Display" pitchFamily="34" charset="-120"/>
-              </a:rPr>
-              <a:t>$30/hr</a:t>
-            </a:r>
-            <a:endParaRPr lang="en-US" sz="1500" dirty="0"/>
-          </a:p>
-        </p:txBody>
-      </p:sp>
-      <p:sp>
-        <p:nvSpPr>
-          <p:cNvPr id="13" name="Shape 10"/>
+                <a:latin typeface="SF Pro Text" pitchFamily="34" charset="0"/>
+                <a:ea typeface="SF Pro Text" pitchFamily="34" charset="-122"/>
+                <a:cs typeface="SF Pro Text" pitchFamily="34" charset="-120"/>
+              </a:rPr>
+              <a:t>Platform fee</a:t>
+            </a:r>
+            <a:endParaRPr lang="en-US" sz="1000" dirty="0"/>
+          </a:p>
+          <a:p>
+            <a:pPr algn="ctr" indent="0" marL="0">
+              <a:buNone/>
+            </a:pPr>
+            <a:r>
+              <a:rPr lang="en-US" sz="1000" dirty="0">
+                <a:solidFill>
+                  <a:srgbClr val="FFFFFF"/>
+                </a:solidFill>
+                <a:latin typeface="SF Pro Text" pitchFamily="34" charset="0"/>
+                <a:ea typeface="SF Pro Text" pitchFamily="34" charset="-122"/>
+                <a:cs typeface="SF Pro Text" pitchFamily="34" charset="-120"/>
+              </a:rPr>
+              <a:t>on the invoice</a:t>
+            </a:r>
+            <a:endParaRPr lang="en-US" sz="1000" dirty="0"/>
+          </a:p>
+        </p:txBody>
+      </p:sp>
+      <p:sp>
+        <p:nvSpPr>
+          <p:cNvPr id="17" name="Shape 14"/>
           <p:cNvSpPr/>
           <p:nvPr/>
         </p:nvSpPr>
         <p:spPr>
           <a:xfrm>
-            <a:off x="3154680" y="1572768"/>
-            <a:ext cx="1261872" cy="914400"/>
+            <a:off x="411480" y="3246120"/>
+            <a:ext cx="8321040" cy="384048"/>
           </a:xfrm>
           <a:prstGeom prst="roundRect">
             <a:avLst>
-              <a:gd name="adj" fmla="val 8000"/>
+              <a:gd name="adj" fmla="val 19048"/>
             </a:avLst>
           </a:prstGeom>
           <a:solidFill>
-            <a:srgbClr val="FFFFFF"/>
+            <a:srgbClr val="FFF3D6"/>
           </a:solidFill>
           <a:ln w="9525">
             <a:solidFill>
-              <a:srgbClr val="DCE1E7"/>
+              <a:srgbClr val="FFF3D6"/>
             </a:solidFill>
             <a:prstDash val="solid"/>
           </a:ln>
         </p:spPr>
       </p:sp>
-      <p:sp>
-        <p:nvSpPr>
-          <p:cNvPr id="14" name="Text 11"/>
-          <p:cNvSpPr txBox="1"/>
-          <p:nvPr/>
-        </p:nvSpPr>
-        <p:spPr>
-          <a:xfrm>
-            <a:off x="3154680" y="1645920"/>
-            <a:ext cx="1261872" cy="320040"/>
-          </a:xfrm>
-          <a:prstGeom prst="rect">
-            <a:avLst/>
-          </a:prstGeom>
-          <a:noFill/>
-          <a:ln/>
-        </p:spPr>
-        <p:txBody>
-          <a:bodyPr wrap="square" lIns="0" tIns="0" rIns="0" bIns="0" rtlCol="0" anchor="t"/>
-          <a:lstStyle/>
-          <a:p>
-            <a:pPr algn="ctr" indent="0" marL="0">
-              <a:buNone/>
-            </a:pPr>
-            <a:r>
-              <a:rPr lang="en-US" sz="1200" b="1" dirty="0">
-                <a:solidFill>
-                  <a:srgbClr val="1D1D1F"/>
-                </a:solidFill>
-                <a:latin typeface="SF Pro Display" pitchFamily="34" charset="0"/>
-                <a:ea typeface="SF Pro Display" pitchFamily="34" charset="-122"/>
-                <a:cs typeface="SF Pro Display" pitchFamily="34" charset="-120"/>
-              </a:rPr>
-              <a:t>Yolanda</a:t>
-            </a:r>
-            <a:endParaRPr lang="en-US" sz="1200" dirty="0"/>
-          </a:p>
-        </p:txBody>
-      </p:sp>
-      <p:sp>
-        <p:nvSpPr>
-          <p:cNvPr id="15" name="Text 12"/>
-          <p:cNvSpPr txBox="1"/>
-          <p:nvPr/>
-        </p:nvSpPr>
-        <p:spPr>
-          <a:xfrm>
-            <a:off x="3154680" y="1965960"/>
-            <a:ext cx="1261872" cy="365760"/>
-          </a:xfrm>
-          <a:prstGeom prst="rect">
-            <a:avLst/>
-          </a:prstGeom>
-          <a:noFill/>
-          <a:ln/>
-        </p:spPr>
-        <p:txBody>
-          <a:bodyPr wrap="square" lIns="0" tIns="0" rIns="0" bIns="0" rtlCol="0" anchor="t"/>
-          <a:lstStyle/>
-          <a:p>
-            <a:pPr algn="ctr" indent="0" marL="0">
-              <a:buNone/>
-            </a:pPr>
-            <a:r>
-              <a:rPr lang="en-US" sz="1500" b="1" dirty="0">
-                <a:solidFill>
-                  <a:srgbClr val="0B7A6F"/>
-                </a:solidFill>
-                <a:latin typeface="SF Pro Display" pitchFamily="34" charset="0"/>
-                <a:ea typeface="SF Pro Display" pitchFamily="34" charset="-122"/>
-                <a:cs typeface="SF Pro Display" pitchFamily="34" charset="-120"/>
-              </a:rPr>
-              <a:t>$23/hr</a:t>
-            </a:r>
-            <a:endParaRPr lang="en-US" sz="1500" dirty="0"/>
-          </a:p>
-        </p:txBody>
-      </p:sp>
-      <p:sp>
-        <p:nvSpPr>
-          <p:cNvPr id="16" name="Text 13"/>
-          <p:cNvSpPr txBox="1"/>
-          <p:nvPr/>
-        </p:nvSpPr>
-        <p:spPr>
-          <a:xfrm>
-            <a:off x="438912" y="2606040"/>
-            <a:ext cx="4023360" cy="274320"/>
-          </a:xfrm>
-          <a:prstGeom prst="rect">
-            <a:avLst/>
-          </a:prstGeom>
-          <a:noFill/>
-          <a:ln/>
-        </p:spPr>
-        <p:txBody>
-          <a:bodyPr wrap="square" lIns="0" tIns="0" rIns="0" bIns="0" rtlCol="0" anchor="t"/>
-          <a:lstStyle/>
-          <a:p>
-            <a:pPr indent="0" marL="0">
-              <a:buNone/>
-            </a:pPr>
-            <a:r>
-              <a:rPr lang="en-US" sz="1200" b="1" dirty="0">
-                <a:solidFill>
-                  <a:srgbClr val="0B7A6F"/>
-                </a:solidFill>
-                <a:latin typeface="SF Pro Display" pitchFamily="34" charset="0"/>
-                <a:ea typeface="SF Pro Display" pitchFamily="34" charset="-122"/>
-                <a:cs typeface="SF Pro Display" pitchFamily="34" charset="-120"/>
-              </a:rPr>
-              <a:t>Max requested rate: $30/hr</a:t>
-            </a:r>
-            <a:endParaRPr lang="en-US" sz="1200" dirty="0"/>
-          </a:p>
-        </p:txBody>
-      </p:sp>
-      <p:sp>
-        <p:nvSpPr>
-          <p:cNvPr id="17" name="Shape 14"/>
-          <p:cNvSpPr/>
-          <p:nvPr/>
-        </p:nvSpPr>
-        <p:spPr>
-          <a:xfrm>
-            <a:off x="4663440" y="1325880"/>
-            <a:ext cx="4069080" cy="1325880"/>
-          </a:xfrm>
-          <a:prstGeom prst="roundRect">
-            <a:avLst>
-              <a:gd name="adj" fmla="val 5517"/>
-            </a:avLst>
-          </a:prstGeom>
-          <a:solidFill>
-            <a:srgbClr val="FFFFFF"/>
-          </a:solidFill>
-          <a:ln w="9525">
-            <a:solidFill>
-              <a:srgbClr val="DCE1E7"/>
-            </a:solidFill>
-            <a:prstDash val="solid"/>
-          </a:ln>
-        </p:spPr>
-      </p:sp>
-      <p:sp>
-        <p:nvSpPr>
-          <p:cNvPr id="18" name="Shape 15"/>
-          <p:cNvSpPr/>
-          <p:nvPr/>
-        </p:nvSpPr>
-        <p:spPr>
-          <a:xfrm>
-            <a:off x="4828032" y="1490472"/>
-            <a:ext cx="329184" cy="329184"/>
-          </a:xfrm>
-          <a:prstGeom prst="ellipse">
-            <a:avLst/>
-          </a:prstGeom>
-          <a:solidFill>
-            <a:srgbClr val="E3F4F1"/>
-          </a:solidFill>
-          <a:ln w="12700">
-            <a:solidFill>
-              <a:srgbClr val="E3F4F1"/>
-            </a:solidFill>
-            <a:prstDash val="solid"/>
-          </a:ln>
-        </p:spPr>
-      </p:sp>
       <p:pic>
         <p:nvPicPr>
-          <p:cNvPr id="19" name="Image 0" descr="preencoded.png">    </p:cNvPr>
+          <p:cNvPr id="18" name="Image 0" descr="preencoded.png">    </p:cNvPr>
           <p:cNvPicPr>
             <a:picLocks noChangeAspect="1"/>
           </p:cNvPicPr>
@@ -18094,8 +18809,8 @@
         </p:blipFill>
         <p:spPr>
           <a:xfrm>
-            <a:off x="4907036" y="1569476"/>
-            <a:ext cx="171176" cy="171176"/>
+            <a:off x="566928" y="3355848"/>
+            <a:ext cx="164592" cy="164592"/>
           </a:xfrm>
           <a:prstGeom prst="rect">
             <a:avLst/>
@@ -18104,14 +18819,14 @@
       </p:pic>
       <p:sp>
         <p:nvSpPr>
-          <p:cNvPr id="20" name="Text 16"/>
+          <p:cNvPr id="19" name="Text 15"/>
           <p:cNvSpPr txBox="1"/>
           <p:nvPr/>
         </p:nvSpPr>
         <p:spPr>
           <a:xfrm>
-            <a:off x="4828032" y="1929384"/>
-            <a:ext cx="3739896" cy="274320"/>
+            <a:off x="822960" y="3346704"/>
+            <a:ext cx="7772400" cy="201168"/>
           </a:xfrm>
           <a:prstGeom prst="rect">
             <a:avLst/>
@@ -18127,249 +18842,31 @@
               <a:buNone/>
             </a:pPr>
             <a:r>
-              <a:rPr lang="en-US" sz="1200" b="1" dirty="0">
-                <a:solidFill>
-                  <a:srgbClr val="1D1D1F"/>
-                </a:solidFill>
-                <a:latin typeface="SF Pro Display" pitchFamily="34" charset="0"/>
-                <a:ea typeface="SF Pro Display" pitchFamily="34" charset="-122"/>
-                <a:cs typeface="SF Pro Display" pitchFamily="34" charset="-120"/>
-              </a:rPr>
-              <a:t>A requested cleaner claims</a:t>
-            </a:r>
-            <a:endParaRPr lang="en-US" sz="1200" dirty="0"/>
-          </a:p>
-        </p:txBody>
-      </p:sp>
-      <p:sp>
-        <p:nvSpPr>
-          <p:cNvPr id="21" name="Text 17"/>
-          <p:cNvSpPr txBox="1"/>
-          <p:nvPr/>
-        </p:nvSpPr>
-        <p:spPr>
-          <a:xfrm>
-            <a:off x="4828032" y="2221992"/>
-            <a:ext cx="3739896" cy="338328"/>
-          </a:xfrm>
-          <a:prstGeom prst="rect">
-            <a:avLst/>
-          </a:prstGeom>
-          <a:noFill/>
-          <a:ln/>
-        </p:spPr>
-        <p:txBody>
-          <a:bodyPr wrap="square" lIns="0" tIns="0" rIns="0" bIns="0" rtlCol="0" anchor="t"/>
-          <a:lstStyle/>
-          <a:p>
-            <a:pPr indent="0" marL="0">
-              <a:buNone/>
-            </a:pPr>
-            <a:r>
-              <a:rPr lang="en-US" sz="950" dirty="0">
-                <a:solidFill>
-                  <a:srgbClr val="6E6E73"/>
+              <a:rPr lang="en-US" sz="1000" b="1" dirty="0">
+                <a:solidFill>
+                  <a:srgbClr val="9A6410"/>
                 </a:solidFill>
                 <a:latin typeface="SF Pro Text" pitchFamily="34" charset="0"/>
                 <a:ea typeface="SF Pro Text" pitchFamily="34" charset="-122"/>
                 <a:cs typeface="SF Pro Text" pitchFamily="34" charset="-120"/>
               </a:rPr>
-              <a:t>Mona claims: the customer pays Mona's rate, $25/hr.</a:t>
-            </a:r>
-            <a:endParaRPr lang="en-US" sz="950" dirty="0"/>
-          </a:p>
-        </p:txBody>
-      </p:sp>
-      <p:sp>
-        <p:nvSpPr>
-          <p:cNvPr id="22" name="Shape 18"/>
-          <p:cNvSpPr/>
-          <p:nvPr/>
-        </p:nvSpPr>
-        <p:spPr>
-          <a:xfrm>
-            <a:off x="4663440" y="2743200"/>
-            <a:ext cx="4069080" cy="1325880"/>
-          </a:xfrm>
-          <a:prstGeom prst="roundRect">
-            <a:avLst>
-              <a:gd name="adj" fmla="val 5517"/>
-            </a:avLst>
-          </a:prstGeom>
-          <a:solidFill>
-            <a:srgbClr val="FFFFFF"/>
-          </a:solidFill>
-          <a:ln w="9525">
-            <a:solidFill>
-              <a:srgbClr val="DCE1E7"/>
-            </a:solidFill>
-            <a:prstDash val="solid"/>
-          </a:ln>
-        </p:spPr>
-      </p:sp>
-      <p:sp>
-        <p:nvSpPr>
-          <p:cNvPr id="23" name="Shape 19"/>
-          <p:cNvSpPr/>
-          <p:nvPr/>
-        </p:nvSpPr>
-        <p:spPr>
-          <a:xfrm>
-            <a:off x="4828032" y="2907792"/>
-            <a:ext cx="329184" cy="329184"/>
-          </a:xfrm>
-          <a:prstGeom prst="ellipse">
-            <a:avLst/>
-          </a:prstGeom>
-          <a:solidFill>
-            <a:srgbClr val="E3F4F1"/>
-          </a:solidFill>
-          <a:ln w="12700">
-            <a:solidFill>
-              <a:srgbClr val="E3F4F1"/>
-            </a:solidFill>
-            <a:prstDash val="solid"/>
-          </a:ln>
-        </p:spPr>
-      </p:sp>
-      <p:pic>
-        <p:nvPicPr>
-          <p:cNvPr id="24" name="Image 1" descr="preencoded.png">    </p:cNvPr>
-          <p:cNvPicPr>
-            <a:picLocks noChangeAspect="1"/>
-          </p:cNvPicPr>
-          <p:nvPr/>
-        </p:nvPicPr>
-        <p:blipFill>
-          <a:blip r:embed="rId2"/>
-          <a:stretch>
-            <a:fillRect/>
-          </a:stretch>
-        </p:blipFill>
-        <p:spPr>
-          <a:xfrm>
-            <a:off x="4907036" y="2986796"/>
-            <a:ext cx="171176" cy="171176"/>
-          </a:xfrm>
-          <a:prstGeom prst="rect">
-            <a:avLst/>
-          </a:prstGeom>
-        </p:spPr>
-      </p:pic>
-      <p:sp>
-        <p:nvSpPr>
-          <p:cNvPr id="25" name="Text 20"/>
-          <p:cNvSpPr txBox="1"/>
-          <p:nvPr/>
-        </p:nvSpPr>
-        <p:spPr>
-          <a:xfrm>
-            <a:off x="4828032" y="3346704"/>
-            <a:ext cx="3739896" cy="274320"/>
-          </a:xfrm>
-          <a:prstGeom prst="rect">
-            <a:avLst/>
-          </a:prstGeom>
-          <a:noFill/>
-          <a:ln/>
-        </p:spPr>
-        <p:txBody>
-          <a:bodyPr wrap="square" lIns="0" tIns="0" rIns="0" bIns="0" rtlCol="0" anchor="t"/>
-          <a:lstStyle/>
-          <a:p>
+              <a:t>Correct charge:  </a:t>
+            </a:r>
             <a:pPr indent="0" marL="0">
               <a:buNone/>
             </a:pPr>
             <a:r>
-              <a:rPr lang="en-US" sz="1200" b="1" dirty="0">
+              <a:rPr lang="en-US" sz="1000" dirty="0">
                 <a:solidFill>
                   <a:srgbClr val="1D1D1F"/>
-                </a:solidFill>
-                <a:latin typeface="SF Pro Display" pitchFamily="34" charset="0"/>
-                <a:ea typeface="SF Pro Display" pitchFamily="34" charset="-122"/>
-                <a:cs typeface="SF Pro Display" pitchFamily="34" charset="-120"/>
-              </a:rPr>
-              <a:t>Someone else claims</a:t>
-            </a:r>
-            <a:endParaRPr lang="en-US" sz="1200" dirty="0"/>
-          </a:p>
-        </p:txBody>
-      </p:sp>
-      <p:sp>
-        <p:nvSpPr>
-          <p:cNvPr id="26" name="Text 21"/>
-          <p:cNvSpPr txBox="1"/>
-          <p:nvPr/>
-        </p:nvSpPr>
-        <p:spPr>
-          <a:xfrm>
-            <a:off x="4828032" y="3639312"/>
-            <a:ext cx="3739896" cy="338328"/>
-          </a:xfrm>
-          <a:prstGeom prst="rect">
-            <a:avLst/>
-          </a:prstGeom>
-          <a:noFill/>
-          <a:ln/>
-        </p:spPr>
-        <p:txBody>
-          <a:bodyPr wrap="square" lIns="0" tIns="0" rIns="0" bIns="0" rtlCol="0" anchor="t"/>
-          <a:lstStyle/>
-          <a:p>
-            <a:pPr indent="0" marL="0">
-              <a:buNone/>
-            </a:pPr>
-            <a:r>
-              <a:rPr lang="en-US" sz="950" dirty="0">
-                <a:solidFill>
-                  <a:srgbClr val="6E6E73"/>
                 </a:solidFill>
                 <a:latin typeface="SF Pro Text" pitchFamily="34" charset="0"/>
                 <a:ea typeface="SF Pro Text" pitchFamily="34" charset="-122"/>
                 <a:cs typeface="SF Pro Text" pitchFamily="34" charset="-120"/>
               </a:rPr>
-              <a:t>Jeff ($18/hr) claims: the customer pays $30/hr. Jeff gets $18/hr.</a:t>
-            </a:r>
-            <a:endParaRPr lang="en-US" sz="950" dirty="0"/>
-          </a:p>
-        </p:txBody>
-      </p:sp>
-      <p:sp>
-        <p:nvSpPr>
-          <p:cNvPr id="27" name="Text 22"/>
-          <p:cNvSpPr txBox="1"/>
-          <p:nvPr/>
-        </p:nvSpPr>
-        <p:spPr>
-          <a:xfrm>
-            <a:off x="438912" y="3017520"/>
-            <a:ext cx="4023360" cy="822960"/>
-          </a:xfrm>
-          <a:prstGeom prst="rect">
-            <a:avLst/>
-          </a:prstGeom>
-          <a:noFill/>
-          <a:ln/>
-        </p:spPr>
-        <p:txBody>
-          <a:bodyPr wrap="square" lIns="0" tIns="0" rIns="0" bIns="0" rtlCol="0" anchor="t"/>
-          <a:lstStyle/>
-          <a:p>
-            <a:pPr indent="0" marL="0">
-              <a:buNone/>
-            </a:pPr>
-            <a:r>
-              <a:rPr lang="en-US" sz="1050" dirty="0">
-                <a:solidFill>
-                  <a:srgbClr val="6E6E73"/>
-                </a:solidFill>
-                <a:latin typeface="SF Pro Text" pitchFamily="34" charset="0"/>
-                <a:ea typeface="SF Pro Text" pitchFamily="34" charset="-122"/>
-                <a:cs typeface="SF Pro Text" pitchFamily="34" charset="-120"/>
-              </a:rPr>
-              <a:t>Requesting Cassandra shows the customer is willing to pay her rate, so it becomes their ceiling.</a:t>
-            </a:r>
-            <a:endParaRPr lang="en-US" sz="1050" dirty="0"/>
+              <a:t>don't reprice it and don't refund the difference. The cleaner is still paid $15/hr.</a:t>
+            </a:r>
+            <a:endParaRPr lang="en-US" sz="1000" dirty="0"/>
           </a:p>
         </p:txBody>
       </p:sp>
@@ -18518,7 +19015,7 @@
                 <a:ea typeface="SF Pro Display" pitchFamily="34" charset="-122"/>
                 <a:cs typeface="SF Pro Display" pitchFamily="34" charset="-120"/>
               </a:rPr>
-              <a:t>Before you explain or refund a fee</a:t>
+              <a:t>Max requested rate</a:t>
             </a:r>
             <a:endParaRPr lang="en-US" sz="2400" dirty="0"/>
           </a:p>
@@ -18557,7 +19054,7 @@
                 <a:ea typeface="SF Pro Text" pitchFamily="34" charset="-122"/>
                 <a:cs typeface="SF Pro Text" pitchFamily="34" charset="-120"/>
               </a:rPr>
-              <a:t>Three answers tell you which case you're in.</a:t>
+              <a:t>Non-FC and deactivated FC customers are priced at the highest rate among the cleaners they requested.</a:t>
             </a:r>
             <a:endParaRPr lang="en-US" sz="1200" dirty="0"/>
           </a:p>
@@ -18565,18 +19062,57 @@
       </p:sp>
       <p:sp>
         <p:nvSpPr>
-          <p:cNvPr id="6" name="Shape 3"/>
+          <p:cNvPr id="6" name="Text 3"/>
+          <p:cNvSpPr txBox="1"/>
+          <p:nvPr/>
+        </p:nvSpPr>
+        <p:spPr>
+          <a:xfrm>
+            <a:off x="438912" y="1325880"/>
+            <a:ext cx="4572000" cy="182880"/>
+          </a:xfrm>
+          <a:prstGeom prst="rect">
+            <a:avLst/>
+          </a:prstGeom>
+          <a:noFill/>
+          <a:ln/>
+        </p:spPr>
+        <p:txBody>
+          <a:bodyPr wrap="square" lIns="0" tIns="0" rIns="0" bIns="0" rtlCol="0" anchor="t"/>
+          <a:lstStyle/>
+          <a:p>
+            <a:pPr indent="0" marL="0">
+              <a:buNone/>
+            </a:pPr>
+            <a:r>
+              <a:rPr lang="en-US" sz="800" b="1" spc="50" kern="0" dirty="0">
+                <a:solidFill>
+                  <a:srgbClr val="6E6E73"/>
+                </a:solidFill>
+                <a:latin typeface="SF Pro Display" pitchFamily="34" charset="0"/>
+                <a:ea typeface="SF Pro Display" pitchFamily="34" charset="-122"/>
+                <a:cs typeface="SF Pro Display" pitchFamily="34" charset="-120"/>
+              </a:rPr>
+              <a:t>REQUESTED CLEANERS</a:t>
+            </a:r>
+            <a:endParaRPr lang="en-US" sz="800" dirty="0"/>
+          </a:p>
+        </p:txBody>
+      </p:sp>
+      <p:sp>
+        <p:nvSpPr>
+          <p:cNvPr id="7" name="Shape 4"/>
           <p:cNvSpPr/>
           <p:nvPr/>
         </p:nvSpPr>
         <p:spPr>
           <a:xfrm>
-            <a:off x="411480" y="1371600"/>
-            <a:ext cx="2682240" cy="1691640"/>
+            <a:off x="411480" y="1572768"/>
+            <a:ext cx="1261872" cy="914400"/>
           </a:xfrm>
           <a:prstGeom prst="roundRect">
             <a:avLst>
-              <a:gd name="adj" fmla="val 4324"/>
+              <a:gd name="adj" fmla="val 8000"/>
             </a:avLst>
           </a:prstGeom>
           <a:solidFill>
@@ -18592,14 +19128,368 @@
       </p:sp>
       <p:sp>
         <p:nvSpPr>
-          <p:cNvPr id="7" name="Shape 4"/>
+          <p:cNvPr id="8" name="Text 5"/>
+          <p:cNvSpPr txBox="1"/>
+          <p:nvPr/>
+        </p:nvSpPr>
+        <p:spPr>
+          <a:xfrm>
+            <a:off x="411480" y="1645920"/>
+            <a:ext cx="1261872" cy="320040"/>
+          </a:xfrm>
+          <a:prstGeom prst="rect">
+            <a:avLst/>
+          </a:prstGeom>
+          <a:noFill/>
+          <a:ln/>
+        </p:spPr>
+        <p:txBody>
+          <a:bodyPr wrap="square" lIns="0" tIns="0" rIns="0" bIns="0" rtlCol="0" anchor="t"/>
+          <a:lstStyle/>
+          <a:p>
+            <a:pPr algn="ctr" indent="0" marL="0">
+              <a:buNone/>
+            </a:pPr>
+            <a:r>
+              <a:rPr lang="en-US" sz="1200" b="1" dirty="0">
+                <a:solidFill>
+                  <a:srgbClr val="1D1D1F"/>
+                </a:solidFill>
+                <a:latin typeface="SF Pro Display" pitchFamily="34" charset="0"/>
+                <a:ea typeface="SF Pro Display" pitchFamily="34" charset="-122"/>
+                <a:cs typeface="SF Pro Display" pitchFamily="34" charset="-120"/>
+              </a:rPr>
+              <a:t>Mona</a:t>
+            </a:r>
+            <a:endParaRPr lang="en-US" sz="1200" dirty="0"/>
+          </a:p>
+        </p:txBody>
+      </p:sp>
+      <p:sp>
+        <p:nvSpPr>
+          <p:cNvPr id="9" name="Text 6"/>
+          <p:cNvSpPr txBox="1"/>
+          <p:nvPr/>
+        </p:nvSpPr>
+        <p:spPr>
+          <a:xfrm>
+            <a:off x="411480" y="1965960"/>
+            <a:ext cx="1261872" cy="365760"/>
+          </a:xfrm>
+          <a:prstGeom prst="rect">
+            <a:avLst/>
+          </a:prstGeom>
+          <a:noFill/>
+          <a:ln/>
+        </p:spPr>
+        <p:txBody>
+          <a:bodyPr wrap="square" lIns="0" tIns="0" rIns="0" bIns="0" rtlCol="0" anchor="t"/>
+          <a:lstStyle/>
+          <a:p>
+            <a:pPr algn="ctr" indent="0" marL="0">
+              <a:buNone/>
+            </a:pPr>
+            <a:r>
+              <a:rPr lang="en-US" sz="1500" b="1" dirty="0">
+                <a:solidFill>
+                  <a:srgbClr val="0B7A6F"/>
+                </a:solidFill>
+                <a:latin typeface="SF Pro Display" pitchFamily="34" charset="0"/>
+                <a:ea typeface="SF Pro Display" pitchFamily="34" charset="-122"/>
+                <a:cs typeface="SF Pro Display" pitchFamily="34" charset="-120"/>
+              </a:rPr>
+              <a:t>$25/hr</a:t>
+            </a:r>
+            <a:endParaRPr lang="en-US" sz="1500" dirty="0"/>
+          </a:p>
+        </p:txBody>
+      </p:sp>
+      <p:sp>
+        <p:nvSpPr>
+          <p:cNvPr id="10" name="Shape 7"/>
           <p:cNvSpPr/>
           <p:nvPr/>
         </p:nvSpPr>
         <p:spPr>
           <a:xfrm>
-            <a:off x="576072" y="1554480"/>
-            <a:ext cx="274320" cy="274320"/>
+            <a:off x="1783080" y="1572768"/>
+            <a:ext cx="1261872" cy="914400"/>
+          </a:xfrm>
+          <a:prstGeom prst="roundRect">
+            <a:avLst>
+              <a:gd name="adj" fmla="val 8000"/>
+            </a:avLst>
+          </a:prstGeom>
+          <a:solidFill>
+            <a:srgbClr val="0B7A6F"/>
+          </a:solidFill>
+          <a:ln w="9525">
+            <a:solidFill>
+              <a:srgbClr val="0B7A6F"/>
+            </a:solidFill>
+            <a:prstDash val="solid"/>
+          </a:ln>
+        </p:spPr>
+      </p:sp>
+      <p:sp>
+        <p:nvSpPr>
+          <p:cNvPr id="11" name="Text 8"/>
+          <p:cNvSpPr txBox="1"/>
+          <p:nvPr/>
+        </p:nvSpPr>
+        <p:spPr>
+          <a:xfrm>
+            <a:off x="1783080" y="1645920"/>
+            <a:ext cx="1261872" cy="320040"/>
+          </a:xfrm>
+          <a:prstGeom prst="rect">
+            <a:avLst/>
+          </a:prstGeom>
+          <a:noFill/>
+          <a:ln/>
+        </p:spPr>
+        <p:txBody>
+          <a:bodyPr wrap="square" lIns="0" tIns="0" rIns="0" bIns="0" rtlCol="0" anchor="t"/>
+          <a:lstStyle/>
+          <a:p>
+            <a:pPr algn="ctr" indent="0" marL="0">
+              <a:buNone/>
+            </a:pPr>
+            <a:r>
+              <a:rPr lang="en-US" sz="1200" b="1" dirty="0">
+                <a:solidFill>
+                  <a:srgbClr val="FFFFFF"/>
+                </a:solidFill>
+                <a:latin typeface="SF Pro Display" pitchFamily="34" charset="0"/>
+                <a:ea typeface="SF Pro Display" pitchFamily="34" charset="-122"/>
+                <a:cs typeface="SF Pro Display" pitchFamily="34" charset="-120"/>
+              </a:rPr>
+              <a:t>Cassandra</a:t>
+            </a:r>
+            <a:endParaRPr lang="en-US" sz="1200" dirty="0"/>
+          </a:p>
+        </p:txBody>
+      </p:sp>
+      <p:sp>
+        <p:nvSpPr>
+          <p:cNvPr id="12" name="Text 9"/>
+          <p:cNvSpPr txBox="1"/>
+          <p:nvPr/>
+        </p:nvSpPr>
+        <p:spPr>
+          <a:xfrm>
+            <a:off x="1783080" y="1965960"/>
+            <a:ext cx="1261872" cy="365760"/>
+          </a:xfrm>
+          <a:prstGeom prst="rect">
+            <a:avLst/>
+          </a:prstGeom>
+          <a:noFill/>
+          <a:ln/>
+        </p:spPr>
+        <p:txBody>
+          <a:bodyPr wrap="square" lIns="0" tIns="0" rIns="0" bIns="0" rtlCol="0" anchor="t"/>
+          <a:lstStyle/>
+          <a:p>
+            <a:pPr algn="ctr" indent="0" marL="0">
+              <a:buNone/>
+            </a:pPr>
+            <a:r>
+              <a:rPr lang="en-US" sz="1500" b="1" dirty="0">
+                <a:solidFill>
+                  <a:srgbClr val="FFFFFF"/>
+                </a:solidFill>
+                <a:latin typeface="SF Pro Display" pitchFamily="34" charset="0"/>
+                <a:ea typeface="SF Pro Display" pitchFamily="34" charset="-122"/>
+                <a:cs typeface="SF Pro Display" pitchFamily="34" charset="-120"/>
+              </a:rPr>
+              <a:t>$30/hr</a:t>
+            </a:r>
+            <a:endParaRPr lang="en-US" sz="1500" dirty="0"/>
+          </a:p>
+        </p:txBody>
+      </p:sp>
+      <p:sp>
+        <p:nvSpPr>
+          <p:cNvPr id="13" name="Shape 10"/>
+          <p:cNvSpPr/>
+          <p:nvPr/>
+        </p:nvSpPr>
+        <p:spPr>
+          <a:xfrm>
+            <a:off x="3154680" y="1572768"/>
+            <a:ext cx="1261872" cy="914400"/>
+          </a:xfrm>
+          <a:prstGeom prst="roundRect">
+            <a:avLst>
+              <a:gd name="adj" fmla="val 8000"/>
+            </a:avLst>
+          </a:prstGeom>
+          <a:solidFill>
+            <a:srgbClr val="FFFFFF"/>
+          </a:solidFill>
+          <a:ln w="9525">
+            <a:solidFill>
+              <a:srgbClr val="DCE1E7"/>
+            </a:solidFill>
+            <a:prstDash val="solid"/>
+          </a:ln>
+        </p:spPr>
+      </p:sp>
+      <p:sp>
+        <p:nvSpPr>
+          <p:cNvPr id="14" name="Text 11"/>
+          <p:cNvSpPr txBox="1"/>
+          <p:nvPr/>
+        </p:nvSpPr>
+        <p:spPr>
+          <a:xfrm>
+            <a:off x="3154680" y="1645920"/>
+            <a:ext cx="1261872" cy="320040"/>
+          </a:xfrm>
+          <a:prstGeom prst="rect">
+            <a:avLst/>
+          </a:prstGeom>
+          <a:noFill/>
+          <a:ln/>
+        </p:spPr>
+        <p:txBody>
+          <a:bodyPr wrap="square" lIns="0" tIns="0" rIns="0" bIns="0" rtlCol="0" anchor="t"/>
+          <a:lstStyle/>
+          <a:p>
+            <a:pPr algn="ctr" indent="0" marL="0">
+              <a:buNone/>
+            </a:pPr>
+            <a:r>
+              <a:rPr lang="en-US" sz="1200" b="1" dirty="0">
+                <a:solidFill>
+                  <a:srgbClr val="1D1D1F"/>
+                </a:solidFill>
+                <a:latin typeface="SF Pro Display" pitchFamily="34" charset="0"/>
+                <a:ea typeface="SF Pro Display" pitchFamily="34" charset="-122"/>
+                <a:cs typeface="SF Pro Display" pitchFamily="34" charset="-120"/>
+              </a:rPr>
+              <a:t>Yolanda</a:t>
+            </a:r>
+            <a:endParaRPr lang="en-US" sz="1200" dirty="0"/>
+          </a:p>
+        </p:txBody>
+      </p:sp>
+      <p:sp>
+        <p:nvSpPr>
+          <p:cNvPr id="15" name="Text 12"/>
+          <p:cNvSpPr txBox="1"/>
+          <p:nvPr/>
+        </p:nvSpPr>
+        <p:spPr>
+          <a:xfrm>
+            <a:off x="3154680" y="1965960"/>
+            <a:ext cx="1261872" cy="365760"/>
+          </a:xfrm>
+          <a:prstGeom prst="rect">
+            <a:avLst/>
+          </a:prstGeom>
+          <a:noFill/>
+          <a:ln/>
+        </p:spPr>
+        <p:txBody>
+          <a:bodyPr wrap="square" lIns="0" tIns="0" rIns="0" bIns="0" rtlCol="0" anchor="t"/>
+          <a:lstStyle/>
+          <a:p>
+            <a:pPr algn="ctr" indent="0" marL="0">
+              <a:buNone/>
+            </a:pPr>
+            <a:r>
+              <a:rPr lang="en-US" sz="1500" b="1" dirty="0">
+                <a:solidFill>
+                  <a:srgbClr val="0B7A6F"/>
+                </a:solidFill>
+                <a:latin typeface="SF Pro Display" pitchFamily="34" charset="0"/>
+                <a:ea typeface="SF Pro Display" pitchFamily="34" charset="-122"/>
+                <a:cs typeface="SF Pro Display" pitchFamily="34" charset="-120"/>
+              </a:rPr>
+              <a:t>$23/hr</a:t>
+            </a:r>
+            <a:endParaRPr lang="en-US" sz="1500" dirty="0"/>
+          </a:p>
+        </p:txBody>
+      </p:sp>
+      <p:sp>
+        <p:nvSpPr>
+          <p:cNvPr id="16" name="Text 13"/>
+          <p:cNvSpPr txBox="1"/>
+          <p:nvPr/>
+        </p:nvSpPr>
+        <p:spPr>
+          <a:xfrm>
+            <a:off x="438912" y="2606040"/>
+            <a:ext cx="4023360" cy="274320"/>
+          </a:xfrm>
+          <a:prstGeom prst="rect">
+            <a:avLst/>
+          </a:prstGeom>
+          <a:noFill/>
+          <a:ln/>
+        </p:spPr>
+        <p:txBody>
+          <a:bodyPr wrap="square" lIns="0" tIns="0" rIns="0" bIns="0" rtlCol="0" anchor="t"/>
+          <a:lstStyle/>
+          <a:p>
+            <a:pPr indent="0" marL="0">
+              <a:buNone/>
+            </a:pPr>
+            <a:r>
+              <a:rPr lang="en-US" sz="1200" b="1" dirty="0">
+                <a:solidFill>
+                  <a:srgbClr val="0B7A6F"/>
+                </a:solidFill>
+                <a:latin typeface="SF Pro Display" pitchFamily="34" charset="0"/>
+                <a:ea typeface="SF Pro Display" pitchFamily="34" charset="-122"/>
+                <a:cs typeface="SF Pro Display" pitchFamily="34" charset="-120"/>
+              </a:rPr>
+              <a:t>Max requested rate: $30/hr</a:t>
+            </a:r>
+            <a:endParaRPr lang="en-US" sz="1200" dirty="0"/>
+          </a:p>
+        </p:txBody>
+      </p:sp>
+      <p:sp>
+        <p:nvSpPr>
+          <p:cNvPr id="17" name="Shape 14"/>
+          <p:cNvSpPr/>
+          <p:nvPr/>
+        </p:nvSpPr>
+        <p:spPr>
+          <a:xfrm>
+            <a:off x="4663440" y="1325880"/>
+            <a:ext cx="4069080" cy="1325880"/>
+          </a:xfrm>
+          <a:prstGeom prst="roundRect">
+            <a:avLst>
+              <a:gd name="adj" fmla="val 5517"/>
+            </a:avLst>
+          </a:prstGeom>
+          <a:solidFill>
+            <a:srgbClr val="FFFFFF"/>
+          </a:solidFill>
+          <a:ln w="9525">
+            <a:solidFill>
+              <a:srgbClr val="DCE1E7"/>
+            </a:solidFill>
+            <a:prstDash val="solid"/>
+          </a:ln>
+        </p:spPr>
+      </p:sp>
+      <p:sp>
+        <p:nvSpPr>
+          <p:cNvPr id="18" name="Shape 15"/>
+          <p:cNvSpPr/>
+          <p:nvPr/>
+        </p:nvSpPr>
+        <p:spPr>
+          <a:xfrm>
+            <a:off x="4828032" y="1490472"/>
+            <a:ext cx="329184" cy="329184"/>
           </a:xfrm>
           <a:prstGeom prst="ellipse">
             <a:avLst/>
@@ -18615,16 +19505,40 @@
           </a:ln>
         </p:spPr>
       </p:sp>
-      <p:sp>
-        <p:nvSpPr>
-          <p:cNvPr id="8" name="Text 5"/>
+      <p:pic>
+        <p:nvPicPr>
+          <p:cNvPr id="19" name="Image 0" descr="preencoded.png">    </p:cNvPr>
+          <p:cNvPicPr>
+            <a:picLocks noChangeAspect="1"/>
+          </p:cNvPicPr>
+          <p:nvPr/>
+        </p:nvPicPr>
+        <p:blipFill>
+          <a:blip r:embed="rId1"/>
+          <a:stretch>
+            <a:fillRect/>
+          </a:stretch>
+        </p:blipFill>
+        <p:spPr>
+          <a:xfrm>
+            <a:off x="4907036" y="1569476"/>
+            <a:ext cx="171176" cy="171176"/>
+          </a:xfrm>
+          <a:prstGeom prst="rect">
+            <a:avLst/>
+          </a:prstGeom>
+        </p:spPr>
+      </p:pic>
+      <p:sp>
+        <p:nvSpPr>
+          <p:cNvPr id="20" name="Text 16"/>
           <p:cNvSpPr txBox="1"/>
           <p:nvPr/>
         </p:nvSpPr>
         <p:spPr>
           <a:xfrm>
-            <a:off x="576072" y="1554480"/>
-            <a:ext cx="274320" cy="274320"/>
+            <a:off x="4828032" y="1929384"/>
+            <a:ext cx="3739896" cy="274320"/>
           </a:xfrm>
           <a:prstGeom prst="rect">
             <a:avLst/>
@@ -18633,76 +19547,37 @@
           <a:ln/>
         </p:spPr>
         <p:txBody>
-          <a:bodyPr wrap="square" lIns="0" tIns="0" rIns="0" bIns="0" rtlCol="0" anchor="ctr"/>
-          <a:lstStyle/>
-          <a:p>
-            <a:pPr algn="ctr" indent="0" marL="0">
-              <a:buNone/>
-            </a:pPr>
-            <a:r>
-              <a:rPr lang="en-US" sz="900" b="1" dirty="0">
-                <a:solidFill>
-                  <a:srgbClr val="0B7A6F"/>
+          <a:bodyPr wrap="square" lIns="0" tIns="0" rIns="0" bIns="0" rtlCol="0" anchor="t"/>
+          <a:lstStyle/>
+          <a:p>
+            <a:pPr indent="0" marL="0">
+              <a:buNone/>
+            </a:pPr>
+            <a:r>
+              <a:rPr lang="en-US" sz="1200" b="1" dirty="0">
+                <a:solidFill>
+                  <a:srgbClr val="1D1D1F"/>
                 </a:solidFill>
                 <a:latin typeface="SF Pro Display" pitchFamily="34" charset="0"/>
                 <a:ea typeface="SF Pro Display" pitchFamily="34" charset="-122"/>
                 <a:cs typeface="SF Pro Display" pitchFamily="34" charset="-120"/>
               </a:rPr>
-              <a:t>1</a:t>
-            </a:r>
-            <a:endParaRPr lang="en-US" sz="900" dirty="0"/>
-          </a:p>
-        </p:txBody>
-      </p:sp>
-      <p:sp>
-        <p:nvSpPr>
-          <p:cNvPr id="9" name="Text 6"/>
+              <a:t>A requested cleaner claims</a:t>
+            </a:r>
+            <a:endParaRPr lang="en-US" sz="1200" dirty="0"/>
+          </a:p>
+        </p:txBody>
+      </p:sp>
+      <p:sp>
+        <p:nvSpPr>
+          <p:cNvPr id="21" name="Text 17"/>
           <p:cNvSpPr txBox="1"/>
           <p:nvPr/>
         </p:nvSpPr>
         <p:spPr>
           <a:xfrm>
-            <a:off x="576072" y="1975104"/>
-            <a:ext cx="2353056" cy="274320"/>
-          </a:xfrm>
-          <a:prstGeom prst="rect">
-            <a:avLst/>
-          </a:prstGeom>
-          <a:noFill/>
-          <a:ln/>
-        </p:spPr>
-        <p:txBody>
-          <a:bodyPr wrap="square" lIns="0" tIns="0" rIns="0" bIns="0" rtlCol="0" anchor="t"/>
-          <a:lstStyle/>
-          <a:p>
-            <a:pPr indent="0" marL="0">
-              <a:buNone/>
-            </a:pPr>
-            <a:r>
-              <a:rPr lang="en-US" sz="1200" b="1" dirty="0">
-                <a:solidFill>
-                  <a:srgbClr val="1D1D1F"/>
-                </a:solidFill>
-                <a:latin typeface="SF Pro Display" pitchFamily="34" charset="0"/>
-                <a:ea typeface="SF Pro Display" pitchFamily="34" charset="-122"/>
-                <a:cs typeface="SF Pro Display" pitchFamily="34" charset="-120"/>
-              </a:rPr>
-              <a:t>Operating model</a:t>
-            </a:r>
-            <a:endParaRPr lang="en-US" sz="1200" dirty="0"/>
-          </a:p>
-        </p:txBody>
-      </p:sp>
-      <p:sp>
-        <p:nvSpPr>
-          <p:cNvPr id="10" name="Text 7"/>
-          <p:cNvSpPr txBox="1"/>
-          <p:nvPr/>
-        </p:nvSpPr>
-        <p:spPr>
-          <a:xfrm>
-            <a:off x="576072" y="2267712"/>
-            <a:ext cx="2353056" cy="704088"/>
+            <a:off x="4828032" y="2221992"/>
+            <a:ext cx="3739896" cy="338328"/>
           </a:xfrm>
           <a:prstGeom prst="rect">
             <a:avLst/>
@@ -18726,7 +19601,7 @@
                 <a:ea typeface="SF Pro Text" pitchFamily="34" charset="-122"/>
                 <a:cs typeface="SF Pro Text" pitchFamily="34" charset="-120"/>
               </a:rPr>
-              <a:t>CA/CA-WA or General? Look for the banner.</a:t>
+              <a:t>Mona claims: the customer pays Mona's rate, $25/hr.</a:t>
             </a:r>
             <a:endParaRPr lang="en-US" sz="950" dirty="0"/>
           </a:p>
@@ -18734,18 +19609,18 @@
       </p:sp>
       <p:sp>
         <p:nvSpPr>
-          <p:cNvPr id="11" name="Shape 8"/>
+          <p:cNvPr id="22" name="Shape 18"/>
           <p:cNvSpPr/>
           <p:nvPr/>
         </p:nvSpPr>
         <p:spPr>
           <a:xfrm>
-            <a:off x="3230880" y="1371600"/>
-            <a:ext cx="2682240" cy="1691640"/>
+            <a:off x="4663440" y="2743200"/>
+            <a:ext cx="4069080" cy="1325880"/>
           </a:xfrm>
           <a:prstGeom prst="roundRect">
             <a:avLst>
-              <a:gd name="adj" fmla="val 4324"/>
+              <a:gd name="adj" fmla="val 5517"/>
             </a:avLst>
           </a:prstGeom>
           <a:solidFill>
@@ -18761,14 +19636,14 @@
       </p:sp>
       <p:sp>
         <p:nvSpPr>
-          <p:cNvPr id="12" name="Shape 9"/>
+          <p:cNvPr id="23" name="Shape 19"/>
           <p:cNvSpPr/>
           <p:nvPr/>
         </p:nvSpPr>
         <p:spPr>
           <a:xfrm>
-            <a:off x="3395472" y="1554480"/>
-            <a:ext cx="274320" cy="274320"/>
+            <a:off x="4828032" y="2907792"/>
+            <a:ext cx="329184" cy="329184"/>
           </a:xfrm>
           <a:prstGeom prst="ellipse">
             <a:avLst/>
@@ -18784,337 +19659,24 @@
           </a:ln>
         </p:spPr>
       </p:sp>
-      <p:sp>
-        <p:nvSpPr>
-          <p:cNvPr id="13" name="Text 10"/>
-          <p:cNvSpPr txBox="1"/>
-          <p:nvPr/>
-        </p:nvSpPr>
-        <p:spPr>
-          <a:xfrm>
-            <a:off x="3395472" y="1554480"/>
-            <a:ext cx="274320" cy="274320"/>
-          </a:xfrm>
-          <a:prstGeom prst="rect">
-            <a:avLst/>
-          </a:prstGeom>
-          <a:noFill/>
-          <a:ln/>
-        </p:spPr>
-        <p:txBody>
-          <a:bodyPr wrap="square" lIns="0" tIns="0" rIns="0" bIns="0" rtlCol="0" anchor="ctr"/>
-          <a:lstStyle/>
-          <a:p>
-            <a:pPr algn="ctr" indent="0" marL="0">
-              <a:buNone/>
-            </a:pPr>
-            <a:r>
-              <a:rPr lang="en-US" sz="900" b="1" dirty="0">
-                <a:solidFill>
-                  <a:srgbClr val="0B7A6F"/>
-                </a:solidFill>
-                <a:latin typeface="SF Pro Display" pitchFamily="34" charset="0"/>
-                <a:ea typeface="SF Pro Display" pitchFamily="34" charset="-122"/>
-                <a:cs typeface="SF Pro Display" pitchFamily="34" charset="-120"/>
-              </a:rPr>
-              <a:t>2</a:t>
-            </a:r>
-            <a:endParaRPr lang="en-US" sz="900" dirty="0"/>
-          </a:p>
-        </p:txBody>
-      </p:sp>
-      <p:sp>
-        <p:nvSpPr>
-          <p:cNvPr id="14" name="Text 11"/>
-          <p:cNvSpPr txBox="1"/>
-          <p:nvPr/>
-        </p:nvSpPr>
-        <p:spPr>
-          <a:xfrm>
-            <a:off x="3395472" y="1975104"/>
-            <a:ext cx="2353056" cy="274320"/>
-          </a:xfrm>
-          <a:prstGeom prst="rect">
-            <a:avLst/>
-          </a:prstGeom>
-          <a:noFill/>
-          <a:ln/>
-        </p:spPr>
-        <p:txBody>
-          <a:bodyPr wrap="square" lIns="0" tIns="0" rIns="0" bIns="0" rtlCol="0" anchor="t"/>
-          <a:lstStyle/>
-          <a:p>
-            <a:pPr indent="0" marL="0">
-              <a:buNone/>
-            </a:pPr>
-            <a:r>
-              <a:rPr lang="en-US" sz="1200" b="1" dirty="0">
-                <a:solidFill>
-                  <a:srgbClr val="1D1D1F"/>
-                </a:solidFill>
-                <a:latin typeface="SF Pro Display" pitchFamily="34" charset="0"/>
-                <a:ea typeface="SF Pro Display" pitchFamily="34" charset="-122"/>
-                <a:cs typeface="SF Pro Display" pitchFamily="34" charset="-120"/>
-              </a:rPr>
-              <a:t>Membership status</a:t>
-            </a:r>
-            <a:endParaRPr lang="en-US" sz="1200" dirty="0"/>
-          </a:p>
-        </p:txBody>
-      </p:sp>
-      <p:sp>
-        <p:nvSpPr>
-          <p:cNvPr id="15" name="Text 12"/>
-          <p:cNvSpPr txBox="1"/>
-          <p:nvPr/>
-        </p:nvSpPr>
-        <p:spPr>
-          <a:xfrm>
-            <a:off x="3395472" y="2267712"/>
-            <a:ext cx="2353056" cy="704088"/>
-          </a:xfrm>
-          <a:prstGeom prst="rect">
-            <a:avLst/>
-          </a:prstGeom>
-          <a:noFill/>
-          <a:ln/>
-        </p:spPr>
-        <p:txBody>
-          <a:bodyPr wrap="square" lIns="0" tIns="0" rIns="0" bIns="0" rtlCol="0" anchor="t"/>
-          <a:lstStyle/>
-          <a:p>
-            <a:pPr indent="0" marL="0">
-              <a:buNone/>
-            </a:pPr>
-            <a:r>
-              <a:rPr lang="en-US" sz="950" dirty="0">
-                <a:solidFill>
-                  <a:srgbClr val="6E6E73"/>
-                </a:solidFill>
-                <a:latin typeface="SF Pro Text" pitchFamily="34" charset="0"/>
-                <a:ea typeface="SF Pro Text" pitchFamily="34" charset="-122"/>
-                <a:cs typeface="SF Pro Text" pitchFamily="34" charset="-120"/>
-              </a:rPr>
-              <a:t>FC, non-FC, or deactivated FC?</a:t>
-            </a:r>
-            <a:endParaRPr lang="en-US" sz="950" dirty="0"/>
-          </a:p>
-        </p:txBody>
-      </p:sp>
-      <p:sp>
-        <p:nvSpPr>
-          <p:cNvPr id="16" name="Shape 13"/>
-          <p:cNvSpPr/>
-          <p:nvPr/>
-        </p:nvSpPr>
-        <p:spPr>
-          <a:xfrm>
-            <a:off x="6050280" y="1371600"/>
-            <a:ext cx="2682240" cy="1691640"/>
-          </a:xfrm>
-          <a:prstGeom prst="roundRect">
-            <a:avLst>
-              <a:gd name="adj" fmla="val 4324"/>
-            </a:avLst>
-          </a:prstGeom>
-          <a:solidFill>
-            <a:srgbClr val="FFFFFF"/>
-          </a:solidFill>
-          <a:ln w="9525">
-            <a:solidFill>
-              <a:srgbClr val="DCE1E7"/>
-            </a:solidFill>
-            <a:prstDash val="solid"/>
-          </a:ln>
-        </p:spPr>
-      </p:sp>
-      <p:sp>
-        <p:nvSpPr>
-          <p:cNvPr id="17" name="Shape 14"/>
-          <p:cNvSpPr/>
-          <p:nvPr/>
-        </p:nvSpPr>
-        <p:spPr>
-          <a:xfrm>
-            <a:off x="6214872" y="1554480"/>
-            <a:ext cx="274320" cy="274320"/>
-          </a:xfrm>
-          <a:prstGeom prst="ellipse">
-            <a:avLst/>
-          </a:prstGeom>
-          <a:solidFill>
-            <a:srgbClr val="E3F4F1"/>
-          </a:solidFill>
-          <a:ln w="12700">
-            <a:solidFill>
-              <a:srgbClr val="E3F4F1"/>
-            </a:solidFill>
-            <a:prstDash val="solid"/>
-          </a:ln>
-        </p:spPr>
-      </p:sp>
-      <p:sp>
-        <p:nvSpPr>
-          <p:cNvPr id="18" name="Text 15"/>
-          <p:cNvSpPr txBox="1"/>
-          <p:nvPr/>
-        </p:nvSpPr>
-        <p:spPr>
-          <a:xfrm>
-            <a:off x="6214872" y="1554480"/>
-            <a:ext cx="274320" cy="274320"/>
-          </a:xfrm>
-          <a:prstGeom prst="rect">
-            <a:avLst/>
-          </a:prstGeom>
-          <a:noFill/>
-          <a:ln/>
-        </p:spPr>
-        <p:txBody>
-          <a:bodyPr wrap="square" lIns="0" tIns="0" rIns="0" bIns="0" rtlCol="0" anchor="ctr"/>
-          <a:lstStyle/>
-          <a:p>
-            <a:pPr algn="ctr" indent="0" marL="0">
-              <a:buNone/>
-            </a:pPr>
-            <a:r>
-              <a:rPr lang="en-US" sz="900" b="1" dirty="0">
-                <a:solidFill>
-                  <a:srgbClr val="0B7A6F"/>
-                </a:solidFill>
-                <a:latin typeface="SF Pro Display" pitchFamily="34" charset="0"/>
-                <a:ea typeface="SF Pro Display" pitchFamily="34" charset="-122"/>
-                <a:cs typeface="SF Pro Display" pitchFamily="34" charset="-120"/>
-              </a:rPr>
-              <a:t>3</a:t>
-            </a:r>
-            <a:endParaRPr lang="en-US" sz="900" dirty="0"/>
-          </a:p>
-        </p:txBody>
-      </p:sp>
-      <p:sp>
-        <p:nvSpPr>
-          <p:cNvPr id="19" name="Text 16"/>
-          <p:cNvSpPr txBox="1"/>
-          <p:nvPr/>
-        </p:nvSpPr>
-        <p:spPr>
-          <a:xfrm>
-            <a:off x="6214872" y="1975104"/>
-            <a:ext cx="2353056" cy="274320"/>
-          </a:xfrm>
-          <a:prstGeom prst="rect">
-            <a:avLst/>
-          </a:prstGeom>
-          <a:noFill/>
-          <a:ln/>
-        </p:spPr>
-        <p:txBody>
-          <a:bodyPr wrap="square" lIns="0" tIns="0" rIns="0" bIns="0" rtlCol="0" anchor="t"/>
-          <a:lstStyle/>
-          <a:p>
-            <a:pPr indent="0" marL="0">
-              <a:buNone/>
-            </a:pPr>
-            <a:r>
-              <a:rPr lang="en-US" sz="1200" b="1" dirty="0">
-                <a:solidFill>
-                  <a:srgbClr val="1D1D1F"/>
-                </a:solidFill>
-                <a:latin typeface="SF Pro Display" pitchFamily="34" charset="0"/>
-                <a:ea typeface="SF Pro Display" pitchFamily="34" charset="-122"/>
-                <a:cs typeface="SF Pro Display" pitchFamily="34" charset="-120"/>
-              </a:rPr>
-              <a:t>First job together?</a:t>
-            </a:r>
-            <a:endParaRPr lang="en-US" sz="1200" dirty="0"/>
-          </a:p>
-        </p:txBody>
-      </p:sp>
-      <p:sp>
-        <p:nvSpPr>
-          <p:cNvPr id="20" name="Text 17"/>
-          <p:cNvSpPr txBox="1"/>
-          <p:nvPr/>
-        </p:nvSpPr>
-        <p:spPr>
-          <a:xfrm>
-            <a:off x="6214872" y="2267712"/>
-            <a:ext cx="2353056" cy="704088"/>
-          </a:xfrm>
-          <a:prstGeom prst="rect">
-            <a:avLst/>
-          </a:prstGeom>
-          <a:noFill/>
-          <a:ln/>
-        </p:spPr>
-        <p:txBody>
-          <a:bodyPr wrap="square" lIns="0" tIns="0" rIns="0" bIns="0" rtlCol="0" anchor="t"/>
-          <a:lstStyle/>
-          <a:p>
-            <a:pPr indent="0" marL="0">
-              <a:buNone/>
-            </a:pPr>
-            <a:r>
-              <a:rPr lang="en-US" sz="950" dirty="0">
-                <a:solidFill>
-                  <a:srgbClr val="6E6E73"/>
-                </a:solidFill>
-                <a:latin typeface="SF Pro Text" pitchFamily="34" charset="0"/>
-                <a:ea typeface="SF Pro Text" pitchFamily="34" charset="-122"/>
-                <a:cs typeface="SF Pro Text" pitchFamily="34" charset="-120"/>
-              </a:rPr>
-              <a:t>Is this the cleaner's first job with this customer?</a:t>
-            </a:r>
-            <a:endParaRPr lang="en-US" sz="950" dirty="0"/>
-          </a:p>
-        </p:txBody>
-      </p:sp>
-      <p:sp>
-        <p:nvSpPr>
-          <p:cNvPr id="21" name="Shape 18"/>
-          <p:cNvSpPr/>
-          <p:nvPr/>
-        </p:nvSpPr>
-        <p:spPr>
-          <a:xfrm>
-            <a:off x="411480" y="3291840"/>
-            <a:ext cx="8321040" cy="384048"/>
-          </a:xfrm>
-          <a:prstGeom prst="roundRect">
-            <a:avLst>
-              <a:gd name="adj" fmla="val 19048"/>
-            </a:avLst>
-          </a:prstGeom>
-          <a:solidFill>
-            <a:srgbClr val="FFF3D6"/>
-          </a:solidFill>
-          <a:ln w="9525">
-            <a:solidFill>
-              <a:srgbClr val="FFF3D6"/>
-            </a:solidFill>
-            <a:prstDash val="solid"/>
-          </a:ln>
-        </p:spPr>
-      </p:sp>
       <p:pic>
         <p:nvPicPr>
-          <p:cNvPr id="22" name="Image 0" descr="preencoded.png">    </p:cNvPr>
+          <p:cNvPr id="24" name="Image 1" descr="preencoded.png">    </p:cNvPr>
           <p:cNvPicPr>
             <a:picLocks noChangeAspect="1"/>
           </p:cNvPicPr>
           <p:nvPr/>
         </p:nvPicPr>
         <p:blipFill>
-          <a:blip r:embed="rId1"/>
+          <a:blip r:embed="rId2"/>
           <a:stretch>
             <a:fillRect/>
           </a:stretch>
         </p:blipFill>
         <p:spPr>
           <a:xfrm>
-            <a:off x="566928" y="3401568"/>
-            <a:ext cx="164592" cy="164592"/>
+            <a:off x="4907036" y="2986796"/>
+            <a:ext cx="171176" cy="171176"/>
           </a:xfrm>
           <a:prstGeom prst="rect">
             <a:avLst/>
@@ -19123,14 +19685,14 @@
       </p:pic>
       <p:sp>
         <p:nvSpPr>
-          <p:cNvPr id="23" name="Text 19"/>
+          <p:cNvPr id="25" name="Text 20"/>
           <p:cNvSpPr txBox="1"/>
           <p:nvPr/>
         </p:nvSpPr>
         <p:spPr>
           <a:xfrm>
-            <a:off x="822960" y="3392424"/>
-            <a:ext cx="7772400" cy="201168"/>
+            <a:off x="4828032" y="3346704"/>
+            <a:ext cx="3739896" cy="274320"/>
           </a:xfrm>
           <a:prstGeom prst="rect">
             <a:avLst/>
@@ -19146,31 +19708,95 @@
               <a:buNone/>
             </a:pPr>
             <a:r>
-              <a:rPr lang="en-US" sz="1000" b="1" dirty="0">
-                <a:solidFill>
-                  <a:srgbClr val="9A6410"/>
+              <a:rPr lang="en-US" sz="1200" b="1" dirty="0">
+                <a:solidFill>
+                  <a:srgbClr val="1D1D1F"/>
+                </a:solidFill>
+                <a:latin typeface="SF Pro Display" pitchFamily="34" charset="0"/>
+                <a:ea typeface="SF Pro Display" pitchFamily="34" charset="-122"/>
+                <a:cs typeface="SF Pro Display" pitchFamily="34" charset="-120"/>
+              </a:rPr>
+              <a:t>Someone else claims</a:t>
+            </a:r>
+            <a:endParaRPr lang="en-US" sz="1200" dirty="0"/>
+          </a:p>
+        </p:txBody>
+      </p:sp>
+      <p:sp>
+        <p:nvSpPr>
+          <p:cNvPr id="26" name="Text 21"/>
+          <p:cNvSpPr txBox="1"/>
+          <p:nvPr/>
+        </p:nvSpPr>
+        <p:spPr>
+          <a:xfrm>
+            <a:off x="4828032" y="3639312"/>
+            <a:ext cx="3739896" cy="338328"/>
+          </a:xfrm>
+          <a:prstGeom prst="rect">
+            <a:avLst/>
+          </a:prstGeom>
+          <a:noFill/>
+          <a:ln/>
+        </p:spPr>
+        <p:txBody>
+          <a:bodyPr wrap="square" lIns="0" tIns="0" rIns="0" bIns="0" rtlCol="0" anchor="t"/>
+          <a:lstStyle/>
+          <a:p>
+            <a:pPr indent="0" marL="0">
+              <a:buNone/>
+            </a:pPr>
+            <a:r>
+              <a:rPr lang="en-US" sz="950" dirty="0">
+                <a:solidFill>
+                  <a:srgbClr val="6E6E73"/>
                 </a:solidFill>
                 <a:latin typeface="SF Pro Text" pitchFamily="34" charset="0"/>
                 <a:ea typeface="SF Pro Text" pitchFamily="34" charset="-122"/>
                 <a:cs typeface="SF Pro Text" pitchFamily="34" charset="-120"/>
               </a:rPr>
-              <a:t>Then:  </a:t>
-            </a:r>
+              <a:t>Jeff ($18/hr) claims: the customer pays $30/hr. Jeff gets $18/hr.</a:t>
+            </a:r>
+            <a:endParaRPr lang="en-US" sz="950" dirty="0"/>
+          </a:p>
+        </p:txBody>
+      </p:sp>
+      <p:sp>
+        <p:nvSpPr>
+          <p:cNvPr id="27" name="Text 22"/>
+          <p:cNvSpPr txBox="1"/>
+          <p:nvPr/>
+        </p:nvSpPr>
+        <p:spPr>
+          <a:xfrm>
+            <a:off x="438912" y="3017520"/>
+            <a:ext cx="4023360" cy="822960"/>
+          </a:xfrm>
+          <a:prstGeom prst="rect">
+            <a:avLst/>
+          </a:prstGeom>
+          <a:noFill/>
+          <a:ln/>
+        </p:spPr>
+        <p:txBody>
+          <a:bodyPr wrap="square" lIns="0" tIns="0" rIns="0" bIns="0" rtlCol="0" anchor="t"/>
+          <a:lstStyle/>
+          <a:p>
             <a:pPr indent="0" marL="0">
               <a:buNone/>
             </a:pPr>
             <a:r>
-              <a:rPr lang="en-US" sz="1000" dirty="0">
-                <a:solidFill>
-                  <a:srgbClr val="1D1D1F"/>
+              <a:rPr lang="en-US" sz="1050" dirty="0">
+                <a:solidFill>
+                  <a:srgbClr val="6E6E73"/>
                 </a:solidFill>
                 <a:latin typeface="SF Pro Text" pitchFamily="34" charset="0"/>
                 <a:ea typeface="SF Pro Text" pitchFamily="34" charset="-122"/>
                 <a:cs typeface="SF Pro Text" pitchFamily="34" charset="-120"/>
               </a:rPr>
-              <a:t>find the matching row in the platform fee table before you explain or refund anything.</a:t>
-            </a:r>
-            <a:endParaRPr lang="en-US" sz="1000" dirty="0"/>
+              <a:t>Requesting Cassandra shows the customer is willing to pay her rate, so it becomes their ceiling.</a:t>
+            </a:r>
+            <a:endParaRPr lang="en-US" sz="1050" dirty="0"/>
           </a:p>
         </p:txBody>
       </p:sp>
@@ -19255,6 +19881,807 @@
         </p:nvSpPr>
         <p:spPr>
           <a:xfrm>
+            <a:off x="438912" y="274320"/>
+            <a:ext cx="8229600" cy="182880"/>
+          </a:xfrm>
+          <a:prstGeom prst="rect">
+            <a:avLst/>
+          </a:prstGeom>
+          <a:noFill/>
+          <a:ln/>
+        </p:spPr>
+        <p:txBody>
+          <a:bodyPr wrap="square" lIns="0" tIns="0" rIns="0" bIns="0" rtlCol="0" anchor="t"/>
+          <a:lstStyle/>
+          <a:p>
+            <a:pPr indent="0" marL="0">
+              <a:buNone/>
+            </a:pPr>
+            <a:r>
+              <a:rPr lang="en-US" sz="800" b="1" spc="50" kern="0" dirty="0">
+                <a:solidFill>
+                  <a:srgbClr val="0B7A6F"/>
+                </a:solidFill>
+                <a:latin typeface="SF Pro Display" pitchFamily="34" charset="0"/>
+                <a:ea typeface="SF Pro Display" pitchFamily="34" charset="-122"/>
+                <a:cs typeface="SF Pro Display" pitchFamily="34" charset="-120"/>
+              </a:rPr>
+              <a:t>C PRICE VS CP PAY</a:t>
+            </a:r>
+            <a:endParaRPr lang="en-US" sz="800" dirty="0"/>
+          </a:p>
+        </p:txBody>
+      </p:sp>
+      <p:sp>
+        <p:nvSpPr>
+          <p:cNvPr id="3" name="Text 1"/>
+          <p:cNvSpPr txBox="1"/>
+          <p:nvPr/>
+        </p:nvSpPr>
+        <p:spPr>
+          <a:xfrm>
+            <a:off x="438912" y="457200"/>
+            <a:ext cx="8229600" cy="457200"/>
+          </a:xfrm>
+          <a:prstGeom prst="rect">
+            <a:avLst/>
+          </a:prstGeom>
+          <a:noFill/>
+          <a:ln/>
+        </p:spPr>
+        <p:txBody>
+          <a:bodyPr wrap="square" lIns="0" tIns="0" rIns="0" bIns="0" rtlCol="0" anchor="t"/>
+          <a:lstStyle/>
+          <a:p>
+            <a:pPr indent="0" marL="0">
+              <a:buNone/>
+            </a:pPr>
+            <a:r>
+              <a:rPr lang="en-US" sz="2400" b="1" dirty="0">
+                <a:solidFill>
+                  <a:srgbClr val="1D1D1F"/>
+                </a:solidFill>
+                <a:latin typeface="SF Pro Display" pitchFamily="34" charset="0"/>
+                <a:ea typeface="SF Pro Display" pitchFamily="34" charset="-122"/>
+                <a:cs typeface="SF Pro Display" pitchFamily="34" charset="-120"/>
+              </a:rPr>
+              <a:t>Before you explain or refund a fee</a:t>
+            </a:r>
+            <a:endParaRPr lang="en-US" sz="2400" dirty="0"/>
+          </a:p>
+        </p:txBody>
+      </p:sp>
+      <p:sp>
+        <p:nvSpPr>
+          <p:cNvPr id="4" name="Text 2"/>
+          <p:cNvSpPr txBox="1"/>
+          <p:nvPr/>
+        </p:nvSpPr>
+        <p:spPr>
+          <a:xfrm>
+            <a:off x="438912" y="960120"/>
+            <a:ext cx="8229600" cy="274320"/>
+          </a:xfrm>
+          <a:prstGeom prst="rect">
+            <a:avLst/>
+          </a:prstGeom>
+          <a:noFill/>
+          <a:ln/>
+        </p:spPr>
+        <p:txBody>
+          <a:bodyPr wrap="square" lIns="0" tIns="0" rIns="0" bIns="0" rtlCol="0" anchor="t"/>
+          <a:lstStyle/>
+          <a:p>
+            <a:pPr indent="0" marL="0">
+              <a:buNone/>
+            </a:pPr>
+            <a:r>
+              <a:rPr lang="en-US" sz="1200" dirty="0">
+                <a:solidFill>
+                  <a:srgbClr val="6E6E73"/>
+                </a:solidFill>
+                <a:latin typeface="SF Pro Text" pitchFamily="34" charset="0"/>
+                <a:ea typeface="SF Pro Text" pitchFamily="34" charset="-122"/>
+                <a:cs typeface="SF Pro Text" pitchFamily="34" charset="-120"/>
+              </a:rPr>
+              <a:t>Three answers tell you which case you're in.</a:t>
+            </a:r>
+            <a:endParaRPr lang="en-US" sz="1200" dirty="0"/>
+          </a:p>
+        </p:txBody>
+      </p:sp>
+      <p:sp>
+        <p:nvSpPr>
+          <p:cNvPr id="6" name="Shape 3"/>
+          <p:cNvSpPr/>
+          <p:nvPr/>
+        </p:nvSpPr>
+        <p:spPr>
+          <a:xfrm>
+            <a:off x="411480" y="1371600"/>
+            <a:ext cx="2682240" cy="1691640"/>
+          </a:xfrm>
+          <a:prstGeom prst="roundRect">
+            <a:avLst>
+              <a:gd name="adj" fmla="val 4324"/>
+            </a:avLst>
+          </a:prstGeom>
+          <a:solidFill>
+            <a:srgbClr val="FFFFFF"/>
+          </a:solidFill>
+          <a:ln w="9525">
+            <a:solidFill>
+              <a:srgbClr val="DCE1E7"/>
+            </a:solidFill>
+            <a:prstDash val="solid"/>
+          </a:ln>
+        </p:spPr>
+      </p:sp>
+      <p:sp>
+        <p:nvSpPr>
+          <p:cNvPr id="7" name="Shape 4"/>
+          <p:cNvSpPr/>
+          <p:nvPr/>
+        </p:nvSpPr>
+        <p:spPr>
+          <a:xfrm>
+            <a:off x="576072" y="1554480"/>
+            <a:ext cx="274320" cy="274320"/>
+          </a:xfrm>
+          <a:prstGeom prst="ellipse">
+            <a:avLst/>
+          </a:prstGeom>
+          <a:solidFill>
+            <a:srgbClr val="E3F4F1"/>
+          </a:solidFill>
+          <a:ln w="12700">
+            <a:solidFill>
+              <a:srgbClr val="E3F4F1"/>
+            </a:solidFill>
+            <a:prstDash val="solid"/>
+          </a:ln>
+        </p:spPr>
+      </p:sp>
+      <p:sp>
+        <p:nvSpPr>
+          <p:cNvPr id="8" name="Text 5"/>
+          <p:cNvSpPr txBox="1"/>
+          <p:nvPr/>
+        </p:nvSpPr>
+        <p:spPr>
+          <a:xfrm>
+            <a:off x="576072" y="1554480"/>
+            <a:ext cx="274320" cy="274320"/>
+          </a:xfrm>
+          <a:prstGeom prst="rect">
+            <a:avLst/>
+          </a:prstGeom>
+          <a:noFill/>
+          <a:ln/>
+        </p:spPr>
+        <p:txBody>
+          <a:bodyPr wrap="square" lIns="0" tIns="0" rIns="0" bIns="0" rtlCol="0" anchor="ctr"/>
+          <a:lstStyle/>
+          <a:p>
+            <a:pPr algn="ctr" indent="0" marL="0">
+              <a:buNone/>
+            </a:pPr>
+            <a:r>
+              <a:rPr lang="en-US" sz="900" b="1" dirty="0">
+                <a:solidFill>
+                  <a:srgbClr val="0B7A6F"/>
+                </a:solidFill>
+                <a:latin typeface="SF Pro Display" pitchFamily="34" charset="0"/>
+                <a:ea typeface="SF Pro Display" pitchFamily="34" charset="-122"/>
+                <a:cs typeface="SF Pro Display" pitchFamily="34" charset="-120"/>
+              </a:rPr>
+              <a:t>1</a:t>
+            </a:r>
+            <a:endParaRPr lang="en-US" sz="900" dirty="0"/>
+          </a:p>
+        </p:txBody>
+      </p:sp>
+      <p:sp>
+        <p:nvSpPr>
+          <p:cNvPr id="9" name="Text 6"/>
+          <p:cNvSpPr txBox="1"/>
+          <p:nvPr/>
+        </p:nvSpPr>
+        <p:spPr>
+          <a:xfrm>
+            <a:off x="576072" y="1975104"/>
+            <a:ext cx="2353056" cy="274320"/>
+          </a:xfrm>
+          <a:prstGeom prst="rect">
+            <a:avLst/>
+          </a:prstGeom>
+          <a:noFill/>
+          <a:ln/>
+        </p:spPr>
+        <p:txBody>
+          <a:bodyPr wrap="square" lIns="0" tIns="0" rIns="0" bIns="0" rtlCol="0" anchor="t"/>
+          <a:lstStyle/>
+          <a:p>
+            <a:pPr indent="0" marL="0">
+              <a:buNone/>
+            </a:pPr>
+            <a:r>
+              <a:rPr lang="en-US" sz="1200" b="1" dirty="0">
+                <a:solidFill>
+                  <a:srgbClr val="1D1D1F"/>
+                </a:solidFill>
+                <a:latin typeface="SF Pro Display" pitchFamily="34" charset="0"/>
+                <a:ea typeface="SF Pro Display" pitchFamily="34" charset="-122"/>
+                <a:cs typeface="SF Pro Display" pitchFamily="34" charset="-120"/>
+              </a:rPr>
+              <a:t>Operating model</a:t>
+            </a:r>
+            <a:endParaRPr lang="en-US" sz="1200" dirty="0"/>
+          </a:p>
+        </p:txBody>
+      </p:sp>
+      <p:sp>
+        <p:nvSpPr>
+          <p:cNvPr id="10" name="Text 7"/>
+          <p:cNvSpPr txBox="1"/>
+          <p:nvPr/>
+        </p:nvSpPr>
+        <p:spPr>
+          <a:xfrm>
+            <a:off x="576072" y="2267712"/>
+            <a:ext cx="2353056" cy="704088"/>
+          </a:xfrm>
+          <a:prstGeom prst="rect">
+            <a:avLst/>
+          </a:prstGeom>
+          <a:noFill/>
+          <a:ln/>
+        </p:spPr>
+        <p:txBody>
+          <a:bodyPr wrap="square" lIns="0" tIns="0" rIns="0" bIns="0" rtlCol="0" anchor="t"/>
+          <a:lstStyle/>
+          <a:p>
+            <a:pPr indent="0" marL="0">
+              <a:buNone/>
+            </a:pPr>
+            <a:r>
+              <a:rPr lang="en-US" sz="950" dirty="0">
+                <a:solidFill>
+                  <a:srgbClr val="6E6E73"/>
+                </a:solidFill>
+                <a:latin typeface="SF Pro Text" pitchFamily="34" charset="0"/>
+                <a:ea typeface="SF Pro Text" pitchFamily="34" charset="-122"/>
+                <a:cs typeface="SF Pro Text" pitchFamily="34" charset="-120"/>
+              </a:rPr>
+              <a:t>CA/CA-WA or General? Look for the banner.</a:t>
+            </a:r>
+            <a:endParaRPr lang="en-US" sz="950" dirty="0"/>
+          </a:p>
+        </p:txBody>
+      </p:sp>
+      <p:sp>
+        <p:nvSpPr>
+          <p:cNvPr id="11" name="Shape 8"/>
+          <p:cNvSpPr/>
+          <p:nvPr/>
+        </p:nvSpPr>
+        <p:spPr>
+          <a:xfrm>
+            <a:off x="3230880" y="1371600"/>
+            <a:ext cx="2682240" cy="1691640"/>
+          </a:xfrm>
+          <a:prstGeom prst="roundRect">
+            <a:avLst>
+              <a:gd name="adj" fmla="val 4324"/>
+            </a:avLst>
+          </a:prstGeom>
+          <a:solidFill>
+            <a:srgbClr val="FFFFFF"/>
+          </a:solidFill>
+          <a:ln w="9525">
+            <a:solidFill>
+              <a:srgbClr val="DCE1E7"/>
+            </a:solidFill>
+            <a:prstDash val="solid"/>
+          </a:ln>
+        </p:spPr>
+      </p:sp>
+      <p:sp>
+        <p:nvSpPr>
+          <p:cNvPr id="12" name="Shape 9"/>
+          <p:cNvSpPr/>
+          <p:nvPr/>
+        </p:nvSpPr>
+        <p:spPr>
+          <a:xfrm>
+            <a:off x="3395472" y="1554480"/>
+            <a:ext cx="274320" cy="274320"/>
+          </a:xfrm>
+          <a:prstGeom prst="ellipse">
+            <a:avLst/>
+          </a:prstGeom>
+          <a:solidFill>
+            <a:srgbClr val="E3F4F1"/>
+          </a:solidFill>
+          <a:ln w="12700">
+            <a:solidFill>
+              <a:srgbClr val="E3F4F1"/>
+            </a:solidFill>
+            <a:prstDash val="solid"/>
+          </a:ln>
+        </p:spPr>
+      </p:sp>
+      <p:sp>
+        <p:nvSpPr>
+          <p:cNvPr id="13" name="Text 10"/>
+          <p:cNvSpPr txBox="1"/>
+          <p:nvPr/>
+        </p:nvSpPr>
+        <p:spPr>
+          <a:xfrm>
+            <a:off x="3395472" y="1554480"/>
+            <a:ext cx="274320" cy="274320"/>
+          </a:xfrm>
+          <a:prstGeom prst="rect">
+            <a:avLst/>
+          </a:prstGeom>
+          <a:noFill/>
+          <a:ln/>
+        </p:spPr>
+        <p:txBody>
+          <a:bodyPr wrap="square" lIns="0" tIns="0" rIns="0" bIns="0" rtlCol="0" anchor="ctr"/>
+          <a:lstStyle/>
+          <a:p>
+            <a:pPr algn="ctr" indent="0" marL="0">
+              <a:buNone/>
+            </a:pPr>
+            <a:r>
+              <a:rPr lang="en-US" sz="900" b="1" dirty="0">
+                <a:solidFill>
+                  <a:srgbClr val="0B7A6F"/>
+                </a:solidFill>
+                <a:latin typeface="SF Pro Display" pitchFamily="34" charset="0"/>
+                <a:ea typeface="SF Pro Display" pitchFamily="34" charset="-122"/>
+                <a:cs typeface="SF Pro Display" pitchFamily="34" charset="-120"/>
+              </a:rPr>
+              <a:t>2</a:t>
+            </a:r>
+            <a:endParaRPr lang="en-US" sz="900" dirty="0"/>
+          </a:p>
+        </p:txBody>
+      </p:sp>
+      <p:sp>
+        <p:nvSpPr>
+          <p:cNvPr id="14" name="Text 11"/>
+          <p:cNvSpPr txBox="1"/>
+          <p:nvPr/>
+        </p:nvSpPr>
+        <p:spPr>
+          <a:xfrm>
+            <a:off x="3395472" y="1975104"/>
+            <a:ext cx="2353056" cy="274320"/>
+          </a:xfrm>
+          <a:prstGeom prst="rect">
+            <a:avLst/>
+          </a:prstGeom>
+          <a:noFill/>
+          <a:ln/>
+        </p:spPr>
+        <p:txBody>
+          <a:bodyPr wrap="square" lIns="0" tIns="0" rIns="0" bIns="0" rtlCol="0" anchor="t"/>
+          <a:lstStyle/>
+          <a:p>
+            <a:pPr indent="0" marL="0">
+              <a:buNone/>
+            </a:pPr>
+            <a:r>
+              <a:rPr lang="en-US" sz="1200" b="1" dirty="0">
+                <a:solidFill>
+                  <a:srgbClr val="1D1D1F"/>
+                </a:solidFill>
+                <a:latin typeface="SF Pro Display" pitchFamily="34" charset="0"/>
+                <a:ea typeface="SF Pro Display" pitchFamily="34" charset="-122"/>
+                <a:cs typeface="SF Pro Display" pitchFamily="34" charset="-120"/>
+              </a:rPr>
+              <a:t>Membership status</a:t>
+            </a:r>
+            <a:endParaRPr lang="en-US" sz="1200" dirty="0"/>
+          </a:p>
+        </p:txBody>
+      </p:sp>
+      <p:sp>
+        <p:nvSpPr>
+          <p:cNvPr id="15" name="Text 12"/>
+          <p:cNvSpPr txBox="1"/>
+          <p:nvPr/>
+        </p:nvSpPr>
+        <p:spPr>
+          <a:xfrm>
+            <a:off x="3395472" y="2267712"/>
+            <a:ext cx="2353056" cy="704088"/>
+          </a:xfrm>
+          <a:prstGeom prst="rect">
+            <a:avLst/>
+          </a:prstGeom>
+          <a:noFill/>
+          <a:ln/>
+        </p:spPr>
+        <p:txBody>
+          <a:bodyPr wrap="square" lIns="0" tIns="0" rIns="0" bIns="0" rtlCol="0" anchor="t"/>
+          <a:lstStyle/>
+          <a:p>
+            <a:pPr indent="0" marL="0">
+              <a:buNone/>
+            </a:pPr>
+            <a:r>
+              <a:rPr lang="en-US" sz="950" dirty="0">
+                <a:solidFill>
+                  <a:srgbClr val="6E6E73"/>
+                </a:solidFill>
+                <a:latin typeface="SF Pro Text" pitchFamily="34" charset="0"/>
+                <a:ea typeface="SF Pro Text" pitchFamily="34" charset="-122"/>
+                <a:cs typeface="SF Pro Text" pitchFamily="34" charset="-120"/>
+              </a:rPr>
+              <a:t>FC, non-FC, or deactivated FC?</a:t>
+            </a:r>
+            <a:endParaRPr lang="en-US" sz="950" dirty="0"/>
+          </a:p>
+        </p:txBody>
+      </p:sp>
+      <p:sp>
+        <p:nvSpPr>
+          <p:cNvPr id="16" name="Shape 13"/>
+          <p:cNvSpPr/>
+          <p:nvPr/>
+        </p:nvSpPr>
+        <p:spPr>
+          <a:xfrm>
+            <a:off x="6050280" y="1371600"/>
+            <a:ext cx="2682240" cy="1691640"/>
+          </a:xfrm>
+          <a:prstGeom prst="roundRect">
+            <a:avLst>
+              <a:gd name="adj" fmla="val 4324"/>
+            </a:avLst>
+          </a:prstGeom>
+          <a:solidFill>
+            <a:srgbClr val="FFFFFF"/>
+          </a:solidFill>
+          <a:ln w="9525">
+            <a:solidFill>
+              <a:srgbClr val="DCE1E7"/>
+            </a:solidFill>
+            <a:prstDash val="solid"/>
+          </a:ln>
+        </p:spPr>
+      </p:sp>
+      <p:sp>
+        <p:nvSpPr>
+          <p:cNvPr id="17" name="Shape 14"/>
+          <p:cNvSpPr/>
+          <p:nvPr/>
+        </p:nvSpPr>
+        <p:spPr>
+          <a:xfrm>
+            <a:off x="6214872" y="1554480"/>
+            <a:ext cx="274320" cy="274320"/>
+          </a:xfrm>
+          <a:prstGeom prst="ellipse">
+            <a:avLst/>
+          </a:prstGeom>
+          <a:solidFill>
+            <a:srgbClr val="E3F4F1"/>
+          </a:solidFill>
+          <a:ln w="12700">
+            <a:solidFill>
+              <a:srgbClr val="E3F4F1"/>
+            </a:solidFill>
+            <a:prstDash val="solid"/>
+          </a:ln>
+        </p:spPr>
+      </p:sp>
+      <p:sp>
+        <p:nvSpPr>
+          <p:cNvPr id="18" name="Text 15"/>
+          <p:cNvSpPr txBox="1"/>
+          <p:nvPr/>
+        </p:nvSpPr>
+        <p:spPr>
+          <a:xfrm>
+            <a:off x="6214872" y="1554480"/>
+            <a:ext cx="274320" cy="274320"/>
+          </a:xfrm>
+          <a:prstGeom prst="rect">
+            <a:avLst/>
+          </a:prstGeom>
+          <a:noFill/>
+          <a:ln/>
+        </p:spPr>
+        <p:txBody>
+          <a:bodyPr wrap="square" lIns="0" tIns="0" rIns="0" bIns="0" rtlCol="0" anchor="ctr"/>
+          <a:lstStyle/>
+          <a:p>
+            <a:pPr algn="ctr" indent="0" marL="0">
+              <a:buNone/>
+            </a:pPr>
+            <a:r>
+              <a:rPr lang="en-US" sz="900" b="1" dirty="0">
+                <a:solidFill>
+                  <a:srgbClr val="0B7A6F"/>
+                </a:solidFill>
+                <a:latin typeface="SF Pro Display" pitchFamily="34" charset="0"/>
+                <a:ea typeface="SF Pro Display" pitchFamily="34" charset="-122"/>
+                <a:cs typeface="SF Pro Display" pitchFamily="34" charset="-120"/>
+              </a:rPr>
+              <a:t>3</a:t>
+            </a:r>
+            <a:endParaRPr lang="en-US" sz="900" dirty="0"/>
+          </a:p>
+        </p:txBody>
+      </p:sp>
+      <p:sp>
+        <p:nvSpPr>
+          <p:cNvPr id="19" name="Text 16"/>
+          <p:cNvSpPr txBox="1"/>
+          <p:nvPr/>
+        </p:nvSpPr>
+        <p:spPr>
+          <a:xfrm>
+            <a:off x="6214872" y="1975104"/>
+            <a:ext cx="2353056" cy="274320"/>
+          </a:xfrm>
+          <a:prstGeom prst="rect">
+            <a:avLst/>
+          </a:prstGeom>
+          <a:noFill/>
+          <a:ln/>
+        </p:spPr>
+        <p:txBody>
+          <a:bodyPr wrap="square" lIns="0" tIns="0" rIns="0" bIns="0" rtlCol="0" anchor="t"/>
+          <a:lstStyle/>
+          <a:p>
+            <a:pPr indent="0" marL="0">
+              <a:buNone/>
+            </a:pPr>
+            <a:r>
+              <a:rPr lang="en-US" sz="1200" b="1" dirty="0">
+                <a:solidFill>
+                  <a:srgbClr val="1D1D1F"/>
+                </a:solidFill>
+                <a:latin typeface="SF Pro Display" pitchFamily="34" charset="0"/>
+                <a:ea typeface="SF Pro Display" pitchFamily="34" charset="-122"/>
+                <a:cs typeface="SF Pro Display" pitchFamily="34" charset="-120"/>
+              </a:rPr>
+              <a:t>First job together?</a:t>
+            </a:r>
+            <a:endParaRPr lang="en-US" sz="1200" dirty="0"/>
+          </a:p>
+        </p:txBody>
+      </p:sp>
+      <p:sp>
+        <p:nvSpPr>
+          <p:cNvPr id="20" name="Text 17"/>
+          <p:cNvSpPr txBox="1"/>
+          <p:nvPr/>
+        </p:nvSpPr>
+        <p:spPr>
+          <a:xfrm>
+            <a:off x="6214872" y="2267712"/>
+            <a:ext cx="2353056" cy="704088"/>
+          </a:xfrm>
+          <a:prstGeom prst="rect">
+            <a:avLst/>
+          </a:prstGeom>
+          <a:noFill/>
+          <a:ln/>
+        </p:spPr>
+        <p:txBody>
+          <a:bodyPr wrap="square" lIns="0" tIns="0" rIns="0" bIns="0" rtlCol="0" anchor="t"/>
+          <a:lstStyle/>
+          <a:p>
+            <a:pPr indent="0" marL="0">
+              <a:buNone/>
+            </a:pPr>
+            <a:r>
+              <a:rPr lang="en-US" sz="950" dirty="0">
+                <a:solidFill>
+                  <a:srgbClr val="6E6E73"/>
+                </a:solidFill>
+                <a:latin typeface="SF Pro Text" pitchFamily="34" charset="0"/>
+                <a:ea typeface="SF Pro Text" pitchFamily="34" charset="-122"/>
+                <a:cs typeface="SF Pro Text" pitchFamily="34" charset="-120"/>
+              </a:rPr>
+              <a:t>Is this the cleaner's first job with this customer?</a:t>
+            </a:r>
+            <a:endParaRPr lang="en-US" sz="950" dirty="0"/>
+          </a:p>
+        </p:txBody>
+      </p:sp>
+      <p:sp>
+        <p:nvSpPr>
+          <p:cNvPr id="21" name="Shape 18"/>
+          <p:cNvSpPr/>
+          <p:nvPr/>
+        </p:nvSpPr>
+        <p:spPr>
+          <a:xfrm>
+            <a:off x="411480" y="3291840"/>
+            <a:ext cx="8321040" cy="384048"/>
+          </a:xfrm>
+          <a:prstGeom prst="roundRect">
+            <a:avLst>
+              <a:gd name="adj" fmla="val 19048"/>
+            </a:avLst>
+          </a:prstGeom>
+          <a:solidFill>
+            <a:srgbClr val="FFF3D6"/>
+          </a:solidFill>
+          <a:ln w="9525">
+            <a:solidFill>
+              <a:srgbClr val="FFF3D6"/>
+            </a:solidFill>
+            <a:prstDash val="solid"/>
+          </a:ln>
+        </p:spPr>
+      </p:sp>
+      <p:pic>
+        <p:nvPicPr>
+          <p:cNvPr id="22" name="Image 0" descr="preencoded.png">    </p:cNvPr>
+          <p:cNvPicPr>
+            <a:picLocks noChangeAspect="1"/>
+          </p:cNvPicPr>
+          <p:nvPr/>
+        </p:nvPicPr>
+        <p:blipFill>
+          <a:blip r:embed="rId1"/>
+          <a:stretch>
+            <a:fillRect/>
+          </a:stretch>
+        </p:blipFill>
+        <p:spPr>
+          <a:xfrm>
+            <a:off x="566928" y="3401568"/>
+            <a:ext cx="164592" cy="164592"/>
+          </a:xfrm>
+          <a:prstGeom prst="rect">
+            <a:avLst/>
+          </a:prstGeom>
+        </p:spPr>
+      </p:pic>
+      <p:sp>
+        <p:nvSpPr>
+          <p:cNvPr id="23" name="Text 19"/>
+          <p:cNvSpPr txBox="1"/>
+          <p:nvPr/>
+        </p:nvSpPr>
+        <p:spPr>
+          <a:xfrm>
+            <a:off x="822960" y="3392424"/>
+            <a:ext cx="7772400" cy="201168"/>
+          </a:xfrm>
+          <a:prstGeom prst="rect">
+            <a:avLst/>
+          </a:prstGeom>
+          <a:noFill/>
+          <a:ln/>
+        </p:spPr>
+        <p:txBody>
+          <a:bodyPr wrap="square" lIns="0" tIns="0" rIns="0" bIns="0" rtlCol="0" anchor="t"/>
+          <a:lstStyle/>
+          <a:p>
+            <a:pPr indent="0" marL="0">
+              <a:buNone/>
+            </a:pPr>
+            <a:r>
+              <a:rPr lang="en-US" sz="1000" b="1" dirty="0">
+                <a:solidFill>
+                  <a:srgbClr val="9A6410"/>
+                </a:solidFill>
+                <a:latin typeface="SF Pro Text" pitchFamily="34" charset="0"/>
+                <a:ea typeface="SF Pro Text" pitchFamily="34" charset="-122"/>
+                <a:cs typeface="SF Pro Text" pitchFamily="34" charset="-120"/>
+              </a:rPr>
+              <a:t>Then:  </a:t>
+            </a:r>
+            <a:pPr indent="0" marL="0">
+              <a:buNone/>
+            </a:pPr>
+            <a:r>
+              <a:rPr lang="en-US" sz="1000" dirty="0">
+                <a:solidFill>
+                  <a:srgbClr val="1D1D1F"/>
+                </a:solidFill>
+                <a:latin typeface="SF Pro Text" pitchFamily="34" charset="0"/>
+                <a:ea typeface="SF Pro Text" pitchFamily="34" charset="-122"/>
+                <a:cs typeface="SF Pro Text" pitchFamily="34" charset="-120"/>
+              </a:rPr>
+              <a:t>find the matching row in the platform fee table before you explain or refund anything.</a:t>
+            </a:r>
+            <a:endParaRPr lang="en-US" sz="1000" dirty="0"/>
+          </a:p>
+        </p:txBody>
+      </p:sp>
+      <p:sp>
+        <p:nvSpPr>
+          <p:cNvPr id="25" name="Slide Number Placeholder 0"/>
+          <p:cNvSpPr>
+            <a:spLocks noGrp="1"/>
+          </p:cNvSpPr>
+          <p:nvPr>
+            <p:ph type="sldNum" sz="quarter" idx="4294967295"/>
+          </p:nvPr>
+        </p:nvSpPr>
+        <p:spPr>
+          <a:xfrm>
+            <a:off x="8229600" y="4800600"/>
+            <a:ext cx="457200" cy="182880"/>
+          </a:xfrm>
+          <a:prstGeom prst="rect">
+            <a:avLst/>
+          </a:prstGeom>
+          <a:extLst>
+            <a:ext uri="{C572A759-6A51-4108-AA02-DFA0A04FC94B}">
+              <ma14:wrappingTextBoxFlag xmlns:ma14="http://schemas.microsoft.com/office/mac/drawingml/2011/main" val="0"/>
+            </a:ext>
+          </a:extLst>
+        </p:spPr>
+        <p:txBody>
+          <a:bodyPr/>
+          <a:lstStyle>
+            <a:lvl1pPr>
+              <a:defRPr sz="700">
+                <a:solidFill>
+                  <a:srgbClr val="6E6E73"/>
+                </a:solidFill>
+                <a:latin typeface="SF Pro Text"/>
+                <a:ea typeface="SF Pro Text"/>
+                <a:cs typeface="SF Pro Text"/>
+              </a:defRPr>
+            </a:lvl1pPr>
+          </a:lstStyle>
+          <a:p>
+            <a:pPr algn="r"/>
+            <a:fld id="{F7021451-1387-4CA6-816F-3879F97B5CBC}" type="slidenum">
+              <a:rPr b="0" lang="en-US"/>
+              <a:t>28</a:t>
+            </a:fld>
+            <a:endParaRPr lang="en-US"/>
+          </a:p>
+        </p:txBody>
+      </p:sp>
+    </p:spTree>
+  </p:cSld>
+  <p:clrMapOvr>
+    <a:masterClrMapping/>
+  </p:clrMapOvr>
+</p:sld>
+</file>
+
+<file path=ppt/slides/slide29.xml><?xml version="1.0" encoding="utf-8"?>
+<p:sld xmlns:a="http://schemas.openxmlformats.org/drawingml/2006/main" xmlns:r="http://schemas.openxmlformats.org/officeDocument/2006/relationships" xmlns:p="http://schemas.openxmlformats.org/presentationml/2006/main">
+  <p:cSld name="Slide 29">
+    <p:spTree>
+      <p:nvGrpSpPr>
+        <p:cNvPr id="1" name=""/>
+        <p:cNvGrpSpPr/>
+        <p:nvPr/>
+      </p:nvGrpSpPr>
+      <p:grpSpPr>
+        <a:xfrm>
+          <a:off x="0" y="0"/>
+          <a:ext cx="0" cy="0"/>
+          <a:chOff x="0" y="0"/>
+          <a:chExt cx="0" cy="0"/>
+        </a:xfrm>
+      </p:grpSpPr>
+      <p:sp>
+        <p:nvSpPr>
+          <p:cNvPr id="2" name="Text 0"/>
+          <p:cNvSpPr txBox="1"/>
+          <p:nvPr/>
+        </p:nvSpPr>
+        <p:spPr>
+          <a:xfrm>
             <a:off x="566928" y="1737360"/>
             <a:ext cx="4572000" cy="182880"/>
           </a:xfrm>
@@ -19632,7 +21059,7 @@
             <a:pPr algn="r"/>
             <a:fld id="{F7021451-1387-4CA6-816F-3879F97B5CBC}" type="slidenum">
               <a:rPr b="0" lang="en-US"/>
-              <a:t>28</a:t>
+              <a:t>29</a:t>
             </a:fld>
             <a:endParaRPr lang="en-US"/>
           </a:p>

--- a/platform-mechanics/platform-operating-mechanics.pptx
+++ b/platform-mechanics/platform-operating-mechanics.pptx
@@ -31,9 +31,10 @@
     <p:sldId id="279" r:id="rId25"/>
     <p:sldId id="280" r:id="rId26"/>
     <p:sldId id="281" r:id="rId27"/>
+    <p:sldId id="282" r:id="rId28"/>
   </p:sldIdLst>
   <p:notesMasterIdLst>
-    <p:notesMasterId r:id="rId28"/>
+    <p:notesMasterId r:id="rId29"/>
   </p:notesMasterIdLst>
   <p:sldSz cx="9144000" cy="5143500"/>
   <p:notesSz cx="5143500" cy="9144000"/>
@@ -1759,7 +1760,7 @@
           <a:p>
             <a:r>
               <a:rPr lang="en-US" dirty="0"/>
-              <a:t>FC, General, first C/CP pairing: customer pays the CP's rate; the platform fee line is the $5/hr marketing fee deducted from the cleaner's pay, not an extra cost to the customer. FC, General, repeat pairing: nothing. FC, CA/CAWA, CP sets different first and repeat rates: customer pays the higher of the two whichever pairing it is; the line is the difference; the CP is paid their applicable rate and the difference goes to Homeaglow. FC, CA/CAWA, one rate: nothing. Non-FC or deactivated FC: customer pays the max CP rate, not the CP's actual rate; the line is the cohort platform fee ($15/hr non-FC, $30/hr deactivated FC) plus the gap between max rate and the CP's actual rate. Why the models differ: no marketing fee in CA/CAWA (state regulation); in exchange CPs may set separate first-pairing and repeat rates and we charge the higher.</a:t>
+              <a:t>Scenario: C is a repeat client and books a cleaning for 5 hours. C has a 3-hour cleaning voucher that will be applied to the job. Calculate the total job pay of CP Sarah and CP Gab if the job also has a $12.50 surge bonus and a $10.00 tip. TRAINER: click Show Answers (or press the right arrow); each click reveals one answer, then the key takeaway. Working: the voucher only changes what the customer pays. The CP is paid for all 5 hours (Homeaglow pays the CP regardless of vouchers, credits or failed charges). Sarah (CA/CAWA, repeat rate $28): $28 x 5 = $140 + $12.50 surge + $10 tip = $162.50. Gab (General, repeat client so no $5 match fee): $24 x 5 = $120 + $12.50 + $10 = $142.50.</a:t>
             </a:r>
             <a:endParaRPr lang="en-US" dirty="0"/>
           </a:p>
@@ -1847,7 +1848,7 @@
           <a:p>
             <a:r>
               <a:rPr lang="en-US" dirty="0"/>
-              <a:t>Deactivated-FC customer, max rate $25, claiming CP's rate $15, platform fee shows $40/hr. That is the $30/hr deactivated-FC platform fee plus the $10/hr gap. The charge is correct: do not reprice it and do not refund the difference. Max rate behaves differently by membership: FC customers have a max rate too, but are charged the CP's actual rate; non-FC and deactivated-FC customers are charged the max rate while the CP is paid their own rate.</a:t>
+              <a:t>FC, General, first C/CP pairing: customer pays the CP's rate; the platform fee line is the $5/hr marketing fee deducted from the cleaner's pay, not an extra cost to the customer. FC, General, repeat pairing: nothing. FC, CA/CAWA, CP sets different first and repeat rates: customer pays the higher of the two whichever pairing it is; the line is the difference; the CP is paid their applicable rate and the difference goes to Homeaglow. FC, CA/CAWA, one rate: nothing. Non-FC or deactivated FC: customer pays the max CP rate, not the CP's actual rate; the line is the cohort platform fee ($15/hr non-FC, $30/hr deactivated FC) plus the gap between max rate and the CP's actual rate. Why the models differ: no marketing fee in CA/CAWA (state regulation); in exchange CPs may set separate first-pairing and repeat rates and we charge the higher.</a:t>
             </a:r>
             <a:endParaRPr lang="en-US" dirty="0"/>
           </a:p>
@@ -1935,7 +1936,7 @@
           <a:p>
             <a:r>
               <a:rPr lang="en-US" dirty="0"/>
-              <a:t>For non-FC customers, pricing follows the highest hourly rate among all the CPs they requested, not whichever CP claims. Example: the customer requests Mona ($25/hr), Cassandra ($30/hr) and Yolanda ($23/hr); the max requested rate is $30/hr. If a requested CP claims (say Mona), the customer is charged Mona's actual rate ($25/hr). If a non-requested CP claims (say Jeff at $18/hr), the customer is still charged $30/hr; Jeff is paid $18/hr and the difference goes to Homeaglow. Why: requesting Cassandra signals willingness to pay her rate, so it becomes their ceiling.</a:t>
+              <a:t>Deactivated-FC customer, max rate $25, claiming CP's rate $15, platform fee shows $40/hr. That is the $30/hr deactivated-FC platform fee plus the $10/hr gap. The charge is correct: do not reprice it and do not refund the difference. Max rate behaves differently by membership: FC customers have a max rate too, but are charged the CP's actual rate; non-FC and deactivated-FC customers are charged the max rate while the CP is paid their own rate.</a:t>
             </a:r>
             <a:endParaRPr lang="en-US" dirty="0"/>
           </a:p>
@@ -2023,7 +2024,7 @@
           <a:p>
             <a:r>
               <a:rPr lang="en-US" dirty="0"/>
-              <a:t>Before explaining or refunding any platform-fee line, establish the operating model, the membership status, and whether it is that CP's first job with this customer. Those three answers decide which row of the platform fee table you are in.</a:t>
+              <a:t>For non-FC customers, pricing follows the highest hourly rate among all the CPs they requested, not whichever CP claims. Example: the customer requests Mona ($25/hr), Cassandra ($30/hr) and Yolanda ($23/hr); the max requested rate is $30/hr. If a requested CP claims (say Mona), the customer is charged Mona's actual rate ($25/hr). If a non-requested CP claims (say Jeff at $18/hr), the customer is still charged $30/hr; Jeff is paid $18/hr and the difference goes to Homeaglow. Why: requesting Cassandra signals willingness to pay her rate, so it becomes their ceiling.</a:t>
             </a:r>
             <a:endParaRPr lang="en-US" dirty="0"/>
           </a:p>
@@ -2111,7 +2112,7 @@
           <a:p>
             <a:r>
               <a:rPr lang="en-US" dirty="0"/>
-              <a:t>Open the floor for questions.</a:t>
+              <a:t>Before explaining or refunding any platform-fee line, establish the operating model, the membership status, and whether it is that CP's first job with this customer. Those three answers decide which row of the platform fee table you are in.</a:t>
             </a:r>
             <a:endParaRPr lang="en-US" dirty="0"/>
           </a:p>
@@ -2135,6 +2136,94 @@
             <a:fld id="{F7021451-1387-4CA6-816F-3879F97B5CBC}" type="slidenum">
               <a:rPr lang="en-US"/>
               <a:t>26</a:t>
+            </a:fld>
+            <a:endParaRPr lang="en-US"/>
+          </a:p>
+        </p:txBody>
+      </p:sp>
+    </p:spTree>
+    <p:extLst>
+      <p:ext uri="{BB962C8B-B14F-4D97-AF65-F5344CB8AC3E}">
+        <p14:creationId xmlns:p14="http://schemas.microsoft.com/office/powerpoint/2010/main" val="1024086991"/>
+      </p:ext>
+    </p:extLst>
+  </p:cSld>
+  <p:clrMapOvr>
+    <a:masterClrMapping/>
+  </p:clrMapOvr>
+</p:notes>
+</file>
+
+<file path=ppt/notesSlides/notesSlide27.xml><?xml version="1.0" encoding="utf-8"?>
+<p:notes xmlns:a="http://schemas.openxmlformats.org/drawingml/2006/main" xmlns:r="http://schemas.openxmlformats.org/officeDocument/2006/relationships" xmlns:p="http://schemas.openxmlformats.org/presentationml/2006/main">
+  <p:cSld>
+    <p:spTree>
+      <p:nvGrpSpPr>
+        <p:cNvPr id="1" name=""/>
+        <p:cNvGrpSpPr/>
+        <p:nvPr/>
+      </p:nvGrpSpPr>
+      <p:grpSpPr>
+        <a:xfrm>
+          <a:off x="0" y="0"/>
+          <a:ext cx="0" cy="0"/>
+          <a:chOff x="0" y="0"/>
+          <a:chExt cx="0" cy="0"/>
+        </a:xfrm>
+      </p:grpSpPr>
+      <p:sp>
+        <p:nvSpPr>
+          <p:cNvPr id="2" name="Slide Image Placeholder 1"/>
+          <p:cNvSpPr>
+            <a:spLocks noGrp="1" noRot="1" noChangeAspect="1"/>
+          </p:cNvSpPr>
+          <p:nvPr>
+            <p:ph type="sldImg"/>
+          </p:nvPr>
+        </p:nvSpPr>
+        <p:spPr/>
+      </p:sp>
+      <p:sp>
+        <p:nvSpPr>
+          <p:cNvPr id="3" name="Notes Placeholder 2"/>
+          <p:cNvSpPr>
+            <a:spLocks noGrp="1"/>
+          </p:cNvSpPr>
+          <p:nvPr>
+            <p:ph type="body" idx="1"/>
+          </p:nvPr>
+        </p:nvSpPr>
+        <p:spPr/>
+        <p:txBody>
+          <a:bodyPr/>
+          <a:lstStyle/>
+          <a:p>
+            <a:r>
+              <a:rPr lang="en-US" dirty="0"/>
+              <a:t>Open the floor for questions.</a:t>
+            </a:r>
+            <a:endParaRPr lang="en-US" dirty="0"/>
+          </a:p>
+        </p:txBody>
+      </p:sp>
+      <p:sp>
+        <p:nvSpPr>
+          <p:cNvPr id="4" name="Slide Number Placeholder 3"/>
+          <p:cNvSpPr>
+            <a:spLocks noGrp="1"/>
+          </p:cNvSpPr>
+          <p:nvPr>
+            <p:ph type="sldNum" sz="quarter" idx="10"/>
+          </p:nvPr>
+        </p:nvSpPr>
+        <p:spPr/>
+        <p:txBody>
+          <a:bodyPr/>
+          <a:lstStyle/>
+          <a:p>
+            <a:fld id="{F7021451-1387-4CA6-816F-3879F97B5CBC}" type="slidenum">
+              <a:rPr lang="en-US"/>
+              <a:t>27</a:t>
             </a:fld>
             <a:endParaRPr lang="en-US"/>
           </a:p>
@@ -16424,7 +16513,7 @@
                 <a:ea typeface="SF Pro Display" pitchFamily="34" charset="-122"/>
                 <a:cs typeface="SF Pro Display" pitchFamily="34" charset="-120"/>
               </a:rPr>
-              <a:t>When a "platform fee" shows up</a:t>
+              <a:t>Let's practice!</a:t>
             </a:r>
             <a:endParaRPr lang="en-US" sz="2400" dirty="0"/>
           </a:p>
@@ -16463,6 +16552,1457 @@
                 <a:ea typeface="SF Pro Text" pitchFamily="34" charset="-122"/>
                 <a:cs typeface="SF Pro Text" pitchFamily="34" charset="-120"/>
               </a:rPr>
+              <a:t>Determine the CP pay in this scenario.</a:t>
+            </a:r>
+            <a:endParaRPr lang="en-US" sz="1200" dirty="0"/>
+          </a:p>
+        </p:txBody>
+      </p:sp>
+      <p:sp>
+        <p:nvSpPr>
+          <p:cNvPr id="6" name="Shape 3"/>
+          <p:cNvSpPr/>
+          <p:nvPr/>
+        </p:nvSpPr>
+        <p:spPr>
+          <a:xfrm>
+            <a:off x="411480" y="1234440"/>
+            <a:ext cx="4023360" cy="1417320"/>
+          </a:xfrm>
+          <a:prstGeom prst="roundRect">
+            <a:avLst>
+              <a:gd name="adj" fmla="val 5161"/>
+            </a:avLst>
+          </a:prstGeom>
+          <a:solidFill>
+            <a:srgbClr val="FFFFFF"/>
+          </a:solidFill>
+          <a:ln w="9525">
+            <a:solidFill>
+              <a:srgbClr val="DCE1E7"/>
+            </a:solidFill>
+            <a:prstDash val="solid"/>
+          </a:ln>
+        </p:spPr>
+      </p:sp>
+      <p:sp>
+        <p:nvSpPr>
+          <p:cNvPr id="7" name="Shape 4"/>
+          <p:cNvSpPr/>
+          <p:nvPr/>
+        </p:nvSpPr>
+        <p:spPr>
+          <a:xfrm>
+            <a:off x="566928" y="1353312"/>
+            <a:ext cx="329184" cy="329184"/>
+          </a:xfrm>
+          <a:prstGeom prst="ellipse">
+            <a:avLst/>
+          </a:prstGeom>
+          <a:solidFill>
+            <a:srgbClr val="E3F4F1"/>
+          </a:solidFill>
+          <a:ln w="12700">
+            <a:solidFill>
+              <a:srgbClr val="E3F4F1"/>
+            </a:solidFill>
+            <a:prstDash val="solid"/>
+          </a:ln>
+        </p:spPr>
+      </p:sp>
+      <p:pic>
+        <p:nvPicPr>
+          <p:cNvPr id="8" name="Image 0" descr="preencoded.png">    </p:cNvPr>
+          <p:cNvPicPr>
+            <a:picLocks noChangeAspect="1"/>
+          </p:cNvPicPr>
+          <p:nvPr/>
+        </p:nvPicPr>
+        <p:blipFill>
+          <a:blip r:embed="rId1"/>
+          <a:stretch>
+            <a:fillRect/>
+          </a:stretch>
+        </p:blipFill>
+        <p:spPr>
+          <a:xfrm>
+            <a:off x="645932" y="1432316"/>
+            <a:ext cx="171176" cy="171176"/>
+          </a:xfrm>
+          <a:prstGeom prst="rect">
+            <a:avLst/>
+          </a:prstGeom>
+        </p:spPr>
+      </p:pic>
+      <p:sp>
+        <p:nvSpPr>
+          <p:cNvPr id="9" name="Text 5"/>
+          <p:cNvSpPr txBox="1"/>
+          <p:nvPr/>
+        </p:nvSpPr>
+        <p:spPr>
+          <a:xfrm>
+            <a:off x="987552" y="1353312"/>
+            <a:ext cx="2743200" cy="329184"/>
+          </a:xfrm>
+          <a:prstGeom prst="rect">
+            <a:avLst/>
+          </a:prstGeom>
+          <a:noFill/>
+          <a:ln/>
+        </p:spPr>
+        <p:txBody>
+          <a:bodyPr wrap="square" lIns="0" tIns="0" rIns="0" bIns="0" rtlCol="0" anchor="ctr"/>
+          <a:lstStyle/>
+          <a:p>
+            <a:pPr indent="0" marL="0">
+              <a:buNone/>
+            </a:pPr>
+            <a:r>
+              <a:rPr lang="en-US" sz="1250" b="1" dirty="0">
+                <a:solidFill>
+                  <a:srgbClr val="1D1D1F"/>
+                </a:solidFill>
+                <a:latin typeface="SF Pro Display" pitchFamily="34" charset="0"/>
+                <a:ea typeface="SF Pro Display" pitchFamily="34" charset="-122"/>
+                <a:cs typeface="SF Pro Display" pitchFamily="34" charset="-120"/>
+              </a:rPr>
+              <a:t>The job</a:t>
+            </a:r>
+            <a:endParaRPr lang="en-US" sz="1250" dirty="0"/>
+          </a:p>
+        </p:txBody>
+      </p:sp>
+      <p:sp>
+        <p:nvSpPr>
+          <p:cNvPr id="10" name="Text 6"/>
+          <p:cNvSpPr txBox="1"/>
+          <p:nvPr/>
+        </p:nvSpPr>
+        <p:spPr>
+          <a:xfrm>
+            <a:off x="566928" y="1783080"/>
+            <a:ext cx="1234440" cy="365760"/>
+          </a:xfrm>
+          <a:prstGeom prst="rect">
+            <a:avLst/>
+          </a:prstGeom>
+          <a:noFill/>
+          <a:ln/>
+        </p:spPr>
+        <p:txBody>
+          <a:bodyPr wrap="square" lIns="0" tIns="0" rIns="0" bIns="0" rtlCol="0" anchor="ctr"/>
+          <a:lstStyle/>
+          <a:p>
+            <a:pPr indent="0" marL="0">
+              <a:buNone/>
+            </a:pPr>
+            <a:r>
+              <a:rPr lang="en-US" sz="900" dirty="0">
+                <a:solidFill>
+                  <a:srgbClr val="6E6E73"/>
+                </a:solidFill>
+                <a:latin typeface="SF Pro Text" pitchFamily="34" charset="0"/>
+                <a:ea typeface="SF Pro Text" pitchFamily="34" charset="-122"/>
+                <a:cs typeface="SF Pro Text" pitchFamily="34" charset="-120"/>
+              </a:rPr>
+              <a:t>Client  </a:t>
+            </a:r>
+            <a:pPr indent="0" marL="0">
+              <a:buNone/>
+            </a:pPr>
+            <a:r>
+              <a:rPr lang="en-US" sz="1100" b="1" dirty="0">
+                <a:solidFill>
+                  <a:srgbClr val="1D1D1F"/>
+                </a:solidFill>
+                <a:latin typeface="SF Pro Display" pitchFamily="34" charset="0"/>
+                <a:ea typeface="SF Pro Display" pitchFamily="34" charset="-122"/>
+                <a:cs typeface="SF Pro Display" pitchFamily="34" charset="-120"/>
+              </a:rPr>
+              <a:t>Repeat</a:t>
+            </a:r>
+            <a:endParaRPr lang="en-US" sz="900" dirty="0"/>
+          </a:p>
+        </p:txBody>
+      </p:sp>
+      <p:sp>
+        <p:nvSpPr>
+          <p:cNvPr id="11" name="Text 7"/>
+          <p:cNvSpPr txBox="1"/>
+          <p:nvPr/>
+        </p:nvSpPr>
+        <p:spPr>
+          <a:xfrm>
+            <a:off x="1828800" y="1783080"/>
+            <a:ext cx="1234440" cy="365760"/>
+          </a:xfrm>
+          <a:prstGeom prst="rect">
+            <a:avLst/>
+          </a:prstGeom>
+          <a:noFill/>
+          <a:ln/>
+        </p:spPr>
+        <p:txBody>
+          <a:bodyPr wrap="square" lIns="0" tIns="0" rIns="0" bIns="0" rtlCol="0" anchor="ctr"/>
+          <a:lstStyle/>
+          <a:p>
+            <a:pPr indent="0" marL="0">
+              <a:buNone/>
+            </a:pPr>
+            <a:r>
+              <a:rPr lang="en-US" sz="900" dirty="0">
+                <a:solidFill>
+                  <a:srgbClr val="6E6E73"/>
+                </a:solidFill>
+                <a:latin typeface="SF Pro Text" pitchFamily="34" charset="0"/>
+                <a:ea typeface="SF Pro Text" pitchFamily="34" charset="-122"/>
+                <a:cs typeface="SF Pro Text" pitchFamily="34" charset="-120"/>
+              </a:rPr>
+              <a:t>Booked  </a:t>
+            </a:r>
+            <a:pPr indent="0" marL="0">
+              <a:buNone/>
+            </a:pPr>
+            <a:r>
+              <a:rPr lang="en-US" sz="1100" b="1" dirty="0">
+                <a:solidFill>
+                  <a:srgbClr val="1D1D1F"/>
+                </a:solidFill>
+                <a:latin typeface="SF Pro Display" pitchFamily="34" charset="0"/>
+                <a:ea typeface="SF Pro Display" pitchFamily="34" charset="-122"/>
+                <a:cs typeface="SF Pro Display" pitchFamily="34" charset="-120"/>
+              </a:rPr>
+              <a:t>5 hours</a:t>
+            </a:r>
+            <a:endParaRPr lang="en-US" sz="900" dirty="0"/>
+          </a:p>
+        </p:txBody>
+      </p:sp>
+      <p:sp>
+        <p:nvSpPr>
+          <p:cNvPr id="12" name="Text 8"/>
+          <p:cNvSpPr txBox="1"/>
+          <p:nvPr/>
+        </p:nvSpPr>
+        <p:spPr>
+          <a:xfrm>
+            <a:off x="3090672" y="1783080"/>
+            <a:ext cx="1234440" cy="365760"/>
+          </a:xfrm>
+          <a:prstGeom prst="rect">
+            <a:avLst/>
+          </a:prstGeom>
+          <a:noFill/>
+          <a:ln/>
+        </p:spPr>
+        <p:txBody>
+          <a:bodyPr wrap="square" lIns="0" tIns="0" rIns="0" bIns="0" rtlCol="0" anchor="ctr"/>
+          <a:lstStyle/>
+          <a:p>
+            <a:pPr indent="0" marL="0">
+              <a:buNone/>
+            </a:pPr>
+            <a:r>
+              <a:rPr lang="en-US" sz="900" dirty="0">
+                <a:solidFill>
+                  <a:srgbClr val="6E6E73"/>
+                </a:solidFill>
+                <a:latin typeface="SF Pro Text" pitchFamily="34" charset="0"/>
+                <a:ea typeface="SF Pro Text" pitchFamily="34" charset="-122"/>
+                <a:cs typeface="SF Pro Text" pitchFamily="34" charset="-120"/>
+              </a:rPr>
+              <a:t>Voucher  </a:t>
+            </a:r>
+            <a:pPr indent="0" marL="0">
+              <a:buNone/>
+            </a:pPr>
+            <a:r>
+              <a:rPr lang="en-US" sz="1100" b="1" dirty="0">
+                <a:solidFill>
+                  <a:srgbClr val="1D1D1F"/>
+                </a:solidFill>
+                <a:latin typeface="SF Pro Display" pitchFamily="34" charset="0"/>
+                <a:ea typeface="SF Pro Display" pitchFamily="34" charset="-122"/>
+                <a:cs typeface="SF Pro Display" pitchFamily="34" charset="-120"/>
+              </a:rPr>
+              <a:t>3 hours</a:t>
+            </a:r>
+            <a:endParaRPr lang="en-US" sz="900" dirty="0"/>
+          </a:p>
+        </p:txBody>
+      </p:sp>
+      <p:sp>
+        <p:nvSpPr>
+          <p:cNvPr id="13" name="Text 9"/>
+          <p:cNvSpPr txBox="1"/>
+          <p:nvPr/>
+        </p:nvSpPr>
+        <p:spPr>
+          <a:xfrm>
+            <a:off x="566928" y="2194560"/>
+            <a:ext cx="1234440" cy="365760"/>
+          </a:xfrm>
+          <a:prstGeom prst="rect">
+            <a:avLst/>
+          </a:prstGeom>
+          <a:noFill/>
+          <a:ln/>
+        </p:spPr>
+        <p:txBody>
+          <a:bodyPr wrap="square" lIns="0" tIns="0" rIns="0" bIns="0" rtlCol="0" anchor="ctr"/>
+          <a:lstStyle/>
+          <a:p>
+            <a:pPr indent="0" marL="0">
+              <a:buNone/>
+            </a:pPr>
+            <a:r>
+              <a:rPr lang="en-US" sz="900" dirty="0">
+                <a:solidFill>
+                  <a:srgbClr val="6E6E73"/>
+                </a:solidFill>
+                <a:latin typeface="SF Pro Text" pitchFamily="34" charset="0"/>
+                <a:ea typeface="SF Pro Text" pitchFamily="34" charset="-122"/>
+                <a:cs typeface="SF Pro Text" pitchFamily="34" charset="-120"/>
+              </a:rPr>
+              <a:t>Surge bonus  </a:t>
+            </a:r>
+            <a:pPr indent="0" marL="0">
+              <a:buNone/>
+            </a:pPr>
+            <a:r>
+              <a:rPr lang="en-US" sz="1100" b="1" dirty="0">
+                <a:solidFill>
+                  <a:srgbClr val="1D1D1F"/>
+                </a:solidFill>
+                <a:latin typeface="SF Pro Display" pitchFamily="34" charset="0"/>
+                <a:ea typeface="SF Pro Display" pitchFamily="34" charset="-122"/>
+                <a:cs typeface="SF Pro Display" pitchFamily="34" charset="-120"/>
+              </a:rPr>
+              <a:t>$12.50</a:t>
+            </a:r>
+            <a:endParaRPr lang="en-US" sz="900" dirty="0"/>
+          </a:p>
+        </p:txBody>
+      </p:sp>
+      <p:sp>
+        <p:nvSpPr>
+          <p:cNvPr id="14" name="Text 10"/>
+          <p:cNvSpPr txBox="1"/>
+          <p:nvPr/>
+        </p:nvSpPr>
+        <p:spPr>
+          <a:xfrm>
+            <a:off x="1828800" y="2194560"/>
+            <a:ext cx="1234440" cy="365760"/>
+          </a:xfrm>
+          <a:prstGeom prst="rect">
+            <a:avLst/>
+          </a:prstGeom>
+          <a:noFill/>
+          <a:ln/>
+        </p:spPr>
+        <p:txBody>
+          <a:bodyPr wrap="square" lIns="0" tIns="0" rIns="0" bIns="0" rtlCol="0" anchor="ctr"/>
+          <a:lstStyle/>
+          <a:p>
+            <a:pPr indent="0" marL="0">
+              <a:buNone/>
+            </a:pPr>
+            <a:r>
+              <a:rPr lang="en-US" sz="900" dirty="0">
+                <a:solidFill>
+                  <a:srgbClr val="6E6E73"/>
+                </a:solidFill>
+                <a:latin typeface="SF Pro Text" pitchFamily="34" charset="0"/>
+                <a:ea typeface="SF Pro Text" pitchFamily="34" charset="-122"/>
+                <a:cs typeface="SF Pro Text" pitchFamily="34" charset="-120"/>
+              </a:rPr>
+              <a:t>Tip  </a:t>
+            </a:r>
+            <a:pPr indent="0" marL="0">
+              <a:buNone/>
+            </a:pPr>
+            <a:r>
+              <a:rPr lang="en-US" sz="1100" b="1" dirty="0">
+                <a:solidFill>
+                  <a:srgbClr val="1D1D1F"/>
+                </a:solidFill>
+                <a:latin typeface="SF Pro Display" pitchFamily="34" charset="0"/>
+                <a:ea typeface="SF Pro Display" pitchFamily="34" charset="-122"/>
+                <a:cs typeface="SF Pro Display" pitchFamily="34" charset="-120"/>
+              </a:rPr>
+              <a:t>$10.00</a:t>
+            </a:r>
+            <a:endParaRPr lang="en-US" sz="900" dirty="0"/>
+          </a:p>
+        </p:txBody>
+      </p:sp>
+      <p:sp>
+        <p:nvSpPr>
+          <p:cNvPr id="15" name="Shape 11"/>
+          <p:cNvSpPr/>
+          <p:nvPr/>
+        </p:nvSpPr>
+        <p:spPr>
+          <a:xfrm>
+            <a:off x="411480" y="2788920"/>
+            <a:ext cx="1965960" cy="1920240"/>
+          </a:xfrm>
+          <a:prstGeom prst="roundRect">
+            <a:avLst>
+              <a:gd name="adj" fmla="val 3810"/>
+            </a:avLst>
+          </a:prstGeom>
+          <a:solidFill>
+            <a:srgbClr val="FFFFFF"/>
+          </a:solidFill>
+          <a:ln w="9525">
+            <a:solidFill>
+              <a:srgbClr val="DCE1E7"/>
+            </a:solidFill>
+            <a:prstDash val="solid"/>
+          </a:ln>
+        </p:spPr>
+      </p:sp>
+      <p:sp>
+        <p:nvSpPr>
+          <p:cNvPr id="16" name="Shape 12"/>
+          <p:cNvSpPr/>
+          <p:nvPr/>
+        </p:nvSpPr>
+        <p:spPr>
+          <a:xfrm>
+            <a:off x="548640" y="2907792"/>
+            <a:ext cx="411480" cy="411480"/>
+          </a:xfrm>
+          <a:prstGeom prst="ellipse">
+            <a:avLst/>
+          </a:prstGeom>
+          <a:solidFill>
+            <a:srgbClr val="E3F4F1"/>
+          </a:solidFill>
+          <a:ln w="12700">
+            <a:solidFill>
+              <a:srgbClr val="E3F4F1"/>
+            </a:solidFill>
+            <a:prstDash val="solid"/>
+          </a:ln>
+        </p:spPr>
+      </p:sp>
+      <p:pic>
+        <p:nvPicPr>
+          <p:cNvPr id="17" name="Image 1" descr="preencoded.png">    </p:cNvPr>
+          <p:cNvPicPr>
+            <a:picLocks noChangeAspect="1"/>
+          </p:cNvPicPr>
+          <p:nvPr/>
+        </p:nvPicPr>
+        <p:blipFill>
+          <a:blip r:embed="rId2"/>
+          <a:stretch>
+            <a:fillRect/>
+          </a:stretch>
+        </p:blipFill>
+        <p:spPr>
+          <a:xfrm>
+            <a:off x="647395" y="3006547"/>
+            <a:ext cx="213970" cy="213970"/>
+          </a:xfrm>
+          <a:prstGeom prst="rect">
+            <a:avLst/>
+          </a:prstGeom>
+        </p:spPr>
+      </p:pic>
+      <p:sp>
+        <p:nvSpPr>
+          <p:cNvPr id="18" name="Text 13"/>
+          <p:cNvSpPr txBox="1"/>
+          <p:nvPr/>
+        </p:nvSpPr>
+        <p:spPr>
+          <a:xfrm>
+            <a:off x="1051560" y="2907792"/>
+            <a:ext cx="1280160" cy="411480"/>
+          </a:xfrm>
+          <a:prstGeom prst="rect">
+            <a:avLst/>
+          </a:prstGeom>
+          <a:noFill/>
+          <a:ln/>
+        </p:spPr>
+        <p:txBody>
+          <a:bodyPr wrap="square" lIns="0" tIns="0" rIns="0" bIns="0" rtlCol="0" anchor="ctr"/>
+          <a:lstStyle/>
+          <a:p>
+            <a:pPr indent="0" marL="0">
+              <a:buNone/>
+            </a:pPr>
+            <a:r>
+              <a:rPr lang="en-US" sz="1250" b="1" dirty="0">
+                <a:solidFill>
+                  <a:srgbClr val="1D1D1F"/>
+                </a:solidFill>
+                <a:latin typeface="SF Pro Display" pitchFamily="34" charset="0"/>
+                <a:ea typeface="SF Pro Display" pitchFamily="34" charset="-122"/>
+                <a:cs typeface="SF Pro Display" pitchFamily="34" charset="-120"/>
+              </a:rPr>
+              <a:t>CP Sarah</a:t>
+            </a:r>
+            <a:endParaRPr lang="en-US" sz="1250" dirty="0"/>
+          </a:p>
+        </p:txBody>
+      </p:sp>
+      <p:sp>
+        <p:nvSpPr>
+          <p:cNvPr id="19" name="Text 14"/>
+          <p:cNvSpPr txBox="1"/>
+          <p:nvPr/>
+        </p:nvSpPr>
+        <p:spPr>
+          <a:xfrm>
+            <a:off x="548640" y="3401568"/>
+            <a:ext cx="1737360" cy="274320"/>
+          </a:xfrm>
+          <a:prstGeom prst="rect">
+            <a:avLst/>
+          </a:prstGeom>
+          <a:noFill/>
+          <a:ln/>
+        </p:spPr>
+        <p:txBody>
+          <a:bodyPr wrap="square" lIns="0" tIns="0" rIns="0" bIns="0" rtlCol="0" anchor="t"/>
+          <a:lstStyle/>
+          <a:p>
+            <a:pPr indent="0" marL="0">
+              <a:buNone/>
+            </a:pPr>
+            <a:r>
+              <a:rPr lang="en-US" sz="900" b="1" dirty="0">
+                <a:solidFill>
+                  <a:srgbClr val="0B7A6F"/>
+                </a:solidFill>
+                <a:latin typeface="SF Pro Text" pitchFamily="34" charset="0"/>
+                <a:ea typeface="SF Pro Text" pitchFamily="34" charset="-122"/>
+                <a:cs typeface="SF Pro Text" pitchFamily="34" charset="-120"/>
+              </a:rPr>
+              <a:t>CA/CA-WA Operating Model</a:t>
+            </a:r>
+            <a:endParaRPr lang="en-US" sz="900" dirty="0"/>
+          </a:p>
+        </p:txBody>
+      </p:sp>
+      <p:sp>
+        <p:nvSpPr>
+          <p:cNvPr id="20" name="Text 15"/>
+          <p:cNvSpPr txBox="1"/>
+          <p:nvPr/>
+        </p:nvSpPr>
+        <p:spPr>
+          <a:xfrm>
+            <a:off x="548640" y="3703320"/>
+            <a:ext cx="1737360" cy="914400"/>
+          </a:xfrm>
+          <a:prstGeom prst="rect">
+            <a:avLst/>
+          </a:prstGeom>
+          <a:noFill/>
+          <a:ln/>
+        </p:spPr>
+        <p:txBody>
+          <a:bodyPr wrap="square" lIns="0" tIns="0" rIns="0" bIns="0" rtlCol="0" anchor="t"/>
+          <a:lstStyle/>
+          <a:p>
+            <a:pPr indent="0" marL="0">
+              <a:spcAft>
+                <a:spcPts val="400"/>
+              </a:spcAft>
+              <a:buNone/>
+            </a:pPr>
+            <a:r>
+              <a:rPr lang="en-US" sz="900" dirty="0">
+                <a:solidFill>
+                  <a:srgbClr val="1D1D1F"/>
+                </a:solidFill>
+                <a:latin typeface="SF Pro Text" pitchFamily="34" charset="0"/>
+                <a:ea typeface="SF Pro Text" pitchFamily="34" charset="-122"/>
+                <a:cs typeface="SF Pro Text" pitchFamily="34" charset="-120"/>
+              </a:rPr>
+              <a:t>$30.00/hr  first-time C/CP pair</a:t>
+            </a:r>
+            <a:endParaRPr lang="en-US" sz="900" dirty="0"/>
+          </a:p>
+          <a:p>
+            <a:pPr indent="0" marL="0">
+              <a:spcAft>
+                <a:spcPts val="400"/>
+              </a:spcAft>
+              <a:buNone/>
+            </a:pPr>
+            <a:r>
+              <a:rPr lang="en-US" sz="900" dirty="0">
+                <a:solidFill>
+                  <a:srgbClr val="1D1D1F"/>
+                </a:solidFill>
+                <a:latin typeface="SF Pro Text" pitchFamily="34" charset="0"/>
+                <a:ea typeface="SF Pro Text" pitchFamily="34" charset="-122"/>
+                <a:cs typeface="SF Pro Text" pitchFamily="34" charset="-120"/>
+              </a:rPr>
+              <a:t>$28.00/hr  repeat C/CP pair</a:t>
+            </a:r>
+            <a:endParaRPr lang="en-US" sz="900" dirty="0"/>
+          </a:p>
+        </p:txBody>
+      </p:sp>
+      <p:sp>
+        <p:nvSpPr>
+          <p:cNvPr id="21" name="Shape 16"/>
+          <p:cNvSpPr/>
+          <p:nvPr/>
+        </p:nvSpPr>
+        <p:spPr>
+          <a:xfrm>
+            <a:off x="2468880" y="2788920"/>
+            <a:ext cx="1965960" cy="1920240"/>
+          </a:xfrm>
+          <a:prstGeom prst="roundRect">
+            <a:avLst>
+              <a:gd name="adj" fmla="val 3810"/>
+            </a:avLst>
+          </a:prstGeom>
+          <a:solidFill>
+            <a:srgbClr val="FFFFFF"/>
+          </a:solidFill>
+          <a:ln w="9525">
+            <a:solidFill>
+              <a:srgbClr val="DCE1E7"/>
+            </a:solidFill>
+            <a:prstDash val="solid"/>
+          </a:ln>
+        </p:spPr>
+      </p:sp>
+      <p:sp>
+        <p:nvSpPr>
+          <p:cNvPr id="22" name="Shape 17"/>
+          <p:cNvSpPr/>
+          <p:nvPr/>
+        </p:nvSpPr>
+        <p:spPr>
+          <a:xfrm>
+            <a:off x="2606040" y="2907792"/>
+            <a:ext cx="411480" cy="411480"/>
+          </a:xfrm>
+          <a:prstGeom prst="ellipse">
+            <a:avLst/>
+          </a:prstGeom>
+          <a:solidFill>
+            <a:srgbClr val="E3F4F1"/>
+          </a:solidFill>
+          <a:ln w="12700">
+            <a:solidFill>
+              <a:srgbClr val="E3F4F1"/>
+            </a:solidFill>
+            <a:prstDash val="solid"/>
+          </a:ln>
+        </p:spPr>
+      </p:sp>
+      <p:pic>
+        <p:nvPicPr>
+          <p:cNvPr id="23" name="Image 2" descr="preencoded.png">    </p:cNvPr>
+          <p:cNvPicPr>
+            <a:picLocks noChangeAspect="1"/>
+          </p:cNvPicPr>
+          <p:nvPr/>
+        </p:nvPicPr>
+        <p:blipFill>
+          <a:blip r:embed="rId3"/>
+          <a:stretch>
+            <a:fillRect/>
+          </a:stretch>
+        </p:blipFill>
+        <p:spPr>
+          <a:xfrm>
+            <a:off x="2704795" y="3006547"/>
+            <a:ext cx="213970" cy="213970"/>
+          </a:xfrm>
+          <a:prstGeom prst="rect">
+            <a:avLst/>
+          </a:prstGeom>
+        </p:spPr>
+      </p:pic>
+      <p:sp>
+        <p:nvSpPr>
+          <p:cNvPr id="24" name="Text 18"/>
+          <p:cNvSpPr txBox="1"/>
+          <p:nvPr/>
+        </p:nvSpPr>
+        <p:spPr>
+          <a:xfrm>
+            <a:off x="3108960" y="2907792"/>
+            <a:ext cx="1280160" cy="411480"/>
+          </a:xfrm>
+          <a:prstGeom prst="rect">
+            <a:avLst/>
+          </a:prstGeom>
+          <a:noFill/>
+          <a:ln/>
+        </p:spPr>
+        <p:txBody>
+          <a:bodyPr wrap="square" lIns="0" tIns="0" rIns="0" bIns="0" rtlCol="0" anchor="ctr"/>
+          <a:lstStyle/>
+          <a:p>
+            <a:pPr indent="0" marL="0">
+              <a:buNone/>
+            </a:pPr>
+            <a:r>
+              <a:rPr lang="en-US" sz="1250" b="1" dirty="0">
+                <a:solidFill>
+                  <a:srgbClr val="1D1D1F"/>
+                </a:solidFill>
+                <a:latin typeface="SF Pro Display" pitchFamily="34" charset="0"/>
+                <a:ea typeface="SF Pro Display" pitchFamily="34" charset="-122"/>
+                <a:cs typeface="SF Pro Display" pitchFamily="34" charset="-120"/>
+              </a:rPr>
+              <a:t>CP Gab</a:t>
+            </a:r>
+            <a:endParaRPr lang="en-US" sz="1250" dirty="0"/>
+          </a:p>
+        </p:txBody>
+      </p:sp>
+      <p:sp>
+        <p:nvSpPr>
+          <p:cNvPr id="25" name="Text 19"/>
+          <p:cNvSpPr txBox="1"/>
+          <p:nvPr/>
+        </p:nvSpPr>
+        <p:spPr>
+          <a:xfrm>
+            <a:off x="2606040" y="3401568"/>
+            <a:ext cx="1737360" cy="274320"/>
+          </a:xfrm>
+          <a:prstGeom prst="rect">
+            <a:avLst/>
+          </a:prstGeom>
+          <a:noFill/>
+          <a:ln/>
+        </p:spPr>
+        <p:txBody>
+          <a:bodyPr wrap="square" lIns="0" tIns="0" rIns="0" bIns="0" rtlCol="0" anchor="t"/>
+          <a:lstStyle/>
+          <a:p>
+            <a:pPr indent="0" marL="0">
+              <a:buNone/>
+            </a:pPr>
+            <a:r>
+              <a:rPr lang="en-US" sz="900" b="1" dirty="0">
+                <a:solidFill>
+                  <a:srgbClr val="0B7A6F"/>
+                </a:solidFill>
+                <a:latin typeface="SF Pro Text" pitchFamily="34" charset="0"/>
+                <a:ea typeface="SF Pro Text" pitchFamily="34" charset="-122"/>
+                <a:cs typeface="SF Pro Text" pitchFamily="34" charset="-120"/>
+              </a:rPr>
+              <a:t>General Operating Model</a:t>
+            </a:r>
+            <a:endParaRPr lang="en-US" sz="900" dirty="0"/>
+          </a:p>
+        </p:txBody>
+      </p:sp>
+      <p:sp>
+        <p:nvSpPr>
+          <p:cNvPr id="26" name="Text 20"/>
+          <p:cNvSpPr txBox="1"/>
+          <p:nvPr/>
+        </p:nvSpPr>
+        <p:spPr>
+          <a:xfrm>
+            <a:off x="2606040" y="3703320"/>
+            <a:ext cx="1737360" cy="914400"/>
+          </a:xfrm>
+          <a:prstGeom prst="rect">
+            <a:avLst/>
+          </a:prstGeom>
+          <a:noFill/>
+          <a:ln/>
+        </p:spPr>
+        <p:txBody>
+          <a:bodyPr wrap="square" lIns="0" tIns="0" rIns="0" bIns="0" rtlCol="0" anchor="t"/>
+          <a:lstStyle/>
+          <a:p>
+            <a:pPr indent="0" marL="0">
+              <a:spcAft>
+                <a:spcPts val="400"/>
+              </a:spcAft>
+              <a:buNone/>
+            </a:pPr>
+            <a:r>
+              <a:rPr lang="en-US" sz="900" dirty="0">
+                <a:solidFill>
+                  <a:srgbClr val="1D1D1F"/>
+                </a:solidFill>
+                <a:latin typeface="SF Pro Text" pitchFamily="34" charset="0"/>
+                <a:ea typeface="SF Pro Text" pitchFamily="34" charset="-122"/>
+                <a:cs typeface="SF Pro Text" pitchFamily="34" charset="-120"/>
+              </a:rPr>
+              <a:t>$24.00/hr  one rate</a:t>
+            </a:r>
+            <a:endParaRPr lang="en-US" sz="900" dirty="0"/>
+          </a:p>
+        </p:txBody>
+      </p:sp>
+      <p:sp>
+        <p:nvSpPr>
+          <p:cNvPr id="27" name="Shape 21"/>
+          <p:cNvSpPr/>
+          <p:nvPr/>
+        </p:nvSpPr>
+        <p:spPr>
+          <a:xfrm>
+            <a:off x="4572000" y="1234440"/>
+            <a:ext cx="4160520" cy="457200"/>
+          </a:xfrm>
+          <a:prstGeom prst="roundRect">
+            <a:avLst>
+              <a:gd name="adj" fmla="val 20000"/>
+            </a:avLst>
+          </a:prstGeom>
+          <a:solidFill>
+            <a:srgbClr val="0B7A6F"/>
+          </a:solidFill>
+          <a:ln w="12700">
+            <a:solidFill>
+              <a:srgbClr val="0B7A6F"/>
+            </a:solidFill>
+            <a:prstDash val="solid"/>
+          </a:ln>
+        </p:spPr>
+      </p:sp>
+      <p:pic>
+        <p:nvPicPr>
+          <p:cNvPr id="28" name="Image 3" descr="preencoded.png">    </p:cNvPr>
+          <p:cNvPicPr>
+            <a:picLocks noChangeAspect="1"/>
+          </p:cNvPicPr>
+          <p:nvPr/>
+        </p:nvPicPr>
+        <p:blipFill>
+          <a:blip r:embed="rId4"/>
+          <a:stretch>
+            <a:fillRect/>
+          </a:stretch>
+        </p:blipFill>
+        <p:spPr>
+          <a:xfrm>
+            <a:off x="4754880" y="1353312"/>
+            <a:ext cx="219456" cy="219456"/>
+          </a:xfrm>
+          <a:prstGeom prst="rect">
+            <a:avLst/>
+          </a:prstGeom>
+        </p:spPr>
+      </p:pic>
+      <p:sp>
+        <p:nvSpPr>
+          <p:cNvPr id="29" name="Text 22"/>
+          <p:cNvSpPr txBox="1"/>
+          <p:nvPr/>
+        </p:nvSpPr>
+        <p:spPr>
+          <a:xfrm>
+            <a:off x="5074920" y="1234440"/>
+            <a:ext cx="3474720" cy="457200"/>
+          </a:xfrm>
+          <a:prstGeom prst="rect">
+            <a:avLst/>
+          </a:prstGeom>
+          <a:noFill/>
+          <a:ln/>
+        </p:spPr>
+        <p:txBody>
+          <a:bodyPr wrap="square" lIns="0" tIns="0" rIns="0" bIns="0" rtlCol="0" anchor="ctr"/>
+          <a:lstStyle/>
+          <a:p>
+            <a:pPr indent="0" marL="0">
+              <a:buNone/>
+            </a:pPr>
+            <a:r>
+              <a:rPr lang="en-US" sz="1300" b="1" dirty="0">
+                <a:solidFill>
+                  <a:srgbClr val="FFFFFF"/>
+                </a:solidFill>
+                <a:latin typeface="SF Pro Display" pitchFamily="34" charset="0"/>
+                <a:ea typeface="SF Pro Display" pitchFamily="34" charset="-122"/>
+                <a:cs typeface="SF Pro Display" pitchFamily="34" charset="-120"/>
+              </a:rPr>
+              <a:t>Show Answers</a:t>
+            </a:r>
+            <a:endParaRPr lang="en-US" sz="1300" dirty="0"/>
+          </a:p>
+        </p:txBody>
+      </p:sp>
+      <p:sp>
+        <p:nvSpPr>
+          <p:cNvPr id="30" name="Shape 23"/>
+          <p:cNvSpPr/>
+          <p:nvPr/>
+        </p:nvSpPr>
+        <p:spPr>
+          <a:xfrm>
+            <a:off x="4572000" y="1783080"/>
+            <a:ext cx="4160520" cy="2926080"/>
+          </a:xfrm>
+          <a:prstGeom prst="roundRect">
+            <a:avLst>
+              <a:gd name="adj" fmla="val 2500"/>
+            </a:avLst>
+          </a:prstGeom>
+          <a:solidFill>
+            <a:srgbClr val="E3F4F1"/>
+          </a:solidFill>
+          <a:ln w="9525">
+            <a:solidFill>
+              <a:srgbClr val="E3F4F1"/>
+            </a:solidFill>
+            <a:prstDash val="solid"/>
+          </a:ln>
+        </p:spPr>
+      </p:sp>
+      <p:sp>
+        <p:nvSpPr>
+          <p:cNvPr id="31" name="revealCpPay"/>
+          <p:cNvSpPr txBox="1"/>
+          <p:nvPr/>
+        </p:nvSpPr>
+        <p:spPr>
+          <a:xfrm>
+            <a:off x="4754880" y="1920240"/>
+            <a:ext cx="3794760" cy="2697480"/>
+          </a:xfrm>
+          <a:prstGeom prst="rect">
+            <a:avLst/>
+          </a:prstGeom>
+          <a:noFill/>
+          <a:ln/>
+        </p:spPr>
+        <p:txBody>
+          <a:bodyPr wrap="square" lIns="0" tIns="0" rIns="0" bIns="0" rtlCol="0" anchor="t"/>
+          <a:lstStyle/>
+          <a:p>
+            <a:pPr indent="0" marL="0">
+              <a:spcAft>
+                <a:spcPts val="1200"/>
+              </a:spcAft>
+              <a:buNone/>
+            </a:pPr>
+            <a:r>
+              <a:rPr lang="en-US" sz="1250" b="1" dirty="0">
+                <a:solidFill>
+                  <a:srgbClr val="0B7A6F"/>
+                </a:solidFill>
+                <a:latin typeface="SF Pro Display" pitchFamily="34" charset="0"/>
+                <a:ea typeface="SF Pro Display" pitchFamily="34" charset="-122"/>
+                <a:cs typeface="SF Pro Display" pitchFamily="34" charset="-120"/>
+              </a:rPr>
+              <a:t>CP Sarah:  $162.50</a:t>
+            </a:r>
+            <a:br/>
+            <a:pPr indent="0" marL="0">
+              <a:spcAft>
+                <a:spcPts val="1200"/>
+              </a:spcAft>
+              <a:buNone/>
+            </a:pPr>
+            <a:r>
+              <a:rPr lang="en-US" sz="950" dirty="0">
+                <a:solidFill>
+                  <a:srgbClr val="1D1D1F"/>
+                </a:solidFill>
+                <a:latin typeface="SF Pro Text" pitchFamily="34" charset="0"/>
+                <a:ea typeface="SF Pro Text" pitchFamily="34" charset="-122"/>
+                <a:cs typeface="SF Pro Text" pitchFamily="34" charset="-120"/>
+              </a:rPr>
+              <a:t>$28/hr repeat rate × 5 hrs + $12.50 surge bonus + $10.00 tip</a:t>
+            </a:r>
+            <a:endParaRPr lang="en-US" sz="1250" dirty="0"/>
+          </a:p>
+          <a:p>
+            <a:pPr indent="0" marL="0">
+              <a:spcAft>
+                <a:spcPts val="1200"/>
+              </a:spcAft>
+              <a:buNone/>
+            </a:pPr>
+            <a:r>
+              <a:rPr lang="en-US" sz="1250" b="1" dirty="0">
+                <a:solidFill>
+                  <a:srgbClr val="0B7A6F"/>
+                </a:solidFill>
+                <a:latin typeface="SF Pro Display" pitchFamily="34" charset="0"/>
+                <a:ea typeface="SF Pro Display" pitchFamily="34" charset="-122"/>
+                <a:cs typeface="SF Pro Display" pitchFamily="34" charset="-120"/>
+              </a:rPr>
+              <a:t>CP Gab:  $142.50</a:t>
+            </a:r>
+            <a:br/>
+            <a:pPr indent="0" marL="0">
+              <a:spcAft>
+                <a:spcPts val="1200"/>
+              </a:spcAft>
+              <a:buNone/>
+            </a:pPr>
+            <a:r>
+              <a:rPr lang="en-US" sz="950" dirty="0">
+                <a:solidFill>
+                  <a:srgbClr val="1D1D1F"/>
+                </a:solidFill>
+                <a:latin typeface="SF Pro Text" pitchFamily="34" charset="0"/>
+                <a:ea typeface="SF Pro Text" pitchFamily="34" charset="-122"/>
+                <a:cs typeface="SF Pro Text" pitchFamily="34" charset="-120"/>
+              </a:rPr>
+              <a:t>$24/hr × 5 hrs + $12.50 surge bonus + $10.00 tip (repeat client, so no $5 match fee)</a:t>
+            </a:r>
+            <a:endParaRPr lang="en-US" sz="1250" dirty="0"/>
+          </a:p>
+          <a:p>
+            <a:pPr indent="0" marL="0">
+              <a:spcAft>
+                <a:spcPts val="1200"/>
+              </a:spcAft>
+              <a:buNone/>
+            </a:pPr>
+            <a:r>
+              <a:rPr lang="en-US" sz="1250" b="1" dirty="0">
+                <a:solidFill>
+                  <a:srgbClr val="0B7A6F"/>
+                </a:solidFill>
+                <a:latin typeface="SF Pro Display" pitchFamily="34" charset="0"/>
+                <a:ea typeface="SF Pro Display" pitchFamily="34" charset="-122"/>
+                <a:cs typeface="SF Pro Display" pitchFamily="34" charset="-120"/>
+              </a:rPr>
+              <a:t>Key point</a:t>
+            </a:r>
+            <a:br/>
+            <a:pPr indent="0" marL="0">
+              <a:spcAft>
+                <a:spcPts val="1200"/>
+              </a:spcAft>
+              <a:buNone/>
+            </a:pPr>
+            <a:r>
+              <a:rPr lang="en-US" sz="950" dirty="0">
+                <a:solidFill>
+                  <a:srgbClr val="1D1D1F"/>
+                </a:solidFill>
+                <a:latin typeface="SF Pro Text" pitchFamily="34" charset="0"/>
+                <a:ea typeface="SF Pro Text" pitchFamily="34" charset="-122"/>
+                <a:cs typeface="SF Pro Text" pitchFamily="34" charset="-120"/>
+              </a:rPr>
+              <a:t>The 3-hour voucher only lowers what the customer pays. The cleaner is still paid for all 5 hours.</a:t>
+            </a:r>
+            <a:endParaRPr lang="en-US" sz="1250" dirty="0"/>
+          </a:p>
+        </p:txBody>
+      </p:sp>
+      <p:sp>
+        <p:nvSpPr>
+          <p:cNvPr id="25" name="Slide Number Placeholder 0"/>
+          <p:cNvSpPr>
+            <a:spLocks noGrp="1"/>
+          </p:cNvSpPr>
+          <p:nvPr>
+            <p:ph type="sldNum" sz="quarter" idx="4294967295"/>
+          </p:nvPr>
+        </p:nvSpPr>
+        <p:spPr>
+          <a:xfrm>
+            <a:off x="8229600" y="4800600"/>
+            <a:ext cx="457200" cy="182880"/>
+          </a:xfrm>
+          <a:prstGeom prst="rect">
+            <a:avLst/>
+          </a:prstGeom>
+          <a:extLst>
+            <a:ext uri="{C572A759-6A51-4108-AA02-DFA0A04FC94B}">
+              <ma14:wrappingTextBoxFlag xmlns:ma14="http://schemas.microsoft.com/office/mac/drawingml/2011/main" val="0"/>
+            </a:ext>
+          </a:extLst>
+        </p:spPr>
+        <p:txBody>
+          <a:bodyPr/>
+          <a:lstStyle>
+            <a:lvl1pPr>
+              <a:defRPr sz="700">
+                <a:solidFill>
+                  <a:srgbClr val="6E6E73"/>
+                </a:solidFill>
+                <a:latin typeface="SF Pro Text"/>
+                <a:ea typeface="SF Pro Text"/>
+                <a:cs typeface="SF Pro Text"/>
+              </a:defRPr>
+            </a:lvl1pPr>
+          </a:lstStyle>
+          <a:p>
+            <a:pPr algn="r"/>
+            <a:fld id="{F7021451-1387-4CA6-816F-3879F97B5CBC}" type="slidenum">
+              <a:rPr b="0" lang="en-US"/>
+              <a:t>22</a:t>
+            </a:fld>
+            <a:endParaRPr lang="en-US"/>
+          </a:p>
+        </p:txBody>
+      </p:sp>
+    </p:spTree>
+  </p:cSld>
+  <p:clrMapOvr>
+    <a:masterClrMapping/>
+  </p:clrMapOvr>
+  <p:timing>
+    <p:tnLst>
+      <p:par>
+        <p:cTn id="1" dur="indefinite" restart="never" nodeType="tmRoot">
+          <p:childTnLst>
+            <p:seq concurrent="1" nextAc="seek">
+              <p:cTn id="2" dur="indefinite" nodeType="mainSeq">
+                <p:childTnLst>
+                  <p:par>
+                    <p:cTn id="3" fill="hold">
+                      <p:stCondLst>
+                        <p:cond delay="indefinite"/>
+                      </p:stCondLst>
+                      <p:childTnLst>
+                        <p:par>
+                          <p:cTn id="4" fill="hold">
+                            <p:stCondLst>
+                              <p:cond delay="0"/>
+                            </p:stCondLst>
+                            <p:childTnLst>
+                              <p:par>
+                                <p:cTn id="5" presetID="10" presetClass="entr" presetSubtype="0" fill="hold" grpId="0" nodeType="clickEffect">
+                                  <p:stCondLst>
+                                    <p:cond delay="0"/>
+                                  </p:stCondLst>
+                                  <p:childTnLst>
+                                    <p:set>
+                                      <p:cBhvr>
+                                        <p:cTn id="6" dur="1" fill="hold">
+                                          <p:stCondLst>
+                                            <p:cond delay="0"/>
+                                          </p:stCondLst>
+                                        </p:cTn>
+                                        <p:tgtEl>
+                                          <p:spTgt spid="31">
+                                            <p:txEl>
+                                              <p:pRg st="0" end="0"/>
+                                            </p:txEl>
+                                          </p:spTgt>
+                                        </p:tgtEl>
+                                        <p:attrNameLst>
+                                          <p:attrName>style.visibility</p:attrName>
+                                        </p:attrNameLst>
+                                      </p:cBhvr>
+                                      <p:to>
+                                        <p:strVal val="visible"/>
+                                      </p:to>
+                                    </p:set>
+                                    <p:animEffect transition="in" filter="fade">
+                                      <p:cBhvr>
+                                        <p:cTn id="7" dur="600"/>
+                                        <p:tgtEl>
+                                          <p:spTgt spid="31">
+                                            <p:txEl>
+                                              <p:pRg st="0" end="0"/>
+                                            </p:txEl>
+                                          </p:spTgt>
+                                        </p:tgtEl>
+                                      </p:cBhvr>
+                                    </p:animEffect>
+                                  </p:childTnLst>
+                                </p:cTn>
+                              </p:par>
+                            </p:childTnLst>
+                          </p:cTn>
+                        </p:par>
+                      </p:childTnLst>
+                    </p:cTn>
+                  </p:par>
+                  <p:par>
+                    <p:cTn id="8" fill="hold">
+                      <p:stCondLst>
+                        <p:cond delay="indefinite"/>
+                      </p:stCondLst>
+                      <p:childTnLst>
+                        <p:par>
+                          <p:cTn id="9" fill="hold">
+                            <p:stCondLst>
+                              <p:cond delay="0"/>
+                            </p:stCondLst>
+                            <p:childTnLst>
+                              <p:par>
+                                <p:cTn id="10" presetID="10" presetClass="entr" presetSubtype="0" fill="hold" grpId="0" nodeType="clickEffect">
+                                  <p:stCondLst>
+                                    <p:cond delay="0"/>
+                                  </p:stCondLst>
+                                  <p:childTnLst>
+                                    <p:set>
+                                      <p:cBhvr>
+                                        <p:cTn id="11" dur="1" fill="hold">
+                                          <p:stCondLst>
+                                            <p:cond delay="0"/>
+                                          </p:stCondLst>
+                                        </p:cTn>
+                                        <p:tgtEl>
+                                          <p:spTgt spid="31">
+                                            <p:txEl>
+                                              <p:pRg st="1" end="1"/>
+                                            </p:txEl>
+                                          </p:spTgt>
+                                        </p:tgtEl>
+                                        <p:attrNameLst>
+                                          <p:attrName>style.visibility</p:attrName>
+                                        </p:attrNameLst>
+                                      </p:cBhvr>
+                                      <p:to>
+                                        <p:strVal val="visible"/>
+                                      </p:to>
+                                    </p:set>
+                                    <p:animEffect transition="in" filter="fade">
+                                      <p:cBhvr>
+                                        <p:cTn id="12" dur="600"/>
+                                        <p:tgtEl>
+                                          <p:spTgt spid="31">
+                                            <p:txEl>
+                                              <p:pRg st="1" end="1"/>
+                                            </p:txEl>
+                                          </p:spTgt>
+                                        </p:tgtEl>
+                                      </p:cBhvr>
+                                    </p:animEffect>
+                                  </p:childTnLst>
+                                </p:cTn>
+                              </p:par>
+                            </p:childTnLst>
+                          </p:cTn>
+                        </p:par>
+                      </p:childTnLst>
+                    </p:cTn>
+                  </p:par>
+                  <p:par>
+                    <p:cTn id="13" fill="hold">
+                      <p:stCondLst>
+                        <p:cond delay="indefinite"/>
+                      </p:stCondLst>
+                      <p:childTnLst>
+                        <p:par>
+                          <p:cTn id="14" fill="hold">
+                            <p:stCondLst>
+                              <p:cond delay="0"/>
+                            </p:stCondLst>
+                            <p:childTnLst>
+                              <p:par>
+                                <p:cTn id="15" presetID="10" presetClass="entr" presetSubtype="0" fill="hold" grpId="0" nodeType="clickEffect">
+                                  <p:stCondLst>
+                                    <p:cond delay="0"/>
+                                  </p:stCondLst>
+                                  <p:childTnLst>
+                                    <p:set>
+                                      <p:cBhvr>
+                                        <p:cTn id="16" dur="1" fill="hold">
+                                          <p:stCondLst>
+                                            <p:cond delay="0"/>
+                                          </p:stCondLst>
+                                        </p:cTn>
+                                        <p:tgtEl>
+                                          <p:spTgt spid="31">
+                                            <p:txEl>
+                                              <p:pRg st="2" end="2"/>
+                                            </p:txEl>
+                                          </p:spTgt>
+                                        </p:tgtEl>
+                                        <p:attrNameLst>
+                                          <p:attrName>style.visibility</p:attrName>
+                                        </p:attrNameLst>
+                                      </p:cBhvr>
+                                      <p:to>
+                                        <p:strVal val="visible"/>
+                                      </p:to>
+                                    </p:set>
+                                    <p:animEffect transition="in" filter="fade">
+                                      <p:cBhvr>
+                                        <p:cTn id="17" dur="600"/>
+                                        <p:tgtEl>
+                                          <p:spTgt spid="31">
+                                            <p:txEl>
+                                              <p:pRg st="2" end="2"/>
+                                            </p:txEl>
+                                          </p:spTgt>
+                                        </p:tgtEl>
+                                      </p:cBhvr>
+                                    </p:animEffect>
+                                  </p:childTnLst>
+                                </p:cTn>
+                              </p:par>
+                            </p:childTnLst>
+                          </p:cTn>
+                        </p:par>
+                      </p:childTnLst>
+                    </p:cTn>
+                  </p:par>
+                </p:childTnLst>
+              </p:cTn>
+              <p:prevCondLst>
+                <p:cond evt="onPrev" delay="0">
+                  <p:tgtEl>
+                    <p:sldTgt/>
+                  </p:tgtEl>
+                </p:cond>
+              </p:prevCondLst>
+              <p:nextCondLst>
+                <p:cond evt="onNext" delay="0">
+                  <p:tgtEl>
+                    <p:sldTgt/>
+                  </p:tgtEl>
+                </p:cond>
+              </p:nextCondLst>
+            </p:seq>
+          </p:childTnLst>
+        </p:cTn>
+      </p:par>
+    </p:tnLst>
+    <p:bldLst>
+      <p:bldP spid="31" grpId="0" build="p"/>
+    </p:bldLst>
+  </p:timing>
+</p:sld>
+</file>
+
+<file path=ppt/slides/slide23.xml><?xml version="1.0" encoding="utf-8"?>
+<p:sld xmlns:a="http://schemas.openxmlformats.org/drawingml/2006/main" xmlns:r="http://schemas.openxmlformats.org/officeDocument/2006/relationships" xmlns:p="http://schemas.openxmlformats.org/presentationml/2006/main">
+  <p:cSld name="Slide 23">
+    <p:spTree>
+      <p:nvGrpSpPr>
+        <p:cNvPr id="1" name=""/>
+        <p:cNvGrpSpPr/>
+        <p:nvPr/>
+      </p:nvGrpSpPr>
+      <p:grpSpPr>
+        <a:xfrm>
+          <a:off x="0" y="0"/>
+          <a:ext cx="0" cy="0"/>
+          <a:chOff x="0" y="0"/>
+          <a:chExt cx="0" cy="0"/>
+        </a:xfrm>
+      </p:grpSpPr>
+      <p:sp>
+        <p:nvSpPr>
+          <p:cNvPr id="2" name="Text 0"/>
+          <p:cNvSpPr txBox="1"/>
+          <p:nvPr/>
+        </p:nvSpPr>
+        <p:spPr>
+          <a:xfrm>
+            <a:off x="438912" y="274320"/>
+            <a:ext cx="8229600" cy="182880"/>
+          </a:xfrm>
+          <a:prstGeom prst="rect">
+            <a:avLst/>
+          </a:prstGeom>
+          <a:noFill/>
+          <a:ln/>
+        </p:spPr>
+        <p:txBody>
+          <a:bodyPr wrap="square" lIns="0" tIns="0" rIns="0" bIns="0" rtlCol="0" anchor="t"/>
+          <a:lstStyle/>
+          <a:p>
+            <a:pPr indent="0" marL="0">
+              <a:buNone/>
+            </a:pPr>
+            <a:r>
+              <a:rPr lang="en-US" sz="800" b="1" spc="50" kern="0" dirty="0">
+                <a:solidFill>
+                  <a:srgbClr val="0B7A6F"/>
+                </a:solidFill>
+                <a:latin typeface="SF Pro Display" pitchFamily="34" charset="0"/>
+                <a:ea typeface="SF Pro Display" pitchFamily="34" charset="-122"/>
+                <a:cs typeface="SF Pro Display" pitchFamily="34" charset="-120"/>
+              </a:rPr>
+              <a:t>C PRICE VS CP PAY</a:t>
+            </a:r>
+            <a:endParaRPr lang="en-US" sz="800" dirty="0"/>
+          </a:p>
+        </p:txBody>
+      </p:sp>
+      <p:sp>
+        <p:nvSpPr>
+          <p:cNvPr id="3" name="Text 1"/>
+          <p:cNvSpPr txBox="1"/>
+          <p:nvPr/>
+        </p:nvSpPr>
+        <p:spPr>
+          <a:xfrm>
+            <a:off x="438912" y="457200"/>
+            <a:ext cx="8229600" cy="457200"/>
+          </a:xfrm>
+          <a:prstGeom prst="rect">
+            <a:avLst/>
+          </a:prstGeom>
+          <a:noFill/>
+          <a:ln/>
+        </p:spPr>
+        <p:txBody>
+          <a:bodyPr wrap="square" lIns="0" tIns="0" rIns="0" bIns="0" rtlCol="0" anchor="t"/>
+          <a:lstStyle/>
+          <a:p>
+            <a:pPr indent="0" marL="0">
+              <a:buNone/>
+            </a:pPr>
+            <a:r>
+              <a:rPr lang="en-US" sz="2400" b="1" dirty="0">
+                <a:solidFill>
+                  <a:srgbClr val="1D1D1F"/>
+                </a:solidFill>
+                <a:latin typeface="SF Pro Display" pitchFamily="34" charset="0"/>
+                <a:ea typeface="SF Pro Display" pitchFamily="34" charset="-122"/>
+                <a:cs typeface="SF Pro Display" pitchFamily="34" charset="-120"/>
+              </a:rPr>
+              <a:t>When a "platform fee" shows up</a:t>
+            </a:r>
+            <a:endParaRPr lang="en-US" sz="2400" dirty="0"/>
+          </a:p>
+        </p:txBody>
+      </p:sp>
+      <p:sp>
+        <p:nvSpPr>
+          <p:cNvPr id="4" name="Text 2"/>
+          <p:cNvSpPr txBox="1"/>
+          <p:nvPr/>
+        </p:nvSpPr>
+        <p:spPr>
+          <a:xfrm>
+            <a:off x="438912" y="960120"/>
+            <a:ext cx="8229600" cy="274320"/>
+          </a:xfrm>
+          <a:prstGeom prst="rect">
+            <a:avLst/>
+          </a:prstGeom>
+          <a:noFill/>
+          <a:ln/>
+        </p:spPr>
+        <p:txBody>
+          <a:bodyPr wrap="square" lIns="0" tIns="0" rIns="0" bIns="0" rtlCol="0" anchor="t"/>
+          <a:lstStyle/>
+          <a:p>
+            <a:pPr indent="0" marL="0">
+              <a:buNone/>
+            </a:pPr>
+            <a:r>
+              <a:rPr lang="en-US" sz="1200" dirty="0">
+                <a:solidFill>
+                  <a:srgbClr val="6E6E73"/>
+                </a:solidFill>
+                <a:latin typeface="SF Pro Text" pitchFamily="34" charset="0"/>
+                <a:ea typeface="SF Pro Text" pitchFamily="34" charset="-122"/>
+                <a:cs typeface="SF Pro Text" pitchFamily="34" charset="-120"/>
+              </a:rPr>
               <a:t>FC customers have no platform fee. If one shows on an FC invoice, it's one of these cases. Not an error.</a:t>
             </a:r>
             <a:endParaRPr lang="en-US" sz="1200" dirty="0"/>
@@ -16471,7 +18011,7 @@
       </p:sp>
       <p:graphicFrame>
         <p:nvGraphicFramePr>
-          <p:cNvPr id="23" name="Table 0"/>
+          <p:cNvPr id="24" name="Table 0"/>
           <p:cNvGraphicFramePr>
             <a:graphicFrameLocks noGrp="1"/>
           </p:cNvGraphicFramePr>
@@ -17882,744 +19422,6 @@
             <a:pPr algn="r"/>
             <a:fld id="{F7021451-1387-4CA6-816F-3879F97B5CBC}" type="slidenum">
               <a:rPr b="0" lang="en-US"/>
-              <a:t>22</a:t>
-            </a:fld>
-            <a:endParaRPr lang="en-US"/>
-          </a:p>
-        </p:txBody>
-      </p:sp>
-    </p:spTree>
-  </p:cSld>
-  <p:clrMapOvr>
-    <a:masterClrMapping/>
-  </p:clrMapOvr>
-</p:sld>
-</file>
-
-<file path=ppt/slides/slide23.xml><?xml version="1.0" encoding="utf-8"?>
-<p:sld xmlns:a="http://schemas.openxmlformats.org/drawingml/2006/main" xmlns:r="http://schemas.openxmlformats.org/officeDocument/2006/relationships" xmlns:p="http://schemas.openxmlformats.org/presentationml/2006/main">
-  <p:cSld name="Slide 23">
-    <p:spTree>
-      <p:nvGrpSpPr>
-        <p:cNvPr id="1" name=""/>
-        <p:cNvGrpSpPr/>
-        <p:nvPr/>
-      </p:nvGrpSpPr>
-      <p:grpSpPr>
-        <a:xfrm>
-          <a:off x="0" y="0"/>
-          <a:ext cx="0" cy="0"/>
-          <a:chOff x="0" y="0"/>
-          <a:chExt cx="0" cy="0"/>
-        </a:xfrm>
-      </p:grpSpPr>
-      <p:sp>
-        <p:nvSpPr>
-          <p:cNvPr id="2" name="Text 0"/>
-          <p:cNvSpPr txBox="1"/>
-          <p:nvPr/>
-        </p:nvSpPr>
-        <p:spPr>
-          <a:xfrm>
-            <a:off x="438912" y="274320"/>
-            <a:ext cx="8229600" cy="182880"/>
-          </a:xfrm>
-          <a:prstGeom prst="rect">
-            <a:avLst/>
-          </a:prstGeom>
-          <a:noFill/>
-          <a:ln/>
-        </p:spPr>
-        <p:txBody>
-          <a:bodyPr wrap="square" lIns="0" tIns="0" rIns="0" bIns="0" rtlCol="0" anchor="t"/>
-          <a:lstStyle/>
-          <a:p>
-            <a:pPr indent="0" marL="0">
-              <a:buNone/>
-            </a:pPr>
-            <a:r>
-              <a:rPr lang="en-US" sz="800" b="1" spc="50" kern="0" dirty="0">
-                <a:solidFill>
-                  <a:srgbClr val="0B7A6F"/>
-                </a:solidFill>
-                <a:latin typeface="SF Pro Display" pitchFamily="34" charset="0"/>
-                <a:ea typeface="SF Pro Display" pitchFamily="34" charset="-122"/>
-                <a:cs typeface="SF Pro Display" pitchFamily="34" charset="-120"/>
-              </a:rPr>
-              <a:t>C PRICE VS CP PAY</a:t>
-            </a:r>
-            <a:endParaRPr lang="en-US" sz="800" dirty="0"/>
-          </a:p>
-        </p:txBody>
-      </p:sp>
-      <p:sp>
-        <p:nvSpPr>
-          <p:cNvPr id="3" name="Text 1"/>
-          <p:cNvSpPr txBox="1"/>
-          <p:nvPr/>
-        </p:nvSpPr>
-        <p:spPr>
-          <a:xfrm>
-            <a:off x="438912" y="457200"/>
-            <a:ext cx="8229600" cy="457200"/>
-          </a:xfrm>
-          <a:prstGeom prst="rect">
-            <a:avLst/>
-          </a:prstGeom>
-          <a:noFill/>
-          <a:ln/>
-        </p:spPr>
-        <p:txBody>
-          <a:bodyPr wrap="square" lIns="0" tIns="0" rIns="0" bIns="0" rtlCol="0" anchor="t"/>
-          <a:lstStyle/>
-          <a:p>
-            <a:pPr indent="0" marL="0">
-              <a:buNone/>
-            </a:pPr>
-            <a:r>
-              <a:rPr lang="en-US" sz="2400" b="1" dirty="0">
-                <a:solidFill>
-                  <a:srgbClr val="1D1D1F"/>
-                </a:solidFill>
-                <a:latin typeface="SF Pro Display" pitchFamily="34" charset="0"/>
-                <a:ea typeface="SF Pro Display" pitchFamily="34" charset="-122"/>
-                <a:cs typeface="SF Pro Display" pitchFamily="34" charset="-120"/>
-              </a:rPr>
-              <a:t>Worked example</a:t>
-            </a:r>
-            <a:endParaRPr lang="en-US" sz="2400" dirty="0"/>
-          </a:p>
-        </p:txBody>
-      </p:sp>
-      <p:sp>
-        <p:nvSpPr>
-          <p:cNvPr id="4" name="Text 2"/>
-          <p:cNvSpPr txBox="1"/>
-          <p:nvPr/>
-        </p:nvSpPr>
-        <p:spPr>
-          <a:xfrm>
-            <a:off x="438912" y="960120"/>
-            <a:ext cx="8229600" cy="274320"/>
-          </a:xfrm>
-          <a:prstGeom prst="rect">
-            <a:avLst/>
-          </a:prstGeom>
-          <a:noFill/>
-          <a:ln/>
-        </p:spPr>
-        <p:txBody>
-          <a:bodyPr wrap="square" lIns="0" tIns="0" rIns="0" bIns="0" rtlCol="0" anchor="t"/>
-          <a:lstStyle/>
-          <a:p>
-            <a:pPr indent="0" marL="0">
-              <a:buNone/>
-            </a:pPr>
-            <a:r>
-              <a:rPr lang="en-US" sz="1200" dirty="0">
-                <a:solidFill>
-                  <a:srgbClr val="6E6E73"/>
-                </a:solidFill>
-                <a:latin typeface="SF Pro Text" pitchFamily="34" charset="0"/>
-                <a:ea typeface="SF Pro Text" pitchFamily="34" charset="-122"/>
-                <a:cs typeface="SF Pro Text" pitchFamily="34" charset="-120"/>
-              </a:rPr>
-              <a:t>A deactivated FC customer sees a $40/hr platform fee. Is it right?</a:t>
-            </a:r>
-            <a:endParaRPr lang="en-US" sz="1200" dirty="0"/>
-          </a:p>
-        </p:txBody>
-      </p:sp>
-      <p:sp>
-        <p:nvSpPr>
-          <p:cNvPr id="6" name="Shape 3"/>
-          <p:cNvSpPr/>
-          <p:nvPr/>
-        </p:nvSpPr>
-        <p:spPr>
-          <a:xfrm>
-            <a:off x="594360" y="1371600"/>
-            <a:ext cx="2194560" cy="1600200"/>
-          </a:xfrm>
-          <a:prstGeom prst="roundRect">
-            <a:avLst>
-              <a:gd name="adj" fmla="val 4571"/>
-            </a:avLst>
-          </a:prstGeom>
-          <a:solidFill>
-            <a:srgbClr val="FFFFFF"/>
-          </a:solidFill>
-          <a:ln w="9525">
-            <a:solidFill>
-              <a:srgbClr val="DCE1E7"/>
-            </a:solidFill>
-            <a:prstDash val="solid"/>
-          </a:ln>
-        </p:spPr>
-      </p:sp>
-      <p:sp>
-        <p:nvSpPr>
-          <p:cNvPr id="7" name="Text 4"/>
-          <p:cNvSpPr txBox="1"/>
-          <p:nvPr/>
-        </p:nvSpPr>
-        <p:spPr>
-          <a:xfrm>
-            <a:off x="594360" y="1508760"/>
-            <a:ext cx="2194560" cy="640080"/>
-          </a:xfrm>
-          <a:prstGeom prst="rect">
-            <a:avLst/>
-          </a:prstGeom>
-          <a:noFill/>
-          <a:ln/>
-        </p:spPr>
-        <p:txBody>
-          <a:bodyPr wrap="square" lIns="0" tIns="0" rIns="0" bIns="0" rtlCol="0" anchor="ctr"/>
-          <a:lstStyle/>
-          <a:p>
-            <a:pPr algn="ctr" indent="0" marL="0">
-              <a:buNone/>
-            </a:pPr>
-            <a:r>
-              <a:rPr lang="en-US" sz="2800" b="1" dirty="0">
-                <a:solidFill>
-                  <a:srgbClr val="0B7A6F"/>
-                </a:solidFill>
-                <a:latin typeface="SF Pro Display" pitchFamily="34" charset="0"/>
-                <a:ea typeface="SF Pro Display" pitchFamily="34" charset="-122"/>
-                <a:cs typeface="SF Pro Display" pitchFamily="34" charset="-120"/>
-              </a:rPr>
-              <a:t>$30/hr</a:t>
-            </a:r>
-            <a:endParaRPr lang="en-US" sz="2800" dirty="0"/>
-          </a:p>
-        </p:txBody>
-      </p:sp>
-      <p:sp>
-        <p:nvSpPr>
-          <p:cNvPr id="8" name="Text 5"/>
-          <p:cNvSpPr txBox="1"/>
-          <p:nvPr/>
-        </p:nvSpPr>
-        <p:spPr>
-          <a:xfrm>
-            <a:off x="594360" y="2194560"/>
-            <a:ext cx="2194560" cy="640080"/>
-          </a:xfrm>
-          <a:prstGeom prst="rect">
-            <a:avLst/>
-          </a:prstGeom>
-          <a:noFill/>
-          <a:ln/>
-        </p:spPr>
-        <p:txBody>
-          <a:bodyPr wrap="square" lIns="0" tIns="0" rIns="0" bIns="0" rtlCol="0" anchor="t"/>
-          <a:lstStyle/>
-          <a:p>
-            <a:pPr algn="ctr" indent="0" marL="0">
-              <a:buNone/>
-            </a:pPr>
-            <a:r>
-              <a:rPr lang="en-US" sz="1000" dirty="0">
-                <a:solidFill>
-                  <a:srgbClr val="6E6E73"/>
-                </a:solidFill>
-                <a:latin typeface="SF Pro Text" pitchFamily="34" charset="0"/>
-                <a:ea typeface="SF Pro Text" pitchFamily="34" charset="-122"/>
-                <a:cs typeface="SF Pro Text" pitchFamily="34" charset="-120"/>
-              </a:rPr>
-              <a:t>Deactivated FC</a:t>
-            </a:r>
-            <a:endParaRPr lang="en-US" sz="1000" dirty="0"/>
-          </a:p>
-          <a:p>
-            <a:pPr algn="ctr" indent="0" marL="0">
-              <a:buNone/>
-            </a:pPr>
-            <a:r>
-              <a:rPr lang="en-US" sz="1000" dirty="0">
-                <a:solidFill>
-                  <a:srgbClr val="6E6E73"/>
-                </a:solidFill>
-                <a:latin typeface="SF Pro Text" pitchFamily="34" charset="0"/>
-                <a:ea typeface="SF Pro Text" pitchFamily="34" charset="-122"/>
-                <a:cs typeface="SF Pro Text" pitchFamily="34" charset="-120"/>
-              </a:rPr>
-              <a:t>platform fee</a:t>
-            </a:r>
-            <a:endParaRPr lang="en-US" sz="1000" dirty="0"/>
-          </a:p>
-        </p:txBody>
-      </p:sp>
-      <p:sp>
-        <p:nvSpPr>
-          <p:cNvPr id="9" name="Text 6"/>
-          <p:cNvSpPr txBox="1"/>
-          <p:nvPr/>
-        </p:nvSpPr>
-        <p:spPr>
-          <a:xfrm>
-            <a:off x="2880360" y="1371600"/>
-            <a:ext cx="457200" cy="1600200"/>
-          </a:xfrm>
-          <a:prstGeom prst="rect">
-            <a:avLst/>
-          </a:prstGeom>
-          <a:noFill/>
-          <a:ln/>
-        </p:spPr>
-        <p:txBody>
-          <a:bodyPr wrap="square" lIns="0" tIns="0" rIns="0" bIns="0" rtlCol="0" anchor="ctr"/>
-          <a:lstStyle/>
-          <a:p>
-            <a:pPr algn="ctr" indent="0" marL="0">
-              <a:buNone/>
-            </a:pPr>
-            <a:r>
-              <a:rPr lang="en-US" sz="2600" b="1" dirty="0">
-                <a:solidFill>
-                  <a:srgbClr val="6E6E73"/>
-                </a:solidFill>
-                <a:latin typeface="SF Pro Display" pitchFamily="34" charset="0"/>
-                <a:ea typeface="SF Pro Display" pitchFamily="34" charset="-122"/>
-                <a:cs typeface="SF Pro Display" pitchFamily="34" charset="-120"/>
-              </a:rPr>
-              <a:t>+</a:t>
-            </a:r>
-            <a:endParaRPr lang="en-US" sz="2600" dirty="0"/>
-          </a:p>
-        </p:txBody>
-      </p:sp>
-      <p:sp>
-        <p:nvSpPr>
-          <p:cNvPr id="10" name="Shape 7"/>
-          <p:cNvSpPr/>
-          <p:nvPr/>
-        </p:nvSpPr>
-        <p:spPr>
-          <a:xfrm>
-            <a:off x="3429000" y="1371600"/>
-            <a:ext cx="2194560" cy="1600200"/>
-          </a:xfrm>
-          <a:prstGeom prst="roundRect">
-            <a:avLst>
-              <a:gd name="adj" fmla="val 4571"/>
-            </a:avLst>
-          </a:prstGeom>
-          <a:solidFill>
-            <a:srgbClr val="FFFFFF"/>
-          </a:solidFill>
-          <a:ln w="9525">
-            <a:solidFill>
-              <a:srgbClr val="DCE1E7"/>
-            </a:solidFill>
-            <a:prstDash val="solid"/>
-          </a:ln>
-        </p:spPr>
-      </p:sp>
-      <p:sp>
-        <p:nvSpPr>
-          <p:cNvPr id="11" name="Text 8"/>
-          <p:cNvSpPr txBox="1"/>
-          <p:nvPr/>
-        </p:nvSpPr>
-        <p:spPr>
-          <a:xfrm>
-            <a:off x="3429000" y="1508760"/>
-            <a:ext cx="2194560" cy="640080"/>
-          </a:xfrm>
-          <a:prstGeom prst="rect">
-            <a:avLst/>
-          </a:prstGeom>
-          <a:noFill/>
-          <a:ln/>
-        </p:spPr>
-        <p:txBody>
-          <a:bodyPr wrap="square" lIns="0" tIns="0" rIns="0" bIns="0" rtlCol="0" anchor="ctr"/>
-          <a:lstStyle/>
-          <a:p>
-            <a:pPr algn="ctr" indent="0" marL="0">
-              <a:buNone/>
-            </a:pPr>
-            <a:r>
-              <a:rPr lang="en-US" sz="2800" b="1" dirty="0">
-                <a:solidFill>
-                  <a:srgbClr val="0B7A6F"/>
-                </a:solidFill>
-                <a:latin typeface="SF Pro Display" pitchFamily="34" charset="0"/>
-                <a:ea typeface="SF Pro Display" pitchFamily="34" charset="-122"/>
-                <a:cs typeface="SF Pro Display" pitchFamily="34" charset="-120"/>
-              </a:rPr>
-              <a:t>$10/hr</a:t>
-            </a:r>
-            <a:endParaRPr lang="en-US" sz="2800" dirty="0"/>
-          </a:p>
-        </p:txBody>
-      </p:sp>
-      <p:sp>
-        <p:nvSpPr>
-          <p:cNvPr id="12" name="Text 9"/>
-          <p:cNvSpPr txBox="1"/>
-          <p:nvPr/>
-        </p:nvSpPr>
-        <p:spPr>
-          <a:xfrm>
-            <a:off x="3429000" y="2194560"/>
-            <a:ext cx="2194560" cy="640080"/>
-          </a:xfrm>
-          <a:prstGeom prst="rect">
-            <a:avLst/>
-          </a:prstGeom>
-          <a:noFill/>
-          <a:ln/>
-        </p:spPr>
-        <p:txBody>
-          <a:bodyPr wrap="square" lIns="0" tIns="0" rIns="0" bIns="0" rtlCol="0" anchor="t"/>
-          <a:lstStyle/>
-          <a:p>
-            <a:pPr algn="ctr" indent="0" marL="0">
-              <a:buNone/>
-            </a:pPr>
-            <a:r>
-              <a:rPr lang="en-US" sz="1000" dirty="0">
-                <a:solidFill>
-                  <a:srgbClr val="6E6E73"/>
-                </a:solidFill>
-                <a:latin typeface="SF Pro Text" pitchFamily="34" charset="0"/>
-                <a:ea typeface="SF Pro Text" pitchFamily="34" charset="-122"/>
-                <a:cs typeface="SF Pro Text" pitchFamily="34" charset="-120"/>
-              </a:rPr>
-              <a:t>Max rate $25 −</a:t>
-            </a:r>
-            <a:endParaRPr lang="en-US" sz="1000" dirty="0"/>
-          </a:p>
-          <a:p>
-            <a:pPr algn="ctr" indent="0" marL="0">
-              <a:buNone/>
-            </a:pPr>
-            <a:r>
-              <a:rPr lang="en-US" sz="1000" dirty="0">
-                <a:solidFill>
-                  <a:srgbClr val="6E6E73"/>
-                </a:solidFill>
-                <a:latin typeface="SF Pro Text" pitchFamily="34" charset="0"/>
-                <a:ea typeface="SF Pro Text" pitchFamily="34" charset="-122"/>
-                <a:cs typeface="SF Pro Text" pitchFamily="34" charset="-120"/>
-              </a:rPr>
-              <a:t>cleaner's rate $15</a:t>
-            </a:r>
-            <a:endParaRPr lang="en-US" sz="1000" dirty="0"/>
-          </a:p>
-        </p:txBody>
-      </p:sp>
-      <p:sp>
-        <p:nvSpPr>
-          <p:cNvPr id="13" name="Text 10"/>
-          <p:cNvSpPr txBox="1"/>
-          <p:nvPr/>
-        </p:nvSpPr>
-        <p:spPr>
-          <a:xfrm>
-            <a:off x="5715000" y="1371600"/>
-            <a:ext cx="457200" cy="1600200"/>
-          </a:xfrm>
-          <a:prstGeom prst="rect">
-            <a:avLst/>
-          </a:prstGeom>
-          <a:noFill/>
-          <a:ln/>
-        </p:spPr>
-        <p:txBody>
-          <a:bodyPr wrap="square" lIns="0" tIns="0" rIns="0" bIns="0" rtlCol="0" anchor="ctr"/>
-          <a:lstStyle/>
-          <a:p>
-            <a:pPr algn="ctr" indent="0" marL="0">
-              <a:buNone/>
-            </a:pPr>
-            <a:r>
-              <a:rPr lang="en-US" sz="2600" b="1" dirty="0">
-                <a:solidFill>
-                  <a:srgbClr val="6E6E73"/>
-                </a:solidFill>
-                <a:latin typeface="SF Pro Display" pitchFamily="34" charset="0"/>
-                <a:ea typeface="SF Pro Display" pitchFamily="34" charset="-122"/>
-                <a:cs typeface="SF Pro Display" pitchFamily="34" charset="-120"/>
-              </a:rPr>
-              <a:t>=</a:t>
-            </a:r>
-            <a:endParaRPr lang="en-US" sz="2600" dirty="0"/>
-          </a:p>
-        </p:txBody>
-      </p:sp>
-      <p:sp>
-        <p:nvSpPr>
-          <p:cNvPr id="14" name="Shape 11"/>
-          <p:cNvSpPr/>
-          <p:nvPr/>
-        </p:nvSpPr>
-        <p:spPr>
-          <a:xfrm>
-            <a:off x="6263640" y="1371600"/>
-            <a:ext cx="2194560" cy="1600200"/>
-          </a:xfrm>
-          <a:prstGeom prst="roundRect">
-            <a:avLst>
-              <a:gd name="adj" fmla="val 4571"/>
-            </a:avLst>
-          </a:prstGeom>
-          <a:solidFill>
-            <a:srgbClr val="0B7A6F"/>
-          </a:solidFill>
-          <a:ln w="9525">
-            <a:solidFill>
-              <a:srgbClr val="0B7A6F"/>
-            </a:solidFill>
-            <a:prstDash val="solid"/>
-          </a:ln>
-        </p:spPr>
-      </p:sp>
-      <p:sp>
-        <p:nvSpPr>
-          <p:cNvPr id="15" name="Text 12"/>
-          <p:cNvSpPr txBox="1"/>
-          <p:nvPr/>
-        </p:nvSpPr>
-        <p:spPr>
-          <a:xfrm>
-            <a:off x="6263640" y="1508760"/>
-            <a:ext cx="2194560" cy="640080"/>
-          </a:xfrm>
-          <a:prstGeom prst="rect">
-            <a:avLst/>
-          </a:prstGeom>
-          <a:noFill/>
-          <a:ln/>
-        </p:spPr>
-        <p:txBody>
-          <a:bodyPr wrap="square" lIns="0" tIns="0" rIns="0" bIns="0" rtlCol="0" anchor="ctr"/>
-          <a:lstStyle/>
-          <a:p>
-            <a:pPr algn="ctr" indent="0" marL="0">
-              <a:buNone/>
-            </a:pPr>
-            <a:r>
-              <a:rPr lang="en-US" sz="2800" b="1" dirty="0">
-                <a:solidFill>
-                  <a:srgbClr val="FFFFFF"/>
-                </a:solidFill>
-                <a:latin typeface="SF Pro Display" pitchFamily="34" charset="0"/>
-                <a:ea typeface="SF Pro Display" pitchFamily="34" charset="-122"/>
-                <a:cs typeface="SF Pro Display" pitchFamily="34" charset="-120"/>
-              </a:rPr>
-              <a:t>$40/hr</a:t>
-            </a:r>
-            <a:endParaRPr lang="en-US" sz="2800" dirty="0"/>
-          </a:p>
-        </p:txBody>
-      </p:sp>
-      <p:sp>
-        <p:nvSpPr>
-          <p:cNvPr id="16" name="Text 13"/>
-          <p:cNvSpPr txBox="1"/>
-          <p:nvPr/>
-        </p:nvSpPr>
-        <p:spPr>
-          <a:xfrm>
-            <a:off x="6263640" y="2194560"/>
-            <a:ext cx="2194560" cy="640080"/>
-          </a:xfrm>
-          <a:prstGeom prst="rect">
-            <a:avLst/>
-          </a:prstGeom>
-          <a:noFill/>
-          <a:ln/>
-        </p:spPr>
-        <p:txBody>
-          <a:bodyPr wrap="square" lIns="0" tIns="0" rIns="0" bIns="0" rtlCol="0" anchor="t"/>
-          <a:lstStyle/>
-          <a:p>
-            <a:pPr algn="ctr" indent="0" marL="0">
-              <a:buNone/>
-            </a:pPr>
-            <a:r>
-              <a:rPr lang="en-US" sz="1000" dirty="0">
-                <a:solidFill>
-                  <a:srgbClr val="FFFFFF"/>
-                </a:solidFill>
-                <a:latin typeface="SF Pro Text" pitchFamily="34" charset="0"/>
-                <a:ea typeface="SF Pro Text" pitchFamily="34" charset="-122"/>
-                <a:cs typeface="SF Pro Text" pitchFamily="34" charset="-120"/>
-              </a:rPr>
-              <a:t>Platform fee</a:t>
-            </a:r>
-            <a:endParaRPr lang="en-US" sz="1000" dirty="0"/>
-          </a:p>
-          <a:p>
-            <a:pPr algn="ctr" indent="0" marL="0">
-              <a:buNone/>
-            </a:pPr>
-            <a:r>
-              <a:rPr lang="en-US" sz="1000" dirty="0">
-                <a:solidFill>
-                  <a:srgbClr val="FFFFFF"/>
-                </a:solidFill>
-                <a:latin typeface="SF Pro Text" pitchFamily="34" charset="0"/>
-                <a:ea typeface="SF Pro Text" pitchFamily="34" charset="-122"/>
-                <a:cs typeface="SF Pro Text" pitchFamily="34" charset="-120"/>
-              </a:rPr>
-              <a:t>on the invoice</a:t>
-            </a:r>
-            <a:endParaRPr lang="en-US" sz="1000" dirty="0"/>
-          </a:p>
-        </p:txBody>
-      </p:sp>
-      <p:sp>
-        <p:nvSpPr>
-          <p:cNvPr id="17" name="Shape 14"/>
-          <p:cNvSpPr/>
-          <p:nvPr/>
-        </p:nvSpPr>
-        <p:spPr>
-          <a:xfrm>
-            <a:off x="411480" y="3246120"/>
-            <a:ext cx="8321040" cy="384048"/>
-          </a:xfrm>
-          <a:prstGeom prst="roundRect">
-            <a:avLst>
-              <a:gd name="adj" fmla="val 19048"/>
-            </a:avLst>
-          </a:prstGeom>
-          <a:solidFill>
-            <a:srgbClr val="FFF3D6"/>
-          </a:solidFill>
-          <a:ln w="9525">
-            <a:solidFill>
-              <a:srgbClr val="FFF3D6"/>
-            </a:solidFill>
-            <a:prstDash val="solid"/>
-          </a:ln>
-        </p:spPr>
-      </p:sp>
-      <p:pic>
-        <p:nvPicPr>
-          <p:cNvPr id="18" name="Image 0" descr="preencoded.png">    </p:cNvPr>
-          <p:cNvPicPr>
-            <a:picLocks noChangeAspect="1"/>
-          </p:cNvPicPr>
-          <p:nvPr/>
-        </p:nvPicPr>
-        <p:blipFill>
-          <a:blip r:embed="rId1"/>
-          <a:stretch>
-            <a:fillRect/>
-          </a:stretch>
-        </p:blipFill>
-        <p:spPr>
-          <a:xfrm>
-            <a:off x="566928" y="3355848"/>
-            <a:ext cx="164592" cy="164592"/>
-          </a:xfrm>
-          <a:prstGeom prst="rect">
-            <a:avLst/>
-          </a:prstGeom>
-        </p:spPr>
-      </p:pic>
-      <p:sp>
-        <p:nvSpPr>
-          <p:cNvPr id="19" name="Text 15"/>
-          <p:cNvSpPr txBox="1"/>
-          <p:nvPr/>
-        </p:nvSpPr>
-        <p:spPr>
-          <a:xfrm>
-            <a:off x="822960" y="3346704"/>
-            <a:ext cx="7772400" cy="201168"/>
-          </a:xfrm>
-          <a:prstGeom prst="rect">
-            <a:avLst/>
-          </a:prstGeom>
-          <a:noFill/>
-          <a:ln/>
-        </p:spPr>
-        <p:txBody>
-          <a:bodyPr wrap="square" lIns="0" tIns="0" rIns="0" bIns="0" rtlCol="0" anchor="t"/>
-          <a:lstStyle/>
-          <a:p>
-            <a:pPr indent="0" marL="0">
-              <a:buNone/>
-            </a:pPr>
-            <a:r>
-              <a:rPr lang="en-US" sz="1000" b="1" dirty="0">
-                <a:solidFill>
-                  <a:srgbClr val="9A6410"/>
-                </a:solidFill>
-                <a:latin typeface="SF Pro Text" pitchFamily="34" charset="0"/>
-                <a:ea typeface="SF Pro Text" pitchFamily="34" charset="-122"/>
-                <a:cs typeface="SF Pro Text" pitchFamily="34" charset="-120"/>
-              </a:rPr>
-              <a:t>Correct charge:  </a:t>
-            </a:r>
-            <a:pPr indent="0" marL="0">
-              <a:buNone/>
-            </a:pPr>
-            <a:r>
-              <a:rPr lang="en-US" sz="1000" dirty="0">
-                <a:solidFill>
-                  <a:srgbClr val="1D1D1F"/>
-                </a:solidFill>
-                <a:latin typeface="SF Pro Text" pitchFamily="34" charset="0"/>
-                <a:ea typeface="SF Pro Text" pitchFamily="34" charset="-122"/>
-                <a:cs typeface="SF Pro Text" pitchFamily="34" charset="-120"/>
-              </a:rPr>
-              <a:t>don't reprice it and don't refund the difference. The cleaner is still paid $15/hr.</a:t>
-            </a:r>
-            <a:endParaRPr lang="en-US" sz="1000" dirty="0"/>
-          </a:p>
-        </p:txBody>
-      </p:sp>
-      <p:sp>
-        <p:nvSpPr>
-          <p:cNvPr id="25" name="Slide Number Placeholder 0"/>
-          <p:cNvSpPr>
-            <a:spLocks noGrp="1"/>
-          </p:cNvSpPr>
-          <p:nvPr>
-            <p:ph type="sldNum" sz="quarter" idx="4294967295"/>
-          </p:nvPr>
-        </p:nvSpPr>
-        <p:spPr>
-          <a:xfrm>
-            <a:off x="8229600" y="4800600"/>
-            <a:ext cx="457200" cy="182880"/>
-          </a:xfrm>
-          <a:prstGeom prst="rect">
-            <a:avLst/>
-          </a:prstGeom>
-          <a:extLst>
-            <a:ext uri="{C572A759-6A51-4108-AA02-DFA0A04FC94B}">
-              <ma14:wrappingTextBoxFlag xmlns:ma14="http://schemas.microsoft.com/office/mac/drawingml/2011/main" val="0"/>
-            </a:ext>
-          </a:extLst>
-        </p:spPr>
-        <p:txBody>
-          <a:bodyPr/>
-          <a:lstStyle>
-            <a:lvl1pPr>
-              <a:defRPr sz="700">
-                <a:solidFill>
-                  <a:srgbClr val="6E6E73"/>
-                </a:solidFill>
-                <a:latin typeface="SF Pro Text"/>
-                <a:ea typeface="SF Pro Text"/>
-                <a:cs typeface="SF Pro Text"/>
-              </a:defRPr>
-            </a:lvl1pPr>
-          </a:lstStyle>
-          <a:p>
-            <a:pPr algn="r"/>
-            <a:fld id="{F7021451-1387-4CA6-816F-3879F97B5CBC}" type="slidenum">
-              <a:rPr b="0" lang="en-US"/>
               <a:t>23</a:t>
             </a:fld>
             <a:endParaRPr lang="en-US"/>
@@ -18723,7 +19525,7 @@
                 <a:ea typeface="SF Pro Display" pitchFamily="34" charset="-122"/>
                 <a:cs typeface="SF Pro Display" pitchFamily="34" charset="-120"/>
               </a:rPr>
-              <a:t>Max requested rate</a:t>
+              <a:t>Worked example</a:t>
             </a:r>
             <a:endParaRPr lang="en-US" sz="2400" dirty="0"/>
           </a:p>
@@ -18762,7 +19564,7 @@
                 <a:ea typeface="SF Pro Text" pitchFamily="34" charset="-122"/>
                 <a:cs typeface="SF Pro Text" pitchFamily="34" charset="-120"/>
               </a:rPr>
-              <a:t>Non-FC and deactivated FC customers are priced at the highest rate among the cleaners they requested.</a:t>
+              <a:t>A deactivated FC customer sees a $40/hr platform fee. Is it right?</a:t>
             </a:r>
             <a:endParaRPr lang="en-US" sz="1200" dirty="0"/>
           </a:p>
@@ -18770,57 +19572,18 @@
       </p:sp>
       <p:sp>
         <p:nvSpPr>
-          <p:cNvPr id="6" name="Text 3"/>
-          <p:cNvSpPr txBox="1"/>
-          <p:nvPr/>
-        </p:nvSpPr>
-        <p:spPr>
-          <a:xfrm>
-            <a:off x="438912" y="1325880"/>
-            <a:ext cx="4572000" cy="182880"/>
-          </a:xfrm>
-          <a:prstGeom prst="rect">
-            <a:avLst/>
-          </a:prstGeom>
-          <a:noFill/>
-          <a:ln/>
-        </p:spPr>
-        <p:txBody>
-          <a:bodyPr wrap="square" lIns="0" tIns="0" rIns="0" bIns="0" rtlCol="0" anchor="t"/>
-          <a:lstStyle/>
-          <a:p>
-            <a:pPr indent="0" marL="0">
-              <a:buNone/>
-            </a:pPr>
-            <a:r>
-              <a:rPr lang="en-US" sz="800" b="1" spc="50" kern="0" dirty="0">
-                <a:solidFill>
-                  <a:srgbClr val="6E6E73"/>
-                </a:solidFill>
-                <a:latin typeface="SF Pro Display" pitchFamily="34" charset="0"/>
-                <a:ea typeface="SF Pro Display" pitchFamily="34" charset="-122"/>
-                <a:cs typeface="SF Pro Display" pitchFamily="34" charset="-120"/>
-              </a:rPr>
-              <a:t>REQUESTED CLEANERS</a:t>
-            </a:r>
-            <a:endParaRPr lang="en-US" sz="800" dirty="0"/>
-          </a:p>
-        </p:txBody>
-      </p:sp>
-      <p:sp>
-        <p:nvSpPr>
-          <p:cNvPr id="7" name="Shape 4"/>
+          <p:cNvPr id="6" name="Shape 3"/>
           <p:cNvSpPr/>
           <p:nvPr/>
         </p:nvSpPr>
         <p:spPr>
           <a:xfrm>
-            <a:off x="411480" y="1572768"/>
-            <a:ext cx="1261872" cy="914400"/>
+            <a:off x="594360" y="1371600"/>
+            <a:ext cx="2194560" cy="1600200"/>
           </a:xfrm>
           <a:prstGeom prst="roundRect">
             <a:avLst>
-              <a:gd name="adj" fmla="val 8000"/>
+              <a:gd name="adj" fmla="val 4571"/>
             </a:avLst>
           </a:prstGeom>
           <a:solidFill>
@@ -18836,14 +19599,14 @@
       </p:sp>
       <p:sp>
         <p:nvSpPr>
-          <p:cNvPr id="8" name="Text 5"/>
+          <p:cNvPr id="7" name="Text 4"/>
           <p:cNvSpPr txBox="1"/>
           <p:nvPr/>
         </p:nvSpPr>
         <p:spPr>
           <a:xfrm>
-            <a:off x="411480" y="1645920"/>
-            <a:ext cx="1261872" cy="320040"/>
+            <a:off x="594360" y="1508760"/>
+            <a:ext cx="2194560" cy="640080"/>
           </a:xfrm>
           <a:prstGeom prst="rect">
             <a:avLst/>
@@ -18852,24 +19615,80 @@
           <a:ln/>
         </p:spPr>
         <p:txBody>
-          <a:bodyPr wrap="square" lIns="0" tIns="0" rIns="0" bIns="0" rtlCol="0" anchor="t"/>
+          <a:bodyPr wrap="square" lIns="0" tIns="0" rIns="0" bIns="0" rtlCol="0" anchor="ctr"/>
           <a:lstStyle/>
           <a:p>
             <a:pPr algn="ctr" indent="0" marL="0">
               <a:buNone/>
             </a:pPr>
             <a:r>
-              <a:rPr lang="en-US" sz="1200" b="1" dirty="0">
-                <a:solidFill>
-                  <a:srgbClr val="1D1D1F"/>
+              <a:rPr lang="en-US" sz="2800" b="1" dirty="0">
+                <a:solidFill>
+                  <a:srgbClr val="0B7A6F"/>
                 </a:solidFill>
                 <a:latin typeface="SF Pro Display" pitchFamily="34" charset="0"/>
                 <a:ea typeface="SF Pro Display" pitchFamily="34" charset="-122"/>
                 <a:cs typeface="SF Pro Display" pitchFamily="34" charset="-120"/>
               </a:rPr>
-              <a:t>Mona</a:t>
-            </a:r>
-            <a:endParaRPr lang="en-US" sz="1200" dirty="0"/>
+              <a:t>$30/hr</a:t>
+            </a:r>
+            <a:endParaRPr lang="en-US" sz="2800" dirty="0"/>
+          </a:p>
+        </p:txBody>
+      </p:sp>
+      <p:sp>
+        <p:nvSpPr>
+          <p:cNvPr id="8" name="Text 5"/>
+          <p:cNvSpPr txBox="1"/>
+          <p:nvPr/>
+        </p:nvSpPr>
+        <p:spPr>
+          <a:xfrm>
+            <a:off x="594360" y="2194560"/>
+            <a:ext cx="2194560" cy="640080"/>
+          </a:xfrm>
+          <a:prstGeom prst="rect">
+            <a:avLst/>
+          </a:prstGeom>
+          <a:noFill/>
+          <a:ln/>
+        </p:spPr>
+        <p:txBody>
+          <a:bodyPr wrap="square" lIns="0" tIns="0" rIns="0" bIns="0" rtlCol="0" anchor="t"/>
+          <a:lstStyle/>
+          <a:p>
+            <a:pPr algn="ctr" indent="0" marL="0">
+              <a:buNone/>
+            </a:pPr>
+            <a:r>
+              <a:rPr lang="en-US" sz="1000" dirty="0">
+                <a:solidFill>
+                  <a:srgbClr val="6E6E73"/>
+                </a:solidFill>
+                <a:latin typeface="SF Pro Text" pitchFamily="34" charset="0"/>
+                <a:ea typeface="SF Pro Text" pitchFamily="34" charset="-122"/>
+                <a:cs typeface="SF Pro Text" pitchFamily="34" charset="-120"/>
+              </a:rPr>
+              <a:t>Deactivated FC</a:t>
+            </a:r>
+            <a:endParaRPr lang="en-US" sz="1000" dirty="0"/>
+          </a:p>
+          <a:p>
+            <a:pPr algn="ctr" indent="0" marL="0">
+              <a:buNone/>
+            </a:pPr>
+            <a:r>
+              <a:rPr lang="en-US" sz="1000" dirty="0">
+                <a:solidFill>
+                  <a:srgbClr val="6E6E73"/>
+                </a:solidFill>
+                <a:latin typeface="SF Pro Text" pitchFamily="34" charset="0"/>
+                <a:ea typeface="SF Pro Text" pitchFamily="34" charset="-122"/>
+                <a:cs typeface="SF Pro Text" pitchFamily="34" charset="-120"/>
+              </a:rPr>
+              <a:t>platform fee</a:t>
+            </a:r>
+            <a:endParaRPr lang="en-US" sz="1000" dirty="0"/>
           </a:p>
         </p:txBody>
       </p:sp>
@@ -18881,8 +19700,8 @@
         </p:nvSpPr>
         <p:spPr>
           <a:xfrm>
-            <a:off x="411480" y="1965960"/>
-            <a:ext cx="1261872" cy="365760"/>
+            <a:off x="2880360" y="1371600"/>
+            <a:ext cx="457200" cy="1600200"/>
           </a:xfrm>
           <a:prstGeom prst="rect">
             <a:avLst/>
@@ -18891,24 +19710,24 @@
           <a:ln/>
         </p:spPr>
         <p:txBody>
-          <a:bodyPr wrap="square" lIns="0" tIns="0" rIns="0" bIns="0" rtlCol="0" anchor="t"/>
+          <a:bodyPr wrap="square" lIns="0" tIns="0" rIns="0" bIns="0" rtlCol="0" anchor="ctr"/>
           <a:lstStyle/>
           <a:p>
             <a:pPr algn="ctr" indent="0" marL="0">
               <a:buNone/>
             </a:pPr>
             <a:r>
-              <a:rPr lang="en-US" sz="1500" b="1" dirty="0">
-                <a:solidFill>
-                  <a:srgbClr val="0B7A6F"/>
+              <a:rPr lang="en-US" sz="2600" b="1" dirty="0">
+                <a:solidFill>
+                  <a:srgbClr val="6E6E73"/>
                 </a:solidFill>
                 <a:latin typeface="SF Pro Display" pitchFamily="34" charset="0"/>
                 <a:ea typeface="SF Pro Display" pitchFamily="34" charset="-122"/>
                 <a:cs typeface="SF Pro Display" pitchFamily="34" charset="-120"/>
               </a:rPr>
-              <a:t>$25/hr</a:t>
-            </a:r>
-            <a:endParaRPr lang="en-US" sz="1500" dirty="0"/>
+              <a:t>+</a:t>
+            </a:r>
+            <a:endParaRPr lang="en-US" sz="2600" dirty="0"/>
           </a:p>
         </p:txBody>
       </p:sp>
@@ -18920,12 +19739,173 @@
         </p:nvSpPr>
         <p:spPr>
           <a:xfrm>
-            <a:off x="1783080" y="1572768"/>
-            <a:ext cx="1261872" cy="914400"/>
+            <a:off x="3429000" y="1371600"/>
+            <a:ext cx="2194560" cy="1600200"/>
           </a:xfrm>
           <a:prstGeom prst="roundRect">
             <a:avLst>
-              <a:gd name="adj" fmla="val 8000"/>
+              <a:gd name="adj" fmla="val 4571"/>
+            </a:avLst>
+          </a:prstGeom>
+          <a:solidFill>
+            <a:srgbClr val="FFFFFF"/>
+          </a:solidFill>
+          <a:ln w="9525">
+            <a:solidFill>
+              <a:srgbClr val="DCE1E7"/>
+            </a:solidFill>
+            <a:prstDash val="solid"/>
+          </a:ln>
+        </p:spPr>
+      </p:sp>
+      <p:sp>
+        <p:nvSpPr>
+          <p:cNvPr id="11" name="Text 8"/>
+          <p:cNvSpPr txBox="1"/>
+          <p:nvPr/>
+        </p:nvSpPr>
+        <p:spPr>
+          <a:xfrm>
+            <a:off x="3429000" y="1508760"/>
+            <a:ext cx="2194560" cy="640080"/>
+          </a:xfrm>
+          <a:prstGeom prst="rect">
+            <a:avLst/>
+          </a:prstGeom>
+          <a:noFill/>
+          <a:ln/>
+        </p:spPr>
+        <p:txBody>
+          <a:bodyPr wrap="square" lIns="0" tIns="0" rIns="0" bIns="0" rtlCol="0" anchor="ctr"/>
+          <a:lstStyle/>
+          <a:p>
+            <a:pPr algn="ctr" indent="0" marL="0">
+              <a:buNone/>
+            </a:pPr>
+            <a:r>
+              <a:rPr lang="en-US" sz="2800" b="1" dirty="0">
+                <a:solidFill>
+                  <a:srgbClr val="0B7A6F"/>
+                </a:solidFill>
+                <a:latin typeface="SF Pro Display" pitchFamily="34" charset="0"/>
+                <a:ea typeface="SF Pro Display" pitchFamily="34" charset="-122"/>
+                <a:cs typeface="SF Pro Display" pitchFamily="34" charset="-120"/>
+              </a:rPr>
+              <a:t>$10/hr</a:t>
+            </a:r>
+            <a:endParaRPr lang="en-US" sz="2800" dirty="0"/>
+          </a:p>
+        </p:txBody>
+      </p:sp>
+      <p:sp>
+        <p:nvSpPr>
+          <p:cNvPr id="12" name="Text 9"/>
+          <p:cNvSpPr txBox="1"/>
+          <p:nvPr/>
+        </p:nvSpPr>
+        <p:spPr>
+          <a:xfrm>
+            <a:off x="3429000" y="2194560"/>
+            <a:ext cx="2194560" cy="640080"/>
+          </a:xfrm>
+          <a:prstGeom prst="rect">
+            <a:avLst/>
+          </a:prstGeom>
+          <a:noFill/>
+          <a:ln/>
+        </p:spPr>
+        <p:txBody>
+          <a:bodyPr wrap="square" lIns="0" tIns="0" rIns="0" bIns="0" rtlCol="0" anchor="t"/>
+          <a:lstStyle/>
+          <a:p>
+            <a:pPr algn="ctr" indent="0" marL="0">
+              <a:buNone/>
+            </a:pPr>
+            <a:r>
+              <a:rPr lang="en-US" sz="1000" dirty="0">
+                <a:solidFill>
+                  <a:srgbClr val="6E6E73"/>
+                </a:solidFill>
+                <a:latin typeface="SF Pro Text" pitchFamily="34" charset="0"/>
+                <a:ea typeface="SF Pro Text" pitchFamily="34" charset="-122"/>
+                <a:cs typeface="SF Pro Text" pitchFamily="34" charset="-120"/>
+              </a:rPr>
+              <a:t>Max rate $25 −</a:t>
+            </a:r>
+            <a:endParaRPr lang="en-US" sz="1000" dirty="0"/>
+          </a:p>
+          <a:p>
+            <a:pPr algn="ctr" indent="0" marL="0">
+              <a:buNone/>
+            </a:pPr>
+            <a:r>
+              <a:rPr lang="en-US" sz="1000" dirty="0">
+                <a:solidFill>
+                  <a:srgbClr val="6E6E73"/>
+                </a:solidFill>
+                <a:latin typeface="SF Pro Text" pitchFamily="34" charset="0"/>
+                <a:ea typeface="SF Pro Text" pitchFamily="34" charset="-122"/>
+                <a:cs typeface="SF Pro Text" pitchFamily="34" charset="-120"/>
+              </a:rPr>
+              <a:t>cleaner's rate $15</a:t>
+            </a:r>
+            <a:endParaRPr lang="en-US" sz="1000" dirty="0"/>
+          </a:p>
+        </p:txBody>
+      </p:sp>
+      <p:sp>
+        <p:nvSpPr>
+          <p:cNvPr id="13" name="Text 10"/>
+          <p:cNvSpPr txBox="1"/>
+          <p:nvPr/>
+        </p:nvSpPr>
+        <p:spPr>
+          <a:xfrm>
+            <a:off x="5715000" y="1371600"/>
+            <a:ext cx="457200" cy="1600200"/>
+          </a:xfrm>
+          <a:prstGeom prst="rect">
+            <a:avLst/>
+          </a:prstGeom>
+          <a:noFill/>
+          <a:ln/>
+        </p:spPr>
+        <p:txBody>
+          <a:bodyPr wrap="square" lIns="0" tIns="0" rIns="0" bIns="0" rtlCol="0" anchor="ctr"/>
+          <a:lstStyle/>
+          <a:p>
+            <a:pPr algn="ctr" indent="0" marL="0">
+              <a:buNone/>
+            </a:pPr>
+            <a:r>
+              <a:rPr lang="en-US" sz="2600" b="1" dirty="0">
+                <a:solidFill>
+                  <a:srgbClr val="6E6E73"/>
+                </a:solidFill>
+                <a:latin typeface="SF Pro Display" pitchFamily="34" charset="0"/>
+                <a:ea typeface="SF Pro Display" pitchFamily="34" charset="-122"/>
+                <a:cs typeface="SF Pro Display" pitchFamily="34" charset="-120"/>
+              </a:rPr>
+              <a:t>=</a:t>
+            </a:r>
+            <a:endParaRPr lang="en-US" sz="2600" dirty="0"/>
+          </a:p>
+        </p:txBody>
+      </p:sp>
+      <p:sp>
+        <p:nvSpPr>
+          <p:cNvPr id="14" name="Shape 11"/>
+          <p:cNvSpPr/>
+          <p:nvPr/>
+        </p:nvSpPr>
+        <p:spPr>
+          <a:xfrm>
+            <a:off x="6263640" y="1371600"/>
+            <a:ext cx="2194560" cy="1600200"/>
+          </a:xfrm>
+          <a:prstGeom prst="roundRect">
+            <a:avLst>
+              <a:gd name="adj" fmla="val 4571"/>
             </a:avLst>
           </a:prstGeom>
           <a:solidFill>
@@ -18941,14 +19921,14 @@
       </p:sp>
       <p:sp>
         <p:nvSpPr>
-          <p:cNvPr id="11" name="Text 8"/>
+          <p:cNvPr id="15" name="Text 12"/>
           <p:cNvSpPr txBox="1"/>
           <p:nvPr/>
         </p:nvSpPr>
         <p:spPr>
           <a:xfrm>
-            <a:off x="1783080" y="1645920"/>
-            <a:ext cx="1261872" cy="320040"/>
+            <a:off x="6263640" y="1508760"/>
+            <a:ext cx="2194560" cy="640080"/>
           </a:xfrm>
           <a:prstGeom prst="rect">
             <a:avLst/>
@@ -18957,14 +19937,14 @@
           <a:ln/>
         </p:spPr>
         <p:txBody>
-          <a:bodyPr wrap="square" lIns="0" tIns="0" rIns="0" bIns="0" rtlCol="0" anchor="t"/>
+          <a:bodyPr wrap="square" lIns="0" tIns="0" rIns="0" bIns="0" rtlCol="0" anchor="ctr"/>
           <a:lstStyle/>
           <a:p>
             <a:pPr algn="ctr" indent="0" marL="0">
               <a:buNone/>
             </a:pPr>
             <a:r>
-              <a:rPr lang="en-US" sz="1200" b="1" dirty="0">
+              <a:rPr lang="en-US" sz="2800" b="1" dirty="0">
                 <a:solidFill>
                   <a:srgbClr val="FFFFFF"/>
                 </a:solidFill>
@@ -18972,22 +19952,22 @@
                 <a:ea typeface="SF Pro Display" pitchFamily="34" charset="-122"/>
                 <a:cs typeface="SF Pro Display" pitchFamily="34" charset="-120"/>
               </a:rPr>
-              <a:t>Cassandra</a:t>
-            </a:r>
-            <a:endParaRPr lang="en-US" sz="1200" dirty="0"/>
-          </a:p>
-        </p:txBody>
-      </p:sp>
-      <p:sp>
-        <p:nvSpPr>
-          <p:cNvPr id="12" name="Text 9"/>
+              <a:t>$40/hr</a:t>
+            </a:r>
+            <a:endParaRPr lang="en-US" sz="2800" dirty="0"/>
+          </a:p>
+        </p:txBody>
+      </p:sp>
+      <p:sp>
+        <p:nvSpPr>
+          <p:cNvPr id="16" name="Text 13"/>
           <p:cNvSpPr txBox="1"/>
           <p:nvPr/>
         </p:nvSpPr>
         <p:spPr>
           <a:xfrm>
-            <a:off x="1783080" y="1965960"/>
-            <a:ext cx="1261872" cy="365760"/>
+            <a:off x="6263640" y="2194560"/>
+            <a:ext cx="2194560" cy="640080"/>
           </a:xfrm>
           <a:prstGeom prst="rect">
             <a:avLst/>
@@ -19003,219 +19983,67 @@
               <a:buNone/>
             </a:pPr>
             <a:r>
-              <a:rPr lang="en-US" sz="1500" b="1" dirty="0">
+              <a:rPr lang="en-US" sz="1000" dirty="0">
                 <a:solidFill>
                   <a:srgbClr val="FFFFFF"/>
                 </a:solidFill>
-                <a:latin typeface="SF Pro Display" pitchFamily="34" charset="0"/>
-                <a:ea typeface="SF Pro Display" pitchFamily="34" charset="-122"/>
-                <a:cs typeface="SF Pro Display" pitchFamily="34" charset="-120"/>
-              </a:rPr>
-              <a:t>$30/hr</a:t>
-            </a:r>
-            <a:endParaRPr lang="en-US" sz="1500" dirty="0"/>
-          </a:p>
-        </p:txBody>
-      </p:sp>
-      <p:sp>
-        <p:nvSpPr>
-          <p:cNvPr id="13" name="Shape 10"/>
+                <a:latin typeface="SF Pro Text" pitchFamily="34" charset="0"/>
+                <a:ea typeface="SF Pro Text" pitchFamily="34" charset="-122"/>
+                <a:cs typeface="SF Pro Text" pitchFamily="34" charset="-120"/>
+              </a:rPr>
+              <a:t>Platform fee</a:t>
+            </a:r>
+            <a:endParaRPr lang="en-US" sz="1000" dirty="0"/>
+          </a:p>
+          <a:p>
+            <a:pPr algn="ctr" indent="0" marL="0">
+              <a:buNone/>
+            </a:pPr>
+            <a:r>
+              <a:rPr lang="en-US" sz="1000" dirty="0">
+                <a:solidFill>
+                  <a:srgbClr val="FFFFFF"/>
+                </a:solidFill>
+                <a:latin typeface="SF Pro Text" pitchFamily="34" charset="0"/>
+                <a:ea typeface="SF Pro Text" pitchFamily="34" charset="-122"/>
+                <a:cs typeface="SF Pro Text" pitchFamily="34" charset="-120"/>
+              </a:rPr>
+              <a:t>on the invoice</a:t>
+            </a:r>
+            <a:endParaRPr lang="en-US" sz="1000" dirty="0"/>
+          </a:p>
+        </p:txBody>
+      </p:sp>
+      <p:sp>
+        <p:nvSpPr>
+          <p:cNvPr id="17" name="Shape 14"/>
           <p:cNvSpPr/>
           <p:nvPr/>
         </p:nvSpPr>
         <p:spPr>
           <a:xfrm>
-            <a:off x="3154680" y="1572768"/>
-            <a:ext cx="1261872" cy="914400"/>
+            <a:off x="411480" y="3246120"/>
+            <a:ext cx="8321040" cy="384048"/>
           </a:xfrm>
           <a:prstGeom prst="roundRect">
             <a:avLst>
-              <a:gd name="adj" fmla="val 8000"/>
+              <a:gd name="adj" fmla="val 19048"/>
             </a:avLst>
           </a:prstGeom>
           <a:solidFill>
-            <a:srgbClr val="FFFFFF"/>
+            <a:srgbClr val="FFF3D6"/>
           </a:solidFill>
           <a:ln w="9525">
             <a:solidFill>
-              <a:srgbClr val="DCE1E7"/>
+              <a:srgbClr val="FFF3D6"/>
             </a:solidFill>
             <a:prstDash val="solid"/>
           </a:ln>
         </p:spPr>
       </p:sp>
-      <p:sp>
-        <p:nvSpPr>
-          <p:cNvPr id="14" name="Text 11"/>
-          <p:cNvSpPr txBox="1"/>
-          <p:nvPr/>
-        </p:nvSpPr>
-        <p:spPr>
-          <a:xfrm>
-            <a:off x="3154680" y="1645920"/>
-            <a:ext cx="1261872" cy="320040"/>
-          </a:xfrm>
-          <a:prstGeom prst="rect">
-            <a:avLst/>
-          </a:prstGeom>
-          <a:noFill/>
-          <a:ln/>
-        </p:spPr>
-        <p:txBody>
-          <a:bodyPr wrap="square" lIns="0" tIns="0" rIns="0" bIns="0" rtlCol="0" anchor="t"/>
-          <a:lstStyle/>
-          <a:p>
-            <a:pPr algn="ctr" indent="0" marL="0">
-              <a:buNone/>
-            </a:pPr>
-            <a:r>
-              <a:rPr lang="en-US" sz="1200" b="1" dirty="0">
-                <a:solidFill>
-                  <a:srgbClr val="1D1D1F"/>
-                </a:solidFill>
-                <a:latin typeface="SF Pro Display" pitchFamily="34" charset="0"/>
-                <a:ea typeface="SF Pro Display" pitchFamily="34" charset="-122"/>
-                <a:cs typeface="SF Pro Display" pitchFamily="34" charset="-120"/>
-              </a:rPr>
-              <a:t>Yolanda</a:t>
-            </a:r>
-            <a:endParaRPr lang="en-US" sz="1200" dirty="0"/>
-          </a:p>
-        </p:txBody>
-      </p:sp>
-      <p:sp>
-        <p:nvSpPr>
-          <p:cNvPr id="15" name="Text 12"/>
-          <p:cNvSpPr txBox="1"/>
-          <p:nvPr/>
-        </p:nvSpPr>
-        <p:spPr>
-          <a:xfrm>
-            <a:off x="3154680" y="1965960"/>
-            <a:ext cx="1261872" cy="365760"/>
-          </a:xfrm>
-          <a:prstGeom prst="rect">
-            <a:avLst/>
-          </a:prstGeom>
-          <a:noFill/>
-          <a:ln/>
-        </p:spPr>
-        <p:txBody>
-          <a:bodyPr wrap="square" lIns="0" tIns="0" rIns="0" bIns="0" rtlCol="0" anchor="t"/>
-          <a:lstStyle/>
-          <a:p>
-            <a:pPr algn="ctr" indent="0" marL="0">
-              <a:buNone/>
-            </a:pPr>
-            <a:r>
-              <a:rPr lang="en-US" sz="1500" b="1" dirty="0">
-                <a:solidFill>
-                  <a:srgbClr val="0B7A6F"/>
-                </a:solidFill>
-                <a:latin typeface="SF Pro Display" pitchFamily="34" charset="0"/>
-                <a:ea typeface="SF Pro Display" pitchFamily="34" charset="-122"/>
-                <a:cs typeface="SF Pro Display" pitchFamily="34" charset="-120"/>
-              </a:rPr>
-              <a:t>$23/hr</a:t>
-            </a:r>
-            <a:endParaRPr lang="en-US" sz="1500" dirty="0"/>
-          </a:p>
-        </p:txBody>
-      </p:sp>
-      <p:sp>
-        <p:nvSpPr>
-          <p:cNvPr id="16" name="Text 13"/>
-          <p:cNvSpPr txBox="1"/>
-          <p:nvPr/>
-        </p:nvSpPr>
-        <p:spPr>
-          <a:xfrm>
-            <a:off x="438912" y="2606040"/>
-            <a:ext cx="4023360" cy="274320"/>
-          </a:xfrm>
-          <a:prstGeom prst="rect">
-            <a:avLst/>
-          </a:prstGeom>
-          <a:noFill/>
-          <a:ln/>
-        </p:spPr>
-        <p:txBody>
-          <a:bodyPr wrap="square" lIns="0" tIns="0" rIns="0" bIns="0" rtlCol="0" anchor="t"/>
-          <a:lstStyle/>
-          <a:p>
-            <a:pPr indent="0" marL="0">
-              <a:buNone/>
-            </a:pPr>
-            <a:r>
-              <a:rPr lang="en-US" sz="1200" b="1" dirty="0">
-                <a:solidFill>
-                  <a:srgbClr val="0B7A6F"/>
-                </a:solidFill>
-                <a:latin typeface="SF Pro Display" pitchFamily="34" charset="0"/>
-                <a:ea typeface="SF Pro Display" pitchFamily="34" charset="-122"/>
-                <a:cs typeface="SF Pro Display" pitchFamily="34" charset="-120"/>
-              </a:rPr>
-              <a:t>Max requested rate: $30/hr</a:t>
-            </a:r>
-            <a:endParaRPr lang="en-US" sz="1200" dirty="0"/>
-          </a:p>
-        </p:txBody>
-      </p:sp>
-      <p:sp>
-        <p:nvSpPr>
-          <p:cNvPr id="17" name="Shape 14"/>
-          <p:cNvSpPr/>
-          <p:nvPr/>
-        </p:nvSpPr>
-        <p:spPr>
-          <a:xfrm>
-            <a:off x="4663440" y="1325880"/>
-            <a:ext cx="4069080" cy="1325880"/>
-          </a:xfrm>
-          <a:prstGeom prst="roundRect">
-            <a:avLst>
-              <a:gd name="adj" fmla="val 5517"/>
-            </a:avLst>
-          </a:prstGeom>
-          <a:solidFill>
-            <a:srgbClr val="FFFFFF"/>
-          </a:solidFill>
-          <a:ln w="9525">
-            <a:solidFill>
-              <a:srgbClr val="DCE1E7"/>
-            </a:solidFill>
-            <a:prstDash val="solid"/>
-          </a:ln>
-        </p:spPr>
-      </p:sp>
-      <p:sp>
-        <p:nvSpPr>
-          <p:cNvPr id="18" name="Shape 15"/>
-          <p:cNvSpPr/>
-          <p:nvPr/>
-        </p:nvSpPr>
-        <p:spPr>
-          <a:xfrm>
-            <a:off x="4828032" y="1490472"/>
-            <a:ext cx="329184" cy="329184"/>
-          </a:xfrm>
-          <a:prstGeom prst="ellipse">
-            <a:avLst/>
-          </a:prstGeom>
-          <a:solidFill>
-            <a:srgbClr val="E3F4F1"/>
-          </a:solidFill>
-          <a:ln w="12700">
-            <a:solidFill>
-              <a:srgbClr val="E3F4F1"/>
-            </a:solidFill>
-            <a:prstDash val="solid"/>
-          </a:ln>
-        </p:spPr>
-      </p:sp>
       <p:pic>
         <p:nvPicPr>
-          <p:cNvPr id="19" name="Image 0" descr="preencoded.png">    </p:cNvPr>
+          <p:cNvPr id="18" name="Image 0" descr="preencoded.png">    </p:cNvPr>
           <p:cNvPicPr>
             <a:picLocks noChangeAspect="1"/>
           </p:cNvPicPr>
@@ -19229,8 +20057,8 @@
         </p:blipFill>
         <p:spPr>
           <a:xfrm>
-            <a:off x="4907036" y="1569476"/>
-            <a:ext cx="171176" cy="171176"/>
+            <a:off x="566928" y="3355848"/>
+            <a:ext cx="164592" cy="164592"/>
           </a:xfrm>
           <a:prstGeom prst="rect">
             <a:avLst/>
@@ -19239,14 +20067,14 @@
       </p:pic>
       <p:sp>
         <p:nvSpPr>
-          <p:cNvPr id="20" name="Text 16"/>
+          <p:cNvPr id="19" name="Text 15"/>
           <p:cNvSpPr txBox="1"/>
           <p:nvPr/>
         </p:nvSpPr>
         <p:spPr>
           <a:xfrm>
-            <a:off x="4828032" y="1929384"/>
-            <a:ext cx="3739896" cy="274320"/>
+            <a:off x="822960" y="3346704"/>
+            <a:ext cx="7772400" cy="201168"/>
           </a:xfrm>
           <a:prstGeom prst="rect">
             <a:avLst/>
@@ -19262,249 +20090,31 @@
               <a:buNone/>
             </a:pPr>
             <a:r>
-              <a:rPr lang="en-US" sz="1200" b="1" dirty="0">
-                <a:solidFill>
-                  <a:srgbClr val="1D1D1F"/>
-                </a:solidFill>
-                <a:latin typeface="SF Pro Display" pitchFamily="34" charset="0"/>
-                <a:ea typeface="SF Pro Display" pitchFamily="34" charset="-122"/>
-                <a:cs typeface="SF Pro Display" pitchFamily="34" charset="-120"/>
-              </a:rPr>
-              <a:t>A requested cleaner claims</a:t>
-            </a:r>
-            <a:endParaRPr lang="en-US" sz="1200" dirty="0"/>
-          </a:p>
-        </p:txBody>
-      </p:sp>
-      <p:sp>
-        <p:nvSpPr>
-          <p:cNvPr id="21" name="Text 17"/>
-          <p:cNvSpPr txBox="1"/>
-          <p:nvPr/>
-        </p:nvSpPr>
-        <p:spPr>
-          <a:xfrm>
-            <a:off x="4828032" y="2221992"/>
-            <a:ext cx="3739896" cy="338328"/>
-          </a:xfrm>
-          <a:prstGeom prst="rect">
-            <a:avLst/>
-          </a:prstGeom>
-          <a:noFill/>
-          <a:ln/>
-        </p:spPr>
-        <p:txBody>
-          <a:bodyPr wrap="square" lIns="0" tIns="0" rIns="0" bIns="0" rtlCol="0" anchor="t"/>
-          <a:lstStyle/>
-          <a:p>
-            <a:pPr indent="0" marL="0">
-              <a:buNone/>
-            </a:pPr>
-            <a:r>
-              <a:rPr lang="en-US" sz="950" dirty="0">
-                <a:solidFill>
-                  <a:srgbClr val="6E6E73"/>
+              <a:rPr lang="en-US" sz="1000" b="1" dirty="0">
+                <a:solidFill>
+                  <a:srgbClr val="9A6410"/>
                 </a:solidFill>
                 <a:latin typeface="SF Pro Text" pitchFamily="34" charset="0"/>
                 <a:ea typeface="SF Pro Text" pitchFamily="34" charset="-122"/>
                 <a:cs typeface="SF Pro Text" pitchFamily="34" charset="-120"/>
               </a:rPr>
-              <a:t>Mona claims: the customer pays Mona's rate, $25/hr.</a:t>
-            </a:r>
-            <a:endParaRPr lang="en-US" sz="950" dirty="0"/>
-          </a:p>
-        </p:txBody>
-      </p:sp>
-      <p:sp>
-        <p:nvSpPr>
-          <p:cNvPr id="22" name="Shape 18"/>
-          <p:cNvSpPr/>
-          <p:nvPr/>
-        </p:nvSpPr>
-        <p:spPr>
-          <a:xfrm>
-            <a:off x="4663440" y="2743200"/>
-            <a:ext cx="4069080" cy="1325880"/>
-          </a:xfrm>
-          <a:prstGeom prst="roundRect">
-            <a:avLst>
-              <a:gd name="adj" fmla="val 5517"/>
-            </a:avLst>
-          </a:prstGeom>
-          <a:solidFill>
-            <a:srgbClr val="FFFFFF"/>
-          </a:solidFill>
-          <a:ln w="9525">
-            <a:solidFill>
-              <a:srgbClr val="DCE1E7"/>
-            </a:solidFill>
-            <a:prstDash val="solid"/>
-          </a:ln>
-        </p:spPr>
-      </p:sp>
-      <p:sp>
-        <p:nvSpPr>
-          <p:cNvPr id="23" name="Shape 19"/>
-          <p:cNvSpPr/>
-          <p:nvPr/>
-        </p:nvSpPr>
-        <p:spPr>
-          <a:xfrm>
-            <a:off x="4828032" y="2907792"/>
-            <a:ext cx="329184" cy="329184"/>
-          </a:xfrm>
-          <a:prstGeom prst="ellipse">
-            <a:avLst/>
-          </a:prstGeom>
-          <a:solidFill>
-            <a:srgbClr val="E3F4F1"/>
-          </a:solidFill>
-          <a:ln w="12700">
-            <a:solidFill>
-              <a:srgbClr val="E3F4F1"/>
-            </a:solidFill>
-            <a:prstDash val="solid"/>
-          </a:ln>
-        </p:spPr>
-      </p:sp>
-      <p:pic>
-        <p:nvPicPr>
-          <p:cNvPr id="24" name="Image 1" descr="preencoded.png">    </p:cNvPr>
-          <p:cNvPicPr>
-            <a:picLocks noChangeAspect="1"/>
-          </p:cNvPicPr>
-          <p:nvPr/>
-        </p:nvPicPr>
-        <p:blipFill>
-          <a:blip r:embed="rId2"/>
-          <a:stretch>
-            <a:fillRect/>
-          </a:stretch>
-        </p:blipFill>
-        <p:spPr>
-          <a:xfrm>
-            <a:off x="4907036" y="2986796"/>
-            <a:ext cx="171176" cy="171176"/>
-          </a:xfrm>
-          <a:prstGeom prst="rect">
-            <a:avLst/>
-          </a:prstGeom>
-        </p:spPr>
-      </p:pic>
-      <p:sp>
-        <p:nvSpPr>
-          <p:cNvPr id="25" name="Text 20"/>
-          <p:cNvSpPr txBox="1"/>
-          <p:nvPr/>
-        </p:nvSpPr>
-        <p:spPr>
-          <a:xfrm>
-            <a:off x="4828032" y="3346704"/>
-            <a:ext cx="3739896" cy="274320"/>
-          </a:xfrm>
-          <a:prstGeom prst="rect">
-            <a:avLst/>
-          </a:prstGeom>
-          <a:noFill/>
-          <a:ln/>
-        </p:spPr>
-        <p:txBody>
-          <a:bodyPr wrap="square" lIns="0" tIns="0" rIns="0" bIns="0" rtlCol="0" anchor="t"/>
-          <a:lstStyle/>
-          <a:p>
+              <a:t>Correct charge:  </a:t>
+            </a:r>
             <a:pPr indent="0" marL="0">
               <a:buNone/>
             </a:pPr>
             <a:r>
-              <a:rPr lang="en-US" sz="1200" b="1" dirty="0">
+              <a:rPr lang="en-US" sz="1000" dirty="0">
                 <a:solidFill>
                   <a:srgbClr val="1D1D1F"/>
-                </a:solidFill>
-                <a:latin typeface="SF Pro Display" pitchFamily="34" charset="0"/>
-                <a:ea typeface="SF Pro Display" pitchFamily="34" charset="-122"/>
-                <a:cs typeface="SF Pro Display" pitchFamily="34" charset="-120"/>
-              </a:rPr>
-              <a:t>Someone else claims</a:t>
-            </a:r>
-            <a:endParaRPr lang="en-US" sz="1200" dirty="0"/>
-          </a:p>
-        </p:txBody>
-      </p:sp>
-      <p:sp>
-        <p:nvSpPr>
-          <p:cNvPr id="26" name="Text 21"/>
-          <p:cNvSpPr txBox="1"/>
-          <p:nvPr/>
-        </p:nvSpPr>
-        <p:spPr>
-          <a:xfrm>
-            <a:off x="4828032" y="3639312"/>
-            <a:ext cx="3739896" cy="338328"/>
-          </a:xfrm>
-          <a:prstGeom prst="rect">
-            <a:avLst/>
-          </a:prstGeom>
-          <a:noFill/>
-          <a:ln/>
-        </p:spPr>
-        <p:txBody>
-          <a:bodyPr wrap="square" lIns="0" tIns="0" rIns="0" bIns="0" rtlCol="0" anchor="t"/>
-          <a:lstStyle/>
-          <a:p>
-            <a:pPr indent="0" marL="0">
-              <a:buNone/>
-            </a:pPr>
-            <a:r>
-              <a:rPr lang="en-US" sz="950" dirty="0">
-                <a:solidFill>
-                  <a:srgbClr val="6E6E73"/>
                 </a:solidFill>
                 <a:latin typeface="SF Pro Text" pitchFamily="34" charset="0"/>
                 <a:ea typeface="SF Pro Text" pitchFamily="34" charset="-122"/>
                 <a:cs typeface="SF Pro Text" pitchFamily="34" charset="-120"/>
               </a:rPr>
-              <a:t>Jeff ($18/hr) claims: the customer pays $30/hr. Jeff gets $18/hr.</a:t>
-            </a:r>
-            <a:endParaRPr lang="en-US" sz="950" dirty="0"/>
-          </a:p>
-        </p:txBody>
-      </p:sp>
-      <p:sp>
-        <p:nvSpPr>
-          <p:cNvPr id="27" name="Text 22"/>
-          <p:cNvSpPr txBox="1"/>
-          <p:nvPr/>
-        </p:nvSpPr>
-        <p:spPr>
-          <a:xfrm>
-            <a:off x="438912" y="3017520"/>
-            <a:ext cx="4023360" cy="822960"/>
-          </a:xfrm>
-          <a:prstGeom prst="rect">
-            <a:avLst/>
-          </a:prstGeom>
-          <a:noFill/>
-          <a:ln/>
-        </p:spPr>
-        <p:txBody>
-          <a:bodyPr wrap="square" lIns="0" tIns="0" rIns="0" bIns="0" rtlCol="0" anchor="t"/>
-          <a:lstStyle/>
-          <a:p>
-            <a:pPr indent="0" marL="0">
-              <a:buNone/>
-            </a:pPr>
-            <a:r>
-              <a:rPr lang="en-US" sz="1050" dirty="0">
-                <a:solidFill>
-                  <a:srgbClr val="6E6E73"/>
-                </a:solidFill>
-                <a:latin typeface="SF Pro Text" pitchFamily="34" charset="0"/>
-                <a:ea typeface="SF Pro Text" pitchFamily="34" charset="-122"/>
-                <a:cs typeface="SF Pro Text" pitchFamily="34" charset="-120"/>
-              </a:rPr>
-              <a:t>Requesting Cassandra shows the customer is willing to pay her rate, so it becomes their ceiling.</a:t>
-            </a:r>
-            <a:endParaRPr lang="en-US" sz="1050" dirty="0"/>
+              <a:t>don't reprice it and don't refund the difference. The cleaner is still paid $15/hr.</a:t>
+            </a:r>
+            <a:endParaRPr lang="en-US" sz="1000" dirty="0"/>
           </a:p>
         </p:txBody>
       </p:sp>
@@ -19653,7 +20263,7 @@
                 <a:ea typeface="SF Pro Display" pitchFamily="34" charset="-122"/>
                 <a:cs typeface="SF Pro Display" pitchFamily="34" charset="-120"/>
               </a:rPr>
-              <a:t>Before you explain or refund a fee</a:t>
+              <a:t>Max requested rate</a:t>
             </a:r>
             <a:endParaRPr lang="en-US" sz="2400" dirty="0"/>
           </a:p>
@@ -19692,7 +20302,7 @@
                 <a:ea typeface="SF Pro Text" pitchFamily="34" charset="-122"/>
                 <a:cs typeface="SF Pro Text" pitchFamily="34" charset="-120"/>
               </a:rPr>
-              <a:t>Three answers tell you which case you're in.</a:t>
+              <a:t>Non-FC and deactivated FC customers are priced at the highest rate among the cleaners they requested.</a:t>
             </a:r>
             <a:endParaRPr lang="en-US" sz="1200" dirty="0"/>
           </a:p>
@@ -19700,18 +20310,57 @@
       </p:sp>
       <p:sp>
         <p:nvSpPr>
-          <p:cNvPr id="6" name="Shape 3"/>
+          <p:cNvPr id="6" name="Text 3"/>
+          <p:cNvSpPr txBox="1"/>
+          <p:nvPr/>
+        </p:nvSpPr>
+        <p:spPr>
+          <a:xfrm>
+            <a:off x="438912" y="1325880"/>
+            <a:ext cx="4572000" cy="182880"/>
+          </a:xfrm>
+          <a:prstGeom prst="rect">
+            <a:avLst/>
+          </a:prstGeom>
+          <a:noFill/>
+          <a:ln/>
+        </p:spPr>
+        <p:txBody>
+          <a:bodyPr wrap="square" lIns="0" tIns="0" rIns="0" bIns="0" rtlCol="0" anchor="t"/>
+          <a:lstStyle/>
+          <a:p>
+            <a:pPr indent="0" marL="0">
+              <a:buNone/>
+            </a:pPr>
+            <a:r>
+              <a:rPr lang="en-US" sz="800" b="1" spc="50" kern="0" dirty="0">
+                <a:solidFill>
+                  <a:srgbClr val="6E6E73"/>
+                </a:solidFill>
+                <a:latin typeface="SF Pro Display" pitchFamily="34" charset="0"/>
+                <a:ea typeface="SF Pro Display" pitchFamily="34" charset="-122"/>
+                <a:cs typeface="SF Pro Display" pitchFamily="34" charset="-120"/>
+              </a:rPr>
+              <a:t>REQUESTED CLEANERS</a:t>
+            </a:r>
+            <a:endParaRPr lang="en-US" sz="800" dirty="0"/>
+          </a:p>
+        </p:txBody>
+      </p:sp>
+      <p:sp>
+        <p:nvSpPr>
+          <p:cNvPr id="7" name="Shape 4"/>
           <p:cNvSpPr/>
           <p:nvPr/>
         </p:nvSpPr>
         <p:spPr>
           <a:xfrm>
-            <a:off x="411480" y="1371600"/>
-            <a:ext cx="2682240" cy="1691640"/>
+            <a:off x="411480" y="1572768"/>
+            <a:ext cx="1261872" cy="914400"/>
           </a:xfrm>
           <a:prstGeom prst="roundRect">
             <a:avLst>
-              <a:gd name="adj" fmla="val 4324"/>
+              <a:gd name="adj" fmla="val 8000"/>
             </a:avLst>
           </a:prstGeom>
           <a:solidFill>
@@ -19727,14 +20376,368 @@
       </p:sp>
       <p:sp>
         <p:nvSpPr>
-          <p:cNvPr id="7" name="Shape 4"/>
+          <p:cNvPr id="8" name="Text 5"/>
+          <p:cNvSpPr txBox="1"/>
+          <p:nvPr/>
+        </p:nvSpPr>
+        <p:spPr>
+          <a:xfrm>
+            <a:off x="411480" y="1645920"/>
+            <a:ext cx="1261872" cy="320040"/>
+          </a:xfrm>
+          <a:prstGeom prst="rect">
+            <a:avLst/>
+          </a:prstGeom>
+          <a:noFill/>
+          <a:ln/>
+        </p:spPr>
+        <p:txBody>
+          <a:bodyPr wrap="square" lIns="0" tIns="0" rIns="0" bIns="0" rtlCol="0" anchor="t"/>
+          <a:lstStyle/>
+          <a:p>
+            <a:pPr algn="ctr" indent="0" marL="0">
+              <a:buNone/>
+            </a:pPr>
+            <a:r>
+              <a:rPr lang="en-US" sz="1200" b="1" dirty="0">
+                <a:solidFill>
+                  <a:srgbClr val="1D1D1F"/>
+                </a:solidFill>
+                <a:latin typeface="SF Pro Display" pitchFamily="34" charset="0"/>
+                <a:ea typeface="SF Pro Display" pitchFamily="34" charset="-122"/>
+                <a:cs typeface="SF Pro Display" pitchFamily="34" charset="-120"/>
+              </a:rPr>
+              <a:t>Mona</a:t>
+            </a:r>
+            <a:endParaRPr lang="en-US" sz="1200" dirty="0"/>
+          </a:p>
+        </p:txBody>
+      </p:sp>
+      <p:sp>
+        <p:nvSpPr>
+          <p:cNvPr id="9" name="Text 6"/>
+          <p:cNvSpPr txBox="1"/>
+          <p:nvPr/>
+        </p:nvSpPr>
+        <p:spPr>
+          <a:xfrm>
+            <a:off x="411480" y="1965960"/>
+            <a:ext cx="1261872" cy="365760"/>
+          </a:xfrm>
+          <a:prstGeom prst="rect">
+            <a:avLst/>
+          </a:prstGeom>
+          <a:noFill/>
+          <a:ln/>
+        </p:spPr>
+        <p:txBody>
+          <a:bodyPr wrap="square" lIns="0" tIns="0" rIns="0" bIns="0" rtlCol="0" anchor="t"/>
+          <a:lstStyle/>
+          <a:p>
+            <a:pPr algn="ctr" indent="0" marL="0">
+              <a:buNone/>
+            </a:pPr>
+            <a:r>
+              <a:rPr lang="en-US" sz="1500" b="1" dirty="0">
+                <a:solidFill>
+                  <a:srgbClr val="0B7A6F"/>
+                </a:solidFill>
+                <a:latin typeface="SF Pro Display" pitchFamily="34" charset="0"/>
+                <a:ea typeface="SF Pro Display" pitchFamily="34" charset="-122"/>
+                <a:cs typeface="SF Pro Display" pitchFamily="34" charset="-120"/>
+              </a:rPr>
+              <a:t>$25/hr</a:t>
+            </a:r>
+            <a:endParaRPr lang="en-US" sz="1500" dirty="0"/>
+          </a:p>
+        </p:txBody>
+      </p:sp>
+      <p:sp>
+        <p:nvSpPr>
+          <p:cNvPr id="10" name="Shape 7"/>
           <p:cNvSpPr/>
           <p:nvPr/>
         </p:nvSpPr>
         <p:spPr>
           <a:xfrm>
-            <a:off x="576072" y="1554480"/>
-            <a:ext cx="274320" cy="274320"/>
+            <a:off x="1783080" y="1572768"/>
+            <a:ext cx="1261872" cy="914400"/>
+          </a:xfrm>
+          <a:prstGeom prst="roundRect">
+            <a:avLst>
+              <a:gd name="adj" fmla="val 8000"/>
+            </a:avLst>
+          </a:prstGeom>
+          <a:solidFill>
+            <a:srgbClr val="0B7A6F"/>
+          </a:solidFill>
+          <a:ln w="9525">
+            <a:solidFill>
+              <a:srgbClr val="0B7A6F"/>
+            </a:solidFill>
+            <a:prstDash val="solid"/>
+          </a:ln>
+        </p:spPr>
+      </p:sp>
+      <p:sp>
+        <p:nvSpPr>
+          <p:cNvPr id="11" name="Text 8"/>
+          <p:cNvSpPr txBox="1"/>
+          <p:nvPr/>
+        </p:nvSpPr>
+        <p:spPr>
+          <a:xfrm>
+            <a:off x="1783080" y="1645920"/>
+            <a:ext cx="1261872" cy="320040"/>
+          </a:xfrm>
+          <a:prstGeom prst="rect">
+            <a:avLst/>
+          </a:prstGeom>
+          <a:noFill/>
+          <a:ln/>
+        </p:spPr>
+        <p:txBody>
+          <a:bodyPr wrap="square" lIns="0" tIns="0" rIns="0" bIns="0" rtlCol="0" anchor="t"/>
+          <a:lstStyle/>
+          <a:p>
+            <a:pPr algn="ctr" indent="0" marL="0">
+              <a:buNone/>
+            </a:pPr>
+            <a:r>
+              <a:rPr lang="en-US" sz="1200" b="1" dirty="0">
+                <a:solidFill>
+                  <a:srgbClr val="FFFFFF"/>
+                </a:solidFill>
+                <a:latin typeface="SF Pro Display" pitchFamily="34" charset="0"/>
+                <a:ea typeface="SF Pro Display" pitchFamily="34" charset="-122"/>
+                <a:cs typeface="SF Pro Display" pitchFamily="34" charset="-120"/>
+              </a:rPr>
+              <a:t>Cassandra</a:t>
+            </a:r>
+            <a:endParaRPr lang="en-US" sz="1200" dirty="0"/>
+          </a:p>
+        </p:txBody>
+      </p:sp>
+      <p:sp>
+        <p:nvSpPr>
+          <p:cNvPr id="12" name="Text 9"/>
+          <p:cNvSpPr txBox="1"/>
+          <p:nvPr/>
+        </p:nvSpPr>
+        <p:spPr>
+          <a:xfrm>
+            <a:off x="1783080" y="1965960"/>
+            <a:ext cx="1261872" cy="365760"/>
+          </a:xfrm>
+          <a:prstGeom prst="rect">
+            <a:avLst/>
+          </a:prstGeom>
+          <a:noFill/>
+          <a:ln/>
+        </p:spPr>
+        <p:txBody>
+          <a:bodyPr wrap="square" lIns="0" tIns="0" rIns="0" bIns="0" rtlCol="0" anchor="t"/>
+          <a:lstStyle/>
+          <a:p>
+            <a:pPr algn="ctr" indent="0" marL="0">
+              <a:buNone/>
+            </a:pPr>
+            <a:r>
+              <a:rPr lang="en-US" sz="1500" b="1" dirty="0">
+                <a:solidFill>
+                  <a:srgbClr val="FFFFFF"/>
+                </a:solidFill>
+                <a:latin typeface="SF Pro Display" pitchFamily="34" charset="0"/>
+                <a:ea typeface="SF Pro Display" pitchFamily="34" charset="-122"/>
+                <a:cs typeface="SF Pro Display" pitchFamily="34" charset="-120"/>
+              </a:rPr>
+              <a:t>$30/hr</a:t>
+            </a:r>
+            <a:endParaRPr lang="en-US" sz="1500" dirty="0"/>
+          </a:p>
+        </p:txBody>
+      </p:sp>
+      <p:sp>
+        <p:nvSpPr>
+          <p:cNvPr id="13" name="Shape 10"/>
+          <p:cNvSpPr/>
+          <p:nvPr/>
+        </p:nvSpPr>
+        <p:spPr>
+          <a:xfrm>
+            <a:off x="3154680" y="1572768"/>
+            <a:ext cx="1261872" cy="914400"/>
+          </a:xfrm>
+          <a:prstGeom prst="roundRect">
+            <a:avLst>
+              <a:gd name="adj" fmla="val 8000"/>
+            </a:avLst>
+          </a:prstGeom>
+          <a:solidFill>
+            <a:srgbClr val="FFFFFF"/>
+          </a:solidFill>
+          <a:ln w="9525">
+            <a:solidFill>
+              <a:srgbClr val="DCE1E7"/>
+            </a:solidFill>
+            <a:prstDash val="solid"/>
+          </a:ln>
+        </p:spPr>
+      </p:sp>
+      <p:sp>
+        <p:nvSpPr>
+          <p:cNvPr id="14" name="Text 11"/>
+          <p:cNvSpPr txBox="1"/>
+          <p:nvPr/>
+        </p:nvSpPr>
+        <p:spPr>
+          <a:xfrm>
+            <a:off x="3154680" y="1645920"/>
+            <a:ext cx="1261872" cy="320040"/>
+          </a:xfrm>
+          <a:prstGeom prst="rect">
+            <a:avLst/>
+          </a:prstGeom>
+          <a:noFill/>
+          <a:ln/>
+        </p:spPr>
+        <p:txBody>
+          <a:bodyPr wrap="square" lIns="0" tIns="0" rIns="0" bIns="0" rtlCol="0" anchor="t"/>
+          <a:lstStyle/>
+          <a:p>
+            <a:pPr algn="ctr" indent="0" marL="0">
+              <a:buNone/>
+            </a:pPr>
+            <a:r>
+              <a:rPr lang="en-US" sz="1200" b="1" dirty="0">
+                <a:solidFill>
+                  <a:srgbClr val="1D1D1F"/>
+                </a:solidFill>
+                <a:latin typeface="SF Pro Display" pitchFamily="34" charset="0"/>
+                <a:ea typeface="SF Pro Display" pitchFamily="34" charset="-122"/>
+                <a:cs typeface="SF Pro Display" pitchFamily="34" charset="-120"/>
+              </a:rPr>
+              <a:t>Yolanda</a:t>
+            </a:r>
+            <a:endParaRPr lang="en-US" sz="1200" dirty="0"/>
+          </a:p>
+        </p:txBody>
+      </p:sp>
+      <p:sp>
+        <p:nvSpPr>
+          <p:cNvPr id="15" name="Text 12"/>
+          <p:cNvSpPr txBox="1"/>
+          <p:nvPr/>
+        </p:nvSpPr>
+        <p:spPr>
+          <a:xfrm>
+            <a:off x="3154680" y="1965960"/>
+            <a:ext cx="1261872" cy="365760"/>
+          </a:xfrm>
+          <a:prstGeom prst="rect">
+            <a:avLst/>
+          </a:prstGeom>
+          <a:noFill/>
+          <a:ln/>
+        </p:spPr>
+        <p:txBody>
+          <a:bodyPr wrap="square" lIns="0" tIns="0" rIns="0" bIns="0" rtlCol="0" anchor="t"/>
+          <a:lstStyle/>
+          <a:p>
+            <a:pPr algn="ctr" indent="0" marL="0">
+              <a:buNone/>
+            </a:pPr>
+            <a:r>
+              <a:rPr lang="en-US" sz="1500" b="1" dirty="0">
+                <a:solidFill>
+                  <a:srgbClr val="0B7A6F"/>
+                </a:solidFill>
+                <a:latin typeface="SF Pro Display" pitchFamily="34" charset="0"/>
+                <a:ea typeface="SF Pro Display" pitchFamily="34" charset="-122"/>
+                <a:cs typeface="SF Pro Display" pitchFamily="34" charset="-120"/>
+              </a:rPr>
+              <a:t>$23/hr</a:t>
+            </a:r>
+            <a:endParaRPr lang="en-US" sz="1500" dirty="0"/>
+          </a:p>
+        </p:txBody>
+      </p:sp>
+      <p:sp>
+        <p:nvSpPr>
+          <p:cNvPr id="16" name="Text 13"/>
+          <p:cNvSpPr txBox="1"/>
+          <p:nvPr/>
+        </p:nvSpPr>
+        <p:spPr>
+          <a:xfrm>
+            <a:off x="438912" y="2606040"/>
+            <a:ext cx="4023360" cy="274320"/>
+          </a:xfrm>
+          <a:prstGeom prst="rect">
+            <a:avLst/>
+          </a:prstGeom>
+          <a:noFill/>
+          <a:ln/>
+        </p:spPr>
+        <p:txBody>
+          <a:bodyPr wrap="square" lIns="0" tIns="0" rIns="0" bIns="0" rtlCol="0" anchor="t"/>
+          <a:lstStyle/>
+          <a:p>
+            <a:pPr indent="0" marL="0">
+              <a:buNone/>
+            </a:pPr>
+            <a:r>
+              <a:rPr lang="en-US" sz="1200" b="1" dirty="0">
+                <a:solidFill>
+                  <a:srgbClr val="0B7A6F"/>
+                </a:solidFill>
+                <a:latin typeface="SF Pro Display" pitchFamily="34" charset="0"/>
+                <a:ea typeface="SF Pro Display" pitchFamily="34" charset="-122"/>
+                <a:cs typeface="SF Pro Display" pitchFamily="34" charset="-120"/>
+              </a:rPr>
+              <a:t>Max requested rate: $30/hr</a:t>
+            </a:r>
+            <a:endParaRPr lang="en-US" sz="1200" dirty="0"/>
+          </a:p>
+        </p:txBody>
+      </p:sp>
+      <p:sp>
+        <p:nvSpPr>
+          <p:cNvPr id="17" name="Shape 14"/>
+          <p:cNvSpPr/>
+          <p:nvPr/>
+        </p:nvSpPr>
+        <p:spPr>
+          <a:xfrm>
+            <a:off x="4663440" y="1325880"/>
+            <a:ext cx="4069080" cy="1325880"/>
+          </a:xfrm>
+          <a:prstGeom prst="roundRect">
+            <a:avLst>
+              <a:gd name="adj" fmla="val 5517"/>
+            </a:avLst>
+          </a:prstGeom>
+          <a:solidFill>
+            <a:srgbClr val="FFFFFF"/>
+          </a:solidFill>
+          <a:ln w="9525">
+            <a:solidFill>
+              <a:srgbClr val="DCE1E7"/>
+            </a:solidFill>
+            <a:prstDash val="solid"/>
+          </a:ln>
+        </p:spPr>
+      </p:sp>
+      <p:sp>
+        <p:nvSpPr>
+          <p:cNvPr id="18" name="Shape 15"/>
+          <p:cNvSpPr/>
+          <p:nvPr/>
+        </p:nvSpPr>
+        <p:spPr>
+          <a:xfrm>
+            <a:off x="4828032" y="1490472"/>
+            <a:ext cx="329184" cy="329184"/>
           </a:xfrm>
           <a:prstGeom prst="ellipse">
             <a:avLst/>
@@ -19750,16 +20753,40 @@
           </a:ln>
         </p:spPr>
       </p:sp>
-      <p:sp>
-        <p:nvSpPr>
-          <p:cNvPr id="8" name="Text 5"/>
+      <p:pic>
+        <p:nvPicPr>
+          <p:cNvPr id="19" name="Image 0" descr="preencoded.png">    </p:cNvPr>
+          <p:cNvPicPr>
+            <a:picLocks noChangeAspect="1"/>
+          </p:cNvPicPr>
+          <p:nvPr/>
+        </p:nvPicPr>
+        <p:blipFill>
+          <a:blip r:embed="rId1"/>
+          <a:stretch>
+            <a:fillRect/>
+          </a:stretch>
+        </p:blipFill>
+        <p:spPr>
+          <a:xfrm>
+            <a:off x="4907036" y="1569476"/>
+            <a:ext cx="171176" cy="171176"/>
+          </a:xfrm>
+          <a:prstGeom prst="rect">
+            <a:avLst/>
+          </a:prstGeom>
+        </p:spPr>
+      </p:pic>
+      <p:sp>
+        <p:nvSpPr>
+          <p:cNvPr id="20" name="Text 16"/>
           <p:cNvSpPr txBox="1"/>
           <p:nvPr/>
         </p:nvSpPr>
         <p:spPr>
           <a:xfrm>
-            <a:off x="576072" y="1554480"/>
-            <a:ext cx="274320" cy="274320"/>
+            <a:off x="4828032" y="1929384"/>
+            <a:ext cx="3739896" cy="274320"/>
           </a:xfrm>
           <a:prstGeom prst="rect">
             <a:avLst/>
@@ -19768,76 +20795,37 @@
           <a:ln/>
         </p:spPr>
         <p:txBody>
-          <a:bodyPr wrap="square" lIns="0" tIns="0" rIns="0" bIns="0" rtlCol="0" anchor="ctr"/>
-          <a:lstStyle/>
-          <a:p>
-            <a:pPr algn="ctr" indent="0" marL="0">
-              <a:buNone/>
-            </a:pPr>
-            <a:r>
-              <a:rPr lang="en-US" sz="900" b="1" dirty="0">
-                <a:solidFill>
-                  <a:srgbClr val="0B7A6F"/>
+          <a:bodyPr wrap="square" lIns="0" tIns="0" rIns="0" bIns="0" rtlCol="0" anchor="t"/>
+          <a:lstStyle/>
+          <a:p>
+            <a:pPr indent="0" marL="0">
+              <a:buNone/>
+            </a:pPr>
+            <a:r>
+              <a:rPr lang="en-US" sz="1200" b="1" dirty="0">
+                <a:solidFill>
+                  <a:srgbClr val="1D1D1F"/>
                 </a:solidFill>
                 <a:latin typeface="SF Pro Display" pitchFamily="34" charset="0"/>
                 <a:ea typeface="SF Pro Display" pitchFamily="34" charset="-122"/>
                 <a:cs typeface="SF Pro Display" pitchFamily="34" charset="-120"/>
               </a:rPr>
-              <a:t>1</a:t>
-            </a:r>
-            <a:endParaRPr lang="en-US" sz="900" dirty="0"/>
-          </a:p>
-        </p:txBody>
-      </p:sp>
-      <p:sp>
-        <p:nvSpPr>
-          <p:cNvPr id="9" name="Text 6"/>
+              <a:t>A requested cleaner claims</a:t>
+            </a:r>
+            <a:endParaRPr lang="en-US" sz="1200" dirty="0"/>
+          </a:p>
+        </p:txBody>
+      </p:sp>
+      <p:sp>
+        <p:nvSpPr>
+          <p:cNvPr id="21" name="Text 17"/>
           <p:cNvSpPr txBox="1"/>
           <p:nvPr/>
         </p:nvSpPr>
         <p:spPr>
           <a:xfrm>
-            <a:off x="576072" y="1975104"/>
-            <a:ext cx="2353056" cy="274320"/>
-          </a:xfrm>
-          <a:prstGeom prst="rect">
-            <a:avLst/>
-          </a:prstGeom>
-          <a:noFill/>
-          <a:ln/>
-        </p:spPr>
-        <p:txBody>
-          <a:bodyPr wrap="square" lIns="0" tIns="0" rIns="0" bIns="0" rtlCol="0" anchor="t"/>
-          <a:lstStyle/>
-          <a:p>
-            <a:pPr indent="0" marL="0">
-              <a:buNone/>
-            </a:pPr>
-            <a:r>
-              <a:rPr lang="en-US" sz="1200" b="1" dirty="0">
-                <a:solidFill>
-                  <a:srgbClr val="1D1D1F"/>
-                </a:solidFill>
-                <a:latin typeface="SF Pro Display" pitchFamily="34" charset="0"/>
-                <a:ea typeface="SF Pro Display" pitchFamily="34" charset="-122"/>
-                <a:cs typeface="SF Pro Display" pitchFamily="34" charset="-120"/>
-              </a:rPr>
-              <a:t>Operating model</a:t>
-            </a:r>
-            <a:endParaRPr lang="en-US" sz="1200" dirty="0"/>
-          </a:p>
-        </p:txBody>
-      </p:sp>
-      <p:sp>
-        <p:nvSpPr>
-          <p:cNvPr id="10" name="Text 7"/>
-          <p:cNvSpPr txBox="1"/>
-          <p:nvPr/>
-        </p:nvSpPr>
-        <p:spPr>
-          <a:xfrm>
-            <a:off x="576072" y="2267712"/>
-            <a:ext cx="2353056" cy="704088"/>
+            <a:off x="4828032" y="2221992"/>
+            <a:ext cx="3739896" cy="338328"/>
           </a:xfrm>
           <a:prstGeom prst="rect">
             <a:avLst/>
@@ -19861,7 +20849,7 @@
                 <a:ea typeface="SF Pro Text" pitchFamily="34" charset="-122"/>
                 <a:cs typeface="SF Pro Text" pitchFamily="34" charset="-120"/>
               </a:rPr>
-              <a:t>CA/CA-WA or General? Look for the banner.</a:t>
+              <a:t>Mona claims: the customer pays Mona's rate, $25/hr.</a:t>
             </a:r>
             <a:endParaRPr lang="en-US" sz="950" dirty="0"/>
           </a:p>
@@ -19869,18 +20857,18 @@
       </p:sp>
       <p:sp>
         <p:nvSpPr>
-          <p:cNvPr id="11" name="Shape 8"/>
+          <p:cNvPr id="22" name="Shape 18"/>
           <p:cNvSpPr/>
           <p:nvPr/>
         </p:nvSpPr>
         <p:spPr>
           <a:xfrm>
-            <a:off x="3230880" y="1371600"/>
-            <a:ext cx="2682240" cy="1691640"/>
+            <a:off x="4663440" y="2743200"/>
+            <a:ext cx="4069080" cy="1325880"/>
           </a:xfrm>
           <a:prstGeom prst="roundRect">
             <a:avLst>
-              <a:gd name="adj" fmla="val 4324"/>
+              <a:gd name="adj" fmla="val 5517"/>
             </a:avLst>
           </a:prstGeom>
           <a:solidFill>
@@ -19896,14 +20884,14 @@
       </p:sp>
       <p:sp>
         <p:nvSpPr>
-          <p:cNvPr id="12" name="Shape 9"/>
+          <p:cNvPr id="23" name="Shape 19"/>
           <p:cNvSpPr/>
           <p:nvPr/>
         </p:nvSpPr>
         <p:spPr>
           <a:xfrm>
-            <a:off x="3395472" y="1554480"/>
-            <a:ext cx="274320" cy="274320"/>
+            <a:off x="4828032" y="2907792"/>
+            <a:ext cx="329184" cy="329184"/>
           </a:xfrm>
           <a:prstGeom prst="ellipse">
             <a:avLst/>
@@ -19919,337 +20907,24 @@
           </a:ln>
         </p:spPr>
       </p:sp>
-      <p:sp>
-        <p:nvSpPr>
-          <p:cNvPr id="13" name="Text 10"/>
-          <p:cNvSpPr txBox="1"/>
-          <p:nvPr/>
-        </p:nvSpPr>
-        <p:spPr>
-          <a:xfrm>
-            <a:off x="3395472" y="1554480"/>
-            <a:ext cx="274320" cy="274320"/>
-          </a:xfrm>
-          <a:prstGeom prst="rect">
-            <a:avLst/>
-          </a:prstGeom>
-          <a:noFill/>
-          <a:ln/>
-        </p:spPr>
-        <p:txBody>
-          <a:bodyPr wrap="square" lIns="0" tIns="0" rIns="0" bIns="0" rtlCol="0" anchor="ctr"/>
-          <a:lstStyle/>
-          <a:p>
-            <a:pPr algn="ctr" indent="0" marL="0">
-              <a:buNone/>
-            </a:pPr>
-            <a:r>
-              <a:rPr lang="en-US" sz="900" b="1" dirty="0">
-                <a:solidFill>
-                  <a:srgbClr val="0B7A6F"/>
-                </a:solidFill>
-                <a:latin typeface="SF Pro Display" pitchFamily="34" charset="0"/>
-                <a:ea typeface="SF Pro Display" pitchFamily="34" charset="-122"/>
-                <a:cs typeface="SF Pro Display" pitchFamily="34" charset="-120"/>
-              </a:rPr>
-              <a:t>2</a:t>
-            </a:r>
-            <a:endParaRPr lang="en-US" sz="900" dirty="0"/>
-          </a:p>
-        </p:txBody>
-      </p:sp>
-      <p:sp>
-        <p:nvSpPr>
-          <p:cNvPr id="14" name="Text 11"/>
-          <p:cNvSpPr txBox="1"/>
-          <p:nvPr/>
-        </p:nvSpPr>
-        <p:spPr>
-          <a:xfrm>
-            <a:off x="3395472" y="1975104"/>
-            <a:ext cx="2353056" cy="274320"/>
-          </a:xfrm>
-          <a:prstGeom prst="rect">
-            <a:avLst/>
-          </a:prstGeom>
-          <a:noFill/>
-          <a:ln/>
-        </p:spPr>
-        <p:txBody>
-          <a:bodyPr wrap="square" lIns="0" tIns="0" rIns="0" bIns="0" rtlCol="0" anchor="t"/>
-          <a:lstStyle/>
-          <a:p>
-            <a:pPr indent="0" marL="0">
-              <a:buNone/>
-            </a:pPr>
-            <a:r>
-              <a:rPr lang="en-US" sz="1200" b="1" dirty="0">
-                <a:solidFill>
-                  <a:srgbClr val="1D1D1F"/>
-                </a:solidFill>
-                <a:latin typeface="SF Pro Display" pitchFamily="34" charset="0"/>
-                <a:ea typeface="SF Pro Display" pitchFamily="34" charset="-122"/>
-                <a:cs typeface="SF Pro Display" pitchFamily="34" charset="-120"/>
-              </a:rPr>
-              <a:t>Membership status</a:t>
-            </a:r>
-            <a:endParaRPr lang="en-US" sz="1200" dirty="0"/>
-          </a:p>
-        </p:txBody>
-      </p:sp>
-      <p:sp>
-        <p:nvSpPr>
-          <p:cNvPr id="15" name="Text 12"/>
-          <p:cNvSpPr txBox="1"/>
-          <p:nvPr/>
-        </p:nvSpPr>
-        <p:spPr>
-          <a:xfrm>
-            <a:off x="3395472" y="2267712"/>
-            <a:ext cx="2353056" cy="704088"/>
-          </a:xfrm>
-          <a:prstGeom prst="rect">
-            <a:avLst/>
-          </a:prstGeom>
-          <a:noFill/>
-          <a:ln/>
-        </p:spPr>
-        <p:txBody>
-          <a:bodyPr wrap="square" lIns="0" tIns="0" rIns="0" bIns="0" rtlCol="0" anchor="t"/>
-          <a:lstStyle/>
-          <a:p>
-            <a:pPr indent="0" marL="0">
-              <a:buNone/>
-            </a:pPr>
-            <a:r>
-              <a:rPr lang="en-US" sz="950" dirty="0">
-                <a:solidFill>
-                  <a:srgbClr val="6E6E73"/>
-                </a:solidFill>
-                <a:latin typeface="SF Pro Text" pitchFamily="34" charset="0"/>
-                <a:ea typeface="SF Pro Text" pitchFamily="34" charset="-122"/>
-                <a:cs typeface="SF Pro Text" pitchFamily="34" charset="-120"/>
-              </a:rPr>
-              <a:t>FC, non-FC, or deactivated FC?</a:t>
-            </a:r>
-            <a:endParaRPr lang="en-US" sz="950" dirty="0"/>
-          </a:p>
-        </p:txBody>
-      </p:sp>
-      <p:sp>
-        <p:nvSpPr>
-          <p:cNvPr id="16" name="Shape 13"/>
-          <p:cNvSpPr/>
-          <p:nvPr/>
-        </p:nvSpPr>
-        <p:spPr>
-          <a:xfrm>
-            <a:off x="6050280" y="1371600"/>
-            <a:ext cx="2682240" cy="1691640"/>
-          </a:xfrm>
-          <a:prstGeom prst="roundRect">
-            <a:avLst>
-              <a:gd name="adj" fmla="val 4324"/>
-            </a:avLst>
-          </a:prstGeom>
-          <a:solidFill>
-            <a:srgbClr val="FFFFFF"/>
-          </a:solidFill>
-          <a:ln w="9525">
-            <a:solidFill>
-              <a:srgbClr val="DCE1E7"/>
-            </a:solidFill>
-            <a:prstDash val="solid"/>
-          </a:ln>
-        </p:spPr>
-      </p:sp>
-      <p:sp>
-        <p:nvSpPr>
-          <p:cNvPr id="17" name="Shape 14"/>
-          <p:cNvSpPr/>
-          <p:nvPr/>
-        </p:nvSpPr>
-        <p:spPr>
-          <a:xfrm>
-            <a:off x="6214872" y="1554480"/>
-            <a:ext cx="274320" cy="274320"/>
-          </a:xfrm>
-          <a:prstGeom prst="ellipse">
-            <a:avLst/>
-          </a:prstGeom>
-          <a:solidFill>
-            <a:srgbClr val="E3F4F1"/>
-          </a:solidFill>
-          <a:ln w="12700">
-            <a:solidFill>
-              <a:srgbClr val="E3F4F1"/>
-            </a:solidFill>
-            <a:prstDash val="solid"/>
-          </a:ln>
-        </p:spPr>
-      </p:sp>
-      <p:sp>
-        <p:nvSpPr>
-          <p:cNvPr id="18" name="Text 15"/>
-          <p:cNvSpPr txBox="1"/>
-          <p:nvPr/>
-        </p:nvSpPr>
-        <p:spPr>
-          <a:xfrm>
-            <a:off x="6214872" y="1554480"/>
-            <a:ext cx="274320" cy="274320"/>
-          </a:xfrm>
-          <a:prstGeom prst="rect">
-            <a:avLst/>
-          </a:prstGeom>
-          <a:noFill/>
-          <a:ln/>
-        </p:spPr>
-        <p:txBody>
-          <a:bodyPr wrap="square" lIns="0" tIns="0" rIns="0" bIns="0" rtlCol="0" anchor="ctr"/>
-          <a:lstStyle/>
-          <a:p>
-            <a:pPr algn="ctr" indent="0" marL="0">
-              <a:buNone/>
-            </a:pPr>
-            <a:r>
-              <a:rPr lang="en-US" sz="900" b="1" dirty="0">
-                <a:solidFill>
-                  <a:srgbClr val="0B7A6F"/>
-                </a:solidFill>
-                <a:latin typeface="SF Pro Display" pitchFamily="34" charset="0"/>
-                <a:ea typeface="SF Pro Display" pitchFamily="34" charset="-122"/>
-                <a:cs typeface="SF Pro Display" pitchFamily="34" charset="-120"/>
-              </a:rPr>
-              <a:t>3</a:t>
-            </a:r>
-            <a:endParaRPr lang="en-US" sz="900" dirty="0"/>
-          </a:p>
-        </p:txBody>
-      </p:sp>
-      <p:sp>
-        <p:nvSpPr>
-          <p:cNvPr id="19" name="Text 16"/>
-          <p:cNvSpPr txBox="1"/>
-          <p:nvPr/>
-        </p:nvSpPr>
-        <p:spPr>
-          <a:xfrm>
-            <a:off x="6214872" y="1975104"/>
-            <a:ext cx="2353056" cy="274320"/>
-          </a:xfrm>
-          <a:prstGeom prst="rect">
-            <a:avLst/>
-          </a:prstGeom>
-          <a:noFill/>
-          <a:ln/>
-        </p:spPr>
-        <p:txBody>
-          <a:bodyPr wrap="square" lIns="0" tIns="0" rIns="0" bIns="0" rtlCol="0" anchor="t"/>
-          <a:lstStyle/>
-          <a:p>
-            <a:pPr indent="0" marL="0">
-              <a:buNone/>
-            </a:pPr>
-            <a:r>
-              <a:rPr lang="en-US" sz="1200" b="1" dirty="0">
-                <a:solidFill>
-                  <a:srgbClr val="1D1D1F"/>
-                </a:solidFill>
-                <a:latin typeface="SF Pro Display" pitchFamily="34" charset="0"/>
-                <a:ea typeface="SF Pro Display" pitchFamily="34" charset="-122"/>
-                <a:cs typeface="SF Pro Display" pitchFamily="34" charset="-120"/>
-              </a:rPr>
-              <a:t>First job together?</a:t>
-            </a:r>
-            <a:endParaRPr lang="en-US" sz="1200" dirty="0"/>
-          </a:p>
-        </p:txBody>
-      </p:sp>
-      <p:sp>
-        <p:nvSpPr>
-          <p:cNvPr id="20" name="Text 17"/>
-          <p:cNvSpPr txBox="1"/>
-          <p:nvPr/>
-        </p:nvSpPr>
-        <p:spPr>
-          <a:xfrm>
-            <a:off x="6214872" y="2267712"/>
-            <a:ext cx="2353056" cy="704088"/>
-          </a:xfrm>
-          <a:prstGeom prst="rect">
-            <a:avLst/>
-          </a:prstGeom>
-          <a:noFill/>
-          <a:ln/>
-        </p:spPr>
-        <p:txBody>
-          <a:bodyPr wrap="square" lIns="0" tIns="0" rIns="0" bIns="0" rtlCol="0" anchor="t"/>
-          <a:lstStyle/>
-          <a:p>
-            <a:pPr indent="0" marL="0">
-              <a:buNone/>
-            </a:pPr>
-            <a:r>
-              <a:rPr lang="en-US" sz="950" dirty="0">
-                <a:solidFill>
-                  <a:srgbClr val="6E6E73"/>
-                </a:solidFill>
-                <a:latin typeface="SF Pro Text" pitchFamily="34" charset="0"/>
-                <a:ea typeface="SF Pro Text" pitchFamily="34" charset="-122"/>
-                <a:cs typeface="SF Pro Text" pitchFamily="34" charset="-120"/>
-              </a:rPr>
-              <a:t>Is this the cleaner's first job with this customer?</a:t>
-            </a:r>
-            <a:endParaRPr lang="en-US" sz="950" dirty="0"/>
-          </a:p>
-        </p:txBody>
-      </p:sp>
-      <p:sp>
-        <p:nvSpPr>
-          <p:cNvPr id="21" name="Shape 18"/>
-          <p:cNvSpPr/>
-          <p:nvPr/>
-        </p:nvSpPr>
-        <p:spPr>
-          <a:xfrm>
-            <a:off x="411480" y="3291840"/>
-            <a:ext cx="8321040" cy="384048"/>
-          </a:xfrm>
-          <a:prstGeom prst="roundRect">
-            <a:avLst>
-              <a:gd name="adj" fmla="val 19048"/>
-            </a:avLst>
-          </a:prstGeom>
-          <a:solidFill>
-            <a:srgbClr val="FFF3D6"/>
-          </a:solidFill>
-          <a:ln w="9525">
-            <a:solidFill>
-              <a:srgbClr val="FFF3D6"/>
-            </a:solidFill>
-            <a:prstDash val="solid"/>
-          </a:ln>
-        </p:spPr>
-      </p:sp>
       <p:pic>
         <p:nvPicPr>
-          <p:cNvPr id="22" name="Image 0" descr="preencoded.png">    </p:cNvPr>
+          <p:cNvPr id="24" name="Image 1" descr="preencoded.png">    </p:cNvPr>
           <p:cNvPicPr>
             <a:picLocks noChangeAspect="1"/>
           </p:cNvPicPr>
           <p:nvPr/>
         </p:nvPicPr>
         <p:blipFill>
-          <a:blip r:embed="rId1"/>
+          <a:blip r:embed="rId2"/>
           <a:stretch>
             <a:fillRect/>
           </a:stretch>
         </p:blipFill>
         <p:spPr>
           <a:xfrm>
-            <a:off x="566928" y="3401568"/>
-            <a:ext cx="164592" cy="164592"/>
+            <a:off x="4907036" y="2986796"/>
+            <a:ext cx="171176" cy="171176"/>
           </a:xfrm>
           <a:prstGeom prst="rect">
             <a:avLst/>
@@ -20258,14 +20933,14 @@
       </p:pic>
       <p:sp>
         <p:nvSpPr>
-          <p:cNvPr id="23" name="Text 19"/>
+          <p:cNvPr id="25" name="Text 20"/>
           <p:cNvSpPr txBox="1"/>
           <p:nvPr/>
         </p:nvSpPr>
         <p:spPr>
           <a:xfrm>
-            <a:off x="822960" y="3392424"/>
-            <a:ext cx="7772400" cy="201168"/>
+            <a:off x="4828032" y="3346704"/>
+            <a:ext cx="3739896" cy="274320"/>
           </a:xfrm>
           <a:prstGeom prst="rect">
             <a:avLst/>
@@ -20281,31 +20956,95 @@
               <a:buNone/>
             </a:pPr>
             <a:r>
-              <a:rPr lang="en-US" sz="1000" b="1" dirty="0">
-                <a:solidFill>
-                  <a:srgbClr val="9A6410"/>
+              <a:rPr lang="en-US" sz="1200" b="1" dirty="0">
+                <a:solidFill>
+                  <a:srgbClr val="1D1D1F"/>
+                </a:solidFill>
+                <a:latin typeface="SF Pro Display" pitchFamily="34" charset="0"/>
+                <a:ea typeface="SF Pro Display" pitchFamily="34" charset="-122"/>
+                <a:cs typeface="SF Pro Display" pitchFamily="34" charset="-120"/>
+              </a:rPr>
+              <a:t>Someone else claims</a:t>
+            </a:r>
+            <a:endParaRPr lang="en-US" sz="1200" dirty="0"/>
+          </a:p>
+        </p:txBody>
+      </p:sp>
+      <p:sp>
+        <p:nvSpPr>
+          <p:cNvPr id="26" name="Text 21"/>
+          <p:cNvSpPr txBox="1"/>
+          <p:nvPr/>
+        </p:nvSpPr>
+        <p:spPr>
+          <a:xfrm>
+            <a:off x="4828032" y="3639312"/>
+            <a:ext cx="3739896" cy="338328"/>
+          </a:xfrm>
+          <a:prstGeom prst="rect">
+            <a:avLst/>
+          </a:prstGeom>
+          <a:noFill/>
+          <a:ln/>
+        </p:spPr>
+        <p:txBody>
+          <a:bodyPr wrap="square" lIns="0" tIns="0" rIns="0" bIns="0" rtlCol="0" anchor="t"/>
+          <a:lstStyle/>
+          <a:p>
+            <a:pPr indent="0" marL="0">
+              <a:buNone/>
+            </a:pPr>
+            <a:r>
+              <a:rPr lang="en-US" sz="950" dirty="0">
+                <a:solidFill>
+                  <a:srgbClr val="6E6E73"/>
                 </a:solidFill>
                 <a:latin typeface="SF Pro Text" pitchFamily="34" charset="0"/>
                 <a:ea typeface="SF Pro Text" pitchFamily="34" charset="-122"/>
                 <a:cs typeface="SF Pro Text" pitchFamily="34" charset="-120"/>
               </a:rPr>
-              <a:t>Then:  </a:t>
-            </a:r>
+              <a:t>Jeff ($18/hr) claims: the customer pays $30/hr. Jeff gets $18/hr.</a:t>
+            </a:r>
+            <a:endParaRPr lang="en-US" sz="950" dirty="0"/>
+          </a:p>
+        </p:txBody>
+      </p:sp>
+      <p:sp>
+        <p:nvSpPr>
+          <p:cNvPr id="27" name="Text 22"/>
+          <p:cNvSpPr txBox="1"/>
+          <p:nvPr/>
+        </p:nvSpPr>
+        <p:spPr>
+          <a:xfrm>
+            <a:off x="438912" y="3017520"/>
+            <a:ext cx="4023360" cy="822960"/>
+          </a:xfrm>
+          <a:prstGeom prst="rect">
+            <a:avLst/>
+          </a:prstGeom>
+          <a:noFill/>
+          <a:ln/>
+        </p:spPr>
+        <p:txBody>
+          <a:bodyPr wrap="square" lIns="0" tIns="0" rIns="0" bIns="0" rtlCol="0" anchor="t"/>
+          <a:lstStyle/>
+          <a:p>
             <a:pPr indent="0" marL="0">
               <a:buNone/>
             </a:pPr>
             <a:r>
-              <a:rPr lang="en-US" sz="1000" dirty="0">
-                <a:solidFill>
-                  <a:srgbClr val="1D1D1F"/>
+              <a:rPr lang="en-US" sz="1050" dirty="0">
+                <a:solidFill>
+                  <a:srgbClr val="6E6E73"/>
                 </a:solidFill>
                 <a:latin typeface="SF Pro Text" pitchFamily="34" charset="0"/>
                 <a:ea typeface="SF Pro Text" pitchFamily="34" charset="-122"/>
                 <a:cs typeface="SF Pro Text" pitchFamily="34" charset="-120"/>
               </a:rPr>
-              <a:t>find the matching row in the platform fee table before you explain or refund anything.</a:t>
-            </a:r>
-            <a:endParaRPr lang="en-US" sz="1000" dirty="0"/>
+              <a:t>Requesting Cassandra shows the customer is willing to pay her rate, so it becomes their ceiling.</a:t>
+            </a:r>
+            <a:endParaRPr lang="en-US" sz="1050" dirty="0"/>
           </a:p>
         </p:txBody>
       </p:sp>
@@ -20390,6 +21129,807 @@
         </p:nvSpPr>
         <p:spPr>
           <a:xfrm>
+            <a:off x="438912" y="274320"/>
+            <a:ext cx="8229600" cy="182880"/>
+          </a:xfrm>
+          <a:prstGeom prst="rect">
+            <a:avLst/>
+          </a:prstGeom>
+          <a:noFill/>
+          <a:ln/>
+        </p:spPr>
+        <p:txBody>
+          <a:bodyPr wrap="square" lIns="0" tIns="0" rIns="0" bIns="0" rtlCol="0" anchor="t"/>
+          <a:lstStyle/>
+          <a:p>
+            <a:pPr indent="0" marL="0">
+              <a:buNone/>
+            </a:pPr>
+            <a:r>
+              <a:rPr lang="en-US" sz="800" b="1" spc="50" kern="0" dirty="0">
+                <a:solidFill>
+                  <a:srgbClr val="0B7A6F"/>
+                </a:solidFill>
+                <a:latin typeface="SF Pro Display" pitchFamily="34" charset="0"/>
+                <a:ea typeface="SF Pro Display" pitchFamily="34" charset="-122"/>
+                <a:cs typeface="SF Pro Display" pitchFamily="34" charset="-120"/>
+              </a:rPr>
+              <a:t>C PRICE VS CP PAY</a:t>
+            </a:r>
+            <a:endParaRPr lang="en-US" sz="800" dirty="0"/>
+          </a:p>
+        </p:txBody>
+      </p:sp>
+      <p:sp>
+        <p:nvSpPr>
+          <p:cNvPr id="3" name="Text 1"/>
+          <p:cNvSpPr txBox="1"/>
+          <p:nvPr/>
+        </p:nvSpPr>
+        <p:spPr>
+          <a:xfrm>
+            <a:off x="438912" y="457200"/>
+            <a:ext cx="8229600" cy="457200"/>
+          </a:xfrm>
+          <a:prstGeom prst="rect">
+            <a:avLst/>
+          </a:prstGeom>
+          <a:noFill/>
+          <a:ln/>
+        </p:spPr>
+        <p:txBody>
+          <a:bodyPr wrap="square" lIns="0" tIns="0" rIns="0" bIns="0" rtlCol="0" anchor="t"/>
+          <a:lstStyle/>
+          <a:p>
+            <a:pPr indent="0" marL="0">
+              <a:buNone/>
+            </a:pPr>
+            <a:r>
+              <a:rPr lang="en-US" sz="2400" b="1" dirty="0">
+                <a:solidFill>
+                  <a:srgbClr val="1D1D1F"/>
+                </a:solidFill>
+                <a:latin typeface="SF Pro Display" pitchFamily="34" charset="0"/>
+                <a:ea typeface="SF Pro Display" pitchFamily="34" charset="-122"/>
+                <a:cs typeface="SF Pro Display" pitchFamily="34" charset="-120"/>
+              </a:rPr>
+              <a:t>Before you explain or refund a fee</a:t>
+            </a:r>
+            <a:endParaRPr lang="en-US" sz="2400" dirty="0"/>
+          </a:p>
+        </p:txBody>
+      </p:sp>
+      <p:sp>
+        <p:nvSpPr>
+          <p:cNvPr id="4" name="Text 2"/>
+          <p:cNvSpPr txBox="1"/>
+          <p:nvPr/>
+        </p:nvSpPr>
+        <p:spPr>
+          <a:xfrm>
+            <a:off x="438912" y="960120"/>
+            <a:ext cx="8229600" cy="274320"/>
+          </a:xfrm>
+          <a:prstGeom prst="rect">
+            <a:avLst/>
+          </a:prstGeom>
+          <a:noFill/>
+          <a:ln/>
+        </p:spPr>
+        <p:txBody>
+          <a:bodyPr wrap="square" lIns="0" tIns="0" rIns="0" bIns="0" rtlCol="0" anchor="t"/>
+          <a:lstStyle/>
+          <a:p>
+            <a:pPr indent="0" marL="0">
+              <a:buNone/>
+            </a:pPr>
+            <a:r>
+              <a:rPr lang="en-US" sz="1200" dirty="0">
+                <a:solidFill>
+                  <a:srgbClr val="6E6E73"/>
+                </a:solidFill>
+                <a:latin typeface="SF Pro Text" pitchFamily="34" charset="0"/>
+                <a:ea typeface="SF Pro Text" pitchFamily="34" charset="-122"/>
+                <a:cs typeface="SF Pro Text" pitchFamily="34" charset="-120"/>
+              </a:rPr>
+              <a:t>Three answers tell you which case you're in.</a:t>
+            </a:r>
+            <a:endParaRPr lang="en-US" sz="1200" dirty="0"/>
+          </a:p>
+        </p:txBody>
+      </p:sp>
+      <p:sp>
+        <p:nvSpPr>
+          <p:cNvPr id="6" name="Shape 3"/>
+          <p:cNvSpPr/>
+          <p:nvPr/>
+        </p:nvSpPr>
+        <p:spPr>
+          <a:xfrm>
+            <a:off x="411480" y="1371600"/>
+            <a:ext cx="2682240" cy="1691640"/>
+          </a:xfrm>
+          <a:prstGeom prst="roundRect">
+            <a:avLst>
+              <a:gd name="adj" fmla="val 4324"/>
+            </a:avLst>
+          </a:prstGeom>
+          <a:solidFill>
+            <a:srgbClr val="FFFFFF"/>
+          </a:solidFill>
+          <a:ln w="9525">
+            <a:solidFill>
+              <a:srgbClr val="DCE1E7"/>
+            </a:solidFill>
+            <a:prstDash val="solid"/>
+          </a:ln>
+        </p:spPr>
+      </p:sp>
+      <p:sp>
+        <p:nvSpPr>
+          <p:cNvPr id="7" name="Shape 4"/>
+          <p:cNvSpPr/>
+          <p:nvPr/>
+        </p:nvSpPr>
+        <p:spPr>
+          <a:xfrm>
+            <a:off x="576072" y="1554480"/>
+            <a:ext cx="274320" cy="274320"/>
+          </a:xfrm>
+          <a:prstGeom prst="ellipse">
+            <a:avLst/>
+          </a:prstGeom>
+          <a:solidFill>
+            <a:srgbClr val="E3F4F1"/>
+          </a:solidFill>
+          <a:ln w="12700">
+            <a:solidFill>
+              <a:srgbClr val="E3F4F1"/>
+            </a:solidFill>
+            <a:prstDash val="solid"/>
+          </a:ln>
+        </p:spPr>
+      </p:sp>
+      <p:sp>
+        <p:nvSpPr>
+          <p:cNvPr id="8" name="Text 5"/>
+          <p:cNvSpPr txBox="1"/>
+          <p:nvPr/>
+        </p:nvSpPr>
+        <p:spPr>
+          <a:xfrm>
+            <a:off x="576072" y="1554480"/>
+            <a:ext cx="274320" cy="274320"/>
+          </a:xfrm>
+          <a:prstGeom prst="rect">
+            <a:avLst/>
+          </a:prstGeom>
+          <a:noFill/>
+          <a:ln/>
+        </p:spPr>
+        <p:txBody>
+          <a:bodyPr wrap="square" lIns="0" tIns="0" rIns="0" bIns="0" rtlCol="0" anchor="ctr"/>
+          <a:lstStyle/>
+          <a:p>
+            <a:pPr algn="ctr" indent="0" marL="0">
+              <a:buNone/>
+            </a:pPr>
+            <a:r>
+              <a:rPr lang="en-US" sz="900" b="1" dirty="0">
+                <a:solidFill>
+                  <a:srgbClr val="0B7A6F"/>
+                </a:solidFill>
+                <a:latin typeface="SF Pro Display" pitchFamily="34" charset="0"/>
+                <a:ea typeface="SF Pro Display" pitchFamily="34" charset="-122"/>
+                <a:cs typeface="SF Pro Display" pitchFamily="34" charset="-120"/>
+              </a:rPr>
+              <a:t>1</a:t>
+            </a:r>
+            <a:endParaRPr lang="en-US" sz="900" dirty="0"/>
+          </a:p>
+        </p:txBody>
+      </p:sp>
+      <p:sp>
+        <p:nvSpPr>
+          <p:cNvPr id="9" name="Text 6"/>
+          <p:cNvSpPr txBox="1"/>
+          <p:nvPr/>
+        </p:nvSpPr>
+        <p:spPr>
+          <a:xfrm>
+            <a:off x="576072" y="1975104"/>
+            <a:ext cx="2353056" cy="274320"/>
+          </a:xfrm>
+          <a:prstGeom prst="rect">
+            <a:avLst/>
+          </a:prstGeom>
+          <a:noFill/>
+          <a:ln/>
+        </p:spPr>
+        <p:txBody>
+          <a:bodyPr wrap="square" lIns="0" tIns="0" rIns="0" bIns="0" rtlCol="0" anchor="t"/>
+          <a:lstStyle/>
+          <a:p>
+            <a:pPr indent="0" marL="0">
+              <a:buNone/>
+            </a:pPr>
+            <a:r>
+              <a:rPr lang="en-US" sz="1200" b="1" dirty="0">
+                <a:solidFill>
+                  <a:srgbClr val="1D1D1F"/>
+                </a:solidFill>
+                <a:latin typeface="SF Pro Display" pitchFamily="34" charset="0"/>
+                <a:ea typeface="SF Pro Display" pitchFamily="34" charset="-122"/>
+                <a:cs typeface="SF Pro Display" pitchFamily="34" charset="-120"/>
+              </a:rPr>
+              <a:t>Operating model</a:t>
+            </a:r>
+            <a:endParaRPr lang="en-US" sz="1200" dirty="0"/>
+          </a:p>
+        </p:txBody>
+      </p:sp>
+      <p:sp>
+        <p:nvSpPr>
+          <p:cNvPr id="10" name="Text 7"/>
+          <p:cNvSpPr txBox="1"/>
+          <p:nvPr/>
+        </p:nvSpPr>
+        <p:spPr>
+          <a:xfrm>
+            <a:off x="576072" y="2267712"/>
+            <a:ext cx="2353056" cy="704088"/>
+          </a:xfrm>
+          <a:prstGeom prst="rect">
+            <a:avLst/>
+          </a:prstGeom>
+          <a:noFill/>
+          <a:ln/>
+        </p:spPr>
+        <p:txBody>
+          <a:bodyPr wrap="square" lIns="0" tIns="0" rIns="0" bIns="0" rtlCol="0" anchor="t"/>
+          <a:lstStyle/>
+          <a:p>
+            <a:pPr indent="0" marL="0">
+              <a:buNone/>
+            </a:pPr>
+            <a:r>
+              <a:rPr lang="en-US" sz="950" dirty="0">
+                <a:solidFill>
+                  <a:srgbClr val="6E6E73"/>
+                </a:solidFill>
+                <a:latin typeface="SF Pro Text" pitchFamily="34" charset="0"/>
+                <a:ea typeface="SF Pro Text" pitchFamily="34" charset="-122"/>
+                <a:cs typeface="SF Pro Text" pitchFamily="34" charset="-120"/>
+              </a:rPr>
+              <a:t>CA/CA-WA or General? Look for the banner.</a:t>
+            </a:r>
+            <a:endParaRPr lang="en-US" sz="950" dirty="0"/>
+          </a:p>
+        </p:txBody>
+      </p:sp>
+      <p:sp>
+        <p:nvSpPr>
+          <p:cNvPr id="11" name="Shape 8"/>
+          <p:cNvSpPr/>
+          <p:nvPr/>
+        </p:nvSpPr>
+        <p:spPr>
+          <a:xfrm>
+            <a:off x="3230880" y="1371600"/>
+            <a:ext cx="2682240" cy="1691640"/>
+          </a:xfrm>
+          <a:prstGeom prst="roundRect">
+            <a:avLst>
+              <a:gd name="adj" fmla="val 4324"/>
+            </a:avLst>
+          </a:prstGeom>
+          <a:solidFill>
+            <a:srgbClr val="FFFFFF"/>
+          </a:solidFill>
+          <a:ln w="9525">
+            <a:solidFill>
+              <a:srgbClr val="DCE1E7"/>
+            </a:solidFill>
+            <a:prstDash val="solid"/>
+          </a:ln>
+        </p:spPr>
+      </p:sp>
+      <p:sp>
+        <p:nvSpPr>
+          <p:cNvPr id="12" name="Shape 9"/>
+          <p:cNvSpPr/>
+          <p:nvPr/>
+        </p:nvSpPr>
+        <p:spPr>
+          <a:xfrm>
+            <a:off x="3395472" y="1554480"/>
+            <a:ext cx="274320" cy="274320"/>
+          </a:xfrm>
+          <a:prstGeom prst="ellipse">
+            <a:avLst/>
+          </a:prstGeom>
+          <a:solidFill>
+            <a:srgbClr val="E3F4F1"/>
+          </a:solidFill>
+          <a:ln w="12700">
+            <a:solidFill>
+              <a:srgbClr val="E3F4F1"/>
+            </a:solidFill>
+            <a:prstDash val="solid"/>
+          </a:ln>
+        </p:spPr>
+      </p:sp>
+      <p:sp>
+        <p:nvSpPr>
+          <p:cNvPr id="13" name="Text 10"/>
+          <p:cNvSpPr txBox="1"/>
+          <p:nvPr/>
+        </p:nvSpPr>
+        <p:spPr>
+          <a:xfrm>
+            <a:off x="3395472" y="1554480"/>
+            <a:ext cx="274320" cy="274320"/>
+          </a:xfrm>
+          <a:prstGeom prst="rect">
+            <a:avLst/>
+          </a:prstGeom>
+          <a:noFill/>
+          <a:ln/>
+        </p:spPr>
+        <p:txBody>
+          <a:bodyPr wrap="square" lIns="0" tIns="0" rIns="0" bIns="0" rtlCol="0" anchor="ctr"/>
+          <a:lstStyle/>
+          <a:p>
+            <a:pPr algn="ctr" indent="0" marL="0">
+              <a:buNone/>
+            </a:pPr>
+            <a:r>
+              <a:rPr lang="en-US" sz="900" b="1" dirty="0">
+                <a:solidFill>
+                  <a:srgbClr val="0B7A6F"/>
+                </a:solidFill>
+                <a:latin typeface="SF Pro Display" pitchFamily="34" charset="0"/>
+                <a:ea typeface="SF Pro Display" pitchFamily="34" charset="-122"/>
+                <a:cs typeface="SF Pro Display" pitchFamily="34" charset="-120"/>
+              </a:rPr>
+              <a:t>2</a:t>
+            </a:r>
+            <a:endParaRPr lang="en-US" sz="900" dirty="0"/>
+          </a:p>
+        </p:txBody>
+      </p:sp>
+      <p:sp>
+        <p:nvSpPr>
+          <p:cNvPr id="14" name="Text 11"/>
+          <p:cNvSpPr txBox="1"/>
+          <p:nvPr/>
+        </p:nvSpPr>
+        <p:spPr>
+          <a:xfrm>
+            <a:off x="3395472" y="1975104"/>
+            <a:ext cx="2353056" cy="274320"/>
+          </a:xfrm>
+          <a:prstGeom prst="rect">
+            <a:avLst/>
+          </a:prstGeom>
+          <a:noFill/>
+          <a:ln/>
+        </p:spPr>
+        <p:txBody>
+          <a:bodyPr wrap="square" lIns="0" tIns="0" rIns="0" bIns="0" rtlCol="0" anchor="t"/>
+          <a:lstStyle/>
+          <a:p>
+            <a:pPr indent="0" marL="0">
+              <a:buNone/>
+            </a:pPr>
+            <a:r>
+              <a:rPr lang="en-US" sz="1200" b="1" dirty="0">
+                <a:solidFill>
+                  <a:srgbClr val="1D1D1F"/>
+                </a:solidFill>
+                <a:latin typeface="SF Pro Display" pitchFamily="34" charset="0"/>
+                <a:ea typeface="SF Pro Display" pitchFamily="34" charset="-122"/>
+                <a:cs typeface="SF Pro Display" pitchFamily="34" charset="-120"/>
+              </a:rPr>
+              <a:t>Membership status</a:t>
+            </a:r>
+            <a:endParaRPr lang="en-US" sz="1200" dirty="0"/>
+          </a:p>
+        </p:txBody>
+      </p:sp>
+      <p:sp>
+        <p:nvSpPr>
+          <p:cNvPr id="15" name="Text 12"/>
+          <p:cNvSpPr txBox="1"/>
+          <p:nvPr/>
+        </p:nvSpPr>
+        <p:spPr>
+          <a:xfrm>
+            <a:off x="3395472" y="2267712"/>
+            <a:ext cx="2353056" cy="704088"/>
+          </a:xfrm>
+          <a:prstGeom prst="rect">
+            <a:avLst/>
+          </a:prstGeom>
+          <a:noFill/>
+          <a:ln/>
+        </p:spPr>
+        <p:txBody>
+          <a:bodyPr wrap="square" lIns="0" tIns="0" rIns="0" bIns="0" rtlCol="0" anchor="t"/>
+          <a:lstStyle/>
+          <a:p>
+            <a:pPr indent="0" marL="0">
+              <a:buNone/>
+            </a:pPr>
+            <a:r>
+              <a:rPr lang="en-US" sz="950" dirty="0">
+                <a:solidFill>
+                  <a:srgbClr val="6E6E73"/>
+                </a:solidFill>
+                <a:latin typeface="SF Pro Text" pitchFamily="34" charset="0"/>
+                <a:ea typeface="SF Pro Text" pitchFamily="34" charset="-122"/>
+                <a:cs typeface="SF Pro Text" pitchFamily="34" charset="-120"/>
+              </a:rPr>
+              <a:t>FC, non-FC, or deactivated FC?</a:t>
+            </a:r>
+            <a:endParaRPr lang="en-US" sz="950" dirty="0"/>
+          </a:p>
+        </p:txBody>
+      </p:sp>
+      <p:sp>
+        <p:nvSpPr>
+          <p:cNvPr id="16" name="Shape 13"/>
+          <p:cNvSpPr/>
+          <p:nvPr/>
+        </p:nvSpPr>
+        <p:spPr>
+          <a:xfrm>
+            <a:off x="6050280" y="1371600"/>
+            <a:ext cx="2682240" cy="1691640"/>
+          </a:xfrm>
+          <a:prstGeom prst="roundRect">
+            <a:avLst>
+              <a:gd name="adj" fmla="val 4324"/>
+            </a:avLst>
+          </a:prstGeom>
+          <a:solidFill>
+            <a:srgbClr val="FFFFFF"/>
+          </a:solidFill>
+          <a:ln w="9525">
+            <a:solidFill>
+              <a:srgbClr val="DCE1E7"/>
+            </a:solidFill>
+            <a:prstDash val="solid"/>
+          </a:ln>
+        </p:spPr>
+      </p:sp>
+      <p:sp>
+        <p:nvSpPr>
+          <p:cNvPr id="17" name="Shape 14"/>
+          <p:cNvSpPr/>
+          <p:nvPr/>
+        </p:nvSpPr>
+        <p:spPr>
+          <a:xfrm>
+            <a:off x="6214872" y="1554480"/>
+            <a:ext cx="274320" cy="274320"/>
+          </a:xfrm>
+          <a:prstGeom prst="ellipse">
+            <a:avLst/>
+          </a:prstGeom>
+          <a:solidFill>
+            <a:srgbClr val="E3F4F1"/>
+          </a:solidFill>
+          <a:ln w="12700">
+            <a:solidFill>
+              <a:srgbClr val="E3F4F1"/>
+            </a:solidFill>
+            <a:prstDash val="solid"/>
+          </a:ln>
+        </p:spPr>
+      </p:sp>
+      <p:sp>
+        <p:nvSpPr>
+          <p:cNvPr id="18" name="Text 15"/>
+          <p:cNvSpPr txBox="1"/>
+          <p:nvPr/>
+        </p:nvSpPr>
+        <p:spPr>
+          <a:xfrm>
+            <a:off x="6214872" y="1554480"/>
+            <a:ext cx="274320" cy="274320"/>
+          </a:xfrm>
+          <a:prstGeom prst="rect">
+            <a:avLst/>
+          </a:prstGeom>
+          <a:noFill/>
+          <a:ln/>
+        </p:spPr>
+        <p:txBody>
+          <a:bodyPr wrap="square" lIns="0" tIns="0" rIns="0" bIns="0" rtlCol="0" anchor="ctr"/>
+          <a:lstStyle/>
+          <a:p>
+            <a:pPr algn="ctr" indent="0" marL="0">
+              <a:buNone/>
+            </a:pPr>
+            <a:r>
+              <a:rPr lang="en-US" sz="900" b="1" dirty="0">
+                <a:solidFill>
+                  <a:srgbClr val="0B7A6F"/>
+                </a:solidFill>
+                <a:latin typeface="SF Pro Display" pitchFamily="34" charset="0"/>
+                <a:ea typeface="SF Pro Display" pitchFamily="34" charset="-122"/>
+                <a:cs typeface="SF Pro Display" pitchFamily="34" charset="-120"/>
+              </a:rPr>
+              <a:t>3</a:t>
+            </a:r>
+            <a:endParaRPr lang="en-US" sz="900" dirty="0"/>
+          </a:p>
+        </p:txBody>
+      </p:sp>
+      <p:sp>
+        <p:nvSpPr>
+          <p:cNvPr id="19" name="Text 16"/>
+          <p:cNvSpPr txBox="1"/>
+          <p:nvPr/>
+        </p:nvSpPr>
+        <p:spPr>
+          <a:xfrm>
+            <a:off x="6214872" y="1975104"/>
+            <a:ext cx="2353056" cy="274320"/>
+          </a:xfrm>
+          <a:prstGeom prst="rect">
+            <a:avLst/>
+          </a:prstGeom>
+          <a:noFill/>
+          <a:ln/>
+        </p:spPr>
+        <p:txBody>
+          <a:bodyPr wrap="square" lIns="0" tIns="0" rIns="0" bIns="0" rtlCol="0" anchor="t"/>
+          <a:lstStyle/>
+          <a:p>
+            <a:pPr indent="0" marL="0">
+              <a:buNone/>
+            </a:pPr>
+            <a:r>
+              <a:rPr lang="en-US" sz="1200" b="1" dirty="0">
+                <a:solidFill>
+                  <a:srgbClr val="1D1D1F"/>
+                </a:solidFill>
+                <a:latin typeface="SF Pro Display" pitchFamily="34" charset="0"/>
+                <a:ea typeface="SF Pro Display" pitchFamily="34" charset="-122"/>
+                <a:cs typeface="SF Pro Display" pitchFamily="34" charset="-120"/>
+              </a:rPr>
+              <a:t>First job together?</a:t>
+            </a:r>
+            <a:endParaRPr lang="en-US" sz="1200" dirty="0"/>
+          </a:p>
+        </p:txBody>
+      </p:sp>
+      <p:sp>
+        <p:nvSpPr>
+          <p:cNvPr id="20" name="Text 17"/>
+          <p:cNvSpPr txBox="1"/>
+          <p:nvPr/>
+        </p:nvSpPr>
+        <p:spPr>
+          <a:xfrm>
+            <a:off x="6214872" y="2267712"/>
+            <a:ext cx="2353056" cy="704088"/>
+          </a:xfrm>
+          <a:prstGeom prst="rect">
+            <a:avLst/>
+          </a:prstGeom>
+          <a:noFill/>
+          <a:ln/>
+        </p:spPr>
+        <p:txBody>
+          <a:bodyPr wrap="square" lIns="0" tIns="0" rIns="0" bIns="0" rtlCol="0" anchor="t"/>
+          <a:lstStyle/>
+          <a:p>
+            <a:pPr indent="0" marL="0">
+              <a:buNone/>
+            </a:pPr>
+            <a:r>
+              <a:rPr lang="en-US" sz="950" dirty="0">
+                <a:solidFill>
+                  <a:srgbClr val="6E6E73"/>
+                </a:solidFill>
+                <a:latin typeface="SF Pro Text" pitchFamily="34" charset="0"/>
+                <a:ea typeface="SF Pro Text" pitchFamily="34" charset="-122"/>
+                <a:cs typeface="SF Pro Text" pitchFamily="34" charset="-120"/>
+              </a:rPr>
+              <a:t>Is this the cleaner's first job with this customer?</a:t>
+            </a:r>
+            <a:endParaRPr lang="en-US" sz="950" dirty="0"/>
+          </a:p>
+        </p:txBody>
+      </p:sp>
+      <p:sp>
+        <p:nvSpPr>
+          <p:cNvPr id="21" name="Shape 18"/>
+          <p:cNvSpPr/>
+          <p:nvPr/>
+        </p:nvSpPr>
+        <p:spPr>
+          <a:xfrm>
+            <a:off x="411480" y="3291840"/>
+            <a:ext cx="8321040" cy="384048"/>
+          </a:xfrm>
+          <a:prstGeom prst="roundRect">
+            <a:avLst>
+              <a:gd name="adj" fmla="val 19048"/>
+            </a:avLst>
+          </a:prstGeom>
+          <a:solidFill>
+            <a:srgbClr val="FFF3D6"/>
+          </a:solidFill>
+          <a:ln w="9525">
+            <a:solidFill>
+              <a:srgbClr val="FFF3D6"/>
+            </a:solidFill>
+            <a:prstDash val="solid"/>
+          </a:ln>
+        </p:spPr>
+      </p:sp>
+      <p:pic>
+        <p:nvPicPr>
+          <p:cNvPr id="22" name="Image 0" descr="preencoded.png">    </p:cNvPr>
+          <p:cNvPicPr>
+            <a:picLocks noChangeAspect="1"/>
+          </p:cNvPicPr>
+          <p:nvPr/>
+        </p:nvPicPr>
+        <p:blipFill>
+          <a:blip r:embed="rId1"/>
+          <a:stretch>
+            <a:fillRect/>
+          </a:stretch>
+        </p:blipFill>
+        <p:spPr>
+          <a:xfrm>
+            <a:off x="566928" y="3401568"/>
+            <a:ext cx="164592" cy="164592"/>
+          </a:xfrm>
+          <a:prstGeom prst="rect">
+            <a:avLst/>
+          </a:prstGeom>
+        </p:spPr>
+      </p:pic>
+      <p:sp>
+        <p:nvSpPr>
+          <p:cNvPr id="23" name="Text 19"/>
+          <p:cNvSpPr txBox="1"/>
+          <p:nvPr/>
+        </p:nvSpPr>
+        <p:spPr>
+          <a:xfrm>
+            <a:off x="822960" y="3392424"/>
+            <a:ext cx="7772400" cy="201168"/>
+          </a:xfrm>
+          <a:prstGeom prst="rect">
+            <a:avLst/>
+          </a:prstGeom>
+          <a:noFill/>
+          <a:ln/>
+        </p:spPr>
+        <p:txBody>
+          <a:bodyPr wrap="square" lIns="0" tIns="0" rIns="0" bIns="0" rtlCol="0" anchor="t"/>
+          <a:lstStyle/>
+          <a:p>
+            <a:pPr indent="0" marL="0">
+              <a:buNone/>
+            </a:pPr>
+            <a:r>
+              <a:rPr lang="en-US" sz="1000" b="1" dirty="0">
+                <a:solidFill>
+                  <a:srgbClr val="9A6410"/>
+                </a:solidFill>
+                <a:latin typeface="SF Pro Text" pitchFamily="34" charset="0"/>
+                <a:ea typeface="SF Pro Text" pitchFamily="34" charset="-122"/>
+                <a:cs typeface="SF Pro Text" pitchFamily="34" charset="-120"/>
+              </a:rPr>
+              <a:t>Then:  </a:t>
+            </a:r>
+            <a:pPr indent="0" marL="0">
+              <a:buNone/>
+            </a:pPr>
+            <a:r>
+              <a:rPr lang="en-US" sz="1000" dirty="0">
+                <a:solidFill>
+                  <a:srgbClr val="1D1D1F"/>
+                </a:solidFill>
+                <a:latin typeface="SF Pro Text" pitchFamily="34" charset="0"/>
+                <a:ea typeface="SF Pro Text" pitchFamily="34" charset="-122"/>
+                <a:cs typeface="SF Pro Text" pitchFamily="34" charset="-120"/>
+              </a:rPr>
+              <a:t>find the matching row in the platform fee table before you explain or refund anything.</a:t>
+            </a:r>
+            <a:endParaRPr lang="en-US" sz="1000" dirty="0"/>
+          </a:p>
+        </p:txBody>
+      </p:sp>
+      <p:sp>
+        <p:nvSpPr>
+          <p:cNvPr id="25" name="Slide Number Placeholder 0"/>
+          <p:cNvSpPr>
+            <a:spLocks noGrp="1"/>
+          </p:cNvSpPr>
+          <p:nvPr>
+            <p:ph type="sldNum" sz="quarter" idx="4294967295"/>
+          </p:nvPr>
+        </p:nvSpPr>
+        <p:spPr>
+          <a:xfrm>
+            <a:off x="8229600" y="4800600"/>
+            <a:ext cx="457200" cy="182880"/>
+          </a:xfrm>
+          <a:prstGeom prst="rect">
+            <a:avLst/>
+          </a:prstGeom>
+          <a:extLst>
+            <a:ext uri="{C572A759-6A51-4108-AA02-DFA0A04FC94B}">
+              <ma14:wrappingTextBoxFlag xmlns:ma14="http://schemas.microsoft.com/office/mac/drawingml/2011/main" val="0"/>
+            </a:ext>
+          </a:extLst>
+        </p:spPr>
+        <p:txBody>
+          <a:bodyPr/>
+          <a:lstStyle>
+            <a:lvl1pPr>
+              <a:defRPr sz="700">
+                <a:solidFill>
+                  <a:srgbClr val="6E6E73"/>
+                </a:solidFill>
+                <a:latin typeface="SF Pro Text"/>
+                <a:ea typeface="SF Pro Text"/>
+                <a:cs typeface="SF Pro Text"/>
+              </a:defRPr>
+            </a:lvl1pPr>
+          </a:lstStyle>
+          <a:p>
+            <a:pPr algn="r"/>
+            <a:fld id="{F7021451-1387-4CA6-816F-3879F97B5CBC}" type="slidenum">
+              <a:rPr b="0" lang="en-US"/>
+              <a:t>26</a:t>
+            </a:fld>
+            <a:endParaRPr lang="en-US"/>
+          </a:p>
+        </p:txBody>
+      </p:sp>
+    </p:spTree>
+  </p:cSld>
+  <p:clrMapOvr>
+    <a:masterClrMapping/>
+  </p:clrMapOvr>
+</p:sld>
+</file>
+
+<file path=ppt/slides/slide27.xml><?xml version="1.0" encoding="utf-8"?>
+<p:sld xmlns:a="http://schemas.openxmlformats.org/drawingml/2006/main" xmlns:r="http://schemas.openxmlformats.org/officeDocument/2006/relationships" xmlns:p="http://schemas.openxmlformats.org/presentationml/2006/main">
+  <p:cSld name="Slide 27">
+    <p:spTree>
+      <p:nvGrpSpPr>
+        <p:cNvPr id="1" name=""/>
+        <p:cNvGrpSpPr/>
+        <p:nvPr/>
+      </p:nvGrpSpPr>
+      <p:grpSpPr>
+        <a:xfrm>
+          <a:off x="0" y="0"/>
+          <a:ext cx="0" cy="0"/>
+          <a:chOff x="0" y="0"/>
+          <a:chExt cx="0" cy="0"/>
+        </a:xfrm>
+      </p:grpSpPr>
+      <p:sp>
+        <p:nvSpPr>
+          <p:cNvPr id="2" name="Text 0"/>
+          <p:cNvSpPr txBox="1"/>
+          <p:nvPr/>
+        </p:nvSpPr>
+        <p:spPr>
+          <a:xfrm>
             <a:off x="566928" y="1737360"/>
             <a:ext cx="4572000" cy="182880"/>
           </a:xfrm>
@@ -20767,7 +22307,7 @@
             <a:pPr algn="r"/>
             <a:fld id="{F7021451-1387-4CA6-816F-3879F97B5CBC}" type="slidenum">
               <a:rPr b="0" lang="en-US"/>
-              <a:t>26</a:t>
+              <a:t>27</a:t>
             </a:fld>
             <a:endParaRPr lang="en-US"/>
           </a:p>

--- a/platform-mechanics/platform-operating-mechanics.pptx
+++ b/platform-mechanics/platform-operating-mechanics.pptx
@@ -2658,7 +2658,7 @@
           <a:p>
             <a:r>
               <a:rPr lang="en-US" dirty="0"/>
-              <a:t>Unused (issued or redeemed): assigned to the account and will apply to the next invoiced job, shown in an orange box with duration, type, price and the 16-letter code. Applied (used): a green box with a check mark, the job ID and the appointment date and time. Grayed out: canceled/invalidated (removed through a refund, dispute or admin invalidation), converted (turned into credits equal to the purchase price), or expired. The reason usually appears beside the code. Refunded: refunded to the customer's card on file.</a:t>
+              <a:t>Unused (issued or redeemed): assigned to the account and will apply to the next invoiced job, shown in an orange box with duration, type, price and the 16-letter code. Applied (used): a green box with a check mark, the job ID and the appointment date and time. Grayed out: canceled/invalidated (removed through a refund, dispute or admin invalidation), converted (turned into credits equal to the purchase price), or expired. The reason usually appears beside the code. Refunded: refunded to the customer's card on file. Examples on the slide: an unused 3hr DHJ ($19.00) sitting below the card on file; a 3hr DHJ applied to Job 12242911 on 10/31/25 (green tag); a 2hr DHJ ($9.00) grayed out with the reason admin_refund on 5/1/26.</a:t>
             </a:r>
             <a:endParaRPr lang="en-US" dirty="0"/>
           </a:p>
@@ -28502,11 +28502,11 @@
         <p:spPr>
           <a:xfrm>
             <a:off x="411480" y="1325880"/>
-            <a:ext cx="2682240" cy="1691640"/>
+            <a:ext cx="2606040" cy="841248"/>
           </a:xfrm>
           <a:prstGeom prst="roundRect">
             <a:avLst>
-              <a:gd name="adj" fmla="val 4324"/>
+              <a:gd name="adj" fmla="val 8696"/>
             </a:avLst>
           </a:prstGeom>
           <a:solidFill>
@@ -28528,8 +28528,8 @@
         </p:nvSpPr>
         <p:spPr>
           <a:xfrm>
-            <a:off x="576072" y="1490472"/>
-            <a:ext cx="329184" cy="329184"/>
+            <a:off x="548640" y="1554480"/>
+            <a:ext cx="384048" cy="384048"/>
           </a:xfrm>
           <a:prstGeom prst="ellipse">
             <a:avLst/>
@@ -28561,8 +28561,8 @@
         </p:blipFill>
         <p:spPr>
           <a:xfrm>
-            <a:off x="655076" y="1569476"/>
-            <a:ext cx="171176" cy="171176"/>
+            <a:off x="640812" y="1646652"/>
+            <a:ext cx="199705" cy="199705"/>
           </a:xfrm>
           <a:prstGeom prst="rect">
             <a:avLst/>
@@ -28577,8 +28577,8 @@
         </p:nvSpPr>
         <p:spPr>
           <a:xfrm>
-            <a:off x="576072" y="1929384"/>
-            <a:ext cx="2353056" cy="274320"/>
+            <a:off x="1024128" y="1380744"/>
+            <a:ext cx="1920240" cy="731520"/>
           </a:xfrm>
           <a:prstGeom prst="rect">
             <a:avLst/>
@@ -28587,7 +28587,7 @@
           <a:ln/>
         </p:spPr>
         <p:txBody>
-          <a:bodyPr wrap="square" lIns="0" tIns="0" rIns="0" bIns="0" rtlCol="0" anchor="t"/>
+          <a:bodyPr wrap="square" lIns="0" tIns="0" rIns="0" bIns="0" rtlCol="0" anchor="ctr"/>
           <a:lstStyle/>
           <a:p>
             <a:pPr indent="0" marL="0">
@@ -28606,34 +28606,12 @@
             </a:r>
             <a:endParaRPr lang="en-US" sz="1200" dirty="0"/>
           </a:p>
-        </p:txBody>
-      </p:sp>
-      <p:sp>
-        <p:nvSpPr>
-          <p:cNvPr id="10" name="Text 6"/>
-          <p:cNvSpPr txBox="1"/>
-          <p:nvPr/>
-        </p:nvSpPr>
-        <p:spPr>
-          <a:xfrm>
-            <a:off x="576072" y="2221992"/>
-            <a:ext cx="2353056" cy="704088"/>
-          </a:xfrm>
-          <a:prstGeom prst="rect">
-            <a:avLst/>
-          </a:prstGeom>
-          <a:noFill/>
-          <a:ln/>
-        </p:spPr>
-        <p:txBody>
-          <a:bodyPr wrap="square" lIns="0" tIns="0" rIns="0" bIns="0" rtlCol="0" anchor="t"/>
-          <a:lstStyle/>
           <a:p>
             <a:pPr indent="0" marL="0">
               <a:buNone/>
             </a:pPr>
             <a:r>
-              <a:rPr lang="en-US" sz="950" dirty="0">
+              <a:rPr lang="en-US" sz="900" dirty="0">
                 <a:solidFill>
                   <a:srgbClr val="6E6E73"/>
                 </a:solidFill>
@@ -28641,26 +28619,26 @@
                 <a:ea typeface="SF Pro Text" pitchFamily="34" charset="-122"/>
                 <a:cs typeface="SF Pro Text" pitchFamily="34" charset="-120"/>
               </a:rPr>
-              <a:t>Orange box. Applies to the next invoiced job.</a:t>
-            </a:r>
-            <a:endParaRPr lang="en-US" sz="950" dirty="0"/>
-          </a:p>
-        </p:txBody>
-      </p:sp>
-      <p:sp>
-        <p:nvSpPr>
-          <p:cNvPr id="11" name="Shape 7"/>
+              <a:t>Orange tag. Applies to the next invoiced job.</a:t>
+            </a:r>
+            <a:endParaRPr lang="en-US" sz="1200" dirty="0"/>
+          </a:p>
+        </p:txBody>
+      </p:sp>
+      <p:sp>
+        <p:nvSpPr>
+          <p:cNvPr id="10" name="Shape 6"/>
           <p:cNvSpPr/>
           <p:nvPr/>
         </p:nvSpPr>
         <p:spPr>
           <a:xfrm>
-            <a:off x="3230880" y="1325880"/>
-            <a:ext cx="2682240" cy="1691640"/>
+            <a:off x="3127248" y="1325880"/>
+            <a:ext cx="5605272" cy="841248"/>
           </a:xfrm>
           <a:prstGeom prst="roundRect">
             <a:avLst>
-              <a:gd name="adj" fmla="val 4324"/>
+              <a:gd name="adj" fmla="val 8696"/>
             </a:avLst>
           </a:prstGeom>
           <a:solidFill>
@@ -28674,16 +28652,67 @@
           </a:ln>
         </p:spPr>
       </p:sp>
-      <p:sp>
-        <p:nvSpPr>
-          <p:cNvPr id="12" name="Shape 8"/>
+      <p:pic>
+        <p:nvPicPr>
+          <p:cNvPr id="11" name="Image 1" descr="/tmp/claude-0/-workspace-training/3ce5cff6-cccf-5f33-b0ee-0b147a55120e/scratchpad/img3/v_unused.png">    </p:cNvPr>
+          <p:cNvPicPr>
+            <a:picLocks noChangeAspect="1"/>
+          </p:cNvPicPr>
+          <p:nvPr/>
+        </p:nvPicPr>
+        <p:blipFill>
+          <a:blip r:embed="rId2"/>
+          <a:stretch>
+            <a:fillRect/>
+          </a:stretch>
+        </p:blipFill>
+        <p:spPr>
+          <a:xfrm>
+            <a:off x="3236976" y="1399032"/>
+            <a:ext cx="3722234" cy="694944"/>
+          </a:xfrm>
+          <a:prstGeom prst="rect">
+            <a:avLst/>
+          </a:prstGeom>
+        </p:spPr>
+      </p:pic>
+      <p:sp>
+        <p:nvSpPr>
+          <p:cNvPr id="12" name="Shape 7"/>
           <p:cNvSpPr/>
           <p:nvPr/>
         </p:nvSpPr>
         <p:spPr>
           <a:xfrm>
-            <a:off x="3395472" y="1490472"/>
-            <a:ext cx="329184" cy="329184"/>
+            <a:off x="411480" y="2258568"/>
+            <a:ext cx="2606040" cy="841248"/>
+          </a:xfrm>
+          <a:prstGeom prst="roundRect">
+            <a:avLst>
+              <a:gd name="adj" fmla="val 8696"/>
+            </a:avLst>
+          </a:prstGeom>
+          <a:solidFill>
+            <a:srgbClr val="FFFFFF"/>
+          </a:solidFill>
+          <a:ln w="9525">
+            <a:solidFill>
+              <a:srgbClr val="DCE1E7"/>
+            </a:solidFill>
+            <a:prstDash val="solid"/>
+          </a:ln>
+        </p:spPr>
+      </p:sp>
+      <p:sp>
+        <p:nvSpPr>
+          <p:cNvPr id="13" name="Shape 8"/>
+          <p:cNvSpPr/>
+          <p:nvPr/>
+        </p:nvSpPr>
+        <p:spPr>
+          <a:xfrm>
+            <a:off x="548640" y="2487168"/>
+            <a:ext cx="384048" cy="384048"/>
           </a:xfrm>
           <a:prstGeom prst="ellipse">
             <a:avLst/>
@@ -28701,22 +28730,22 @@
       </p:sp>
       <p:pic>
         <p:nvPicPr>
-          <p:cNvPr id="13" name="Image 1" descr="preencoded.png">    </p:cNvPr>
+          <p:cNvPr id="14" name="Image 2" descr="preencoded.png">    </p:cNvPr>
           <p:cNvPicPr>
             <a:picLocks noChangeAspect="1"/>
           </p:cNvPicPr>
           <p:nvPr/>
         </p:nvPicPr>
         <p:blipFill>
-          <a:blip r:embed="rId2"/>
+          <a:blip r:embed="rId3"/>
           <a:stretch>
             <a:fillRect/>
           </a:stretch>
         </p:blipFill>
         <p:spPr>
           <a:xfrm>
-            <a:off x="3474476" y="1569476"/>
-            <a:ext cx="171176" cy="171176"/>
+            <a:off x="640812" y="2579340"/>
+            <a:ext cx="199705" cy="199705"/>
           </a:xfrm>
           <a:prstGeom prst="rect">
             <a:avLst/>
@@ -28725,14 +28754,14 @@
       </p:pic>
       <p:sp>
         <p:nvSpPr>
-          <p:cNvPr id="14" name="Text 9"/>
+          <p:cNvPr id="15" name="Text 9"/>
           <p:cNvSpPr txBox="1"/>
           <p:nvPr/>
         </p:nvSpPr>
         <p:spPr>
           <a:xfrm>
-            <a:off x="3395472" y="1929384"/>
-            <a:ext cx="2353056" cy="274320"/>
+            <a:off x="1024128" y="2313432"/>
+            <a:ext cx="1920240" cy="731520"/>
           </a:xfrm>
           <a:prstGeom prst="rect">
             <a:avLst/>
@@ -28741,7 +28770,7 @@
           <a:ln/>
         </p:spPr>
         <p:txBody>
-          <a:bodyPr wrap="square" lIns="0" tIns="0" rIns="0" bIns="0" rtlCol="0" anchor="t"/>
+          <a:bodyPr wrap="square" lIns="0" tIns="0" rIns="0" bIns="0" rtlCol="0" anchor="ctr"/>
           <a:lstStyle/>
           <a:p>
             <a:pPr indent="0" marL="0">
@@ -28760,34 +28789,12 @@
             </a:r>
             <a:endParaRPr lang="en-US" sz="1200" dirty="0"/>
           </a:p>
-        </p:txBody>
-      </p:sp>
-      <p:sp>
-        <p:nvSpPr>
-          <p:cNvPr id="15" name="Text 10"/>
-          <p:cNvSpPr txBox="1"/>
-          <p:nvPr/>
-        </p:nvSpPr>
-        <p:spPr>
-          <a:xfrm>
-            <a:off x="3395472" y="2221992"/>
-            <a:ext cx="2353056" cy="704088"/>
-          </a:xfrm>
-          <a:prstGeom prst="rect">
-            <a:avLst/>
-          </a:prstGeom>
-          <a:noFill/>
-          <a:ln/>
-        </p:spPr>
-        <p:txBody>
-          <a:bodyPr wrap="square" lIns="0" tIns="0" rIns="0" bIns="0" rtlCol="0" anchor="t"/>
-          <a:lstStyle/>
           <a:p>
             <a:pPr indent="0" marL="0">
               <a:buNone/>
             </a:pPr>
             <a:r>
-              <a:rPr lang="en-US" sz="950" dirty="0">
+              <a:rPr lang="en-US" sz="900" dirty="0">
                 <a:solidFill>
                   <a:srgbClr val="6E6E73"/>
                 </a:solidFill>
@@ -28795,26 +28802,26 @@
                 <a:ea typeface="SF Pro Text" pitchFamily="34" charset="-122"/>
                 <a:cs typeface="SF Pro Text" pitchFamily="34" charset="-120"/>
               </a:rPr>
-              <a:t>Green box with a check mark, job ID and date.</a:t>
-            </a:r>
-            <a:endParaRPr lang="en-US" sz="950" dirty="0"/>
-          </a:p>
-        </p:txBody>
-      </p:sp>
-      <p:sp>
-        <p:nvSpPr>
-          <p:cNvPr id="16" name="Shape 11"/>
+              <a:t>Green tag with a check mark, job ID and date.</a:t>
+            </a:r>
+            <a:endParaRPr lang="en-US" sz="1200" dirty="0"/>
+          </a:p>
+        </p:txBody>
+      </p:sp>
+      <p:sp>
+        <p:nvSpPr>
+          <p:cNvPr id="16" name="Shape 10"/>
           <p:cNvSpPr/>
           <p:nvPr/>
         </p:nvSpPr>
         <p:spPr>
           <a:xfrm>
-            <a:off x="6050280" y="1325880"/>
-            <a:ext cx="2682240" cy="1691640"/>
+            <a:off x="3127248" y="2258568"/>
+            <a:ext cx="5605272" cy="841248"/>
           </a:xfrm>
           <a:prstGeom prst="roundRect">
             <a:avLst>
-              <a:gd name="adj" fmla="val 4324"/>
+              <a:gd name="adj" fmla="val 8696"/>
             </a:avLst>
           </a:prstGeom>
           <a:solidFill>
@@ -28828,16 +28835,67 @@
           </a:ln>
         </p:spPr>
       </p:sp>
-      <p:sp>
-        <p:nvSpPr>
-          <p:cNvPr id="17" name="Shape 12"/>
+      <p:pic>
+        <p:nvPicPr>
+          <p:cNvPr id="17" name="Image 3" descr="/tmp/claude-0/-workspace-training/3ce5cff6-cccf-5f33-b0ee-0b147a55120e/scratchpad/img3/v_applied.png">    </p:cNvPr>
+          <p:cNvPicPr>
+            <a:picLocks noChangeAspect="1"/>
+          </p:cNvPicPr>
+          <p:nvPr/>
+        </p:nvPicPr>
+        <p:blipFill>
+          <a:blip r:embed="rId4"/>
+          <a:stretch>
+            <a:fillRect/>
+          </a:stretch>
+        </p:blipFill>
+        <p:spPr>
+          <a:xfrm>
+            <a:off x="3236976" y="2372079"/>
+            <a:ext cx="5394960" cy="614227"/>
+          </a:xfrm>
+          <a:prstGeom prst="rect">
+            <a:avLst/>
+          </a:prstGeom>
+        </p:spPr>
+      </p:pic>
+      <p:sp>
+        <p:nvSpPr>
+          <p:cNvPr id="18" name="Shape 11"/>
           <p:cNvSpPr/>
           <p:nvPr/>
         </p:nvSpPr>
         <p:spPr>
           <a:xfrm>
-            <a:off x="6214872" y="1490472"/>
-            <a:ext cx="329184" cy="329184"/>
+            <a:off x="411480" y="3191256"/>
+            <a:ext cx="2606040" cy="841248"/>
+          </a:xfrm>
+          <a:prstGeom prst="roundRect">
+            <a:avLst>
+              <a:gd name="adj" fmla="val 8696"/>
+            </a:avLst>
+          </a:prstGeom>
+          <a:solidFill>
+            <a:srgbClr val="FFFFFF"/>
+          </a:solidFill>
+          <a:ln w="9525">
+            <a:solidFill>
+              <a:srgbClr val="DCE1E7"/>
+            </a:solidFill>
+            <a:prstDash val="solid"/>
+          </a:ln>
+        </p:spPr>
+      </p:sp>
+      <p:sp>
+        <p:nvSpPr>
+          <p:cNvPr id="19" name="Shape 12"/>
+          <p:cNvSpPr/>
+          <p:nvPr/>
+        </p:nvSpPr>
+        <p:spPr>
+          <a:xfrm>
+            <a:off x="548640" y="3419856"/>
+            <a:ext cx="384048" cy="384048"/>
           </a:xfrm>
           <a:prstGeom prst="ellipse">
             <a:avLst/>
@@ -28855,22 +28913,22 @@
       </p:sp>
       <p:pic>
         <p:nvPicPr>
-          <p:cNvPr id="18" name="Image 2" descr="preencoded.png">    </p:cNvPr>
+          <p:cNvPr id="20" name="Image 4" descr="preencoded.png">    </p:cNvPr>
           <p:cNvPicPr>
             <a:picLocks noChangeAspect="1"/>
           </p:cNvPicPr>
           <p:nvPr/>
         </p:nvPicPr>
         <p:blipFill>
-          <a:blip r:embed="rId3"/>
+          <a:blip r:embed="rId5"/>
           <a:stretch>
             <a:fillRect/>
           </a:stretch>
         </p:blipFill>
         <p:spPr>
           <a:xfrm>
-            <a:off x="6293876" y="1569476"/>
-            <a:ext cx="171176" cy="171176"/>
+            <a:off x="640812" y="3512028"/>
+            <a:ext cx="199705" cy="199705"/>
           </a:xfrm>
           <a:prstGeom prst="rect">
             <a:avLst/>
@@ -28879,14 +28937,14 @@
       </p:pic>
       <p:sp>
         <p:nvSpPr>
-          <p:cNvPr id="19" name="Text 13"/>
+          <p:cNvPr id="21" name="Text 13"/>
           <p:cNvSpPr txBox="1"/>
           <p:nvPr/>
         </p:nvSpPr>
         <p:spPr>
           <a:xfrm>
-            <a:off x="6214872" y="1929384"/>
-            <a:ext cx="2353056" cy="274320"/>
+            <a:off x="1024128" y="3246120"/>
+            <a:ext cx="1920240" cy="731520"/>
           </a:xfrm>
           <a:prstGeom prst="rect">
             <a:avLst/>
@@ -28895,7 +28953,7 @@
           <a:ln/>
         </p:spPr>
         <p:txBody>
-          <a:bodyPr wrap="square" lIns="0" tIns="0" rIns="0" bIns="0" rtlCol="0" anchor="t"/>
+          <a:bodyPr wrap="square" lIns="0" tIns="0" rIns="0" bIns="0" rtlCol="0" anchor="ctr"/>
           <a:lstStyle/>
           <a:p>
             <a:pPr indent="0" marL="0">
@@ -28914,34 +28972,12 @@
             </a:r>
             <a:endParaRPr lang="en-US" sz="1200" dirty="0"/>
           </a:p>
-        </p:txBody>
-      </p:sp>
-      <p:sp>
-        <p:nvSpPr>
-          <p:cNvPr id="20" name="Text 14"/>
-          <p:cNvSpPr txBox="1"/>
-          <p:nvPr/>
-        </p:nvSpPr>
-        <p:spPr>
-          <a:xfrm>
-            <a:off x="6214872" y="2221992"/>
-            <a:ext cx="2353056" cy="704088"/>
-          </a:xfrm>
-          <a:prstGeom prst="rect">
-            <a:avLst/>
-          </a:prstGeom>
-          <a:noFill/>
-          <a:ln/>
-        </p:spPr>
-        <p:txBody>
-          <a:bodyPr wrap="square" lIns="0" tIns="0" rIns="0" bIns="0" rtlCol="0" anchor="t"/>
-          <a:lstStyle/>
           <a:p>
             <a:pPr indent="0" marL="0">
               <a:buNone/>
             </a:pPr>
             <a:r>
-              <a:rPr lang="en-US" sz="950" dirty="0">
+              <a:rPr lang="en-US" sz="900" dirty="0">
                 <a:solidFill>
                   <a:srgbClr val="6E6E73"/>
                 </a:solidFill>
@@ -28949,21 +28985,72 @@
                 <a:ea typeface="SF Pro Text" pitchFamily="34" charset="-122"/>
                 <a:cs typeface="SF Pro Text" pitchFamily="34" charset="-120"/>
               </a:rPr>
-              <a:t>Canceled, invalidated, converted or expired. Reason shown by the code.</a:t>
-            </a:r>
-            <a:endParaRPr lang="en-US" sz="950" dirty="0"/>
-          </a:p>
-        </p:txBody>
-      </p:sp>
-      <p:sp>
-        <p:nvSpPr>
-          <p:cNvPr id="21" name="Shape 15"/>
+              <a:t>Canceled, invalidated, converted or expired. Reason next to the code.</a:t>
+            </a:r>
+            <a:endParaRPr lang="en-US" sz="1200" dirty="0"/>
+          </a:p>
+        </p:txBody>
+      </p:sp>
+      <p:sp>
+        <p:nvSpPr>
+          <p:cNvPr id="22" name="Shape 14"/>
           <p:cNvSpPr/>
           <p:nvPr/>
         </p:nvSpPr>
         <p:spPr>
           <a:xfrm>
-            <a:off x="411480" y="3200400"/>
+            <a:off x="3127248" y="3191256"/>
+            <a:ext cx="5605272" cy="841248"/>
+          </a:xfrm>
+          <a:prstGeom prst="roundRect">
+            <a:avLst>
+              <a:gd name="adj" fmla="val 8696"/>
+            </a:avLst>
+          </a:prstGeom>
+          <a:solidFill>
+            <a:srgbClr val="FFFFFF"/>
+          </a:solidFill>
+          <a:ln w="9525">
+            <a:solidFill>
+              <a:srgbClr val="DCE1E7"/>
+            </a:solidFill>
+            <a:prstDash val="solid"/>
+          </a:ln>
+        </p:spPr>
+      </p:sp>
+      <p:pic>
+        <p:nvPicPr>
+          <p:cNvPr id="23" name="Image 5" descr="/tmp/claude-0/-workspace-training/3ce5cff6-cccf-5f33-b0ee-0b147a55120e/scratchpad/img3/v_grayed.png">    </p:cNvPr>
+          <p:cNvPicPr>
+            <a:picLocks noChangeAspect="1"/>
+          </p:cNvPicPr>
+          <p:nvPr/>
+        </p:nvPicPr>
+        <p:blipFill>
+          <a:blip r:embed="rId6"/>
+          <a:stretch>
+            <a:fillRect/>
+          </a:stretch>
+        </p:blipFill>
+        <p:spPr>
+          <a:xfrm>
+            <a:off x="3236976" y="3264408"/>
+            <a:ext cx="4552387" cy="694944"/>
+          </a:xfrm>
+          <a:prstGeom prst="rect">
+            <a:avLst/>
+          </a:prstGeom>
+        </p:spPr>
+      </p:pic>
+      <p:sp>
+        <p:nvSpPr>
+          <p:cNvPr id="24" name="Shape 15"/>
+          <p:cNvSpPr/>
+          <p:nvPr/>
+        </p:nvSpPr>
+        <p:spPr>
+          <a:xfrm>
+            <a:off x="411480" y="4206240"/>
             <a:ext cx="8321040" cy="384048"/>
           </a:xfrm>
           <a:prstGeom prst="roundRect">
@@ -28984,21 +29071,21 @@
       </p:sp>
       <p:pic>
         <p:nvPicPr>
-          <p:cNvPr id="22" name="Image 3" descr="preencoded.png">    </p:cNvPr>
+          <p:cNvPr id="25" name="Image 6" descr="preencoded.png">    </p:cNvPr>
           <p:cNvPicPr>
             <a:picLocks noChangeAspect="1"/>
           </p:cNvPicPr>
           <p:nvPr/>
         </p:nvPicPr>
         <p:blipFill>
-          <a:blip r:embed="rId4"/>
+          <a:blip r:embed="rId7"/>
           <a:stretch>
             <a:fillRect/>
           </a:stretch>
         </p:blipFill>
         <p:spPr>
           <a:xfrm>
-            <a:off x="566928" y="3310128"/>
+            <a:off x="566928" y="4315968"/>
             <a:ext cx="164592" cy="164592"/>
           </a:xfrm>
           <a:prstGeom prst="rect">
@@ -29008,13 +29095,13 @@
       </p:pic>
       <p:sp>
         <p:nvSpPr>
-          <p:cNvPr id="23" name="Text 16"/>
+          <p:cNvPr id="26" name="Text 16"/>
           <p:cNvSpPr txBox="1"/>
           <p:nvPr/>
         </p:nvSpPr>
         <p:spPr>
           <a:xfrm>
-            <a:off x="822960" y="3300984"/>
+            <a:off x="822960" y="4306824"/>
             <a:ext cx="7772400" cy="201168"/>
           </a:xfrm>
           <a:prstGeom prst="rect">

--- a/platform-mechanics/platform-operating-mechanics.pptx
+++ b/platform-mechanics/platform-operating-mechanics.pptx
@@ -3626,7 +3626,7 @@
           <a:p>
             <a:r>
               <a:rPr lang="en-US" dirty="0"/>
-              <a:t>An agent can set a maximum hourly rate on a customer's behalf via the Update Max Rate action in the legacy CRM (C CRM &gt; Do). It caps what CPs can claim the customer's jobs at, going forward; CPs above that rate simply can't claim. Trade-off: a lower cap protects the customer's wallet, but shrinks the pool of CPs who can claim, possibly including their current CP if that CP's rate is above the new cap. Setting it without understanding how it interacts with booked jobs, rescheduling and admin-locked jobs is how a well-intentioned cap turns into an unclaimed-job ticket a week later.</a:t>
+              <a:t>An agent can set a maximum hourly rate on a customer's behalf via the Update Max Rate action in the legacy CRM (C CRM &gt; Do). It caps what CPs can claim the customer's jobs at, going forward; CPs above that rate simply can't claim. Steps on the slide: 1) open the customer's legacy C CRM and click Do (next to View); 2) in the Do menu, find the Max Rate row, which shows the current cap, and click Update Max Rate; 3) enter the maximum hourly rate and click Update Max Rate (the form notes it caps current and future jobs). Trade-off: a lower cap protects the customer's wallet, but shrinks the pool of CPs who can claim, possibly including their current CP if that CP's rate is above the new cap. Setting it without understanding how it interacts with booked jobs, rescheduling and admin-locked jobs is how a well-intentioned cap turns into an unclaimed-job ticket a week later.</a:t>
             </a:r>
             <a:endParaRPr lang="en-US" dirty="0"/>
           </a:p>
@@ -41523,12 +41523,115 @@
         </p:nvSpPr>
         <p:spPr>
           <a:xfrm>
-            <a:off x="411480" y="1371600"/>
-            <a:ext cx="4091940" cy="2011680"/>
+            <a:off x="411480" y="1344168"/>
+            <a:ext cx="274320" cy="274320"/>
+          </a:xfrm>
+          <a:prstGeom prst="ellipse">
+            <a:avLst/>
+          </a:prstGeom>
+          <a:solidFill>
+            <a:srgbClr val="E3F4F1"/>
+          </a:solidFill>
+          <a:ln w="12700">
+            <a:solidFill>
+              <a:srgbClr val="E3F4F1"/>
+            </a:solidFill>
+            <a:prstDash val="solid"/>
+          </a:ln>
+        </p:spPr>
+      </p:sp>
+      <p:sp>
+        <p:nvSpPr>
+          <p:cNvPr id="7" name="Text 4"/>
+          <p:cNvSpPr txBox="1"/>
+          <p:nvPr/>
+        </p:nvSpPr>
+        <p:spPr>
+          <a:xfrm>
+            <a:off x="411480" y="1344168"/>
+            <a:ext cx="274320" cy="274320"/>
+          </a:xfrm>
+          <a:prstGeom prst="rect">
+            <a:avLst/>
+          </a:prstGeom>
+          <a:noFill/>
+          <a:ln/>
+        </p:spPr>
+        <p:txBody>
+          <a:bodyPr wrap="square" lIns="0" tIns="0" rIns="0" bIns="0" rtlCol="0" anchor="ctr"/>
+          <a:lstStyle/>
+          <a:p>
+            <a:pPr algn="ctr" indent="0" marL="0">
+              <a:buNone/>
+            </a:pPr>
+            <a:r>
+              <a:rPr lang="en-US" sz="900" b="1" dirty="0">
+                <a:solidFill>
+                  <a:srgbClr val="0B7A6F"/>
+                </a:solidFill>
+                <a:latin typeface="SF Pro Display" pitchFamily="34" charset="0"/>
+                <a:ea typeface="SF Pro Display" pitchFamily="34" charset="-122"/>
+                <a:cs typeface="SF Pro Display" pitchFamily="34" charset="-120"/>
+              </a:rPr>
+              <a:t>1</a:t>
+            </a:r>
+            <a:endParaRPr lang="en-US" sz="900" dirty="0"/>
+          </a:p>
+        </p:txBody>
+      </p:sp>
+      <p:sp>
+        <p:nvSpPr>
+          <p:cNvPr id="8" name="Text 5"/>
+          <p:cNvSpPr txBox="1"/>
+          <p:nvPr/>
+        </p:nvSpPr>
+        <p:spPr>
+          <a:xfrm>
+            <a:off x="822960" y="1280160"/>
+            <a:ext cx="2270760" cy="457200"/>
+          </a:xfrm>
+          <a:prstGeom prst="rect">
+            <a:avLst/>
+          </a:prstGeom>
+          <a:noFill/>
+          <a:ln/>
+        </p:spPr>
+        <p:txBody>
+          <a:bodyPr wrap="square" lIns="0" tIns="0" rIns="0" bIns="0" rtlCol="0" anchor="ctr"/>
+          <a:lstStyle/>
+          <a:p>
+            <a:pPr indent="0" marL="0">
+              <a:buNone/>
+            </a:pPr>
+            <a:r>
+              <a:rPr lang="en-US" sz="1050" b="1" dirty="0">
+                <a:solidFill>
+                  <a:srgbClr val="1D1D1F"/>
+                </a:solidFill>
+                <a:latin typeface="SF Pro Display" pitchFamily="34" charset="0"/>
+                <a:ea typeface="SF Pro Display" pitchFamily="34" charset="-122"/>
+                <a:cs typeface="SF Pro Display" pitchFamily="34" charset="-120"/>
+              </a:rPr>
+              <a:t>Open the customer's legacy C CRM and click Do</a:t>
+            </a:r>
+            <a:endParaRPr lang="en-US" sz="1050" dirty="0"/>
+          </a:p>
+        </p:txBody>
+      </p:sp>
+      <p:sp>
+        <p:nvSpPr>
+          <p:cNvPr id="9" name="Shape 6"/>
+          <p:cNvSpPr/>
+          <p:nvPr/>
+        </p:nvSpPr>
+        <p:spPr>
+          <a:xfrm>
+            <a:off x="411480" y="1810512"/>
+            <a:ext cx="2682240" cy="1600200"/>
           </a:xfrm>
           <a:prstGeom prst="roundRect">
             <a:avLst>
-              <a:gd name="adj" fmla="val 3636"/>
+              <a:gd name="adj" fmla="val 4571"/>
             </a:avLst>
           </a:prstGeom>
           <a:solidFill>
@@ -41542,16 +41645,128 @@
           </a:ln>
         </p:spPr>
       </p:sp>
-      <p:sp>
-        <p:nvSpPr>
-          <p:cNvPr id="7" name="Shape 4"/>
+      <p:pic>
+        <p:nvPicPr>
+          <p:cNvPr id="10" name="Image 0" descr="/tmp/claude-0/-workspace-training/3ce5cff6-cccf-5f33-b0ee-0b147a55120e/scratchpad/img3/maxrate_do_btn.png">    </p:cNvPr>
+          <p:cNvPicPr>
+            <a:picLocks noChangeAspect="1"/>
+          </p:cNvPicPr>
+          <p:nvPr/>
+        </p:nvPicPr>
+        <p:blipFill>
+          <a:blip r:embed="rId1"/>
+          <a:stretch>
+            <a:fillRect/>
+          </a:stretch>
+        </p:blipFill>
+        <p:spPr>
+          <a:xfrm>
+            <a:off x="484632" y="2140756"/>
+            <a:ext cx="2535936" cy="939712"/>
+          </a:xfrm>
+          <a:prstGeom prst="rect">
+            <a:avLst/>
+          </a:prstGeom>
+        </p:spPr>
+      </p:pic>
+      <p:sp>
+        <p:nvSpPr>
+          <p:cNvPr id="11" name="Shape 7"/>
           <p:cNvSpPr/>
           <p:nvPr/>
         </p:nvSpPr>
         <p:spPr>
           <a:xfrm>
-            <a:off x="594360" y="1554480"/>
-            <a:ext cx="384048" cy="384048"/>
+            <a:off x="1771909" y="2269484"/>
+            <a:ext cx="476293" cy="411929"/>
+          </a:xfrm>
+          <a:prstGeom prst="roundRect">
+            <a:avLst>
+              <a:gd name="adj" fmla="val 6659"/>
+            </a:avLst>
+          </a:prstGeom>
+          <a:ln w="25400">
+            <a:solidFill>
+              <a:srgbClr val="0B7A6F"/>
+            </a:solidFill>
+            <a:prstDash val="solid"/>
+          </a:ln>
+        </p:spPr>
+      </p:sp>
+      <p:sp>
+        <p:nvSpPr>
+          <p:cNvPr id="12" name="Shape 8"/>
+          <p:cNvSpPr/>
+          <p:nvPr/>
+        </p:nvSpPr>
+        <p:spPr>
+          <a:xfrm>
+            <a:off x="1671325" y="2168900"/>
+            <a:ext cx="201168" cy="201168"/>
+          </a:xfrm>
+          <a:prstGeom prst="ellipse">
+            <a:avLst/>
+          </a:prstGeom>
+          <a:solidFill>
+            <a:srgbClr val="0B7A6F"/>
+          </a:solidFill>
+          <a:ln w="12700">
+            <a:solidFill>
+              <a:srgbClr val="FFFFFF"/>
+            </a:solidFill>
+            <a:prstDash val="solid"/>
+          </a:ln>
+        </p:spPr>
+      </p:sp>
+      <p:sp>
+        <p:nvSpPr>
+          <p:cNvPr id="13" name="Text 9"/>
+          <p:cNvSpPr txBox="1"/>
+          <p:nvPr/>
+        </p:nvSpPr>
+        <p:spPr>
+          <a:xfrm>
+            <a:off x="1671325" y="2168900"/>
+            <a:ext cx="201168" cy="201168"/>
+          </a:xfrm>
+          <a:prstGeom prst="rect">
+            <a:avLst/>
+          </a:prstGeom>
+          <a:noFill/>
+          <a:ln/>
+        </p:spPr>
+        <p:txBody>
+          <a:bodyPr wrap="square" lIns="0" tIns="0" rIns="0" bIns="0" rtlCol="0" anchor="ctr"/>
+          <a:lstStyle/>
+          <a:p>
+            <a:pPr algn="ctr" indent="0" marL="0">
+              <a:buNone/>
+            </a:pPr>
+            <a:r>
+              <a:rPr lang="en-US" sz="800" b="1" dirty="0">
+                <a:solidFill>
+                  <a:srgbClr val="FFFFFF"/>
+                </a:solidFill>
+                <a:latin typeface="SF Pro Display" pitchFamily="34" charset="0"/>
+                <a:ea typeface="SF Pro Display" pitchFamily="34" charset="-122"/>
+                <a:cs typeface="SF Pro Display" pitchFamily="34" charset="-120"/>
+              </a:rPr>
+              <a:t>1</a:t>
+            </a:r>
+            <a:endParaRPr lang="en-US" sz="800" dirty="0"/>
+          </a:p>
+        </p:txBody>
+      </p:sp>
+      <p:sp>
+        <p:nvSpPr>
+          <p:cNvPr id="14" name="Shape 10"/>
+          <p:cNvSpPr/>
+          <p:nvPr/>
+        </p:nvSpPr>
+        <p:spPr>
+          <a:xfrm>
+            <a:off x="3230880" y="1344168"/>
+            <a:ext cx="274320" cy="274320"/>
           </a:xfrm>
           <a:prstGeom prst="ellipse">
             <a:avLst/>
@@ -41567,40 +41782,16 @@
           </a:ln>
         </p:spPr>
       </p:sp>
-      <p:pic>
-        <p:nvPicPr>
-          <p:cNvPr id="8" name="Image 0" descr="preencoded.png">    </p:cNvPr>
-          <p:cNvPicPr>
-            <a:picLocks noChangeAspect="1"/>
-          </p:cNvPicPr>
-          <p:nvPr/>
-        </p:nvPicPr>
-        <p:blipFill>
-          <a:blip r:embed="rId1"/>
-          <a:stretch>
-            <a:fillRect/>
-          </a:stretch>
-        </p:blipFill>
-        <p:spPr>
-          <a:xfrm>
-            <a:off x="686532" y="1646652"/>
-            <a:ext cx="199705" cy="199705"/>
-          </a:xfrm>
-          <a:prstGeom prst="rect">
-            <a:avLst/>
-          </a:prstGeom>
-        </p:spPr>
-      </p:pic>
-      <p:sp>
-        <p:nvSpPr>
-          <p:cNvPr id="9" name="Text 5"/>
+      <p:sp>
+        <p:nvSpPr>
+          <p:cNvPr id="15" name="Text 11"/>
           <p:cNvSpPr txBox="1"/>
           <p:nvPr/>
         </p:nvSpPr>
         <p:spPr>
           <a:xfrm>
-            <a:off x="1097280" y="1554480"/>
-            <a:ext cx="3223260" cy="384048"/>
+            <a:off x="3230880" y="1344168"/>
+            <a:ext cx="274320" cy="274320"/>
           </a:xfrm>
           <a:prstGeom prst="rect">
             <a:avLst/>
@@ -41612,34 +41803,34 @@
           <a:bodyPr wrap="square" lIns="0" tIns="0" rIns="0" bIns="0" rtlCol="0" anchor="ctr"/>
           <a:lstStyle/>
           <a:p>
-            <a:pPr indent="0" marL="0">
-              <a:buNone/>
-            </a:pPr>
-            <a:r>
-              <a:rPr lang="en-US" sz="1300" b="1" dirty="0">
-                <a:solidFill>
-                  <a:srgbClr val="1D1D1F"/>
+            <a:pPr algn="ctr" indent="0" marL="0">
+              <a:buNone/>
+            </a:pPr>
+            <a:r>
+              <a:rPr lang="en-US" sz="900" b="1" dirty="0">
+                <a:solidFill>
+                  <a:srgbClr val="0B7A6F"/>
                 </a:solidFill>
                 <a:latin typeface="SF Pro Display" pitchFamily="34" charset="0"/>
                 <a:ea typeface="SF Pro Display" pitchFamily="34" charset="-122"/>
                 <a:cs typeface="SF Pro Display" pitchFamily="34" charset="-120"/>
               </a:rPr>
-              <a:t>Protects the customer's wallet</a:t>
-            </a:r>
-            <a:endParaRPr lang="en-US" sz="1300" dirty="0"/>
-          </a:p>
-        </p:txBody>
-      </p:sp>
-      <p:sp>
-        <p:nvSpPr>
-          <p:cNvPr id="10" name="Text 6"/>
+              <a:t>2</a:t>
+            </a:r>
+            <a:endParaRPr lang="en-US" sz="900" dirty="0"/>
+          </a:p>
+        </p:txBody>
+      </p:sp>
+      <p:sp>
+        <p:nvSpPr>
+          <p:cNvPr id="16" name="Text 12"/>
           <p:cNvSpPr txBox="1"/>
           <p:nvPr/>
         </p:nvSpPr>
         <p:spPr>
           <a:xfrm>
-            <a:off x="594360" y="2084832"/>
-            <a:ext cx="3726180" cy="1188720"/>
+            <a:off x="3642360" y="1280160"/>
+            <a:ext cx="2270760" cy="457200"/>
           </a:xfrm>
           <a:prstGeom prst="rect">
             <a:avLst/>
@@ -41648,66 +41839,41 @@
           <a:ln/>
         </p:spPr>
         <p:txBody>
-          <a:bodyPr wrap="square" lIns="0" tIns="0" rIns="0" bIns="0" rtlCol="0" anchor="t"/>
-          <a:lstStyle/>
-          <a:p>
-            <a:pPr marL="127000" indent="-127000">
-              <a:spcAft>
-                <a:spcPts val="500"/>
-              </a:spcAft>
-              <a:buSzPct val="100000"/>
-              <a:buChar char="•"/>
-            </a:pPr>
-            <a:r>
-              <a:rPr lang="en-US" sz="1000" dirty="0">
+          <a:bodyPr wrap="square" lIns="0" tIns="0" rIns="0" bIns="0" rtlCol="0" anchor="ctr"/>
+          <a:lstStyle/>
+          <a:p>
+            <a:pPr indent="0" marL="0">
+              <a:buNone/>
+            </a:pPr>
+            <a:r>
+              <a:rPr lang="en-US" sz="1050" b="1" dirty="0">
                 <a:solidFill>
                   <a:srgbClr val="1D1D1F"/>
                 </a:solidFill>
-                <a:latin typeface="SF Pro Text" pitchFamily="34" charset="0"/>
-                <a:ea typeface="SF Pro Text" pitchFamily="34" charset="-122"/>
-                <a:cs typeface="SF Pro Text" pitchFamily="34" charset="-120"/>
-              </a:rPr>
-              <a:t>Cleaners above the cap can't claim</a:t>
-            </a:r>
-            <a:endParaRPr lang="en-US" sz="1000" dirty="0"/>
-          </a:p>
-          <a:p>
-            <a:pPr marL="127000" indent="-127000">
-              <a:spcAft>
-                <a:spcPts val="500"/>
-              </a:spcAft>
-              <a:buSzPct val="100000"/>
-              <a:buChar char="•"/>
-            </a:pPr>
-            <a:r>
-              <a:rPr lang="en-US" sz="1000" dirty="0">
-                <a:solidFill>
-                  <a:srgbClr val="1D1D1F"/>
-                </a:solidFill>
-                <a:latin typeface="SF Pro Text" pitchFamily="34" charset="0"/>
-                <a:ea typeface="SF Pro Text" pitchFamily="34" charset="-122"/>
-                <a:cs typeface="SF Pro Text" pitchFamily="34" charset="-120"/>
-              </a:rPr>
-              <a:t>New jobs price at or below the cap</a:t>
-            </a:r>
-            <a:endParaRPr lang="en-US" sz="1000" dirty="0"/>
-          </a:p>
-        </p:txBody>
-      </p:sp>
-      <p:sp>
-        <p:nvSpPr>
-          <p:cNvPr id="11" name="Shape 7"/>
+                <a:latin typeface="SF Pro Display" pitchFamily="34" charset="0"/>
+                <a:ea typeface="SF Pro Display" pitchFamily="34" charset="-122"/>
+                <a:cs typeface="SF Pro Display" pitchFamily="34" charset="-120"/>
+              </a:rPr>
+              <a:t>Find Max Rate and click Update Max Rate</a:t>
+            </a:r>
+            <a:endParaRPr lang="en-US" sz="1050" dirty="0"/>
+          </a:p>
+        </p:txBody>
+      </p:sp>
+      <p:sp>
+        <p:nvSpPr>
+          <p:cNvPr id="17" name="Shape 13"/>
           <p:cNvSpPr/>
           <p:nvPr/>
         </p:nvSpPr>
         <p:spPr>
           <a:xfrm>
-            <a:off x="4640580" y="1371600"/>
-            <a:ext cx="4091940" cy="2011680"/>
+            <a:off x="3230880" y="1810512"/>
+            <a:ext cx="2682240" cy="1600200"/>
           </a:xfrm>
           <a:prstGeom prst="roundRect">
             <a:avLst>
-              <a:gd name="adj" fmla="val 3636"/>
+              <a:gd name="adj" fmla="val 4571"/>
             </a:avLst>
           </a:prstGeom>
           <a:solidFill>
@@ -41721,16 +41887,128 @@
           </a:ln>
         </p:spPr>
       </p:sp>
-      <p:sp>
-        <p:nvSpPr>
-          <p:cNvPr id="12" name="Shape 8"/>
+      <p:pic>
+        <p:nvPicPr>
+          <p:cNvPr id="18" name="Image 1" descr="/tmp/claude-0/-workspace-training/3ce5cff6-cccf-5f33-b0ee-0b147a55120e/scratchpad/img3/maxrate_do_menu.png">    </p:cNvPr>
+          <p:cNvPicPr>
+            <a:picLocks noChangeAspect="1"/>
+          </p:cNvPicPr>
+          <p:nvPr/>
+        </p:nvPicPr>
+        <p:blipFill>
+          <a:blip r:embed="rId2"/>
+          <a:stretch>
+            <a:fillRect/>
+          </a:stretch>
+        </p:blipFill>
+        <p:spPr>
+          <a:xfrm>
+            <a:off x="3304032" y="2320442"/>
+            <a:ext cx="2535936" cy="580339"/>
+          </a:xfrm>
+          <a:prstGeom prst="rect">
+            <a:avLst/>
+          </a:prstGeom>
+        </p:spPr>
+      </p:pic>
+      <p:sp>
+        <p:nvSpPr>
+          <p:cNvPr id="19" name="Shape 14"/>
           <p:cNvSpPr/>
           <p:nvPr/>
         </p:nvSpPr>
         <p:spPr>
           <a:xfrm>
-            <a:off x="4823460" y="1554480"/>
-            <a:ext cx="384048" cy="384048"/>
+            <a:off x="3318662" y="2476500"/>
+            <a:ext cx="2482291" cy="141427"/>
+          </a:xfrm>
+          <a:prstGeom prst="roundRect">
+            <a:avLst>
+              <a:gd name="adj" fmla="val 19397"/>
+            </a:avLst>
+          </a:prstGeom>
+          <a:ln w="25400">
+            <a:solidFill>
+              <a:srgbClr val="0B7A6F"/>
+            </a:solidFill>
+            <a:prstDash val="solid"/>
+          </a:ln>
+        </p:spPr>
+      </p:sp>
+      <p:sp>
+        <p:nvSpPr>
+          <p:cNvPr id="20" name="Shape 15"/>
+          <p:cNvSpPr/>
+          <p:nvPr/>
+        </p:nvSpPr>
+        <p:spPr>
+          <a:xfrm>
+            <a:off x="3218078" y="2375916"/>
+            <a:ext cx="201168" cy="201168"/>
+          </a:xfrm>
+          <a:prstGeom prst="ellipse">
+            <a:avLst/>
+          </a:prstGeom>
+          <a:solidFill>
+            <a:srgbClr val="0B7A6F"/>
+          </a:solidFill>
+          <a:ln w="12700">
+            <a:solidFill>
+              <a:srgbClr val="FFFFFF"/>
+            </a:solidFill>
+            <a:prstDash val="solid"/>
+          </a:ln>
+        </p:spPr>
+      </p:sp>
+      <p:sp>
+        <p:nvSpPr>
+          <p:cNvPr id="21" name="Text 16"/>
+          <p:cNvSpPr txBox="1"/>
+          <p:nvPr/>
+        </p:nvSpPr>
+        <p:spPr>
+          <a:xfrm>
+            <a:off x="3218078" y="2375916"/>
+            <a:ext cx="201168" cy="201168"/>
+          </a:xfrm>
+          <a:prstGeom prst="rect">
+            <a:avLst/>
+          </a:prstGeom>
+          <a:noFill/>
+          <a:ln/>
+        </p:spPr>
+        <p:txBody>
+          <a:bodyPr wrap="square" lIns="0" tIns="0" rIns="0" bIns="0" rtlCol="0" anchor="ctr"/>
+          <a:lstStyle/>
+          <a:p>
+            <a:pPr algn="ctr" indent="0" marL="0">
+              <a:buNone/>
+            </a:pPr>
+            <a:r>
+              <a:rPr lang="en-US" sz="800" b="1" dirty="0">
+                <a:solidFill>
+                  <a:srgbClr val="FFFFFF"/>
+                </a:solidFill>
+                <a:latin typeface="SF Pro Display" pitchFamily="34" charset="0"/>
+                <a:ea typeface="SF Pro Display" pitchFamily="34" charset="-122"/>
+                <a:cs typeface="SF Pro Display" pitchFamily="34" charset="-120"/>
+              </a:rPr>
+              <a:t>2</a:t>
+            </a:r>
+            <a:endParaRPr lang="en-US" sz="800" dirty="0"/>
+          </a:p>
+        </p:txBody>
+      </p:sp>
+      <p:sp>
+        <p:nvSpPr>
+          <p:cNvPr id="22" name="Shape 17"/>
+          <p:cNvSpPr/>
+          <p:nvPr/>
+        </p:nvSpPr>
+        <p:spPr>
+          <a:xfrm>
+            <a:off x="6050280" y="1344168"/>
+            <a:ext cx="274320" cy="274320"/>
           </a:xfrm>
           <a:prstGeom prst="ellipse">
             <a:avLst/>
@@ -41746,40 +42024,16 @@
           </a:ln>
         </p:spPr>
       </p:sp>
-      <p:pic>
-        <p:nvPicPr>
-          <p:cNvPr id="13" name="Image 1" descr="preencoded.png">    </p:cNvPr>
-          <p:cNvPicPr>
-            <a:picLocks noChangeAspect="1"/>
-          </p:cNvPicPr>
-          <p:nvPr/>
-        </p:nvPicPr>
-        <p:blipFill>
-          <a:blip r:embed="rId2"/>
-          <a:stretch>
-            <a:fillRect/>
-          </a:stretch>
-        </p:blipFill>
-        <p:spPr>
-          <a:xfrm>
-            <a:off x="4915632" y="1646652"/>
-            <a:ext cx="199705" cy="199705"/>
-          </a:xfrm>
-          <a:prstGeom prst="rect">
-            <a:avLst/>
-          </a:prstGeom>
-        </p:spPr>
-      </p:pic>
-      <p:sp>
-        <p:nvSpPr>
-          <p:cNvPr id="14" name="Text 9"/>
+      <p:sp>
+        <p:nvSpPr>
+          <p:cNvPr id="23" name="Text 18"/>
           <p:cNvSpPr txBox="1"/>
           <p:nvPr/>
         </p:nvSpPr>
         <p:spPr>
           <a:xfrm>
-            <a:off x="5326380" y="1554480"/>
-            <a:ext cx="3223260" cy="384048"/>
+            <a:off x="6050280" y="1344168"/>
+            <a:ext cx="274320" cy="274320"/>
           </a:xfrm>
           <a:prstGeom prst="rect">
             <a:avLst/>
@@ -41791,34 +42045,34 @@
           <a:bodyPr wrap="square" lIns="0" tIns="0" rIns="0" bIns="0" rtlCol="0" anchor="ctr"/>
           <a:lstStyle/>
           <a:p>
-            <a:pPr indent="0" marL="0">
-              <a:buNone/>
-            </a:pPr>
-            <a:r>
-              <a:rPr lang="en-US" sz="1300" b="1" dirty="0">
-                <a:solidFill>
-                  <a:srgbClr val="1D1D1F"/>
+            <a:pPr algn="ctr" indent="0" marL="0">
+              <a:buNone/>
+            </a:pPr>
+            <a:r>
+              <a:rPr lang="en-US" sz="900" b="1" dirty="0">
+                <a:solidFill>
+                  <a:srgbClr val="0B7A6F"/>
                 </a:solidFill>
                 <a:latin typeface="SF Pro Display" pitchFamily="34" charset="0"/>
                 <a:ea typeface="SF Pro Display" pitchFamily="34" charset="-122"/>
                 <a:cs typeface="SF Pro Display" pitchFamily="34" charset="-120"/>
               </a:rPr>
-              <a:t>Shrinks the cleaner pool</a:t>
-            </a:r>
-            <a:endParaRPr lang="en-US" sz="1300" dirty="0"/>
-          </a:p>
-        </p:txBody>
-      </p:sp>
-      <p:sp>
-        <p:nvSpPr>
-          <p:cNvPr id="15" name="Text 10"/>
+              <a:t>3</a:t>
+            </a:r>
+            <a:endParaRPr lang="en-US" sz="900" dirty="0"/>
+          </a:p>
+        </p:txBody>
+      </p:sp>
+      <p:sp>
+        <p:nvSpPr>
+          <p:cNvPr id="24" name="Text 19"/>
           <p:cNvSpPr txBox="1"/>
           <p:nvPr/>
         </p:nvSpPr>
         <p:spPr>
           <a:xfrm>
-            <a:off x="4823460" y="2084832"/>
-            <a:ext cx="3726180" cy="1188720"/>
+            <a:off x="6461760" y="1280160"/>
+            <a:ext cx="2270760" cy="457200"/>
           </a:xfrm>
           <a:prstGeom prst="rect">
             <a:avLst/>
@@ -41827,74 +42081,49 @@
           <a:ln/>
         </p:spPr>
         <p:txBody>
-          <a:bodyPr wrap="square" lIns="0" tIns="0" rIns="0" bIns="0" rtlCol="0" anchor="t"/>
-          <a:lstStyle/>
-          <a:p>
-            <a:pPr marL="127000" indent="-127000">
-              <a:spcAft>
-                <a:spcPts val="500"/>
-              </a:spcAft>
-              <a:buSzPct val="100000"/>
-              <a:buChar char="•"/>
-            </a:pPr>
-            <a:r>
-              <a:rPr lang="en-US" sz="1000" dirty="0">
+          <a:bodyPr wrap="square" lIns="0" tIns="0" rIns="0" bIns="0" rtlCol="0" anchor="ctr"/>
+          <a:lstStyle/>
+          <a:p>
+            <a:pPr indent="0" marL="0">
+              <a:buNone/>
+            </a:pPr>
+            <a:r>
+              <a:rPr lang="en-US" sz="1050" b="1" dirty="0">
                 <a:solidFill>
                   <a:srgbClr val="1D1D1F"/>
                 </a:solidFill>
-                <a:latin typeface="SF Pro Text" pitchFamily="34" charset="0"/>
-                <a:ea typeface="SF Pro Text" pitchFamily="34" charset="-122"/>
-                <a:cs typeface="SF Pro Text" pitchFamily="34" charset="-120"/>
-              </a:rPr>
-              <a:t>Their current cleaner may be above it</a:t>
-            </a:r>
-            <a:endParaRPr lang="en-US" sz="1000" dirty="0"/>
-          </a:p>
-          <a:p>
-            <a:pPr marL="127000" indent="-127000">
-              <a:spcAft>
-                <a:spcPts val="500"/>
-              </a:spcAft>
-              <a:buSzPct val="100000"/>
-              <a:buChar char="•"/>
-            </a:pPr>
-            <a:r>
-              <a:rPr lang="en-US" sz="1000" dirty="0">
-                <a:solidFill>
-                  <a:srgbClr val="1D1D1F"/>
-                </a:solidFill>
-                <a:latin typeface="SF Pro Text" pitchFamily="34" charset="0"/>
-                <a:ea typeface="SF Pro Text" pitchFamily="34" charset="-122"/>
-                <a:cs typeface="SF Pro Text" pitchFamily="34" charset="-120"/>
-              </a:rPr>
-              <a:t>Too low, and jobs can go unclaimed</a:t>
-            </a:r>
-            <a:endParaRPr lang="en-US" sz="1000" dirty="0"/>
-          </a:p>
-        </p:txBody>
-      </p:sp>
-      <p:sp>
-        <p:nvSpPr>
-          <p:cNvPr id="16" name="Shape 11"/>
+                <a:latin typeface="SF Pro Display" pitchFamily="34" charset="0"/>
+                <a:ea typeface="SF Pro Display" pitchFamily="34" charset="-122"/>
+                <a:cs typeface="SF Pro Display" pitchFamily="34" charset="-120"/>
+              </a:rPr>
+              <a:t>Enter the hourly cap and click Update Max Rate</a:t>
+            </a:r>
+            <a:endParaRPr lang="en-US" sz="1050" dirty="0"/>
+          </a:p>
+        </p:txBody>
+      </p:sp>
+      <p:sp>
+        <p:nvSpPr>
+          <p:cNvPr id="25" name="Shape 20"/>
           <p:cNvSpPr/>
           <p:nvPr/>
         </p:nvSpPr>
         <p:spPr>
           <a:xfrm>
-            <a:off x="411480" y="3566160"/>
-            <a:ext cx="8321040" cy="384048"/>
+            <a:off x="6050280" y="1810512"/>
+            <a:ext cx="2682240" cy="1600200"/>
           </a:xfrm>
           <a:prstGeom prst="roundRect">
             <a:avLst>
-              <a:gd name="adj" fmla="val 19048"/>
+              <a:gd name="adj" fmla="val 4571"/>
             </a:avLst>
           </a:prstGeom>
           <a:solidFill>
-            <a:srgbClr val="FFF3D6"/>
+            <a:srgbClr val="FFFFFF"/>
           </a:solidFill>
           <a:ln w="9525">
             <a:solidFill>
-              <a:srgbClr val="FFF3D6"/>
+              <a:srgbClr val="DCE1E7"/>
             </a:solidFill>
             <a:prstDash val="solid"/>
           </a:ln>
@@ -41902,7 +42131,7 @@
       </p:sp>
       <p:pic>
         <p:nvPicPr>
-          <p:cNvPr id="17" name="Image 2" descr="preencoded.png">    </p:cNvPr>
+          <p:cNvPr id="26" name="Image 2" descr="/tmp/claude-0/-workspace-training/3ce5cff6-cccf-5f33-b0ee-0b147a55120e/scratchpad/img3/maxrate_form_crop.png">    </p:cNvPr>
           <p:cNvPicPr>
             <a:picLocks noChangeAspect="1"/>
           </p:cNvPicPr>
@@ -41916,8 +42145,8 @@
         </p:blipFill>
         <p:spPr>
           <a:xfrm>
-            <a:off x="566928" y="3675888"/>
-            <a:ext cx="164592" cy="164592"/>
+            <a:off x="6123432" y="2010591"/>
+            <a:ext cx="2535936" cy="1200041"/>
           </a:xfrm>
           <a:prstGeom prst="rect">
             <a:avLst/>
@@ -41926,14 +42155,90 @@
       </p:pic>
       <p:sp>
         <p:nvSpPr>
-          <p:cNvPr id="18" name="Text 12"/>
+          <p:cNvPr id="27" name="Shape 21"/>
+          <p:cNvSpPr/>
+          <p:nvPr/>
+        </p:nvSpPr>
+        <p:spPr>
+          <a:xfrm>
+            <a:off x="411480" y="3566160"/>
+            <a:ext cx="4091940" cy="777240"/>
+          </a:xfrm>
+          <a:prstGeom prst="roundRect">
+            <a:avLst>
+              <a:gd name="adj" fmla="val 9412"/>
+            </a:avLst>
+          </a:prstGeom>
+          <a:solidFill>
+            <a:srgbClr val="FFFFFF"/>
+          </a:solidFill>
+          <a:ln w="9525">
+            <a:solidFill>
+              <a:srgbClr val="DCE1E7"/>
+            </a:solidFill>
+            <a:prstDash val="solid"/>
+          </a:ln>
+        </p:spPr>
+      </p:sp>
+      <p:sp>
+        <p:nvSpPr>
+          <p:cNvPr id="28" name="Shape 22"/>
+          <p:cNvSpPr/>
+          <p:nvPr/>
+        </p:nvSpPr>
+        <p:spPr>
+          <a:xfrm>
+            <a:off x="576072" y="3758184"/>
+            <a:ext cx="384048" cy="384048"/>
+          </a:xfrm>
+          <a:prstGeom prst="ellipse">
+            <a:avLst/>
+          </a:prstGeom>
+          <a:solidFill>
+            <a:srgbClr val="E3F4F1"/>
+          </a:solidFill>
+          <a:ln w="12700">
+            <a:solidFill>
+              <a:srgbClr val="E3F4F1"/>
+            </a:solidFill>
+            <a:prstDash val="solid"/>
+          </a:ln>
+        </p:spPr>
+      </p:sp>
+      <p:pic>
+        <p:nvPicPr>
+          <p:cNvPr id="29" name="Image 3" descr="preencoded.png">    </p:cNvPr>
+          <p:cNvPicPr>
+            <a:picLocks noChangeAspect="1"/>
+          </p:cNvPicPr>
+          <p:nvPr/>
+        </p:nvPicPr>
+        <p:blipFill>
+          <a:blip r:embed="rId4"/>
+          <a:stretch>
+            <a:fillRect/>
+          </a:stretch>
+        </p:blipFill>
+        <p:spPr>
+          <a:xfrm>
+            <a:off x="668244" y="3850356"/>
+            <a:ext cx="199705" cy="199705"/>
+          </a:xfrm>
+          <a:prstGeom prst="rect">
+            <a:avLst/>
+          </a:prstGeom>
+        </p:spPr>
+      </p:pic>
+      <p:sp>
+        <p:nvSpPr>
+          <p:cNvPr id="30" name="Text 23"/>
           <p:cNvSpPr txBox="1"/>
           <p:nvPr/>
         </p:nvSpPr>
         <p:spPr>
           <a:xfrm>
-            <a:off x="822960" y="3666744"/>
-            <a:ext cx="7772400" cy="201168"/>
+            <a:off x="1097280" y="3611880"/>
+            <a:ext cx="3268980" cy="685800"/>
           </a:xfrm>
           <a:prstGeom prst="rect">
             <a:avLst/>
@@ -41942,38 +42247,173 @@
           <a:ln/>
         </p:spPr>
         <p:txBody>
-          <a:bodyPr wrap="square" lIns="0" tIns="0" rIns="0" bIns="0" rtlCol="0" anchor="t"/>
+          <a:bodyPr wrap="square" lIns="0" tIns="0" rIns="0" bIns="0" rtlCol="0" anchor="ctr"/>
           <a:lstStyle/>
           <a:p>
             <a:pPr indent="0" marL="0">
               <a:buNone/>
             </a:pPr>
             <a:r>
-              <a:rPr lang="en-US" sz="1000" b="1" dirty="0">
-                <a:solidFill>
-                  <a:srgbClr val="9A6410"/>
+              <a:rPr lang="en-US" sz="1150" b="1" dirty="0">
+                <a:solidFill>
+                  <a:srgbClr val="1D1D1F"/>
+                </a:solidFill>
+                <a:latin typeface="SF Pro Display" pitchFamily="34" charset="0"/>
+                <a:ea typeface="SF Pro Display" pitchFamily="34" charset="-122"/>
+                <a:cs typeface="SF Pro Display" pitchFamily="34" charset="-120"/>
+              </a:rPr>
+              <a:t>Protects the customer's wallet</a:t>
+            </a:r>
+            <a:endParaRPr lang="en-US" sz="1150" dirty="0"/>
+          </a:p>
+          <a:p>
+            <a:pPr indent="0" marL="0">
+              <a:buNone/>
+            </a:pPr>
+            <a:r>
+              <a:rPr lang="en-US" sz="950" dirty="0">
+                <a:solidFill>
+                  <a:srgbClr val="6E6E73"/>
                 </a:solidFill>
                 <a:latin typeface="SF Pro Text" pitchFamily="34" charset="0"/>
                 <a:ea typeface="SF Pro Text" pitchFamily="34" charset="-122"/>
                 <a:cs typeface="SF Pro Text" pitchFamily="34" charset="-120"/>
               </a:rPr>
-              <a:t>Not a pure win:  </a:t>
-            </a:r>
+              <a:t>Cleaners above the cap can't claim. New jobs price at or below it.</a:t>
+            </a:r>
+            <a:endParaRPr lang="en-US" sz="1150" dirty="0"/>
+          </a:p>
+        </p:txBody>
+      </p:sp>
+      <p:sp>
+        <p:nvSpPr>
+          <p:cNvPr id="31" name="Shape 24"/>
+          <p:cNvSpPr/>
+          <p:nvPr/>
+        </p:nvSpPr>
+        <p:spPr>
+          <a:xfrm>
+            <a:off x="4640580" y="3566160"/>
+            <a:ext cx="4091940" cy="777240"/>
+          </a:xfrm>
+          <a:prstGeom prst="roundRect">
+            <a:avLst>
+              <a:gd name="adj" fmla="val 9412"/>
+            </a:avLst>
+          </a:prstGeom>
+          <a:solidFill>
+            <a:srgbClr val="FFFFFF"/>
+          </a:solidFill>
+          <a:ln w="9525">
+            <a:solidFill>
+              <a:srgbClr val="DCE1E7"/>
+            </a:solidFill>
+            <a:prstDash val="solid"/>
+          </a:ln>
+        </p:spPr>
+      </p:sp>
+      <p:sp>
+        <p:nvSpPr>
+          <p:cNvPr id="32" name="Shape 25"/>
+          <p:cNvSpPr/>
+          <p:nvPr/>
+        </p:nvSpPr>
+        <p:spPr>
+          <a:xfrm>
+            <a:off x="4805172" y="3758184"/>
+            <a:ext cx="384048" cy="384048"/>
+          </a:xfrm>
+          <a:prstGeom prst="ellipse">
+            <a:avLst/>
+          </a:prstGeom>
+          <a:solidFill>
+            <a:srgbClr val="E3F4F1"/>
+          </a:solidFill>
+          <a:ln w="12700">
+            <a:solidFill>
+              <a:srgbClr val="E3F4F1"/>
+            </a:solidFill>
+            <a:prstDash val="solid"/>
+          </a:ln>
+        </p:spPr>
+      </p:sp>
+      <p:pic>
+        <p:nvPicPr>
+          <p:cNvPr id="33" name="Image 4" descr="preencoded.png">    </p:cNvPr>
+          <p:cNvPicPr>
+            <a:picLocks noChangeAspect="1"/>
+          </p:cNvPicPr>
+          <p:nvPr/>
+        </p:nvPicPr>
+        <p:blipFill>
+          <a:blip r:embed="rId5"/>
+          <a:stretch>
+            <a:fillRect/>
+          </a:stretch>
+        </p:blipFill>
+        <p:spPr>
+          <a:xfrm>
+            <a:off x="4897344" y="3850356"/>
+            <a:ext cx="199705" cy="199705"/>
+          </a:xfrm>
+          <a:prstGeom prst="rect">
+            <a:avLst/>
+          </a:prstGeom>
+        </p:spPr>
+      </p:pic>
+      <p:sp>
+        <p:nvSpPr>
+          <p:cNvPr id="34" name="Text 26"/>
+          <p:cNvSpPr txBox="1"/>
+          <p:nvPr/>
+        </p:nvSpPr>
+        <p:spPr>
+          <a:xfrm>
+            <a:off x="5326380" y="3611880"/>
+            <a:ext cx="3268980" cy="685800"/>
+          </a:xfrm>
+          <a:prstGeom prst="rect">
+            <a:avLst/>
+          </a:prstGeom>
+          <a:noFill/>
+          <a:ln/>
+        </p:spPr>
+        <p:txBody>
+          <a:bodyPr wrap="square" lIns="0" tIns="0" rIns="0" bIns="0" rtlCol="0" anchor="ctr"/>
+          <a:lstStyle/>
+          <a:p>
             <a:pPr indent="0" marL="0">
               <a:buNone/>
             </a:pPr>
             <a:r>
-              <a:rPr lang="en-US" sz="1000" dirty="0">
+              <a:rPr lang="en-US" sz="1150" b="1" dirty="0">
                 <a:solidFill>
                   <a:srgbClr val="1D1D1F"/>
+                </a:solidFill>
+                <a:latin typeface="SF Pro Display" pitchFamily="34" charset="0"/>
+                <a:ea typeface="SF Pro Display" pitchFamily="34" charset="-122"/>
+                <a:cs typeface="SF Pro Display" pitchFamily="34" charset="-120"/>
+              </a:rPr>
+              <a:t>Shrinks the cleaner pool</a:t>
+            </a:r>
+            <a:endParaRPr lang="en-US" sz="1150" dirty="0"/>
+          </a:p>
+          <a:p>
+            <a:pPr indent="0" marL="0">
+              <a:buNone/>
+            </a:pPr>
+            <a:r>
+              <a:rPr lang="en-US" sz="950" dirty="0">
+                <a:solidFill>
+                  <a:srgbClr val="6E6E73"/>
                 </a:solidFill>
                 <a:latin typeface="SF Pro Text" pitchFamily="34" charset="0"/>
                 <a:ea typeface="SF Pro Text" pitchFamily="34" charset="-122"/>
                 <a:cs typeface="SF Pro Text" pitchFamily="34" charset="-120"/>
               </a:rPr>
-              <a:t>set it carefully, or it becomes an unclaimed-job ticket a week later.</a:t>
-            </a:r>
-            <a:endParaRPr lang="en-US" sz="1000" dirty="0"/>
+              <a:t>Their current cleaner may be above it. Too low, and jobs go unclaimed.</a:t>
+            </a:r>
+            <a:endParaRPr lang="en-US" sz="1150" dirty="0"/>
           </a:p>
         </p:txBody>
       </p:sp>
